--- a/端到端流程与模型规划_单页汇报.pptx
+++ b/端到端流程与模型规划_单页汇报.pptx
@@ -7431,1775 +7431,1454 @@
           </a:p>
         </p:txBody>
       </p:sp>
-      <p:graphicFrame>
-        <p:nvGraphicFramePr>
-          <p:cNvPr id="105" name="tl-table">
-            <a:extLst>
-              <a:ext uri="{FF2B5EF4-FFF2-40B4-BE49-F238E27FC236}">
-                <a16:creationId xmlns:a16="http://schemas.microsoft.com/office/drawing/2014/main" id="{90F05DD9-E848-444F-B744-43138E71ABFA}"/>
-              </a:ext>
-            </a:extLst>
-          </p:cNvPr>
-          <p:cNvGraphicFramePr>
-            <a:graphicFrameLocks noGrp="1"/>
-          </p:cNvGraphicFramePr>
-          <p:nvPr>
-            <p:extLst>
-              <p:ext uri="{D42A27DB-BD31-4B8C-83A1-F6EECF244321}">
-                <p14:modId xmlns:p14="http://schemas.microsoft.com/office/powerpoint/2010/main" val="1921094673"/>
-              </p:ext>
-            </p:extLst>
-          </p:nvPr>
-        </p:nvGraphicFramePr>
-        <p:xfrm>
-          <a:off x="641809" y="3097681"/>
-          <a:ext cx="9824363" cy="1664208"/>
-        </p:xfrm>
-        <a:graphic>
-          <a:graphicData uri="http://schemas.openxmlformats.org/drawingml/2006/table">
-            <a:tbl>
-              <a:tblPr firstRow="1" bandRow="1"/>
-              <a:tblGrid>
-                <a:gridCol w="2232810">
-                  <a:extLst>
-                    <a:ext uri="{9D8B030D-6E8A-4147-A177-3AD203B41FA5}">
-                      <a16:colId xmlns:a16="http://schemas.microsoft.com/office/drawing/2014/main" val="20000"/>
-                    </a:ext>
-                  </a:extLst>
-                </a:gridCol>
-                <a:gridCol w="6430492">
-                  <a:extLst>
-                    <a:ext uri="{9D8B030D-6E8A-4147-A177-3AD203B41FA5}">
-                      <a16:colId xmlns:a16="http://schemas.microsoft.com/office/drawing/2014/main" val="20001"/>
-                    </a:ext>
-                  </a:extLst>
-                </a:gridCol>
-                <a:gridCol w="1161061">
-                  <a:extLst>
-                    <a:ext uri="{9D8B030D-6E8A-4147-A177-3AD203B41FA5}">
-                      <a16:colId xmlns:a16="http://schemas.microsoft.com/office/drawing/2014/main" val="20002"/>
-                    </a:ext>
-                  </a:extLst>
-                </a:gridCol>
-              </a:tblGrid>
-              <a:tr h="155448">
-                <a:tc>
-                  <a:txBody>
-                    <a:bodyPr/>
-                    <a:lstStyle/>
-                    <a:p>
-                      <a:pPr algn="l" latinLnBrk="1">
-                        <a:lnSpc>
-                          <a:spcPct val="90000"/>
-                        </a:lnSpc>
-                      </a:pPr>
-                      <a:r>
-                        <a:rPr sz="800" b="1" dirty="0" err="1">
-                          <a:solidFill>
-                            <a:srgbClr val="0A0A0A"/>
-                          </a:solidFill>
-                          <a:latin typeface="微软雅黑"/>
-                          <a:ea typeface="微软雅黑"/>
-                        </a:rPr>
-                        <a:t>时间节点</a:t>
-                      </a:r>
-                      <a:endParaRPr sz="800" b="1" dirty="0">
-                        <a:solidFill>
-                          <a:srgbClr val="0A0A0A"/>
-                        </a:solidFill>
-                        <a:latin typeface="微软雅黑"/>
-                        <a:ea typeface="微软雅黑"/>
-                      </a:endParaRPr>
-                    </a:p>
-                  </a:txBody>
-                  <a:tcPr marT="0" marB="0" anchor="ctr">
-                    <a:lnL>
-                      <a:noFill/>
-                    </a:lnL>
-                    <a:lnR>
-                      <a:noFill/>
-                    </a:lnR>
-                    <a:lnT>
-                      <a:noFill/>
-                    </a:lnT>
-                    <a:lnB w="19050">
-                      <a:solidFill>
-                        <a:srgbClr val="0A0A0A"/>
-                      </a:solidFill>
-                    </a:lnB>
-                  </a:tcPr>
-                </a:tc>
-                <a:tc>
-                  <a:txBody>
-                    <a:bodyPr/>
-                    <a:lstStyle/>
-                    <a:p>
-                      <a:pPr algn="l" latinLnBrk="1">
-                        <a:lnSpc>
-                          <a:spcPct val="90000"/>
-                        </a:lnSpc>
-                      </a:pPr>
-                      <a:r>
-                        <a:rPr sz="800" b="1">
-                          <a:solidFill>
-                            <a:srgbClr val="0A0A0A"/>
-                          </a:solidFill>
-                          <a:latin typeface="微软雅黑"/>
-                          <a:ea typeface="微软雅黑"/>
-                        </a:rPr>
-                        <a:t>事项</a:t>
-                      </a:r>
-                    </a:p>
-                  </a:txBody>
-                  <a:tcPr marT="0" marB="0" anchor="ctr">
-                    <a:lnL>
-                      <a:noFill/>
-                    </a:lnL>
-                    <a:lnR>
-                      <a:noFill/>
-                    </a:lnR>
-                    <a:lnT>
-                      <a:noFill/>
-                    </a:lnT>
-                    <a:lnB w="19050">
-                      <a:solidFill>
-                        <a:srgbClr val="0A0A0A"/>
-                      </a:solidFill>
-                    </a:lnB>
-                  </a:tcPr>
-                </a:tc>
-                <a:tc>
-                  <a:txBody>
-                    <a:bodyPr/>
-                    <a:lstStyle/>
-                    <a:p>
-                      <a:pPr algn="l" latinLnBrk="1">
-                        <a:lnSpc>
-                          <a:spcPct val="90000"/>
-                        </a:lnSpc>
-                      </a:pPr>
-                      <a:r>
-                        <a:rPr sz="800" b="1">
-                          <a:solidFill>
-                            <a:srgbClr val="0A0A0A"/>
-                          </a:solidFill>
-                          <a:latin typeface="微软雅黑"/>
-                          <a:ea typeface="微软雅黑"/>
-                        </a:rPr>
-                        <a:t>状态</a:t>
-                      </a:r>
-                    </a:p>
-                  </a:txBody>
-                  <a:tcPr marT="0" marB="0" anchor="ctr">
-                    <a:lnL>
-                      <a:noFill/>
-                    </a:lnL>
-                    <a:lnR>
-                      <a:noFill/>
-                    </a:lnR>
-                    <a:lnT>
-                      <a:noFill/>
-                    </a:lnT>
-                    <a:lnB w="19050">
-                      <a:solidFill>
-                        <a:srgbClr val="0A0A0A"/>
-                      </a:solidFill>
-                    </a:lnB>
-                  </a:tcPr>
-                </a:tc>
-                <a:extLst>
-                  <a:ext uri="{0D108BD9-81ED-4DB2-BD59-A6C34878D82A}">
-                    <a16:rowId xmlns:a16="http://schemas.microsoft.com/office/drawing/2014/main" val="10000"/>
-                  </a:ext>
-                </a:extLst>
-              </a:tr>
-              <a:tr h="137160">
-                <a:tc>
-                  <a:txBody>
-                    <a:bodyPr/>
-                    <a:lstStyle/>
-                    <a:p>
-                      <a:pPr algn="l" latinLnBrk="1">
-                        <a:lnSpc>
-                          <a:spcPct val="90000"/>
-                        </a:lnSpc>
-                      </a:pPr>
-                      <a:r>
-                        <a:rPr sz="800" b="0">
-                          <a:solidFill>
-                            <a:srgbClr val="3D3C3A"/>
-                          </a:solidFill>
-                          <a:latin typeface="微软雅黑"/>
-                          <a:ea typeface="微软雅黑"/>
-                        </a:rPr>
-                        <a:t>8月9日</a:t>
-                      </a:r>
-                    </a:p>
-                  </a:txBody>
-                  <a:tcPr marT="0" marB="0" anchor="ctr">
-                    <a:lnL>
-                      <a:noFill/>
-                    </a:lnL>
-                    <a:lnR>
-                      <a:noFill/>
-                    </a:lnR>
-                    <a:lnT w="19050" cap="flat" cmpd="sng" algn="ctr">
-                      <a:solidFill>
-                        <a:srgbClr val="0A0A0A"/>
-                      </a:solidFill>
-                      <a:prstDash val="solid"/>
-                      <a:round/>
-                      <a:headEnd type="none" w="med" len="med"/>
-                      <a:tailEnd type="none" w="med" len="med"/>
-                    </a:lnT>
-                    <a:lnB w="9525">
-                      <a:solidFill>
-                        <a:srgbClr val="D6D6D6"/>
-                      </a:solidFill>
-                    </a:lnB>
-                  </a:tcPr>
-                </a:tc>
-                <a:tc>
-                  <a:txBody>
-                    <a:bodyPr/>
-                    <a:lstStyle/>
-                    <a:p>
-                      <a:pPr algn="l" latinLnBrk="1">
-                        <a:lnSpc>
-                          <a:spcPct val="90000"/>
-                        </a:lnSpc>
-                      </a:pPr>
-                      <a:r>
-                        <a:rPr sz="800" b="0">
-                          <a:solidFill>
-                            <a:srgbClr val="3D3C3A"/>
-                          </a:solidFill>
-                          <a:latin typeface="微软雅黑"/>
-                          <a:ea typeface="微软雅黑"/>
-                        </a:rPr>
-                        <a:t>943 模型平台 preview 版本完成部署，开放模型输出接口</a:t>
-                      </a:r>
-                    </a:p>
-                  </a:txBody>
-                  <a:tcPr marT="0" marB="0" anchor="ctr">
-                    <a:lnL>
-                      <a:noFill/>
-                    </a:lnL>
-                    <a:lnR>
-                      <a:noFill/>
-                    </a:lnR>
-                    <a:lnT w="19050" cap="flat" cmpd="sng" algn="ctr">
-                      <a:solidFill>
-                        <a:srgbClr val="0A0A0A"/>
-                      </a:solidFill>
-                      <a:prstDash val="solid"/>
-                      <a:round/>
-                      <a:headEnd type="none" w="med" len="med"/>
-                      <a:tailEnd type="none" w="med" len="med"/>
-                    </a:lnT>
-                    <a:lnB w="9525">
-                      <a:solidFill>
-                        <a:srgbClr val="D6D6D6"/>
-                      </a:solidFill>
-                    </a:lnB>
-                  </a:tcPr>
-                </a:tc>
-                <a:tc>
-                  <a:txBody>
-                    <a:bodyPr/>
-                    <a:lstStyle/>
-                    <a:p>
-                      <a:pPr algn="l" latinLnBrk="1">
-                        <a:lnSpc>
-                          <a:spcPct val="90000"/>
-                        </a:lnSpc>
-                      </a:pPr>
-                      <a:r>
-                        <a:rPr sz="800" b="1">
-                          <a:solidFill>
-                            <a:srgbClr val="1F4E79"/>
-                          </a:solidFill>
-                          <a:latin typeface="微软雅黑"/>
-                          <a:ea typeface="微软雅黑"/>
-                        </a:rPr>
-                        <a:t>已完成</a:t>
-                      </a:r>
-                    </a:p>
-                  </a:txBody>
-                  <a:tcPr marT="0" marB="0" anchor="ctr">
-                    <a:lnL>
-                      <a:noFill/>
-                    </a:lnL>
-                    <a:lnR>
-                      <a:noFill/>
-                    </a:lnR>
-                    <a:lnT w="19050" cap="flat" cmpd="sng" algn="ctr">
-                      <a:solidFill>
-                        <a:srgbClr val="0A0A0A"/>
-                      </a:solidFill>
-                      <a:prstDash val="solid"/>
-                      <a:round/>
-                      <a:headEnd type="none" w="med" len="med"/>
-                      <a:tailEnd type="none" w="med" len="med"/>
-                    </a:lnT>
-                    <a:lnB w="9525">
-                      <a:solidFill>
-                        <a:srgbClr val="D6D6D6"/>
-                      </a:solidFill>
-                    </a:lnB>
-                  </a:tcPr>
-                </a:tc>
-                <a:extLst>
-                  <a:ext uri="{0D108BD9-81ED-4DB2-BD59-A6C34878D82A}">
-                    <a16:rowId xmlns:a16="http://schemas.microsoft.com/office/drawing/2014/main" val="10001"/>
-                  </a:ext>
-                </a:extLst>
-              </a:tr>
-              <a:tr h="137160">
-                <a:tc>
-                  <a:txBody>
-                    <a:bodyPr/>
-                    <a:lstStyle/>
-                    <a:p>
-                      <a:pPr algn="l" latinLnBrk="1">
-                        <a:lnSpc>
-                          <a:spcPct val="90000"/>
-                        </a:lnSpc>
-                      </a:pPr>
-                      <a:r>
-                        <a:rPr sz="800" b="0">
-                          <a:solidFill>
-                            <a:srgbClr val="3D3C3A"/>
-                          </a:solidFill>
-                          <a:latin typeface="微软雅黑"/>
-                          <a:ea typeface="微软雅黑"/>
-                        </a:rPr>
-                        <a:t>8月9日</a:t>
-                      </a:r>
-                    </a:p>
-                  </a:txBody>
-                  <a:tcPr marT="0" marB="0" anchor="ctr">
-                    <a:lnL>
-                      <a:noFill/>
-                    </a:lnL>
-                    <a:lnR>
-                      <a:noFill/>
-                    </a:lnR>
-                    <a:lnT w="9525" cap="flat" cmpd="sng" algn="ctr">
-                      <a:solidFill>
-                        <a:srgbClr val="D6D6D6"/>
-                      </a:solidFill>
-                      <a:prstDash val="solid"/>
-                      <a:round/>
-                      <a:headEnd type="none" w="med" len="med"/>
-                      <a:tailEnd type="none" w="med" len="med"/>
-                    </a:lnT>
-                    <a:lnB w="9525">
-                      <a:solidFill>
-                        <a:srgbClr val="D6D6D6"/>
-                      </a:solidFill>
-                    </a:lnB>
-                  </a:tcPr>
-                </a:tc>
-                <a:tc>
-                  <a:txBody>
-                    <a:bodyPr/>
-                    <a:lstStyle/>
-                    <a:p>
-                      <a:pPr algn="l" latinLnBrk="1">
-                        <a:lnSpc>
-                          <a:spcPct val="90000"/>
-                        </a:lnSpc>
-                      </a:pPr>
-                      <a:r>
-                        <a:rPr sz="800" b="0">
-                          <a:solidFill>
-                            <a:srgbClr val="3D3C3A"/>
-                          </a:solidFill>
-                          <a:latin typeface="微软雅黑"/>
-                          <a:ea typeface="微软雅黑"/>
-                        </a:rPr>
-                        <a:t>下游平台开始模型调用链路开发</a:t>
-                      </a:r>
-                    </a:p>
-                  </a:txBody>
-                  <a:tcPr marT="0" marB="0" anchor="ctr">
-                    <a:lnL>
-                      <a:noFill/>
-                    </a:lnL>
-                    <a:lnR>
-                      <a:noFill/>
-                    </a:lnR>
-                    <a:lnT w="9525" cap="flat" cmpd="sng" algn="ctr">
-                      <a:solidFill>
-                        <a:srgbClr val="D6D6D6"/>
-                      </a:solidFill>
-                      <a:prstDash val="solid"/>
-                      <a:round/>
-                      <a:headEnd type="none" w="med" len="med"/>
-                      <a:tailEnd type="none" w="med" len="med"/>
-                    </a:lnT>
-                    <a:lnB w="9525">
-                      <a:solidFill>
-                        <a:srgbClr val="D6D6D6"/>
-                      </a:solidFill>
-                    </a:lnB>
-                  </a:tcPr>
-                </a:tc>
-                <a:tc>
-                  <a:txBody>
-                    <a:bodyPr/>
-                    <a:lstStyle/>
-                    <a:p>
-                      <a:pPr algn="l" latinLnBrk="1">
-                        <a:lnSpc>
-                          <a:spcPct val="90000"/>
-                        </a:lnSpc>
-                      </a:pPr>
-                      <a:r>
-                        <a:rPr sz="800" b="0">
-                          <a:solidFill>
-                            <a:srgbClr val="606060"/>
-                          </a:solidFill>
-                          <a:latin typeface="微软雅黑"/>
-                          <a:ea typeface="微软雅黑"/>
-                        </a:rPr>
-                        <a:t>进行中</a:t>
-                      </a:r>
-                    </a:p>
-                  </a:txBody>
-                  <a:tcPr marT="0" marB="0" anchor="ctr">
-                    <a:lnL>
-                      <a:noFill/>
-                    </a:lnL>
-                    <a:lnR>
-                      <a:noFill/>
-                    </a:lnR>
-                    <a:lnT w="9525" cap="flat" cmpd="sng" algn="ctr">
-                      <a:solidFill>
-                        <a:srgbClr val="D6D6D6"/>
-                      </a:solidFill>
-                      <a:prstDash val="solid"/>
-                      <a:round/>
-                      <a:headEnd type="none" w="med" len="med"/>
-                      <a:tailEnd type="none" w="med" len="med"/>
-                    </a:lnT>
-                    <a:lnB w="9525">
-                      <a:solidFill>
-                        <a:srgbClr val="D6D6D6"/>
-                      </a:solidFill>
-                    </a:lnB>
-                  </a:tcPr>
-                </a:tc>
-                <a:extLst>
-                  <a:ext uri="{0D108BD9-81ED-4DB2-BD59-A6C34878D82A}">
-                    <a16:rowId xmlns:a16="http://schemas.microsoft.com/office/drawing/2014/main" val="10002"/>
-                  </a:ext>
-                </a:extLst>
-              </a:tr>
-              <a:tr h="137160">
-                <a:tc>
-                  <a:txBody>
-                    <a:bodyPr/>
-                    <a:lstStyle/>
-                    <a:p>
-                      <a:pPr algn="l" latinLnBrk="1">
-                        <a:lnSpc>
-                          <a:spcPct val="90000"/>
-                        </a:lnSpc>
-                      </a:pPr>
-                      <a:r>
-                        <a:rPr sz="800" b="0">
-                          <a:solidFill>
-                            <a:srgbClr val="3D3C3A"/>
-                          </a:solidFill>
-                          <a:latin typeface="微软雅黑"/>
-                          <a:ea typeface="微软雅黑"/>
-                        </a:rPr>
-                        <a:t>当前</a:t>
-                      </a:r>
-                    </a:p>
-                  </a:txBody>
-                  <a:tcPr marT="0" marB="0" anchor="ctr">
-                    <a:lnL>
-                      <a:noFill/>
-                    </a:lnL>
-                    <a:lnR>
-                      <a:noFill/>
-                    </a:lnR>
-                    <a:lnT w="9525" cap="flat" cmpd="sng" algn="ctr">
-                      <a:solidFill>
-                        <a:srgbClr val="D6D6D6"/>
-                      </a:solidFill>
-                      <a:prstDash val="solid"/>
-                      <a:round/>
-                      <a:headEnd type="none" w="med" len="med"/>
-                      <a:tailEnd type="none" w="med" len="med"/>
-                    </a:lnT>
-                    <a:lnB w="9525">
-                      <a:solidFill>
-                        <a:srgbClr val="D6D6D6"/>
-                      </a:solidFill>
-                    </a:lnB>
-                  </a:tcPr>
-                </a:tc>
-                <a:tc>
-                  <a:txBody>
-                    <a:bodyPr/>
-                    <a:lstStyle/>
-                    <a:p>
-                      <a:pPr algn="l" latinLnBrk="1">
-                        <a:lnSpc>
-                          <a:spcPct val="90000"/>
-                        </a:lnSpc>
-                      </a:pPr>
-                      <a:r>
-                        <a:rPr sz="800" b="0">
-                          <a:solidFill>
-                            <a:srgbClr val="3D3C3A"/>
-                          </a:solidFill>
-                          <a:latin typeface="微软雅黑"/>
-                          <a:ea typeface="微软雅黑"/>
-                        </a:rPr>
-                        <a:t>负债 / 收入类知识库基本初始化完成，两类模型效果较好</a:t>
-                      </a:r>
-                    </a:p>
-                  </a:txBody>
-                  <a:tcPr marT="0" marB="0" anchor="ctr">
-                    <a:lnL>
-                      <a:noFill/>
-                    </a:lnL>
-                    <a:lnR>
-                      <a:noFill/>
-                    </a:lnR>
-                    <a:lnT w="9525" cap="flat" cmpd="sng" algn="ctr">
-                      <a:solidFill>
-                        <a:srgbClr val="D6D6D6"/>
-                      </a:solidFill>
-                      <a:prstDash val="solid"/>
-                      <a:round/>
-                      <a:headEnd type="none" w="med" len="med"/>
-                      <a:tailEnd type="none" w="med" len="med"/>
-                    </a:lnT>
-                    <a:lnB w="9525">
-                      <a:solidFill>
-                        <a:srgbClr val="D6D6D6"/>
-                      </a:solidFill>
-                    </a:lnB>
-                  </a:tcPr>
-                </a:tc>
-                <a:tc>
-                  <a:txBody>
-                    <a:bodyPr/>
-                    <a:lstStyle/>
-                    <a:p>
-                      <a:pPr algn="l" latinLnBrk="1">
-                        <a:lnSpc>
-                          <a:spcPct val="90000"/>
-                        </a:lnSpc>
-                      </a:pPr>
-                      <a:r>
-                        <a:rPr sz="800" b="1">
-                          <a:solidFill>
-                            <a:srgbClr val="1F4E79"/>
-                          </a:solidFill>
-                          <a:latin typeface="微软雅黑"/>
-                          <a:ea typeface="微软雅黑"/>
-                        </a:rPr>
-                        <a:t>基本完成</a:t>
-                      </a:r>
-                    </a:p>
-                  </a:txBody>
-                  <a:tcPr marT="0" marB="0" anchor="ctr">
-                    <a:lnL>
-                      <a:noFill/>
-                    </a:lnL>
-                    <a:lnR>
-                      <a:noFill/>
-                    </a:lnR>
-                    <a:lnT w="9525" cap="flat" cmpd="sng" algn="ctr">
-                      <a:solidFill>
-                        <a:srgbClr val="D6D6D6"/>
-                      </a:solidFill>
-                      <a:prstDash val="solid"/>
-                      <a:round/>
-                      <a:headEnd type="none" w="med" len="med"/>
-                      <a:tailEnd type="none" w="med" len="med"/>
-                    </a:lnT>
-                    <a:lnB w="9525">
-                      <a:solidFill>
-                        <a:srgbClr val="D6D6D6"/>
-                      </a:solidFill>
-                    </a:lnB>
-                  </a:tcPr>
-                </a:tc>
-                <a:extLst>
-                  <a:ext uri="{0D108BD9-81ED-4DB2-BD59-A6C34878D82A}">
-                    <a16:rowId xmlns:a16="http://schemas.microsoft.com/office/drawing/2014/main" val="10003"/>
-                  </a:ext>
-                </a:extLst>
-              </a:tr>
-              <a:tr h="137160">
-                <a:tc>
-                  <a:txBody>
-                    <a:bodyPr/>
-                    <a:lstStyle/>
-                    <a:p>
-                      <a:pPr algn="l" latinLnBrk="1">
-                        <a:lnSpc>
-                          <a:spcPct val="90000"/>
-                        </a:lnSpc>
-                      </a:pPr>
-                      <a:r>
-                        <a:rPr sz="800" b="0">
-                          <a:solidFill>
-                            <a:srgbClr val="3D3C3A"/>
-                          </a:solidFill>
-                          <a:latin typeface="微软雅黑"/>
-                          <a:ea typeface="微软雅黑"/>
-                        </a:rPr>
-                        <a:t>当前</a:t>
-                      </a:r>
-                    </a:p>
-                  </a:txBody>
-                  <a:tcPr marT="0" marB="0" anchor="ctr">
-                    <a:lnL>
-                      <a:noFill/>
-                    </a:lnL>
-                    <a:lnR>
-                      <a:noFill/>
-                    </a:lnR>
-                    <a:lnT w="9525" cap="flat" cmpd="sng" algn="ctr">
-                      <a:solidFill>
-                        <a:srgbClr val="D6D6D6"/>
-                      </a:solidFill>
-                      <a:prstDash val="solid"/>
-                      <a:round/>
-                      <a:headEnd type="none" w="med" len="med"/>
-                      <a:tailEnd type="none" w="med" len="med"/>
-                    </a:lnT>
-                    <a:lnB w="9525">
-                      <a:solidFill>
-                        <a:srgbClr val="D6D6D6"/>
-                      </a:solidFill>
-                    </a:lnB>
-                  </a:tcPr>
-                </a:tc>
-                <a:tc>
-                  <a:txBody>
-                    <a:bodyPr/>
-                    <a:lstStyle/>
-                    <a:p>
-                      <a:pPr algn="l" latinLnBrk="1">
-                        <a:lnSpc>
-                          <a:spcPct val="90000"/>
-                        </a:lnSpc>
-                      </a:pPr>
-                      <a:r>
-                        <a:rPr sz="800" b="0">
-                          <a:solidFill>
-                            <a:srgbClr val="3D3C3A"/>
-                          </a:solidFill>
-                          <a:latin typeface="微软雅黑"/>
-                          <a:ea typeface="微软雅黑"/>
-                        </a:rPr>
-                        <a:t>消费类知识库建设中</a:t>
-                      </a:r>
-                    </a:p>
-                  </a:txBody>
-                  <a:tcPr marT="0" marB="0" anchor="ctr">
-                    <a:lnL>
-                      <a:noFill/>
-                    </a:lnL>
-                    <a:lnR>
-                      <a:noFill/>
-                    </a:lnR>
-                    <a:lnT w="9525" cap="flat" cmpd="sng" algn="ctr">
-                      <a:solidFill>
-                        <a:srgbClr val="D6D6D6"/>
-                      </a:solidFill>
-                      <a:prstDash val="solid"/>
-                      <a:round/>
-                      <a:headEnd type="none" w="med" len="med"/>
-                      <a:tailEnd type="none" w="med" len="med"/>
-                    </a:lnT>
-                    <a:lnB w="9525">
-                      <a:solidFill>
-                        <a:srgbClr val="D6D6D6"/>
-                      </a:solidFill>
-                    </a:lnB>
-                  </a:tcPr>
-                </a:tc>
-                <a:tc>
-                  <a:txBody>
-                    <a:bodyPr/>
-                    <a:lstStyle/>
-                    <a:p>
-                      <a:pPr algn="l" latinLnBrk="1">
-                        <a:lnSpc>
-                          <a:spcPct val="90000"/>
-                        </a:lnSpc>
-                      </a:pPr>
-                      <a:r>
-                        <a:rPr sz="800" b="0">
-                          <a:solidFill>
-                            <a:srgbClr val="606060"/>
-                          </a:solidFill>
-                          <a:latin typeface="微软雅黑"/>
-                          <a:ea typeface="微软雅黑"/>
-                        </a:rPr>
-                        <a:t>进行中</a:t>
-                      </a:r>
-                    </a:p>
-                  </a:txBody>
-                  <a:tcPr marT="0" marB="0" anchor="ctr">
-                    <a:lnL>
-                      <a:noFill/>
-                    </a:lnL>
-                    <a:lnR>
-                      <a:noFill/>
-                    </a:lnR>
-                    <a:lnT w="9525" cap="flat" cmpd="sng" algn="ctr">
-                      <a:solidFill>
-                        <a:srgbClr val="D6D6D6"/>
-                      </a:solidFill>
-                      <a:prstDash val="solid"/>
-                      <a:round/>
-                      <a:headEnd type="none" w="med" len="med"/>
-                      <a:tailEnd type="none" w="med" len="med"/>
-                    </a:lnT>
-                    <a:lnB w="9525">
-                      <a:solidFill>
-                        <a:srgbClr val="D6D6D6"/>
-                      </a:solidFill>
-                    </a:lnB>
-                  </a:tcPr>
-                </a:tc>
-                <a:extLst>
-                  <a:ext uri="{0D108BD9-81ED-4DB2-BD59-A6C34878D82A}">
-                    <a16:rowId xmlns:a16="http://schemas.microsoft.com/office/drawing/2014/main" val="10004"/>
-                  </a:ext>
-                </a:extLst>
-              </a:tr>
-              <a:tr h="137160">
-                <a:tc>
-                  <a:txBody>
-                    <a:bodyPr/>
-                    <a:lstStyle/>
-                    <a:p>
-                      <a:pPr algn="l" latinLnBrk="1">
-                        <a:lnSpc>
-                          <a:spcPct val="90000"/>
-                        </a:lnSpc>
-                      </a:pPr>
-                      <a:r>
-                        <a:rPr sz="800" b="0">
-                          <a:solidFill>
-                            <a:srgbClr val="3D3C3A"/>
-                          </a:solidFill>
-                          <a:latin typeface="微软雅黑"/>
-                          <a:ea typeface="微软雅黑"/>
-                        </a:rPr>
-                        <a:t>8月21日</a:t>
-                      </a:r>
-                    </a:p>
-                  </a:txBody>
-                  <a:tcPr marT="0" marB="0" anchor="ctr">
-                    <a:lnL>
-                      <a:noFill/>
-                    </a:lnL>
-                    <a:lnR>
-                      <a:noFill/>
-                    </a:lnR>
-                    <a:lnT w="9525" cap="flat" cmpd="sng" algn="ctr">
-                      <a:solidFill>
-                        <a:srgbClr val="D6D6D6"/>
-                      </a:solidFill>
-                      <a:prstDash val="solid"/>
-                      <a:round/>
-                      <a:headEnd type="none" w="med" len="med"/>
-                      <a:tailEnd type="none" w="med" len="med"/>
-                    </a:lnT>
-                    <a:lnB w="9525">
-                      <a:solidFill>
-                        <a:srgbClr val="D6D6D6"/>
-                      </a:solidFill>
-                    </a:lnB>
-                  </a:tcPr>
-                </a:tc>
-                <a:tc>
-                  <a:txBody>
-                    <a:bodyPr/>
-                    <a:lstStyle/>
-                    <a:p>
-                      <a:pPr algn="l" latinLnBrk="1">
-                        <a:lnSpc>
-                          <a:spcPct val="90000"/>
-                        </a:lnSpc>
-                      </a:pPr>
-                      <a:r>
-                        <a:rPr sz="800" b="0">
-                          <a:solidFill>
-                            <a:srgbClr val="3D3C3A"/>
-                          </a:solidFill>
-                          <a:latin typeface="微软雅黑"/>
-                          <a:ea typeface="微软雅黑"/>
-                        </a:rPr>
-                        <a:t>完成消费类知识库初始化</a:t>
-                      </a:r>
-                    </a:p>
-                  </a:txBody>
-                  <a:tcPr marT="0" marB="0" anchor="ctr">
-                    <a:lnL>
-                      <a:noFill/>
-                    </a:lnL>
-                    <a:lnR>
-                      <a:noFill/>
-                    </a:lnR>
-                    <a:lnT w="9525" cap="flat" cmpd="sng" algn="ctr">
-                      <a:solidFill>
-                        <a:srgbClr val="D6D6D6"/>
-                      </a:solidFill>
-                      <a:prstDash val="solid"/>
-                      <a:round/>
-                      <a:headEnd type="none" w="med" len="med"/>
-                      <a:tailEnd type="none" w="med" len="med"/>
-                    </a:lnT>
-                    <a:lnB w="9525">
-                      <a:solidFill>
-                        <a:srgbClr val="D6D6D6"/>
-                      </a:solidFill>
-                    </a:lnB>
-                  </a:tcPr>
-                </a:tc>
-                <a:tc>
-                  <a:txBody>
-                    <a:bodyPr/>
-                    <a:lstStyle/>
-                    <a:p>
-                      <a:pPr algn="l" latinLnBrk="1">
-                        <a:lnSpc>
-                          <a:spcPct val="90000"/>
-                        </a:lnSpc>
-                      </a:pPr>
-                      <a:r>
-                        <a:rPr sz="800" b="0">
-                          <a:solidFill>
-                            <a:srgbClr val="3D3C3A"/>
-                          </a:solidFill>
-                          <a:latin typeface="微软雅黑"/>
-                          <a:ea typeface="微软雅黑"/>
-                        </a:rPr>
-                        <a:t>待办</a:t>
-                      </a:r>
-                    </a:p>
-                  </a:txBody>
-                  <a:tcPr marT="0" marB="0" anchor="ctr">
-                    <a:lnL>
-                      <a:noFill/>
-                    </a:lnL>
-                    <a:lnR>
-                      <a:noFill/>
-                    </a:lnR>
-                    <a:lnT w="9525" cap="flat" cmpd="sng" algn="ctr">
-                      <a:solidFill>
-                        <a:srgbClr val="D6D6D6"/>
-                      </a:solidFill>
-                      <a:prstDash val="solid"/>
-                      <a:round/>
-                      <a:headEnd type="none" w="med" len="med"/>
-                      <a:tailEnd type="none" w="med" len="med"/>
-                    </a:lnT>
-                    <a:lnB w="9525">
-                      <a:solidFill>
-                        <a:srgbClr val="D6D6D6"/>
-                      </a:solidFill>
-                    </a:lnB>
-                  </a:tcPr>
-                </a:tc>
-                <a:extLst>
-                  <a:ext uri="{0D108BD9-81ED-4DB2-BD59-A6C34878D82A}">
-                    <a16:rowId xmlns:a16="http://schemas.microsoft.com/office/drawing/2014/main" val="10005"/>
-                  </a:ext>
-                </a:extLst>
-              </a:tr>
-              <a:tr h="137160">
-                <a:tc>
-                  <a:txBody>
-                    <a:bodyPr/>
-                    <a:lstStyle/>
-                    <a:p>
-                      <a:pPr algn="l" latinLnBrk="1">
-                        <a:lnSpc>
-                          <a:spcPct val="90000"/>
-                        </a:lnSpc>
-                      </a:pPr>
-                      <a:r>
-                        <a:rPr sz="800" b="0">
-                          <a:solidFill>
-                            <a:srgbClr val="3D3C3A"/>
-                          </a:solidFill>
-                          <a:latin typeface="微软雅黑"/>
-                          <a:ea typeface="微软雅黑"/>
-                        </a:rPr>
-                        <a:t>8月21日</a:t>
-                      </a:r>
-                    </a:p>
-                  </a:txBody>
-                  <a:tcPr marT="0" marB="0" anchor="ctr">
-                    <a:lnL>
-                      <a:noFill/>
-                    </a:lnL>
-                    <a:lnR>
-                      <a:noFill/>
-                    </a:lnR>
-                    <a:lnT w="9525" cap="flat" cmpd="sng" algn="ctr">
-                      <a:solidFill>
-                        <a:srgbClr val="D6D6D6"/>
-                      </a:solidFill>
-                      <a:prstDash val="solid"/>
-                      <a:round/>
-                      <a:headEnd type="none" w="med" len="med"/>
-                      <a:tailEnd type="none" w="med" len="med"/>
-                    </a:lnT>
-                    <a:lnB w="9525">
-                      <a:solidFill>
-                        <a:srgbClr val="D6D6D6"/>
-                      </a:solidFill>
-                    </a:lnB>
-                  </a:tcPr>
-                </a:tc>
-                <a:tc>
-                  <a:txBody>
-                    <a:bodyPr/>
-                    <a:lstStyle/>
-                    <a:p>
-                      <a:pPr algn="l" latinLnBrk="1">
-                        <a:lnSpc>
-                          <a:spcPct val="90000"/>
-                        </a:lnSpc>
-                      </a:pPr>
-                      <a:r>
-                        <a:rPr sz="800" b="0">
-                          <a:solidFill>
-                            <a:srgbClr val="3D3C3A"/>
-                          </a:solidFill>
-                          <a:latin typeface="微软雅黑"/>
-                          <a:ea typeface="微软雅黑"/>
-                        </a:rPr>
-                        <a:t>发布全分类详细模型效果评估报告</a:t>
-                      </a:r>
-                    </a:p>
-                  </a:txBody>
-                  <a:tcPr marT="0" marB="0" anchor="ctr">
-                    <a:lnL>
-                      <a:noFill/>
-                    </a:lnL>
-                    <a:lnR>
-                      <a:noFill/>
-                    </a:lnR>
-                    <a:lnT w="9525" cap="flat" cmpd="sng" algn="ctr">
-                      <a:solidFill>
-                        <a:srgbClr val="D6D6D6"/>
-                      </a:solidFill>
-                      <a:prstDash val="solid"/>
-                      <a:round/>
-                      <a:headEnd type="none" w="med" len="med"/>
-                      <a:tailEnd type="none" w="med" len="med"/>
-                    </a:lnT>
-                    <a:lnB w="9525">
-                      <a:solidFill>
-                        <a:srgbClr val="D6D6D6"/>
-                      </a:solidFill>
-                    </a:lnB>
-                  </a:tcPr>
-                </a:tc>
-                <a:tc>
-                  <a:txBody>
-                    <a:bodyPr/>
-                    <a:lstStyle/>
-                    <a:p>
-                      <a:pPr algn="l" latinLnBrk="1">
-                        <a:lnSpc>
-                          <a:spcPct val="90000"/>
-                        </a:lnSpc>
-                      </a:pPr>
-                      <a:r>
-                        <a:rPr sz="800" b="0">
-                          <a:solidFill>
-                            <a:srgbClr val="3D3C3A"/>
-                          </a:solidFill>
-                          <a:latin typeface="微软雅黑"/>
-                          <a:ea typeface="微软雅黑"/>
-                        </a:rPr>
-                        <a:t>待办</a:t>
-                      </a:r>
-                    </a:p>
-                  </a:txBody>
-                  <a:tcPr marT="0" marB="0" anchor="ctr">
-                    <a:lnL>
-                      <a:noFill/>
-                    </a:lnL>
-                    <a:lnR>
-                      <a:noFill/>
-                    </a:lnR>
-                    <a:lnT w="9525" cap="flat" cmpd="sng" algn="ctr">
-                      <a:solidFill>
-                        <a:srgbClr val="D6D6D6"/>
-                      </a:solidFill>
-                      <a:prstDash val="solid"/>
-                      <a:round/>
-                      <a:headEnd type="none" w="med" len="med"/>
-                      <a:tailEnd type="none" w="med" len="med"/>
-                    </a:lnT>
-                    <a:lnB w="9525">
-                      <a:solidFill>
-                        <a:srgbClr val="D6D6D6"/>
-                      </a:solidFill>
-                    </a:lnB>
-                  </a:tcPr>
-                </a:tc>
-                <a:extLst>
-                  <a:ext uri="{0D108BD9-81ED-4DB2-BD59-A6C34878D82A}">
-                    <a16:rowId xmlns:a16="http://schemas.microsoft.com/office/drawing/2014/main" val="10006"/>
-                  </a:ext>
-                </a:extLst>
-              </a:tr>
-              <a:tr h="137160">
-                <a:tc>
-                  <a:txBody>
-                    <a:bodyPr/>
-                    <a:lstStyle/>
-                    <a:p>
-                      <a:pPr algn="l" latinLnBrk="1">
-                        <a:lnSpc>
-                          <a:spcPct val="90000"/>
-                        </a:lnSpc>
-                      </a:pPr>
-                      <a:r>
-                        <a:rPr sz="800" b="0">
-                          <a:solidFill>
-                            <a:srgbClr val="3D3C3A"/>
-                          </a:solidFill>
-                          <a:latin typeface="微软雅黑"/>
-                          <a:ea typeface="微软雅黑"/>
-                        </a:rPr>
-                        <a:t>8月31日</a:t>
-                      </a:r>
-                    </a:p>
-                  </a:txBody>
-                  <a:tcPr marT="0" marB="0" anchor="ctr">
-                    <a:lnL>
-                      <a:noFill/>
-                    </a:lnL>
-                    <a:lnR>
-                      <a:noFill/>
-                    </a:lnR>
-                    <a:lnT w="9525" cap="flat" cmpd="sng" algn="ctr">
-                      <a:solidFill>
-                        <a:srgbClr val="D6D6D6"/>
-                      </a:solidFill>
-                      <a:prstDash val="solid"/>
-                      <a:round/>
-                      <a:headEnd type="none" w="med" len="med"/>
-                      <a:tailEnd type="none" w="med" len="med"/>
-                    </a:lnT>
-                    <a:lnB w="9525">
-                      <a:solidFill>
-                        <a:srgbClr val="D6D6D6"/>
-                      </a:solidFill>
-                    </a:lnB>
-                  </a:tcPr>
-                </a:tc>
-                <a:tc>
-                  <a:txBody>
-                    <a:bodyPr/>
-                    <a:lstStyle/>
-                    <a:p>
-                      <a:pPr algn="l" latinLnBrk="1">
-                        <a:lnSpc>
-                          <a:spcPct val="90000"/>
-                        </a:lnSpc>
-                      </a:pPr>
-                      <a:r>
-                        <a:rPr sz="800" b="0" dirty="0" err="1">
-                          <a:solidFill>
-                            <a:srgbClr val="3D3C3A"/>
-                          </a:solidFill>
-                          <a:latin typeface="微软雅黑"/>
-                          <a:ea typeface="微软雅黑"/>
-                        </a:rPr>
-                        <a:t>发布正式版模型</a:t>
-                      </a:r>
-                      <a:endParaRPr sz="800" b="0" dirty="0">
-                        <a:solidFill>
-                          <a:srgbClr val="3D3C3A"/>
-                        </a:solidFill>
-                        <a:latin typeface="微软雅黑"/>
-                        <a:ea typeface="微软雅黑"/>
-                      </a:endParaRPr>
-                    </a:p>
-                  </a:txBody>
-                  <a:tcPr marT="0" marB="0" anchor="ctr">
-                    <a:lnL>
-                      <a:noFill/>
-                    </a:lnL>
-                    <a:lnR>
-                      <a:noFill/>
-                    </a:lnR>
-                    <a:lnT w="9525" cap="flat" cmpd="sng" algn="ctr">
-                      <a:solidFill>
-                        <a:srgbClr val="D6D6D6"/>
-                      </a:solidFill>
-                      <a:prstDash val="solid"/>
-                      <a:round/>
-                      <a:headEnd type="none" w="med" len="med"/>
-                      <a:tailEnd type="none" w="med" len="med"/>
-                    </a:lnT>
-                    <a:lnB w="9525">
-                      <a:solidFill>
-                        <a:srgbClr val="D6D6D6"/>
-                      </a:solidFill>
-                    </a:lnB>
-                  </a:tcPr>
-                </a:tc>
-                <a:tc>
-                  <a:txBody>
-                    <a:bodyPr/>
-                    <a:lstStyle/>
-                    <a:p>
-                      <a:pPr algn="l" latinLnBrk="1">
-                        <a:lnSpc>
-                          <a:spcPct val="90000"/>
-                        </a:lnSpc>
-                      </a:pPr>
-                      <a:r>
-                        <a:rPr sz="800" b="0">
-                          <a:solidFill>
-                            <a:srgbClr val="3D3C3A"/>
-                          </a:solidFill>
-                          <a:latin typeface="微软雅黑"/>
-                          <a:ea typeface="微软雅黑"/>
-                        </a:rPr>
-                        <a:t>待办</a:t>
-                      </a:r>
-                    </a:p>
-                  </a:txBody>
-                  <a:tcPr marT="0" marB="0" anchor="ctr">
-                    <a:lnL>
-                      <a:noFill/>
-                    </a:lnL>
-                    <a:lnR>
-                      <a:noFill/>
-                    </a:lnR>
-                    <a:lnT w="9525" cap="flat" cmpd="sng" algn="ctr">
-                      <a:solidFill>
-                        <a:srgbClr val="D6D6D6"/>
-                      </a:solidFill>
-                      <a:prstDash val="solid"/>
-                      <a:round/>
-                      <a:headEnd type="none" w="med" len="med"/>
-                      <a:tailEnd type="none" w="med" len="med"/>
-                    </a:lnT>
-                    <a:lnB w="9525">
-                      <a:solidFill>
-                        <a:srgbClr val="D6D6D6"/>
-                      </a:solidFill>
-                    </a:lnB>
-                  </a:tcPr>
-                </a:tc>
-                <a:extLst>
-                  <a:ext uri="{0D108BD9-81ED-4DB2-BD59-A6C34878D82A}">
-                    <a16:rowId xmlns:a16="http://schemas.microsoft.com/office/drawing/2014/main" val="10007"/>
-                  </a:ext>
-                </a:extLst>
-              </a:tr>
-              <a:tr h="137160">
-                <a:tc>
-                  <a:txBody>
-                    <a:bodyPr/>
-                    <a:lstStyle/>
-                    <a:p>
-                      <a:pPr algn="l" latinLnBrk="1">
-                        <a:lnSpc>
-                          <a:spcPct val="90000"/>
-                        </a:lnSpc>
-                      </a:pPr>
-                      <a:r>
-                        <a:rPr sz="800" b="0">
-                          <a:solidFill>
-                            <a:srgbClr val="3D3C3A"/>
-                          </a:solidFill>
-                          <a:latin typeface="微软雅黑"/>
-                          <a:ea typeface="微软雅黑"/>
-                        </a:rPr>
-                        <a:t>8月31日</a:t>
-                      </a:r>
-                    </a:p>
-                  </a:txBody>
-                  <a:tcPr marT="0" marB="0" anchor="ctr">
-                    <a:lnL>
-                      <a:noFill/>
-                    </a:lnL>
-                    <a:lnR>
-                      <a:noFill/>
-                    </a:lnR>
-                    <a:lnT w="9525" cap="flat" cmpd="sng" algn="ctr">
-                      <a:solidFill>
-                        <a:srgbClr val="D6D6D6"/>
-                      </a:solidFill>
-                      <a:prstDash val="solid"/>
-                      <a:round/>
-                      <a:headEnd type="none" w="med" len="med"/>
-                      <a:tailEnd type="none" w="med" len="med"/>
-                    </a:lnT>
-                    <a:lnB w="9525">
-                      <a:solidFill>
-                        <a:srgbClr val="D6D6D6"/>
-                      </a:solidFill>
-                    </a:lnB>
-                  </a:tcPr>
-                </a:tc>
-                <a:tc>
-                  <a:txBody>
-                    <a:bodyPr/>
-                    <a:lstStyle/>
-                    <a:p>
-                      <a:pPr algn="l" latinLnBrk="1">
-                        <a:lnSpc>
-                          <a:spcPct val="90000"/>
-                        </a:lnSpc>
-                      </a:pPr>
-                      <a:r>
-                        <a:rPr sz="800" b="0" dirty="0" err="1">
-                          <a:solidFill>
-                            <a:srgbClr val="3D3C3A"/>
-                          </a:solidFill>
-                          <a:latin typeface="微软雅黑"/>
-                          <a:ea typeface="微软雅黑"/>
-                        </a:rPr>
-                        <a:t>链路调通</a:t>
-                      </a:r>
-                      <a:endParaRPr sz="800" b="0" dirty="0">
-                        <a:solidFill>
-                          <a:srgbClr val="3D3C3A"/>
-                        </a:solidFill>
-                        <a:latin typeface="微软雅黑"/>
-                        <a:ea typeface="微软雅黑"/>
-                      </a:endParaRPr>
-                    </a:p>
-                  </a:txBody>
-                  <a:tcPr marT="0" marB="0" anchor="ctr">
-                    <a:lnL>
-                      <a:noFill/>
-                    </a:lnL>
-                    <a:lnR>
-                      <a:noFill/>
-                    </a:lnR>
-                    <a:lnT w="9525" cap="flat" cmpd="sng" algn="ctr">
-                      <a:solidFill>
-                        <a:srgbClr val="D6D6D6"/>
-                      </a:solidFill>
-                      <a:prstDash val="solid"/>
-                      <a:round/>
-                      <a:headEnd type="none" w="med" len="med"/>
-                      <a:tailEnd type="none" w="med" len="med"/>
-                    </a:lnT>
-                    <a:lnB w="9525">
-                      <a:solidFill>
-                        <a:srgbClr val="D6D6D6"/>
-                      </a:solidFill>
-                    </a:lnB>
-                  </a:tcPr>
-                </a:tc>
-                <a:tc>
-                  <a:txBody>
-                    <a:bodyPr/>
-                    <a:lstStyle/>
-                    <a:p>
-                      <a:pPr algn="l" latinLnBrk="1">
-                        <a:lnSpc>
-                          <a:spcPct val="90000"/>
-                        </a:lnSpc>
-                      </a:pPr>
-                      <a:r>
-                        <a:rPr sz="800" b="0">
-                          <a:solidFill>
-                            <a:srgbClr val="3D3C3A"/>
-                          </a:solidFill>
-                          <a:latin typeface="微软雅黑"/>
-                          <a:ea typeface="微软雅黑"/>
-                        </a:rPr>
-                        <a:t>待办</a:t>
-                      </a:r>
-                    </a:p>
-                  </a:txBody>
-                  <a:tcPr marT="0" marB="0" anchor="ctr">
-                    <a:lnL>
-                      <a:noFill/>
-                    </a:lnL>
-                    <a:lnR>
-                      <a:noFill/>
-                    </a:lnR>
-                    <a:lnT w="9525" cap="flat" cmpd="sng" algn="ctr">
-                      <a:solidFill>
-                        <a:srgbClr val="D6D6D6"/>
-                      </a:solidFill>
-                      <a:prstDash val="solid"/>
-                      <a:round/>
-                      <a:headEnd type="none" w="med" len="med"/>
-                      <a:tailEnd type="none" w="med" len="med"/>
-                    </a:lnT>
-                    <a:lnB w="9525">
-                      <a:solidFill>
-                        <a:srgbClr val="D6D6D6"/>
-                      </a:solidFill>
-                    </a:lnB>
-                  </a:tcPr>
-                </a:tc>
-                <a:extLst>
-                  <a:ext uri="{0D108BD9-81ED-4DB2-BD59-A6C34878D82A}">
-                    <a16:rowId xmlns:a16="http://schemas.microsoft.com/office/drawing/2014/main" val="10008"/>
-                  </a:ext>
-                </a:extLst>
-              </a:tr>
-              <a:tr h="137160">
-                <a:tc>
-                  <a:txBody>
-                    <a:bodyPr/>
-                    <a:lstStyle/>
-                    <a:p>
-                      <a:pPr algn="l" latinLnBrk="1">
-                        <a:lnSpc>
-                          <a:spcPct val="90000"/>
-                        </a:lnSpc>
-                      </a:pPr>
-                      <a:r>
-                        <a:rPr sz="800" b="0">
-                          <a:solidFill>
-                            <a:srgbClr val="3D3C3A"/>
-                          </a:solidFill>
-                          <a:latin typeface="微软雅黑"/>
-                          <a:ea typeface="微软雅黑"/>
-                        </a:rPr>
-                        <a:t>9月15日之前</a:t>
-                      </a:r>
-                    </a:p>
-                  </a:txBody>
-                  <a:tcPr marT="0" marB="0" anchor="ctr">
-                    <a:lnL>
-                      <a:noFill/>
-                    </a:lnL>
-                    <a:lnR>
-                      <a:noFill/>
-                    </a:lnR>
-                    <a:lnT w="9525" cap="flat" cmpd="sng" algn="ctr">
-                      <a:solidFill>
-                        <a:srgbClr val="D6D6D6"/>
-                      </a:solidFill>
-                      <a:prstDash val="solid"/>
-                      <a:round/>
-                      <a:headEnd type="none" w="med" len="med"/>
-                      <a:tailEnd type="none" w="med" len="med"/>
-                    </a:lnT>
-                    <a:lnB w="9525">
-                      <a:solidFill>
-                        <a:srgbClr val="D6D6D6"/>
-                      </a:solidFill>
-                    </a:lnB>
-                  </a:tcPr>
-                </a:tc>
-                <a:tc>
-                  <a:txBody>
-                    <a:bodyPr/>
-                    <a:lstStyle/>
-                    <a:p>
-                      <a:pPr algn="l" latinLnBrk="1">
-                        <a:lnSpc>
-                          <a:spcPct val="90000"/>
-                        </a:lnSpc>
-                      </a:pPr>
-                      <a:r>
-                        <a:rPr sz="800" b="0">
-                          <a:solidFill>
-                            <a:srgbClr val="3D3C3A"/>
-                          </a:solidFill>
-                          <a:latin typeface="微软雅黑"/>
-                          <a:ea typeface="微软雅黑"/>
-                        </a:rPr>
-                        <a:t>新 S-CALC 开发完成</a:t>
-                      </a:r>
-                    </a:p>
-                  </a:txBody>
-                  <a:tcPr marT="0" marB="0" anchor="ctr">
-                    <a:lnL>
-                      <a:noFill/>
-                    </a:lnL>
-                    <a:lnR>
-                      <a:noFill/>
-                    </a:lnR>
-                    <a:lnT w="9525" cap="flat" cmpd="sng" algn="ctr">
-                      <a:solidFill>
-                        <a:srgbClr val="D6D6D6"/>
-                      </a:solidFill>
-                      <a:prstDash val="solid"/>
-                      <a:round/>
-                      <a:headEnd type="none" w="med" len="med"/>
-                      <a:tailEnd type="none" w="med" len="med"/>
-                    </a:lnT>
-                    <a:lnB w="9525">
-                      <a:solidFill>
-                        <a:srgbClr val="D6D6D6"/>
-                      </a:solidFill>
-                    </a:lnB>
-                  </a:tcPr>
-                </a:tc>
-                <a:tc>
-                  <a:txBody>
-                    <a:bodyPr/>
-                    <a:lstStyle/>
-                    <a:p>
-                      <a:pPr algn="l" latinLnBrk="1">
-                        <a:lnSpc>
-                          <a:spcPct val="90000"/>
-                        </a:lnSpc>
-                      </a:pPr>
-                      <a:r>
-                        <a:rPr sz="800" b="0">
-                          <a:solidFill>
-                            <a:srgbClr val="3D3C3A"/>
-                          </a:solidFill>
-                          <a:latin typeface="微软雅黑"/>
-                          <a:ea typeface="微软雅黑"/>
-                        </a:rPr>
-                        <a:t>待办</a:t>
-                      </a:r>
-                    </a:p>
-                  </a:txBody>
-                  <a:tcPr marT="0" marB="0" anchor="ctr">
-                    <a:lnL>
-                      <a:noFill/>
-                    </a:lnL>
-                    <a:lnR>
-                      <a:noFill/>
-                    </a:lnR>
-                    <a:lnT w="9525" cap="flat" cmpd="sng" algn="ctr">
-                      <a:solidFill>
-                        <a:srgbClr val="D6D6D6"/>
-                      </a:solidFill>
-                      <a:prstDash val="solid"/>
-                      <a:round/>
-                      <a:headEnd type="none" w="med" len="med"/>
-                      <a:tailEnd type="none" w="med" len="med"/>
-                    </a:lnT>
-                    <a:lnB w="9525">
-                      <a:solidFill>
-                        <a:srgbClr val="D6D6D6"/>
-                      </a:solidFill>
-                    </a:lnB>
-                  </a:tcPr>
-                </a:tc>
-                <a:extLst>
-                  <a:ext uri="{0D108BD9-81ED-4DB2-BD59-A6C34878D82A}">
-                    <a16:rowId xmlns:a16="http://schemas.microsoft.com/office/drawing/2014/main" val="10009"/>
-                  </a:ext>
-                </a:extLst>
-              </a:tr>
-              <a:tr h="137160">
-                <a:tc>
-                  <a:txBody>
-                    <a:bodyPr/>
-                    <a:lstStyle/>
-                    <a:p>
-                      <a:pPr algn="l" latinLnBrk="1">
-                        <a:lnSpc>
-                          <a:spcPct val="90000"/>
-                        </a:lnSpc>
-                      </a:pPr>
-                      <a:r>
-                        <a:rPr sz="800" b="0">
-                          <a:solidFill>
-                            <a:srgbClr val="3D3C3A"/>
-                          </a:solidFill>
-                          <a:latin typeface="微软雅黑"/>
-                          <a:ea typeface="微软雅黑"/>
-                        </a:rPr>
-                        <a:t>9月15日之前</a:t>
-                      </a:r>
-                    </a:p>
-                  </a:txBody>
-                  <a:tcPr marT="0" marB="0" anchor="ctr">
-                    <a:lnL>
-                      <a:noFill/>
-                    </a:lnL>
-                    <a:lnR>
-                      <a:noFill/>
-                    </a:lnR>
-                    <a:lnT w="9525" cap="flat" cmpd="sng" algn="ctr">
-                      <a:solidFill>
-                        <a:srgbClr val="D6D6D6"/>
-                      </a:solidFill>
-                      <a:prstDash val="solid"/>
-                      <a:round/>
-                      <a:headEnd type="none" w="med" len="med"/>
-                      <a:tailEnd type="none" w="med" len="med"/>
-                    </a:lnT>
-                    <a:lnB w="9525">
-                      <a:solidFill>
-                        <a:srgbClr val="D6D6D6"/>
-                      </a:solidFill>
-                    </a:lnB>
-                  </a:tcPr>
-                </a:tc>
-                <a:tc>
-                  <a:txBody>
-                    <a:bodyPr/>
-                    <a:lstStyle/>
-                    <a:p>
-                      <a:pPr algn="l" latinLnBrk="1">
-                        <a:lnSpc>
-                          <a:spcPct val="90000"/>
-                        </a:lnSpc>
-                      </a:pPr>
-                      <a:r>
-                        <a:rPr sz="800" b="0">
-                          <a:solidFill>
-                            <a:srgbClr val="3D3C3A"/>
-                          </a:solidFill>
-                          <a:latin typeface="微软雅黑"/>
-                          <a:ea typeface="微软雅黑"/>
-                        </a:rPr>
-                        <a:t>LMS 新页面开发完成，开 AB 前交付人审使用</a:t>
-                      </a:r>
-                    </a:p>
-                  </a:txBody>
-                  <a:tcPr marT="0" marB="0" anchor="ctr">
-                    <a:lnL>
-                      <a:noFill/>
-                    </a:lnL>
-                    <a:lnR>
-                      <a:noFill/>
-                    </a:lnR>
-                    <a:lnT w="9525" cap="flat" cmpd="sng" algn="ctr">
-                      <a:solidFill>
-                        <a:srgbClr val="D6D6D6"/>
-                      </a:solidFill>
-                      <a:prstDash val="solid"/>
-                      <a:round/>
-                      <a:headEnd type="none" w="med" len="med"/>
-                      <a:tailEnd type="none" w="med" len="med"/>
-                    </a:lnT>
-                    <a:lnB w="9525">
-                      <a:solidFill>
-                        <a:srgbClr val="D6D6D6"/>
-                      </a:solidFill>
-                    </a:lnB>
-                  </a:tcPr>
-                </a:tc>
-                <a:tc>
-                  <a:txBody>
-                    <a:bodyPr/>
-                    <a:lstStyle/>
-                    <a:p>
-                      <a:pPr algn="l" latinLnBrk="1">
-                        <a:lnSpc>
-                          <a:spcPct val="90000"/>
-                        </a:lnSpc>
-                      </a:pPr>
-                      <a:r>
-                        <a:rPr sz="800" b="0">
-                          <a:solidFill>
-                            <a:srgbClr val="3D3C3A"/>
-                          </a:solidFill>
-                          <a:latin typeface="微软雅黑"/>
-                          <a:ea typeface="微软雅黑"/>
-                        </a:rPr>
-                        <a:t>待办</a:t>
-                      </a:r>
-                    </a:p>
-                  </a:txBody>
-                  <a:tcPr marT="0" marB="0" anchor="ctr">
-                    <a:lnL>
-                      <a:noFill/>
-                    </a:lnL>
-                    <a:lnR>
-                      <a:noFill/>
-                    </a:lnR>
-                    <a:lnT w="9525" cap="flat" cmpd="sng" algn="ctr">
-                      <a:solidFill>
-                        <a:srgbClr val="D6D6D6"/>
-                      </a:solidFill>
-                      <a:prstDash val="solid"/>
-                      <a:round/>
-                      <a:headEnd type="none" w="med" len="med"/>
-                      <a:tailEnd type="none" w="med" len="med"/>
-                    </a:lnT>
-                    <a:lnB w="9525">
-                      <a:solidFill>
-                        <a:srgbClr val="D6D6D6"/>
-                      </a:solidFill>
-                    </a:lnB>
-                  </a:tcPr>
-                </a:tc>
-                <a:extLst>
-                  <a:ext uri="{0D108BD9-81ED-4DB2-BD59-A6C34878D82A}">
-                    <a16:rowId xmlns:a16="http://schemas.microsoft.com/office/drawing/2014/main" val="10010"/>
-                  </a:ext>
-                </a:extLst>
-              </a:tr>
-              <a:tr h="137160">
-                <a:tc>
-                  <a:txBody>
-                    <a:bodyPr/>
-                    <a:lstStyle/>
-                    <a:p>
-                      <a:pPr algn="l" latinLnBrk="1">
-                        <a:lnSpc>
-                          <a:spcPct val="90000"/>
-                        </a:lnSpc>
-                      </a:pPr>
-                      <a:r>
-                        <a:rPr sz="800" b="0">
-                          <a:solidFill>
-                            <a:srgbClr val="3D3C3A"/>
-                          </a:solidFill>
-                          <a:latin typeface="微软雅黑"/>
-                          <a:ea typeface="微软雅黑"/>
-                        </a:rPr>
-                        <a:t>S-CALC 开发完成后</a:t>
-                      </a:r>
-                    </a:p>
-                  </a:txBody>
-                  <a:tcPr marT="0" marB="0" anchor="ctr">
-                    <a:lnL>
-                      <a:noFill/>
-                    </a:lnL>
-                    <a:lnR>
-                      <a:noFill/>
-                    </a:lnR>
-                    <a:lnT w="9525" cap="flat" cmpd="sng" algn="ctr">
-                      <a:solidFill>
-                        <a:srgbClr val="D6D6D6"/>
-                      </a:solidFill>
-                      <a:prstDash val="solid"/>
-                      <a:round/>
-                      <a:headEnd type="none" w="med" len="med"/>
-                      <a:tailEnd type="none" w="med" len="med"/>
-                    </a:lnT>
-                    <a:lnB w="9525">
-                      <a:solidFill>
-                        <a:srgbClr val="D6D6D6"/>
-                      </a:solidFill>
-                    </a:lnB>
-                  </a:tcPr>
-                </a:tc>
-                <a:tc>
-                  <a:txBody>
-                    <a:bodyPr/>
-                    <a:lstStyle/>
-                    <a:p>
-                      <a:pPr algn="l" latinLnBrk="1">
-                        <a:lnSpc>
-                          <a:spcPct val="90000"/>
-                        </a:lnSpc>
-                      </a:pPr>
-                      <a:r>
-                        <a:rPr sz="800" b="0">
-                          <a:solidFill>
-                            <a:srgbClr val="3D3C3A"/>
-                          </a:solidFill>
-                          <a:latin typeface="微软雅黑"/>
-                          <a:ea typeface="微软雅黑"/>
-                        </a:rPr>
-                        <a:t>开通 AB 测试</a:t>
-                      </a:r>
-                    </a:p>
-                  </a:txBody>
-                  <a:tcPr marT="0" marB="0" anchor="ctr">
-                    <a:lnL>
-                      <a:noFill/>
-                    </a:lnL>
-                    <a:lnR>
-                      <a:noFill/>
-                    </a:lnR>
-                    <a:lnT w="9525" cap="flat" cmpd="sng" algn="ctr">
-                      <a:solidFill>
-                        <a:srgbClr val="D6D6D6"/>
-                      </a:solidFill>
-                      <a:prstDash val="solid"/>
-                      <a:round/>
-                      <a:headEnd type="none" w="med" len="med"/>
-                      <a:tailEnd type="none" w="med" len="med"/>
-                    </a:lnT>
-                    <a:lnB w="9525">
-                      <a:solidFill>
-                        <a:srgbClr val="D6D6D6"/>
-                      </a:solidFill>
-                    </a:lnB>
-                  </a:tcPr>
-                </a:tc>
-                <a:tc>
-                  <a:txBody>
-                    <a:bodyPr/>
-                    <a:lstStyle/>
-                    <a:p>
-                      <a:pPr algn="l" latinLnBrk="1">
-                        <a:lnSpc>
-                          <a:spcPct val="90000"/>
-                        </a:lnSpc>
-                      </a:pPr>
-                      <a:r>
-                        <a:rPr sz="800" b="0" dirty="0" err="1">
-                          <a:solidFill>
-                            <a:srgbClr val="3D3C3A"/>
-                          </a:solidFill>
-                          <a:latin typeface="微软雅黑"/>
-                          <a:ea typeface="微软雅黑"/>
-                        </a:rPr>
-                        <a:t>待办</a:t>
-                      </a:r>
-                      <a:endParaRPr sz="800" b="0" dirty="0">
-                        <a:solidFill>
-                          <a:srgbClr val="3D3C3A"/>
-                        </a:solidFill>
-                        <a:latin typeface="微软雅黑"/>
-                        <a:ea typeface="微软雅黑"/>
-                      </a:endParaRPr>
-                    </a:p>
-                  </a:txBody>
-                  <a:tcPr marT="0" marB="0" anchor="ctr">
-                    <a:lnL>
-                      <a:noFill/>
-                    </a:lnL>
-                    <a:lnR>
-                      <a:noFill/>
-                    </a:lnR>
-                    <a:lnT w="9525" cap="flat" cmpd="sng" algn="ctr">
-                      <a:solidFill>
-                        <a:srgbClr val="D6D6D6"/>
-                      </a:solidFill>
-                      <a:prstDash val="solid"/>
-                      <a:round/>
-                      <a:headEnd type="none" w="med" len="med"/>
-                      <a:tailEnd type="none" w="med" len="med"/>
-                    </a:lnT>
-                    <a:lnB w="9525">
-                      <a:solidFill>
-                        <a:srgbClr val="D6D6D6"/>
-                      </a:solidFill>
-                    </a:lnB>
-                  </a:tcPr>
-                </a:tc>
-                <a:extLst>
-                  <a:ext uri="{0D108BD9-81ED-4DB2-BD59-A6C34878D82A}">
-                    <a16:rowId xmlns:a16="http://schemas.microsoft.com/office/drawing/2014/main" val="10011"/>
-                  </a:ext>
-                </a:extLst>
-              </a:tr>
-            </a:tbl>
-          </a:graphicData>
-        </a:graphic>
-      </p:graphicFrame>
+      <p:sp>
+        <p:nvSpPr>
+          <p:cNvPr id="140" name="tl-line"/>
+          <p:cNvSpPr/>
+          <p:nvPr/>
+        </p:nvSpPr>
+        <p:spPr>
+          <a:xfrm>
+            <a:off x="658368" y="3830421"/>
+            <a:ext cx="10698480" cy="20116"/>
+          </a:xfrm>
+          <a:prstGeom prst="rect">
+            <a:avLst/>
+          </a:prstGeom>
+          <a:solidFill>
+            <a:srgbClr val="1F4E79"/>
+          </a:solidFill>
+          <a:ln>
+            <a:noFill/>
+          </a:ln>
+          <a:effectLst/>
+        </p:spPr>
+        <p:style>
+          <a:lnRef idx="1">
+            <a:schemeClr val="accent1"/>
+          </a:lnRef>
+          <a:fillRef idx="3">
+            <a:schemeClr val="accent1"/>
+          </a:fillRef>
+          <a:effectRef idx="2">
+            <a:schemeClr val="accent1"/>
+          </a:effectRef>
+          <a:fontRef idx="minor">
+            <a:schemeClr val="lt1"/>
+          </a:fontRef>
+        </p:style>
+        <p:txBody>
+          <a:bodyPr rtlCol="0" anchor="ctr"/>
+          <a:lstStyle/>
+          <a:p>
+            <a:pPr algn="ctr"/>
+          </a:p>
+        </p:txBody>
+      </p:sp>
+      <p:sp>
+        <p:nvSpPr>
+          <p:cNvPr id="141" name="tl-dot-0"/>
+          <p:cNvSpPr/>
+          <p:nvPr/>
+        </p:nvSpPr>
+        <p:spPr>
+          <a:xfrm>
+            <a:off x="1353312" y="3771900"/>
+            <a:ext cx="137160" cy="137160"/>
+          </a:xfrm>
+          <a:prstGeom prst="ellipse">
+            <a:avLst/>
+          </a:prstGeom>
+          <a:solidFill>
+            <a:srgbClr val="1F4E79"/>
+          </a:solidFill>
+          <a:ln>
+            <a:noFill/>
+          </a:ln>
+          <a:effectLst/>
+        </p:spPr>
+        <p:style>
+          <a:lnRef idx="1">
+            <a:schemeClr val="accent1"/>
+          </a:lnRef>
+          <a:fillRef idx="3">
+            <a:schemeClr val="accent1"/>
+          </a:fillRef>
+          <a:effectRef idx="2">
+            <a:schemeClr val="accent1"/>
+          </a:effectRef>
+          <a:fontRef idx="minor">
+            <a:schemeClr val="lt1"/>
+          </a:fontRef>
+        </p:style>
+        <p:txBody>
+          <a:bodyPr rtlCol="0" anchor="ctr"/>
+          <a:lstStyle/>
+          <a:p>
+            <a:pPr algn="ctr"/>
+          </a:p>
+        </p:txBody>
+      </p:sp>
+      <p:sp>
+        <p:nvSpPr>
+          <p:cNvPr id="142" name="tl-date-0"/>
+          <p:cNvSpPr txBox="1"/>
+          <p:nvPr/>
+        </p:nvSpPr>
+        <p:spPr>
+          <a:xfrm>
+            <a:off x="512064" y="3547872"/>
+            <a:ext cx="1819656" cy="146304"/>
+          </a:xfrm>
+          <a:prstGeom prst="rect">
+            <a:avLst/>
+          </a:prstGeom>
+          <a:noFill/>
+        </p:spPr>
+        <p:txBody>
+          <a:bodyPr wrap="square" lIns="0" rIns="0" tIns="0" bIns="0" anchor="t">
+            <a:spAutoFit/>
+          </a:bodyPr>
+          <a:lstStyle/>
+          <a:p>
+            <a:pPr algn="l" latinLnBrk="1"/>
+            <a:r>
+              <a:rPr sz="800" b="1">
+                <a:solidFill>
+                  <a:srgbClr val="1F4E79"/>
+                </a:solidFill>
+                <a:latin typeface="微软雅黑"/>
+                <a:ea typeface="微软雅黑"/>
+              </a:rPr>
+              <a:t>8月9日</a:t>
+            </a:r>
+          </a:p>
+        </p:txBody>
+      </p:sp>
+      <p:sp>
+        <p:nvSpPr>
+          <p:cNvPr id="143" name="tl-stdot-0-0"/>
+          <p:cNvSpPr/>
+          <p:nvPr/>
+        </p:nvSpPr>
+        <p:spPr>
+          <a:xfrm>
+            <a:off x="530352" y="4101084"/>
+            <a:ext cx="68580" cy="68580"/>
+          </a:xfrm>
+          <a:prstGeom prst="ellipse">
+            <a:avLst/>
+          </a:prstGeom>
+          <a:solidFill>
+            <a:srgbClr val="1F4E79"/>
+          </a:solidFill>
+          <a:ln>
+            <a:noFill/>
+          </a:ln>
+          <a:effectLst/>
+        </p:spPr>
+        <p:style>
+          <a:lnRef idx="1">
+            <a:schemeClr val="accent1"/>
+          </a:lnRef>
+          <a:fillRef idx="3">
+            <a:schemeClr val="accent1"/>
+          </a:fillRef>
+          <a:effectRef idx="2">
+            <a:schemeClr val="accent1"/>
+          </a:effectRef>
+          <a:fontRef idx="minor">
+            <a:schemeClr val="lt1"/>
+          </a:fontRef>
+        </p:style>
+        <p:txBody>
+          <a:bodyPr rtlCol="0" anchor="ctr"/>
+          <a:lstStyle/>
+          <a:p>
+            <a:pPr algn="ctr"/>
+          </a:p>
+        </p:txBody>
+      </p:sp>
+      <p:sp>
+        <p:nvSpPr>
+          <p:cNvPr id="144" name="tl-item-0-0"/>
+          <p:cNvSpPr txBox="1"/>
+          <p:nvPr/>
+        </p:nvSpPr>
+        <p:spPr>
+          <a:xfrm>
+            <a:off x="630936" y="4059936"/>
+            <a:ext cx="1682496" cy="274320"/>
+          </a:xfrm>
+          <a:prstGeom prst="rect">
+            <a:avLst/>
+          </a:prstGeom>
+          <a:noFill/>
+        </p:spPr>
+        <p:txBody>
+          <a:bodyPr wrap="square" lIns="0" rIns="0" tIns="0" bIns="0" anchor="t">
+            <a:spAutoFit/>
+          </a:bodyPr>
+          <a:lstStyle/>
+          <a:p>
+            <a:pPr algn="l" latinLnBrk="1">
+              <a:lnSpc>
+                <a:spcPct val="95000"/>
+              </a:lnSpc>
+            </a:pPr>
+            <a:r>
+              <a:rPr sz="700" b="0">
+                <a:solidFill>
+                  <a:srgbClr val="3D3C3A"/>
+                </a:solidFill>
+                <a:latin typeface="微软雅黑"/>
+                <a:ea typeface="微软雅黑"/>
+              </a:rPr>
+              <a:t>943 模型平台 preview 版本完成部署，开放模型输出接口</a:t>
+            </a:r>
+          </a:p>
+        </p:txBody>
+      </p:sp>
+      <p:sp>
+        <p:nvSpPr>
+          <p:cNvPr id="145" name="tl-stdot-0-1"/>
+          <p:cNvSpPr/>
+          <p:nvPr/>
+        </p:nvSpPr>
+        <p:spPr>
+          <a:xfrm>
+            <a:off x="530352" y="4375404"/>
+            <a:ext cx="68580" cy="68580"/>
+          </a:xfrm>
+          <a:prstGeom prst="ellipse">
+            <a:avLst/>
+          </a:prstGeom>
+          <a:solidFill>
+            <a:srgbClr val="D6A000"/>
+          </a:solidFill>
+          <a:ln>
+            <a:noFill/>
+          </a:ln>
+          <a:effectLst/>
+        </p:spPr>
+        <p:style>
+          <a:lnRef idx="1">
+            <a:schemeClr val="accent1"/>
+          </a:lnRef>
+          <a:fillRef idx="3">
+            <a:schemeClr val="accent1"/>
+          </a:fillRef>
+          <a:effectRef idx="2">
+            <a:schemeClr val="accent1"/>
+          </a:effectRef>
+          <a:fontRef idx="minor">
+            <a:schemeClr val="lt1"/>
+          </a:fontRef>
+        </p:style>
+        <p:txBody>
+          <a:bodyPr rtlCol="0" anchor="ctr"/>
+          <a:lstStyle/>
+          <a:p>
+            <a:pPr algn="ctr"/>
+          </a:p>
+        </p:txBody>
+      </p:sp>
+      <p:sp>
+        <p:nvSpPr>
+          <p:cNvPr id="146" name="tl-item-0-1"/>
+          <p:cNvSpPr txBox="1"/>
+          <p:nvPr/>
+        </p:nvSpPr>
+        <p:spPr>
+          <a:xfrm>
+            <a:off x="630936" y="4334256"/>
+            <a:ext cx="1682496" cy="274320"/>
+          </a:xfrm>
+          <a:prstGeom prst="rect">
+            <a:avLst/>
+          </a:prstGeom>
+          <a:noFill/>
+        </p:spPr>
+        <p:txBody>
+          <a:bodyPr wrap="square" lIns="0" rIns="0" tIns="0" bIns="0" anchor="t">
+            <a:spAutoFit/>
+          </a:bodyPr>
+          <a:lstStyle/>
+          <a:p>
+            <a:pPr algn="l" latinLnBrk="1">
+              <a:lnSpc>
+                <a:spcPct val="95000"/>
+              </a:lnSpc>
+            </a:pPr>
+            <a:r>
+              <a:rPr sz="700" b="0">
+                <a:solidFill>
+                  <a:srgbClr val="3D3C3A"/>
+                </a:solidFill>
+                <a:latin typeface="微软雅黑"/>
+                <a:ea typeface="微软雅黑"/>
+              </a:rPr>
+              <a:t>下游平台开始模型调用链路开发</a:t>
+            </a:r>
+          </a:p>
+        </p:txBody>
+      </p:sp>
+      <p:sp>
+        <p:nvSpPr>
+          <p:cNvPr id="147" name="tl-dot-1"/>
+          <p:cNvSpPr/>
+          <p:nvPr/>
+        </p:nvSpPr>
+        <p:spPr>
+          <a:xfrm>
+            <a:off x="3172968" y="3771900"/>
+            <a:ext cx="137160" cy="137160"/>
+          </a:xfrm>
+          <a:prstGeom prst="ellipse">
+            <a:avLst/>
+          </a:prstGeom>
+          <a:solidFill>
+            <a:srgbClr val="1F4E79"/>
+          </a:solidFill>
+          <a:ln>
+            <a:noFill/>
+          </a:ln>
+          <a:effectLst/>
+        </p:spPr>
+        <p:style>
+          <a:lnRef idx="1">
+            <a:schemeClr val="accent1"/>
+          </a:lnRef>
+          <a:fillRef idx="3">
+            <a:schemeClr val="accent1"/>
+          </a:fillRef>
+          <a:effectRef idx="2">
+            <a:schemeClr val="accent1"/>
+          </a:effectRef>
+          <a:fontRef idx="minor">
+            <a:schemeClr val="lt1"/>
+          </a:fontRef>
+        </p:style>
+        <p:txBody>
+          <a:bodyPr rtlCol="0" anchor="ctr"/>
+          <a:lstStyle/>
+          <a:p>
+            <a:pPr algn="ctr"/>
+          </a:p>
+        </p:txBody>
+      </p:sp>
+      <p:sp>
+        <p:nvSpPr>
+          <p:cNvPr id="148" name="tl-date-1"/>
+          <p:cNvSpPr txBox="1"/>
+          <p:nvPr/>
+        </p:nvSpPr>
+        <p:spPr>
+          <a:xfrm>
+            <a:off x="2331720" y="3547872"/>
+            <a:ext cx="1819656" cy="146304"/>
+          </a:xfrm>
+          <a:prstGeom prst="rect">
+            <a:avLst/>
+          </a:prstGeom>
+          <a:noFill/>
+        </p:spPr>
+        <p:txBody>
+          <a:bodyPr wrap="square" lIns="0" rIns="0" tIns="0" bIns="0" anchor="t">
+            <a:spAutoFit/>
+          </a:bodyPr>
+          <a:lstStyle/>
+          <a:p>
+            <a:pPr algn="l" latinLnBrk="1"/>
+            <a:r>
+              <a:rPr sz="800" b="1">
+                <a:solidFill>
+                  <a:srgbClr val="1F4E79"/>
+                </a:solidFill>
+                <a:latin typeface="微软雅黑"/>
+                <a:ea typeface="微软雅黑"/>
+              </a:rPr>
+              <a:t>当前</a:t>
+            </a:r>
+          </a:p>
+        </p:txBody>
+      </p:sp>
+      <p:sp>
+        <p:nvSpPr>
+          <p:cNvPr id="149" name="tl-stdot-1-0"/>
+          <p:cNvSpPr/>
+          <p:nvPr/>
+        </p:nvSpPr>
+        <p:spPr>
+          <a:xfrm>
+            <a:off x="2350008" y="4101084"/>
+            <a:ext cx="68580" cy="68580"/>
+          </a:xfrm>
+          <a:prstGeom prst="ellipse">
+            <a:avLst/>
+          </a:prstGeom>
+          <a:solidFill>
+            <a:srgbClr val="1F4E79"/>
+          </a:solidFill>
+          <a:ln>
+            <a:noFill/>
+          </a:ln>
+          <a:effectLst/>
+        </p:spPr>
+        <p:style>
+          <a:lnRef idx="1">
+            <a:schemeClr val="accent1"/>
+          </a:lnRef>
+          <a:fillRef idx="3">
+            <a:schemeClr val="accent1"/>
+          </a:fillRef>
+          <a:effectRef idx="2">
+            <a:schemeClr val="accent1"/>
+          </a:effectRef>
+          <a:fontRef idx="minor">
+            <a:schemeClr val="lt1"/>
+          </a:fontRef>
+        </p:style>
+        <p:txBody>
+          <a:bodyPr rtlCol="0" anchor="ctr"/>
+          <a:lstStyle/>
+          <a:p>
+            <a:pPr algn="ctr"/>
+          </a:p>
+        </p:txBody>
+      </p:sp>
+      <p:sp>
+        <p:nvSpPr>
+          <p:cNvPr id="150" name="tl-item-1-0"/>
+          <p:cNvSpPr txBox="1"/>
+          <p:nvPr/>
+        </p:nvSpPr>
+        <p:spPr>
+          <a:xfrm>
+            <a:off x="2450591" y="4059936"/>
+            <a:ext cx="1682496" cy="274320"/>
+          </a:xfrm>
+          <a:prstGeom prst="rect">
+            <a:avLst/>
+          </a:prstGeom>
+          <a:noFill/>
+        </p:spPr>
+        <p:txBody>
+          <a:bodyPr wrap="square" lIns="0" rIns="0" tIns="0" bIns="0" anchor="t">
+            <a:spAutoFit/>
+          </a:bodyPr>
+          <a:lstStyle/>
+          <a:p>
+            <a:pPr algn="l" latinLnBrk="1">
+              <a:lnSpc>
+                <a:spcPct val="95000"/>
+              </a:lnSpc>
+            </a:pPr>
+            <a:r>
+              <a:rPr sz="700" b="0">
+                <a:solidFill>
+                  <a:srgbClr val="3D3C3A"/>
+                </a:solidFill>
+                <a:latin typeface="微软雅黑"/>
+                <a:ea typeface="微软雅黑"/>
+              </a:rPr>
+              <a:t>负债 / 收入类知识库基本初始化完成，两类模型效果较好</a:t>
+            </a:r>
+          </a:p>
+        </p:txBody>
+      </p:sp>
+      <p:sp>
+        <p:nvSpPr>
+          <p:cNvPr id="151" name="tl-stdot-1-1"/>
+          <p:cNvSpPr/>
+          <p:nvPr/>
+        </p:nvSpPr>
+        <p:spPr>
+          <a:xfrm>
+            <a:off x="2350008" y="4375404"/>
+            <a:ext cx="68580" cy="68580"/>
+          </a:xfrm>
+          <a:prstGeom prst="ellipse">
+            <a:avLst/>
+          </a:prstGeom>
+          <a:solidFill>
+            <a:srgbClr val="D6A000"/>
+          </a:solidFill>
+          <a:ln>
+            <a:noFill/>
+          </a:ln>
+          <a:effectLst/>
+        </p:spPr>
+        <p:style>
+          <a:lnRef idx="1">
+            <a:schemeClr val="accent1"/>
+          </a:lnRef>
+          <a:fillRef idx="3">
+            <a:schemeClr val="accent1"/>
+          </a:fillRef>
+          <a:effectRef idx="2">
+            <a:schemeClr val="accent1"/>
+          </a:effectRef>
+          <a:fontRef idx="minor">
+            <a:schemeClr val="lt1"/>
+          </a:fontRef>
+        </p:style>
+        <p:txBody>
+          <a:bodyPr rtlCol="0" anchor="ctr"/>
+          <a:lstStyle/>
+          <a:p>
+            <a:pPr algn="ctr"/>
+          </a:p>
+        </p:txBody>
+      </p:sp>
+      <p:sp>
+        <p:nvSpPr>
+          <p:cNvPr id="152" name="tl-item-1-1"/>
+          <p:cNvSpPr txBox="1"/>
+          <p:nvPr/>
+        </p:nvSpPr>
+        <p:spPr>
+          <a:xfrm>
+            <a:off x="2450591" y="4334256"/>
+            <a:ext cx="1682496" cy="274320"/>
+          </a:xfrm>
+          <a:prstGeom prst="rect">
+            <a:avLst/>
+          </a:prstGeom>
+          <a:noFill/>
+        </p:spPr>
+        <p:txBody>
+          <a:bodyPr wrap="square" lIns="0" rIns="0" tIns="0" bIns="0" anchor="t">
+            <a:spAutoFit/>
+          </a:bodyPr>
+          <a:lstStyle/>
+          <a:p>
+            <a:pPr algn="l" latinLnBrk="1">
+              <a:lnSpc>
+                <a:spcPct val="95000"/>
+              </a:lnSpc>
+            </a:pPr>
+            <a:r>
+              <a:rPr sz="700" b="0">
+                <a:solidFill>
+                  <a:srgbClr val="3D3C3A"/>
+                </a:solidFill>
+                <a:latin typeface="微软雅黑"/>
+                <a:ea typeface="微软雅黑"/>
+              </a:rPr>
+              <a:t>消费类知识库建设中</a:t>
+            </a:r>
+          </a:p>
+        </p:txBody>
+      </p:sp>
+      <p:sp>
+        <p:nvSpPr>
+          <p:cNvPr id="153" name="tl-dot-2"/>
+          <p:cNvSpPr/>
+          <p:nvPr/>
+        </p:nvSpPr>
+        <p:spPr>
+          <a:xfrm>
+            <a:off x="4992624" y="3771900"/>
+            <a:ext cx="137160" cy="137160"/>
+          </a:xfrm>
+          <a:prstGeom prst="ellipse">
+            <a:avLst/>
+          </a:prstGeom>
+          <a:solidFill>
+            <a:srgbClr val="1F4E79"/>
+          </a:solidFill>
+          <a:ln>
+            <a:noFill/>
+          </a:ln>
+          <a:effectLst/>
+        </p:spPr>
+        <p:style>
+          <a:lnRef idx="1">
+            <a:schemeClr val="accent1"/>
+          </a:lnRef>
+          <a:fillRef idx="3">
+            <a:schemeClr val="accent1"/>
+          </a:fillRef>
+          <a:effectRef idx="2">
+            <a:schemeClr val="accent1"/>
+          </a:effectRef>
+          <a:fontRef idx="minor">
+            <a:schemeClr val="lt1"/>
+          </a:fontRef>
+        </p:style>
+        <p:txBody>
+          <a:bodyPr rtlCol="0" anchor="ctr"/>
+          <a:lstStyle/>
+          <a:p>
+            <a:pPr algn="ctr"/>
+          </a:p>
+        </p:txBody>
+      </p:sp>
+      <p:sp>
+        <p:nvSpPr>
+          <p:cNvPr id="154" name="tl-date-2"/>
+          <p:cNvSpPr txBox="1"/>
+          <p:nvPr/>
+        </p:nvSpPr>
+        <p:spPr>
+          <a:xfrm>
+            <a:off x="4151376" y="3547872"/>
+            <a:ext cx="1819656" cy="146304"/>
+          </a:xfrm>
+          <a:prstGeom prst="rect">
+            <a:avLst/>
+          </a:prstGeom>
+          <a:noFill/>
+        </p:spPr>
+        <p:txBody>
+          <a:bodyPr wrap="square" lIns="0" rIns="0" tIns="0" bIns="0" anchor="t">
+            <a:spAutoFit/>
+          </a:bodyPr>
+          <a:lstStyle/>
+          <a:p>
+            <a:pPr algn="l" latinLnBrk="1"/>
+            <a:r>
+              <a:rPr sz="800" b="1">
+                <a:solidFill>
+                  <a:srgbClr val="1F4E79"/>
+                </a:solidFill>
+                <a:latin typeface="微软雅黑"/>
+                <a:ea typeface="微软雅黑"/>
+              </a:rPr>
+              <a:t>8月21日</a:t>
+            </a:r>
+          </a:p>
+        </p:txBody>
+      </p:sp>
+      <p:sp>
+        <p:nvSpPr>
+          <p:cNvPr id="155" name="tl-stdot-2-0"/>
+          <p:cNvSpPr/>
+          <p:nvPr/>
+        </p:nvSpPr>
+        <p:spPr>
+          <a:xfrm>
+            <a:off x="4169663" y="4101084"/>
+            <a:ext cx="68580" cy="68580"/>
+          </a:xfrm>
+          <a:prstGeom prst="ellipse">
+            <a:avLst/>
+          </a:prstGeom>
+          <a:solidFill>
+            <a:srgbClr val="606060"/>
+          </a:solidFill>
+          <a:ln>
+            <a:noFill/>
+          </a:ln>
+          <a:effectLst/>
+        </p:spPr>
+        <p:style>
+          <a:lnRef idx="1">
+            <a:schemeClr val="accent1"/>
+          </a:lnRef>
+          <a:fillRef idx="3">
+            <a:schemeClr val="accent1"/>
+          </a:fillRef>
+          <a:effectRef idx="2">
+            <a:schemeClr val="accent1"/>
+          </a:effectRef>
+          <a:fontRef idx="minor">
+            <a:schemeClr val="lt1"/>
+          </a:fontRef>
+        </p:style>
+        <p:txBody>
+          <a:bodyPr rtlCol="0" anchor="ctr"/>
+          <a:lstStyle/>
+          <a:p>
+            <a:pPr algn="ctr"/>
+          </a:p>
+        </p:txBody>
+      </p:sp>
+      <p:sp>
+        <p:nvSpPr>
+          <p:cNvPr id="156" name="tl-item-2-0"/>
+          <p:cNvSpPr txBox="1"/>
+          <p:nvPr/>
+        </p:nvSpPr>
+        <p:spPr>
+          <a:xfrm>
+            <a:off x="4270248" y="4059936"/>
+            <a:ext cx="1682496" cy="274320"/>
+          </a:xfrm>
+          <a:prstGeom prst="rect">
+            <a:avLst/>
+          </a:prstGeom>
+          <a:noFill/>
+        </p:spPr>
+        <p:txBody>
+          <a:bodyPr wrap="square" lIns="0" rIns="0" tIns="0" bIns="0" anchor="t">
+            <a:spAutoFit/>
+          </a:bodyPr>
+          <a:lstStyle/>
+          <a:p>
+            <a:pPr algn="l" latinLnBrk="1">
+              <a:lnSpc>
+                <a:spcPct val="95000"/>
+              </a:lnSpc>
+            </a:pPr>
+            <a:r>
+              <a:rPr sz="700" b="0">
+                <a:solidFill>
+                  <a:srgbClr val="3D3C3A"/>
+                </a:solidFill>
+                <a:latin typeface="微软雅黑"/>
+                <a:ea typeface="微软雅黑"/>
+              </a:rPr>
+              <a:t>完成消费类知识库初始化</a:t>
+            </a:r>
+          </a:p>
+        </p:txBody>
+      </p:sp>
+      <p:sp>
+        <p:nvSpPr>
+          <p:cNvPr id="157" name="tl-stdot-2-1"/>
+          <p:cNvSpPr/>
+          <p:nvPr/>
+        </p:nvSpPr>
+        <p:spPr>
+          <a:xfrm>
+            <a:off x="4169663" y="4375404"/>
+            <a:ext cx="68580" cy="68580"/>
+          </a:xfrm>
+          <a:prstGeom prst="ellipse">
+            <a:avLst/>
+          </a:prstGeom>
+          <a:solidFill>
+            <a:srgbClr val="606060"/>
+          </a:solidFill>
+          <a:ln>
+            <a:noFill/>
+          </a:ln>
+          <a:effectLst/>
+        </p:spPr>
+        <p:style>
+          <a:lnRef idx="1">
+            <a:schemeClr val="accent1"/>
+          </a:lnRef>
+          <a:fillRef idx="3">
+            <a:schemeClr val="accent1"/>
+          </a:fillRef>
+          <a:effectRef idx="2">
+            <a:schemeClr val="accent1"/>
+          </a:effectRef>
+          <a:fontRef idx="minor">
+            <a:schemeClr val="lt1"/>
+          </a:fontRef>
+        </p:style>
+        <p:txBody>
+          <a:bodyPr rtlCol="0" anchor="ctr"/>
+          <a:lstStyle/>
+          <a:p>
+            <a:pPr algn="ctr"/>
+          </a:p>
+        </p:txBody>
+      </p:sp>
+      <p:sp>
+        <p:nvSpPr>
+          <p:cNvPr id="158" name="tl-item-2-1"/>
+          <p:cNvSpPr txBox="1"/>
+          <p:nvPr/>
+        </p:nvSpPr>
+        <p:spPr>
+          <a:xfrm>
+            <a:off x="4270248" y="4334256"/>
+            <a:ext cx="1682496" cy="274320"/>
+          </a:xfrm>
+          <a:prstGeom prst="rect">
+            <a:avLst/>
+          </a:prstGeom>
+          <a:noFill/>
+        </p:spPr>
+        <p:txBody>
+          <a:bodyPr wrap="square" lIns="0" rIns="0" tIns="0" bIns="0" anchor="t">
+            <a:spAutoFit/>
+          </a:bodyPr>
+          <a:lstStyle/>
+          <a:p>
+            <a:pPr algn="l" latinLnBrk="1">
+              <a:lnSpc>
+                <a:spcPct val="95000"/>
+              </a:lnSpc>
+            </a:pPr>
+            <a:r>
+              <a:rPr sz="700" b="0">
+                <a:solidFill>
+                  <a:srgbClr val="3D3C3A"/>
+                </a:solidFill>
+                <a:latin typeface="微软雅黑"/>
+                <a:ea typeface="微软雅黑"/>
+              </a:rPr>
+              <a:t>发布全分类详细模型效果评估报告</a:t>
+            </a:r>
+          </a:p>
+        </p:txBody>
+      </p:sp>
+      <p:sp>
+        <p:nvSpPr>
+          <p:cNvPr id="159" name="tl-dot-3"/>
+          <p:cNvSpPr/>
+          <p:nvPr/>
+        </p:nvSpPr>
+        <p:spPr>
+          <a:xfrm>
+            <a:off x="6812280" y="3771900"/>
+            <a:ext cx="137160" cy="137160"/>
+          </a:xfrm>
+          <a:prstGeom prst="ellipse">
+            <a:avLst/>
+          </a:prstGeom>
+          <a:solidFill>
+            <a:srgbClr val="1F4E79"/>
+          </a:solidFill>
+          <a:ln>
+            <a:noFill/>
+          </a:ln>
+          <a:effectLst/>
+        </p:spPr>
+        <p:style>
+          <a:lnRef idx="1">
+            <a:schemeClr val="accent1"/>
+          </a:lnRef>
+          <a:fillRef idx="3">
+            <a:schemeClr val="accent1"/>
+          </a:fillRef>
+          <a:effectRef idx="2">
+            <a:schemeClr val="accent1"/>
+          </a:effectRef>
+          <a:fontRef idx="minor">
+            <a:schemeClr val="lt1"/>
+          </a:fontRef>
+        </p:style>
+        <p:txBody>
+          <a:bodyPr rtlCol="0" anchor="ctr"/>
+          <a:lstStyle/>
+          <a:p>
+            <a:pPr algn="ctr"/>
+          </a:p>
+        </p:txBody>
+      </p:sp>
+      <p:sp>
+        <p:nvSpPr>
+          <p:cNvPr id="160" name="tl-date-3"/>
+          <p:cNvSpPr txBox="1"/>
+          <p:nvPr/>
+        </p:nvSpPr>
+        <p:spPr>
+          <a:xfrm>
+            <a:off x="5971031" y="3547872"/>
+            <a:ext cx="1819656" cy="146304"/>
+          </a:xfrm>
+          <a:prstGeom prst="rect">
+            <a:avLst/>
+          </a:prstGeom>
+          <a:noFill/>
+        </p:spPr>
+        <p:txBody>
+          <a:bodyPr wrap="square" lIns="0" rIns="0" tIns="0" bIns="0" anchor="t">
+            <a:spAutoFit/>
+          </a:bodyPr>
+          <a:lstStyle/>
+          <a:p>
+            <a:pPr algn="l" latinLnBrk="1"/>
+            <a:r>
+              <a:rPr sz="800" b="1">
+                <a:solidFill>
+                  <a:srgbClr val="1F4E79"/>
+                </a:solidFill>
+                <a:latin typeface="微软雅黑"/>
+                <a:ea typeface="微软雅黑"/>
+              </a:rPr>
+              <a:t>8月31日</a:t>
+            </a:r>
+          </a:p>
+        </p:txBody>
+      </p:sp>
+      <p:sp>
+        <p:nvSpPr>
+          <p:cNvPr id="161" name="tl-stdot-3-0"/>
+          <p:cNvSpPr/>
+          <p:nvPr/>
+        </p:nvSpPr>
+        <p:spPr>
+          <a:xfrm>
+            <a:off x="5989319" y="4101084"/>
+            <a:ext cx="68580" cy="68580"/>
+          </a:xfrm>
+          <a:prstGeom prst="ellipse">
+            <a:avLst/>
+          </a:prstGeom>
+          <a:solidFill>
+            <a:srgbClr val="606060"/>
+          </a:solidFill>
+          <a:ln>
+            <a:noFill/>
+          </a:ln>
+          <a:effectLst/>
+        </p:spPr>
+        <p:style>
+          <a:lnRef idx="1">
+            <a:schemeClr val="accent1"/>
+          </a:lnRef>
+          <a:fillRef idx="3">
+            <a:schemeClr val="accent1"/>
+          </a:fillRef>
+          <a:effectRef idx="2">
+            <a:schemeClr val="accent1"/>
+          </a:effectRef>
+          <a:fontRef idx="minor">
+            <a:schemeClr val="lt1"/>
+          </a:fontRef>
+        </p:style>
+        <p:txBody>
+          <a:bodyPr rtlCol="0" anchor="ctr"/>
+          <a:lstStyle/>
+          <a:p>
+            <a:pPr algn="ctr"/>
+          </a:p>
+        </p:txBody>
+      </p:sp>
+      <p:sp>
+        <p:nvSpPr>
+          <p:cNvPr id="162" name="tl-item-3-0"/>
+          <p:cNvSpPr txBox="1"/>
+          <p:nvPr/>
+        </p:nvSpPr>
+        <p:spPr>
+          <a:xfrm>
+            <a:off x="6089903" y="4059936"/>
+            <a:ext cx="1682496" cy="274320"/>
+          </a:xfrm>
+          <a:prstGeom prst="rect">
+            <a:avLst/>
+          </a:prstGeom>
+          <a:noFill/>
+        </p:spPr>
+        <p:txBody>
+          <a:bodyPr wrap="square" lIns="0" rIns="0" tIns="0" bIns="0" anchor="t">
+            <a:spAutoFit/>
+          </a:bodyPr>
+          <a:lstStyle/>
+          <a:p>
+            <a:pPr algn="l" latinLnBrk="1">
+              <a:lnSpc>
+                <a:spcPct val="95000"/>
+              </a:lnSpc>
+            </a:pPr>
+            <a:r>
+              <a:rPr sz="700" b="0">
+                <a:solidFill>
+                  <a:srgbClr val="3D3C3A"/>
+                </a:solidFill>
+                <a:latin typeface="微软雅黑"/>
+                <a:ea typeface="微软雅黑"/>
+              </a:rPr>
+              <a:t>发布正式版模型</a:t>
+            </a:r>
+          </a:p>
+        </p:txBody>
+      </p:sp>
+      <p:sp>
+        <p:nvSpPr>
+          <p:cNvPr id="163" name="tl-stdot-3-1"/>
+          <p:cNvSpPr/>
+          <p:nvPr/>
+        </p:nvSpPr>
+        <p:spPr>
+          <a:xfrm>
+            <a:off x="5989319" y="4375404"/>
+            <a:ext cx="68580" cy="68580"/>
+          </a:xfrm>
+          <a:prstGeom prst="ellipse">
+            <a:avLst/>
+          </a:prstGeom>
+          <a:solidFill>
+            <a:srgbClr val="606060"/>
+          </a:solidFill>
+          <a:ln>
+            <a:noFill/>
+          </a:ln>
+          <a:effectLst/>
+        </p:spPr>
+        <p:style>
+          <a:lnRef idx="1">
+            <a:schemeClr val="accent1"/>
+          </a:lnRef>
+          <a:fillRef idx="3">
+            <a:schemeClr val="accent1"/>
+          </a:fillRef>
+          <a:effectRef idx="2">
+            <a:schemeClr val="accent1"/>
+          </a:effectRef>
+          <a:fontRef idx="minor">
+            <a:schemeClr val="lt1"/>
+          </a:fontRef>
+        </p:style>
+        <p:txBody>
+          <a:bodyPr rtlCol="0" anchor="ctr"/>
+          <a:lstStyle/>
+          <a:p>
+            <a:pPr algn="ctr"/>
+          </a:p>
+        </p:txBody>
+      </p:sp>
+      <p:sp>
+        <p:nvSpPr>
+          <p:cNvPr id="164" name="tl-item-3-1"/>
+          <p:cNvSpPr txBox="1"/>
+          <p:nvPr/>
+        </p:nvSpPr>
+        <p:spPr>
+          <a:xfrm>
+            <a:off x="6089903" y="4334256"/>
+            <a:ext cx="1682496" cy="274320"/>
+          </a:xfrm>
+          <a:prstGeom prst="rect">
+            <a:avLst/>
+          </a:prstGeom>
+          <a:noFill/>
+        </p:spPr>
+        <p:txBody>
+          <a:bodyPr wrap="square" lIns="0" rIns="0" tIns="0" bIns="0" anchor="t">
+            <a:spAutoFit/>
+          </a:bodyPr>
+          <a:lstStyle/>
+          <a:p>
+            <a:pPr algn="l" latinLnBrk="1">
+              <a:lnSpc>
+                <a:spcPct val="95000"/>
+              </a:lnSpc>
+            </a:pPr>
+            <a:r>
+              <a:rPr sz="700" b="0">
+                <a:solidFill>
+                  <a:srgbClr val="3D3C3A"/>
+                </a:solidFill>
+                <a:latin typeface="微软雅黑"/>
+                <a:ea typeface="微软雅黑"/>
+              </a:rPr>
+              <a:t>链路调通</a:t>
+            </a:r>
+          </a:p>
+        </p:txBody>
+      </p:sp>
+      <p:sp>
+        <p:nvSpPr>
+          <p:cNvPr id="165" name="tl-dot-4"/>
+          <p:cNvSpPr/>
+          <p:nvPr/>
+        </p:nvSpPr>
+        <p:spPr>
+          <a:xfrm>
+            <a:off x="8631936" y="3771900"/>
+            <a:ext cx="137160" cy="137160"/>
+          </a:xfrm>
+          <a:prstGeom prst="ellipse">
+            <a:avLst/>
+          </a:prstGeom>
+          <a:solidFill>
+            <a:srgbClr val="1F4E79"/>
+          </a:solidFill>
+          <a:ln>
+            <a:noFill/>
+          </a:ln>
+          <a:effectLst/>
+        </p:spPr>
+        <p:style>
+          <a:lnRef idx="1">
+            <a:schemeClr val="accent1"/>
+          </a:lnRef>
+          <a:fillRef idx="3">
+            <a:schemeClr val="accent1"/>
+          </a:fillRef>
+          <a:effectRef idx="2">
+            <a:schemeClr val="accent1"/>
+          </a:effectRef>
+          <a:fontRef idx="minor">
+            <a:schemeClr val="lt1"/>
+          </a:fontRef>
+        </p:style>
+        <p:txBody>
+          <a:bodyPr rtlCol="0" anchor="ctr"/>
+          <a:lstStyle/>
+          <a:p>
+            <a:pPr algn="ctr"/>
+          </a:p>
+        </p:txBody>
+      </p:sp>
+      <p:sp>
+        <p:nvSpPr>
+          <p:cNvPr id="166" name="tl-date-4"/>
+          <p:cNvSpPr txBox="1"/>
+          <p:nvPr/>
+        </p:nvSpPr>
+        <p:spPr>
+          <a:xfrm>
+            <a:off x="7790688" y="3547872"/>
+            <a:ext cx="1819656" cy="146304"/>
+          </a:xfrm>
+          <a:prstGeom prst="rect">
+            <a:avLst/>
+          </a:prstGeom>
+          <a:noFill/>
+        </p:spPr>
+        <p:txBody>
+          <a:bodyPr wrap="square" lIns="0" rIns="0" tIns="0" bIns="0" anchor="t">
+            <a:spAutoFit/>
+          </a:bodyPr>
+          <a:lstStyle/>
+          <a:p>
+            <a:pPr algn="l" latinLnBrk="1"/>
+            <a:r>
+              <a:rPr sz="800" b="1">
+                <a:solidFill>
+                  <a:srgbClr val="1F4E79"/>
+                </a:solidFill>
+                <a:latin typeface="微软雅黑"/>
+                <a:ea typeface="微软雅黑"/>
+              </a:rPr>
+              <a:t>9月15日之前</a:t>
+            </a:r>
+          </a:p>
+        </p:txBody>
+      </p:sp>
+      <p:sp>
+        <p:nvSpPr>
+          <p:cNvPr id="167" name="tl-stdot-4-0"/>
+          <p:cNvSpPr/>
+          <p:nvPr/>
+        </p:nvSpPr>
+        <p:spPr>
+          <a:xfrm>
+            <a:off x="7808975" y="4101084"/>
+            <a:ext cx="68580" cy="68580"/>
+          </a:xfrm>
+          <a:prstGeom prst="ellipse">
+            <a:avLst/>
+          </a:prstGeom>
+          <a:solidFill>
+            <a:srgbClr val="606060"/>
+          </a:solidFill>
+          <a:ln>
+            <a:noFill/>
+          </a:ln>
+          <a:effectLst/>
+        </p:spPr>
+        <p:style>
+          <a:lnRef idx="1">
+            <a:schemeClr val="accent1"/>
+          </a:lnRef>
+          <a:fillRef idx="3">
+            <a:schemeClr val="accent1"/>
+          </a:fillRef>
+          <a:effectRef idx="2">
+            <a:schemeClr val="accent1"/>
+          </a:effectRef>
+          <a:fontRef idx="minor">
+            <a:schemeClr val="lt1"/>
+          </a:fontRef>
+        </p:style>
+        <p:txBody>
+          <a:bodyPr rtlCol="0" anchor="ctr"/>
+          <a:lstStyle/>
+          <a:p>
+            <a:pPr algn="ctr"/>
+          </a:p>
+        </p:txBody>
+      </p:sp>
+      <p:sp>
+        <p:nvSpPr>
+          <p:cNvPr id="168" name="tl-item-4-0"/>
+          <p:cNvSpPr txBox="1"/>
+          <p:nvPr/>
+        </p:nvSpPr>
+        <p:spPr>
+          <a:xfrm>
+            <a:off x="7909560" y="4059936"/>
+            <a:ext cx="1682496" cy="274320"/>
+          </a:xfrm>
+          <a:prstGeom prst="rect">
+            <a:avLst/>
+          </a:prstGeom>
+          <a:noFill/>
+        </p:spPr>
+        <p:txBody>
+          <a:bodyPr wrap="square" lIns="0" rIns="0" tIns="0" bIns="0" anchor="t">
+            <a:spAutoFit/>
+          </a:bodyPr>
+          <a:lstStyle/>
+          <a:p>
+            <a:pPr algn="l" latinLnBrk="1">
+              <a:lnSpc>
+                <a:spcPct val="95000"/>
+              </a:lnSpc>
+            </a:pPr>
+            <a:r>
+              <a:rPr sz="700" b="0">
+                <a:solidFill>
+                  <a:srgbClr val="3D3C3A"/>
+                </a:solidFill>
+                <a:latin typeface="微软雅黑"/>
+                <a:ea typeface="微软雅黑"/>
+              </a:rPr>
+              <a:t>新 S-CALC 开发完成</a:t>
+            </a:r>
+          </a:p>
+        </p:txBody>
+      </p:sp>
+      <p:sp>
+        <p:nvSpPr>
+          <p:cNvPr id="169" name="tl-stdot-4-1"/>
+          <p:cNvSpPr/>
+          <p:nvPr/>
+        </p:nvSpPr>
+        <p:spPr>
+          <a:xfrm>
+            <a:off x="7808975" y="4375404"/>
+            <a:ext cx="68580" cy="68580"/>
+          </a:xfrm>
+          <a:prstGeom prst="ellipse">
+            <a:avLst/>
+          </a:prstGeom>
+          <a:solidFill>
+            <a:srgbClr val="606060"/>
+          </a:solidFill>
+          <a:ln>
+            <a:noFill/>
+          </a:ln>
+          <a:effectLst/>
+        </p:spPr>
+        <p:style>
+          <a:lnRef idx="1">
+            <a:schemeClr val="accent1"/>
+          </a:lnRef>
+          <a:fillRef idx="3">
+            <a:schemeClr val="accent1"/>
+          </a:fillRef>
+          <a:effectRef idx="2">
+            <a:schemeClr val="accent1"/>
+          </a:effectRef>
+          <a:fontRef idx="minor">
+            <a:schemeClr val="lt1"/>
+          </a:fontRef>
+        </p:style>
+        <p:txBody>
+          <a:bodyPr rtlCol="0" anchor="ctr"/>
+          <a:lstStyle/>
+          <a:p>
+            <a:pPr algn="ctr"/>
+          </a:p>
+        </p:txBody>
+      </p:sp>
+      <p:sp>
+        <p:nvSpPr>
+          <p:cNvPr id="170" name="tl-item-4-1"/>
+          <p:cNvSpPr txBox="1"/>
+          <p:nvPr/>
+        </p:nvSpPr>
+        <p:spPr>
+          <a:xfrm>
+            <a:off x="7909560" y="4334256"/>
+            <a:ext cx="1682496" cy="274320"/>
+          </a:xfrm>
+          <a:prstGeom prst="rect">
+            <a:avLst/>
+          </a:prstGeom>
+          <a:noFill/>
+        </p:spPr>
+        <p:txBody>
+          <a:bodyPr wrap="square" lIns="0" rIns="0" tIns="0" bIns="0" anchor="t">
+            <a:spAutoFit/>
+          </a:bodyPr>
+          <a:lstStyle/>
+          <a:p>
+            <a:pPr algn="l" latinLnBrk="1">
+              <a:lnSpc>
+                <a:spcPct val="95000"/>
+              </a:lnSpc>
+            </a:pPr>
+            <a:r>
+              <a:rPr sz="700" b="0">
+                <a:solidFill>
+                  <a:srgbClr val="3D3C3A"/>
+                </a:solidFill>
+                <a:latin typeface="微软雅黑"/>
+                <a:ea typeface="微软雅黑"/>
+              </a:rPr>
+              <a:t>LMS 新页面开发完成，开 AB 前交付人审使用</a:t>
+            </a:r>
+          </a:p>
+        </p:txBody>
+      </p:sp>
+      <p:sp>
+        <p:nvSpPr>
+          <p:cNvPr id="171" name="tl-dot-5"/>
+          <p:cNvSpPr/>
+          <p:nvPr/>
+        </p:nvSpPr>
+        <p:spPr>
+          <a:xfrm>
+            <a:off x="10451592" y="3771900"/>
+            <a:ext cx="137160" cy="137160"/>
+          </a:xfrm>
+          <a:prstGeom prst="ellipse">
+            <a:avLst/>
+          </a:prstGeom>
+          <a:solidFill>
+            <a:srgbClr val="1F4E79"/>
+          </a:solidFill>
+          <a:ln>
+            <a:noFill/>
+          </a:ln>
+          <a:effectLst/>
+        </p:spPr>
+        <p:style>
+          <a:lnRef idx="1">
+            <a:schemeClr val="accent1"/>
+          </a:lnRef>
+          <a:fillRef idx="3">
+            <a:schemeClr val="accent1"/>
+          </a:fillRef>
+          <a:effectRef idx="2">
+            <a:schemeClr val="accent1"/>
+          </a:effectRef>
+          <a:fontRef idx="minor">
+            <a:schemeClr val="lt1"/>
+          </a:fontRef>
+        </p:style>
+        <p:txBody>
+          <a:bodyPr rtlCol="0" anchor="ctr"/>
+          <a:lstStyle/>
+          <a:p>
+            <a:pPr algn="ctr"/>
+          </a:p>
+        </p:txBody>
+      </p:sp>
+      <p:sp>
+        <p:nvSpPr>
+          <p:cNvPr id="172" name="tl-date-5"/>
+          <p:cNvSpPr txBox="1"/>
+          <p:nvPr/>
+        </p:nvSpPr>
+        <p:spPr>
+          <a:xfrm>
+            <a:off x="9610344" y="3547872"/>
+            <a:ext cx="1819656" cy="146304"/>
+          </a:xfrm>
+          <a:prstGeom prst="rect">
+            <a:avLst/>
+          </a:prstGeom>
+          <a:noFill/>
+        </p:spPr>
+        <p:txBody>
+          <a:bodyPr wrap="square" lIns="0" rIns="0" tIns="0" bIns="0" anchor="t">
+            <a:spAutoFit/>
+          </a:bodyPr>
+          <a:lstStyle/>
+          <a:p>
+            <a:pPr algn="l" latinLnBrk="1"/>
+            <a:r>
+              <a:rPr sz="800" b="1">
+                <a:solidFill>
+                  <a:srgbClr val="1F4E79"/>
+                </a:solidFill>
+                <a:latin typeface="微软雅黑"/>
+                <a:ea typeface="微软雅黑"/>
+              </a:rPr>
+              <a:t>S-CALC 开发完成后</a:t>
+            </a:r>
+          </a:p>
+        </p:txBody>
+      </p:sp>
+      <p:sp>
+        <p:nvSpPr>
+          <p:cNvPr id="173" name="tl-stdot-5-0"/>
+          <p:cNvSpPr/>
+          <p:nvPr/>
+        </p:nvSpPr>
+        <p:spPr>
+          <a:xfrm>
+            <a:off x="9628632" y="4101084"/>
+            <a:ext cx="68580" cy="68580"/>
+          </a:xfrm>
+          <a:prstGeom prst="ellipse">
+            <a:avLst/>
+          </a:prstGeom>
+          <a:solidFill>
+            <a:srgbClr val="606060"/>
+          </a:solidFill>
+          <a:ln>
+            <a:noFill/>
+          </a:ln>
+          <a:effectLst/>
+        </p:spPr>
+        <p:style>
+          <a:lnRef idx="1">
+            <a:schemeClr val="accent1"/>
+          </a:lnRef>
+          <a:fillRef idx="3">
+            <a:schemeClr val="accent1"/>
+          </a:fillRef>
+          <a:effectRef idx="2">
+            <a:schemeClr val="accent1"/>
+          </a:effectRef>
+          <a:fontRef idx="minor">
+            <a:schemeClr val="lt1"/>
+          </a:fontRef>
+        </p:style>
+        <p:txBody>
+          <a:bodyPr rtlCol="0" anchor="ctr"/>
+          <a:lstStyle/>
+          <a:p>
+            <a:pPr algn="ctr"/>
+          </a:p>
+        </p:txBody>
+      </p:sp>
+      <p:sp>
+        <p:nvSpPr>
+          <p:cNvPr id="174" name="tl-item-5-0"/>
+          <p:cNvSpPr txBox="1"/>
+          <p:nvPr/>
+        </p:nvSpPr>
+        <p:spPr>
+          <a:xfrm>
+            <a:off x="9729216" y="4059936"/>
+            <a:ext cx="1682496" cy="274320"/>
+          </a:xfrm>
+          <a:prstGeom prst="rect">
+            <a:avLst/>
+          </a:prstGeom>
+          <a:noFill/>
+        </p:spPr>
+        <p:txBody>
+          <a:bodyPr wrap="square" lIns="0" rIns="0" tIns="0" bIns="0" anchor="t">
+            <a:spAutoFit/>
+          </a:bodyPr>
+          <a:lstStyle/>
+          <a:p>
+            <a:pPr algn="l" latinLnBrk="1">
+              <a:lnSpc>
+                <a:spcPct val="95000"/>
+              </a:lnSpc>
+            </a:pPr>
+            <a:r>
+              <a:rPr sz="700" b="0">
+                <a:solidFill>
+                  <a:srgbClr val="3D3C3A"/>
+                </a:solidFill>
+                <a:latin typeface="微软雅黑"/>
+                <a:ea typeface="微软雅黑"/>
+              </a:rPr>
+              <a:t>开通 AB 测试</a:t>
+            </a:r>
+          </a:p>
+        </p:txBody>
+      </p:sp>
     </p:spTree>
     <p:extLst>
       <p:ext uri="{BB962C8B-B14F-4D97-AF65-F5344CB8AC3E}">

--- a/端到端流程与模型规划_单页汇报.pptx
+++ b/端到端流程与模型规划_单页汇报.pptx
@@ -4875,8 +4875,8 @@
         </p:nvSpPr>
         <p:spPr>
           <a:xfrm>
-            <a:off x="5028008" y="1394172"/>
-            <a:ext cx="896112" cy="320040"/>
+            <a:off x="5070479" y="1394172"/>
+            <a:ext cx="1236868" cy="320040"/>
           </a:xfrm>
           <a:prstGeom prst="roundRect">
             <a:avLst>
@@ -4908,7 +4908,7 @@
         </p:nvSpPr>
         <p:spPr>
           <a:xfrm>
-            <a:off x="5046296" y="1403316"/>
+            <a:off x="5246789" y="1403316"/>
             <a:ext cx="859536" cy="301752"/>
           </a:xfrm>
           <a:prstGeom prst="rect">
@@ -4972,8 +4972,8 @@
         </p:nvSpPr>
         <p:spPr>
           <a:xfrm>
-            <a:off x="6097856" y="1394172"/>
-            <a:ext cx="859536" cy="320040"/>
+            <a:off x="6633660" y="1394172"/>
+            <a:ext cx="1064698" cy="320040"/>
           </a:xfrm>
           <a:prstGeom prst="roundRect">
             <a:avLst>
@@ -5005,7 +5005,7 @@
         </p:nvSpPr>
         <p:spPr>
           <a:xfrm>
-            <a:off x="6116144" y="1403316"/>
+            <a:off x="6746342" y="1403316"/>
             <a:ext cx="822960" cy="301752"/>
           </a:xfrm>
           <a:prstGeom prst="rect">
@@ -5050,103 +5050,6 @@
                 <a:cs typeface="Microsoft YaHei" pitchFamily="34" charset="-120"/>
               </a:rPr>
               <a:t>服务能力</a:t>
-            </a:r>
-            <a:endParaRPr lang="en-US" sz="730" dirty="0"/>
-          </a:p>
-        </p:txBody>
-      </p:sp>
-      <p:sp>
-        <p:nvSpPr>
-          <p:cNvPr id="56" name="Shape 30">
-            <a:extLst>
-              <a:ext uri="{FF2B5EF4-FFF2-40B4-BE49-F238E27FC236}">
-                <a16:creationId xmlns:a16="http://schemas.microsoft.com/office/drawing/2014/main" id="{BD2AB5D6-F05F-41B7-BA9F-CBC961074025}"/>
-              </a:ext>
-            </a:extLst>
-          </p:cNvPr>
-          <p:cNvSpPr/>
-          <p:nvPr/>
-        </p:nvSpPr>
-        <p:spPr>
-          <a:xfrm>
-            <a:off x="7103696" y="1394172"/>
-            <a:ext cx="566928" cy="320040"/>
-          </a:xfrm>
-          <a:prstGeom prst="roundRect">
-            <a:avLst>
-              <a:gd name="adj" fmla="val 14286"/>
-            </a:avLst>
-          </a:prstGeom>
-          <a:solidFill>
-            <a:srgbClr val="FFF4D4"/>
-          </a:solidFill>
-          <a:ln w="7620">
-            <a:solidFill>
-              <a:srgbClr val="E5B100"/>
-            </a:solidFill>
-            <a:prstDash val="solid"/>
-          </a:ln>
-        </p:spPr>
-      </p:sp>
-      <p:sp>
-        <p:nvSpPr>
-          <p:cNvPr id="57" name="Text 31">
-            <a:extLst>
-              <a:ext uri="{FF2B5EF4-FFF2-40B4-BE49-F238E27FC236}">
-                <a16:creationId xmlns:a16="http://schemas.microsoft.com/office/drawing/2014/main" id="{EEB7C6C3-50B1-4D9B-9E32-6912B63F5E3A}"/>
-              </a:ext>
-            </a:extLst>
-          </p:cNvPr>
-          <p:cNvSpPr/>
-          <p:nvPr/>
-        </p:nvSpPr>
-        <p:spPr>
-          <a:xfrm>
-            <a:off x="7121984" y="1403316"/>
-            <a:ext cx="530352" cy="301752"/>
-          </a:xfrm>
-          <a:prstGeom prst="rect">
-            <a:avLst/>
-          </a:prstGeom>
-          <a:noFill/>
-          <a:ln/>
-        </p:spPr>
-        <p:txBody>
-          <a:bodyPr wrap="square" lIns="254" tIns="254" rIns="254" bIns="254" rtlCol="0" anchor="ctr">
-            <a:normAutofit/>
-          </a:bodyPr>
-          <a:lstStyle/>
-          <a:p>
-            <a:pPr marL="0" indent="0" algn="ctr">
-              <a:buNone/>
-            </a:pPr>
-            <a:r>
-              <a:rPr lang="en-US" sz="730" b="1" dirty="0">
-                <a:solidFill>
-                  <a:srgbClr val="111111"/>
-                </a:solidFill>
-                <a:latin typeface="Microsoft YaHei" pitchFamily="34" charset="0"/>
-                <a:ea typeface="Microsoft YaHei" pitchFamily="34" charset="-122"/>
-                <a:cs typeface="Microsoft YaHei" pitchFamily="34" charset="-120"/>
-              </a:rPr>
-              <a:t>GenAI</a:t>
-            </a:r>
-            <a:endParaRPr lang="en-US" sz="730" dirty="0"/>
-          </a:p>
-          <a:p>
-            <a:pPr marL="0" indent="0" algn="ctr">
-              <a:buNone/>
-            </a:pPr>
-            <a:r>
-              <a:rPr lang="en-US" sz="730" b="1" dirty="0">
-                <a:solidFill>
-                  <a:srgbClr val="111111"/>
-                </a:solidFill>
-                <a:latin typeface="Microsoft YaHei" pitchFamily="34" charset="0"/>
-                <a:ea typeface="Microsoft YaHei" pitchFamily="34" charset="-122"/>
-                <a:cs typeface="Microsoft YaHei" pitchFamily="34" charset="-120"/>
-              </a:rPr>
-              <a:t>辅助推理</a:t>
             </a:r>
             <a:endParaRPr lang="en-US" sz="730" dirty="0"/>
           </a:p>
@@ -5197,39 +5100,8 @@
         </p:nvSpPr>
         <p:spPr>
           <a:xfrm>
-            <a:off x="5924120" y="1549620"/>
+            <a:off x="6392779" y="1558764"/>
             <a:ext cx="155448" cy="0"/>
-          </a:xfrm>
-          <a:prstGeom prst="line">
-            <a:avLst/>
-          </a:prstGeom>
-          <a:noFill/>
-          <a:ln w="10160">
-            <a:solidFill>
-              <a:srgbClr val="A7A7A7"/>
-            </a:solidFill>
-            <a:prstDash val="solid"/>
-            <a:headEnd type="none"/>
-            <a:tailEnd type="triangle"/>
-          </a:ln>
-        </p:spPr>
-      </p:sp>
-      <p:sp>
-        <p:nvSpPr>
-          <p:cNvPr id="68" name="Shape 34">
-            <a:extLst>
-              <a:ext uri="{FF2B5EF4-FFF2-40B4-BE49-F238E27FC236}">
-                <a16:creationId xmlns:a16="http://schemas.microsoft.com/office/drawing/2014/main" id="{BBE0A87F-A2F5-4FF8-8DC5-F2893CFF889E}"/>
-              </a:ext>
-            </a:extLst>
-          </p:cNvPr>
-          <p:cNvSpPr/>
-          <p:nvPr/>
-        </p:nvSpPr>
-        <p:spPr>
-          <a:xfrm>
-            <a:off x="6957392" y="1549620"/>
-            <a:ext cx="128016" cy="0"/>
           </a:xfrm>
           <a:prstGeom prst="line">
             <a:avLst/>
@@ -5772,7 +5644,7 @@
         </p:nvSpPr>
         <p:spPr>
           <a:xfrm>
-            <a:off x="475488" y="2733460"/>
+            <a:off x="410288" y="2639910"/>
             <a:ext cx="64008" cy="201168"/>
           </a:xfrm>
           <a:prstGeom prst="rect">
@@ -5805,7 +5677,7 @@
         </p:nvSpPr>
         <p:spPr>
           <a:xfrm>
-            <a:off x="603504" y="2715172"/>
+            <a:off x="538304" y="2621622"/>
             <a:ext cx="5449824" cy="237744"/>
           </a:xfrm>
           <a:prstGeom prst="rect">
@@ -6190,15 +6062,42 @@
           <a:p>
             <a:pPr algn="l" latinLnBrk="1"/>
             <a:r>
-              <a:rPr sz="700" b="0">
+              <a:rPr sz="800" b="0" dirty="0" err="1">
                 <a:solidFill>
                   <a:srgbClr val="3D3C3A"/>
                 </a:solidFill>
                 <a:latin typeface="微软雅黑"/>
                 <a:ea typeface="微软雅黑"/>
               </a:rPr>
-              <a:t>分类分布与命中率、数据/分类漂移；对手方识别异常、关键字段缺失</a:t>
-            </a:r>
+              <a:t>分类分布与命中率、数据</a:t>
+            </a:r>
+            <a:r>
+              <a:rPr sz="800" b="0" dirty="0">
+                <a:solidFill>
+                  <a:srgbClr val="3D3C3A"/>
+                </a:solidFill>
+                <a:latin typeface="微软雅黑"/>
+                <a:ea typeface="微软雅黑"/>
+              </a:rPr>
+              <a:t>/</a:t>
+            </a:r>
+            <a:r>
+              <a:rPr sz="800" b="0" dirty="0" err="1">
+                <a:solidFill>
+                  <a:srgbClr val="3D3C3A"/>
+                </a:solidFill>
+                <a:latin typeface="微软雅黑"/>
+                <a:ea typeface="微软雅黑"/>
+              </a:rPr>
+              <a:t>分类漂移；对手方识别异常、关键字段缺失</a:t>
+            </a:r>
+            <a:endParaRPr sz="800" b="0" dirty="0">
+              <a:solidFill>
+                <a:srgbClr val="3D3C3A"/>
+              </a:solidFill>
+              <a:latin typeface="微软雅黑"/>
+              <a:ea typeface="微软雅黑"/>
+            </a:endParaRPr>
           </a:p>
         </p:txBody>
       </p:sp>
@@ -6216,7 +6115,7 @@
         </p:nvSpPr>
         <p:spPr>
           <a:xfrm>
-            <a:off x="710847" y="6111240"/>
+            <a:off x="710847" y="6148308"/>
             <a:ext cx="5650992" cy="123111"/>
           </a:xfrm>
           <a:prstGeom prst="rect">
@@ -6275,7 +6174,7 @@
         </p:nvSpPr>
         <p:spPr>
           <a:xfrm>
-            <a:off x="884583" y="6266688"/>
+            <a:off x="884583" y="6303756"/>
             <a:ext cx="5504688" cy="128016"/>
           </a:xfrm>
           <a:prstGeom prst="rect">
@@ -6291,7 +6190,7 @@
           <a:p>
             <a:pPr algn="l" latinLnBrk="1"/>
             <a:r>
-              <a:rPr sz="700" b="0" dirty="0" err="1">
+              <a:rPr sz="800" b="0" dirty="0" err="1">
                 <a:solidFill>
                   <a:srgbClr val="3D3C3A"/>
                 </a:solidFill>
@@ -6301,7 +6200,7 @@
               <a:t>定位异常交易与问题引擎，识别缺失商户</a:t>
             </a:r>
             <a:r>
-              <a:rPr sz="700" b="0" dirty="0">
+              <a:rPr sz="800" b="0" dirty="0">
                 <a:solidFill>
                   <a:srgbClr val="3D3C3A"/>
                 </a:solidFill>
@@ -6311,7 +6210,7 @@
               <a:t>/</a:t>
             </a:r>
             <a:r>
-              <a:rPr sz="700" b="0" dirty="0" err="1">
+              <a:rPr sz="800" b="0" dirty="0" err="1">
                 <a:solidFill>
                   <a:srgbClr val="3D3C3A"/>
                 </a:solidFill>
@@ -6321,7 +6220,7 @@
               <a:t>关键词</a:t>
             </a:r>
             <a:r>
-              <a:rPr sz="700" b="0" dirty="0">
+              <a:rPr sz="800" b="0" dirty="0">
                 <a:solidFill>
                   <a:srgbClr val="3D3C3A"/>
                 </a:solidFill>
@@ -6331,7 +6230,7 @@
               <a:t>/</a:t>
             </a:r>
             <a:r>
-              <a:rPr sz="700" b="0" dirty="0" err="1">
+              <a:rPr sz="800" b="0" dirty="0" err="1">
                 <a:solidFill>
                   <a:srgbClr val="3D3C3A"/>
                 </a:solidFill>
@@ -6341,7 +6240,7 @@
               <a:t>规则；自动生成优先级</a:t>
             </a:r>
             <a:r>
-              <a:rPr sz="700" b="0" dirty="0">
+              <a:rPr sz="800" b="0" dirty="0">
                 <a:solidFill>
                   <a:srgbClr val="3D3C3A"/>
                 </a:solidFill>
@@ -6351,7 +6250,7 @@
               <a:t> </a:t>
             </a:r>
             <a:r>
-              <a:rPr sz="700" b="0" dirty="0" err="1">
+              <a:rPr sz="800" b="0" dirty="0" err="1">
                 <a:solidFill>
                   <a:srgbClr val="3D3C3A"/>
                 </a:solidFill>
@@ -6361,7 +6260,7 @@
               <a:t>Todo</a:t>
             </a:r>
             <a:r>
-              <a:rPr sz="700" b="0" dirty="0">
+              <a:rPr sz="800" b="0" dirty="0">
                 <a:solidFill>
                   <a:srgbClr val="3D3C3A"/>
                 </a:solidFill>
@@ -6371,7 +6270,7 @@
               <a:t> </a:t>
             </a:r>
             <a:r>
-              <a:rPr sz="700" b="0" dirty="0" err="1">
+              <a:rPr sz="800" b="0" dirty="0" err="1">
                 <a:solidFill>
                   <a:srgbClr val="3D3C3A"/>
                 </a:solidFill>
@@ -6380,7 +6279,7 @@
               </a:rPr>
               <a:t>清单</a:t>
             </a:r>
-            <a:endParaRPr sz="700" b="0" dirty="0">
+            <a:endParaRPr sz="800" b="0" dirty="0">
               <a:solidFill>
                 <a:srgbClr val="3D3C3A"/>
               </a:solidFill>
@@ -6655,15 +6554,42 @@
             <a:p>
               <a:pPr algn="l" latinLnBrk="1"/>
               <a:r>
-                <a:rPr sz="700" b="0">
+                <a:rPr sz="800" b="0" dirty="0" err="1">
                   <a:solidFill>
                     <a:srgbClr val="3D3C3A"/>
                   </a:solidFill>
                   <a:latin typeface="微软雅黑"/>
                   <a:ea typeface="微软雅黑"/>
                 </a:rPr>
-                <a:t>检索未知商户/对手方，补充企业、品牌、关键词与分类信息，识别新增业务实体</a:t>
+                <a:t>检索未知商户</a:t>
               </a:r>
+              <a:r>
+                <a:rPr sz="800" b="0" dirty="0">
+                  <a:solidFill>
+                    <a:srgbClr val="3D3C3A"/>
+                  </a:solidFill>
+                  <a:latin typeface="微软雅黑"/>
+                  <a:ea typeface="微软雅黑"/>
+                </a:rPr>
+                <a:t>/</a:t>
+              </a:r>
+              <a:r>
+                <a:rPr sz="800" b="0" dirty="0" err="1">
+                  <a:solidFill>
+                    <a:srgbClr val="3D3C3A"/>
+                  </a:solidFill>
+                  <a:latin typeface="微软雅黑"/>
+                  <a:ea typeface="微软雅黑"/>
+                </a:rPr>
+                <a:t>对手方，补充企业、品牌、关键词与分类信息，识别新增业务实体</a:t>
+              </a:r>
+              <a:endParaRPr sz="800" b="0" dirty="0">
+                <a:solidFill>
+                  <a:srgbClr val="3D3C3A"/>
+                </a:solidFill>
+                <a:latin typeface="微软雅黑"/>
+                <a:ea typeface="微软雅黑"/>
+              </a:endParaRPr>
             </a:p>
           </p:txBody>
         </p:sp>
@@ -6741,7 +6667,7 @@
           <p:spPr>
             <a:xfrm>
               <a:off x="6534779" y="5564919"/>
-              <a:ext cx="5504688" cy="107722"/>
+              <a:ext cx="5504688" cy="123111"/>
             </a:xfrm>
             <a:prstGeom prst="rect">
               <a:avLst/>
@@ -6756,7 +6682,7 @@
             <a:p>
               <a:pPr algn="l" latinLnBrk="1"/>
               <a:r>
-                <a:rPr sz="700" b="0" dirty="0" err="1">
+                <a:rPr sz="800" b="0" dirty="0" err="1">
                   <a:solidFill>
                     <a:srgbClr val="3D3C3A"/>
                   </a:solidFill>
@@ -6766,7 +6692,7 @@
                 <a:t>自动生成新增</a:t>
               </a:r>
               <a:r>
-                <a:rPr sz="700" b="0" dirty="0">
+                <a:rPr sz="800" b="0" dirty="0">
                   <a:solidFill>
                     <a:srgbClr val="3D3C3A"/>
                   </a:solidFill>
@@ -6776,7 +6702,7 @@
                 <a:t>/</a:t>
               </a:r>
               <a:r>
-                <a:rPr sz="700" b="0" dirty="0" err="1">
+                <a:rPr sz="800" b="0" dirty="0" err="1">
                   <a:solidFill>
                     <a:srgbClr val="3D3C3A"/>
                   </a:solidFill>
@@ -6786,7 +6712,7 @@
                 <a:t>修改</a:t>
               </a:r>
               <a:r>
-                <a:rPr lang="zh-CN" altLang="en-US" sz="700" dirty="0">
+                <a:rPr lang="zh-CN" altLang="en-US" sz="800" dirty="0">
                   <a:solidFill>
                     <a:srgbClr val="3D3C3A"/>
                   </a:solidFill>
@@ -6796,7 +6722,7 @@
                 <a:t>知识库</a:t>
               </a:r>
               <a:r>
-                <a:rPr sz="700" b="0" dirty="0" err="1">
+                <a:rPr sz="800" b="0" dirty="0" err="1">
                   <a:solidFill>
                     <a:srgbClr val="3D3C3A"/>
                   </a:solidFill>
@@ -6805,7 +6731,7 @@
                 </a:rPr>
                 <a:t>建议，人工审核后进入正式知识库，持续沉淀规则与案例</a:t>
               </a:r>
-              <a:endParaRPr sz="700" b="0" dirty="0">
+              <a:endParaRPr sz="800" b="0" dirty="0">
                 <a:solidFill>
                   <a:srgbClr val="3D3C3A"/>
                 </a:solidFill>
@@ -6863,7 +6789,7 @@
         </p:nvSpPr>
         <p:spPr>
           <a:xfrm>
-            <a:off x="620600" y="2218358"/>
+            <a:off x="620600" y="2249248"/>
             <a:ext cx="10661904" cy="155448"/>
           </a:xfrm>
           <a:prstGeom prst="rect">
@@ -7009,7 +6935,7 @@
         </p:nvSpPr>
         <p:spPr>
           <a:xfrm>
-            <a:off x="658368" y="3830421"/>
+            <a:off x="694135" y="3497747"/>
             <a:ext cx="10698480" cy="20116"/>
           </a:xfrm>
           <a:prstGeom prst="rect">
@@ -7060,7 +6986,7 @@
         </p:nvSpPr>
         <p:spPr>
           <a:xfrm>
-            <a:off x="1353312" y="3771900"/>
+            <a:off x="1389079" y="3439226"/>
             <a:ext cx="137160" cy="137160"/>
           </a:xfrm>
           <a:prstGeom prst="ellipse">
@@ -7111,8 +7037,8 @@
         </p:nvSpPr>
         <p:spPr>
           <a:xfrm>
-            <a:off x="512064" y="3547872"/>
-            <a:ext cx="1819656" cy="146304"/>
+            <a:off x="1270701" y="3172844"/>
+            <a:ext cx="602428" cy="123111"/>
           </a:xfrm>
           <a:prstGeom prst="rect">
             <a:avLst/>
@@ -7127,24 +7053,194 @@
           <a:p>
             <a:pPr algn="l" latinLnBrk="1"/>
             <a:r>
-              <a:rPr sz="800" b="1">
+              <a:rPr sz="800" b="1" dirty="0">
                 <a:solidFill>
                   <a:srgbClr val="1F4E79"/>
                 </a:solidFill>
                 <a:latin typeface="微软雅黑"/>
                 <a:ea typeface="微软雅黑"/>
               </a:rPr>
-              <a:t>8月9日</a:t>
-            </a:r>
-          </a:p>
-        </p:txBody>
-      </p:sp>
-      <p:sp>
-        <p:nvSpPr>
-          <p:cNvPr id="116" name="tl-stdot-0-0">
-            <a:extLst>
-              <a:ext uri="{FF2B5EF4-FFF2-40B4-BE49-F238E27FC236}">
-                <a16:creationId xmlns:a16="http://schemas.microsoft.com/office/drawing/2014/main" id="{2B3F0F8B-7396-43CE-8EA4-ACB27866CB22}"/>
+              <a:t>8月</a:t>
+            </a:r>
+            <a:r>
+              <a:rPr lang="en-US" sz="800" b="1" dirty="0">
+                <a:solidFill>
+                  <a:srgbClr val="1F4E79"/>
+                </a:solidFill>
+                <a:latin typeface="微软雅黑"/>
+                <a:ea typeface="微软雅黑"/>
+              </a:rPr>
+              <a:t>11</a:t>
+            </a:r>
+            <a:r>
+              <a:rPr sz="800" b="1" dirty="0">
+                <a:solidFill>
+                  <a:srgbClr val="1F4E79"/>
+                </a:solidFill>
+                <a:latin typeface="微软雅黑"/>
+                <a:ea typeface="微软雅黑"/>
+              </a:rPr>
+              <a:t>日</a:t>
+            </a:r>
+          </a:p>
+        </p:txBody>
+      </p:sp>
+      <p:sp>
+        <p:nvSpPr>
+          <p:cNvPr id="117" name="tl-item-0-0">
+            <a:extLst>
+              <a:ext uri="{FF2B5EF4-FFF2-40B4-BE49-F238E27FC236}">
+                <a16:creationId xmlns:a16="http://schemas.microsoft.com/office/drawing/2014/main" id="{FF2763C1-5CC2-427B-8DBB-A63FFE053BA4}"/>
+              </a:ext>
+            </a:extLst>
+          </p:cNvPr>
+          <p:cNvSpPr txBox="1"/>
+          <p:nvPr/>
+        </p:nvSpPr>
+        <p:spPr>
+          <a:xfrm>
+            <a:off x="637787" y="3796890"/>
+            <a:ext cx="1682496" cy="409343"/>
+          </a:xfrm>
+          <a:prstGeom prst="rect">
+            <a:avLst/>
+          </a:prstGeom>
+          <a:noFill/>
+        </p:spPr>
+        <p:txBody>
+          <a:bodyPr wrap="square" lIns="0" tIns="0" rIns="0" bIns="0" anchor="t">
+            <a:spAutoFit/>
+          </a:bodyPr>
+          <a:lstStyle/>
+          <a:p>
+            <a:pPr marL="228600" indent="-228600" algn="l" latinLnBrk="1">
+              <a:lnSpc>
+                <a:spcPct val="95000"/>
+              </a:lnSpc>
+              <a:buFont typeface="+mj-lt"/>
+              <a:buAutoNum type="arabicPeriod"/>
+            </a:pPr>
+            <a:r>
+              <a:rPr sz="700" b="0" dirty="0">
+                <a:solidFill>
+                  <a:srgbClr val="3D3C3A"/>
+                </a:solidFill>
+                <a:latin typeface="微软雅黑"/>
+                <a:ea typeface="微软雅黑"/>
+              </a:rPr>
+              <a:t>943 </a:t>
+            </a:r>
+            <a:r>
+              <a:rPr sz="700" b="0" dirty="0" err="1">
+                <a:solidFill>
+                  <a:srgbClr val="3D3C3A"/>
+                </a:solidFill>
+                <a:latin typeface="微软雅黑"/>
+                <a:ea typeface="微软雅黑"/>
+              </a:rPr>
+              <a:t>模型平台</a:t>
+            </a:r>
+            <a:r>
+              <a:rPr sz="700" b="0" dirty="0">
+                <a:solidFill>
+                  <a:srgbClr val="3D3C3A"/>
+                </a:solidFill>
+                <a:latin typeface="微软雅黑"/>
+                <a:ea typeface="微软雅黑"/>
+              </a:rPr>
+              <a:t> preview </a:t>
+            </a:r>
+            <a:r>
+              <a:rPr sz="700" b="0" dirty="0" err="1">
+                <a:solidFill>
+                  <a:srgbClr val="3D3C3A"/>
+                </a:solidFill>
+                <a:latin typeface="微软雅黑"/>
+                <a:ea typeface="微软雅黑"/>
+              </a:rPr>
+              <a:t>版本完成部署，开放模型输出接口</a:t>
+            </a:r>
+            <a:endParaRPr lang="en-US" sz="700" b="0" dirty="0">
+              <a:solidFill>
+                <a:srgbClr val="3D3C3A"/>
+              </a:solidFill>
+              <a:latin typeface="微软雅黑"/>
+              <a:ea typeface="微软雅黑"/>
+            </a:endParaRPr>
+          </a:p>
+          <a:p>
+            <a:pPr marL="228600" indent="-228600" algn="l" latinLnBrk="1">
+              <a:lnSpc>
+                <a:spcPct val="95000"/>
+              </a:lnSpc>
+              <a:buFont typeface="+mj-lt"/>
+              <a:buAutoNum type="arabicPeriod"/>
+            </a:pPr>
+            <a:r>
+              <a:rPr lang="zh-CN" altLang="en-US" sz="700" dirty="0">
+                <a:solidFill>
+                  <a:srgbClr val="3D3C3A"/>
+                </a:solidFill>
+                <a:latin typeface="微软雅黑"/>
+                <a:ea typeface="微软雅黑"/>
+              </a:rPr>
+              <a:t>发布</a:t>
+            </a:r>
+            <a:r>
+              <a:rPr lang="en-US" altLang="zh-CN" sz="700" dirty="0">
+                <a:solidFill>
+                  <a:srgbClr val="3D3C3A"/>
+                </a:solidFill>
+                <a:latin typeface="微软雅黑"/>
+                <a:ea typeface="微软雅黑"/>
+              </a:rPr>
+              <a:t>liability </a:t>
+            </a:r>
+            <a:r>
+              <a:rPr lang="zh-CN" altLang="en-US" sz="700" dirty="0">
+                <a:solidFill>
+                  <a:srgbClr val="3D3C3A"/>
+                </a:solidFill>
+                <a:latin typeface="微软雅黑"/>
+                <a:ea typeface="微软雅黑"/>
+              </a:rPr>
+              <a:t>识别报告</a:t>
+            </a:r>
+            <a:endParaRPr lang="en-US" sz="700" b="0" dirty="0">
+              <a:solidFill>
+                <a:srgbClr val="3D3C3A"/>
+              </a:solidFill>
+              <a:latin typeface="微软雅黑"/>
+              <a:ea typeface="微软雅黑"/>
+            </a:endParaRPr>
+          </a:p>
+          <a:p>
+            <a:pPr marL="228600" indent="-228600" latinLnBrk="1">
+              <a:lnSpc>
+                <a:spcPct val="95000"/>
+              </a:lnSpc>
+              <a:buFont typeface="+mj-lt"/>
+              <a:buAutoNum type="arabicPeriod"/>
+            </a:pPr>
+            <a:r>
+              <a:rPr lang="zh-CN" altLang="en-US" sz="700" b="0" dirty="0">
+                <a:solidFill>
+                  <a:srgbClr val="3D3C3A"/>
+                </a:solidFill>
+                <a:latin typeface="微软雅黑"/>
+                <a:ea typeface="微软雅黑"/>
+              </a:rPr>
+              <a:t>下游平台开始模型调用链路开发</a:t>
+            </a:r>
+          </a:p>
+        </p:txBody>
+      </p:sp>
+      <p:sp>
+        <p:nvSpPr>
+          <p:cNvPr id="120" name="tl-dot-1">
+            <a:extLst>
+              <a:ext uri="{FF2B5EF4-FFF2-40B4-BE49-F238E27FC236}">
+                <a16:creationId xmlns:a16="http://schemas.microsoft.com/office/drawing/2014/main" id="{B4E6BFA3-3126-485B-B8F8-B80EFA23EF6B}"/>
               </a:ext>
             </a:extLst>
           </p:cNvPr>
@@ -7153,8 +7249,8 @@
         </p:nvSpPr>
         <p:spPr>
           <a:xfrm>
-            <a:off x="530352" y="4101084"/>
-            <a:ext cx="68580" cy="68580"/>
+            <a:off x="3208735" y="3439226"/>
+            <a:ext cx="137160" cy="137160"/>
           </a:xfrm>
           <a:prstGeom prst="ellipse">
             <a:avLst/>
@@ -7192,10 +7288,10 @@
       </p:sp>
       <p:sp>
         <p:nvSpPr>
-          <p:cNvPr id="117" name="tl-item-0-0">
-            <a:extLst>
-              <a:ext uri="{FF2B5EF4-FFF2-40B4-BE49-F238E27FC236}">
-                <a16:creationId xmlns:a16="http://schemas.microsoft.com/office/drawing/2014/main" id="{FF2763C1-5CC2-427B-8DBB-A63FFE053BA4}"/>
+          <p:cNvPr id="121" name="tl-date-1">
+            <a:extLst>
+              <a:ext uri="{FF2B5EF4-FFF2-40B4-BE49-F238E27FC236}">
+                <a16:creationId xmlns:a16="http://schemas.microsoft.com/office/drawing/2014/main" id="{C764ADD4-2E15-49E6-8D1D-625DE9E814D3}"/>
               </a:ext>
             </a:extLst>
           </p:cNvPr>
@@ -7204,8 +7300,8 @@
         </p:nvSpPr>
         <p:spPr>
           <a:xfrm>
-            <a:off x="630936" y="4059936"/>
-            <a:ext cx="1682496" cy="274320"/>
+            <a:off x="3146664" y="3172274"/>
+            <a:ext cx="326669" cy="123111"/>
           </a:xfrm>
           <a:prstGeom prst="rect">
             <a:avLst/>
@@ -7218,30 +7314,255 @@
           </a:bodyPr>
           <a:lstStyle/>
           <a:p>
-            <a:pPr algn="l" latinLnBrk="1">
+            <a:pPr algn="l" latinLnBrk="1"/>
+            <a:r>
+              <a:rPr sz="800" b="1" dirty="0" err="1">
+                <a:solidFill>
+                  <a:srgbClr val="1F4E79"/>
+                </a:solidFill>
+                <a:latin typeface="微软雅黑"/>
+                <a:ea typeface="微软雅黑"/>
+              </a:rPr>
+              <a:t>当前</a:t>
+            </a:r>
+            <a:endParaRPr sz="800" b="1" dirty="0">
+              <a:solidFill>
+                <a:srgbClr val="1F4E79"/>
+              </a:solidFill>
+              <a:latin typeface="微软雅黑"/>
+              <a:ea typeface="微软雅黑"/>
+            </a:endParaRPr>
+          </a:p>
+        </p:txBody>
+      </p:sp>
+      <p:sp>
+        <p:nvSpPr>
+          <p:cNvPr id="123" name="tl-item-1-0">
+            <a:extLst>
+              <a:ext uri="{FF2B5EF4-FFF2-40B4-BE49-F238E27FC236}">
+                <a16:creationId xmlns:a16="http://schemas.microsoft.com/office/drawing/2014/main" id="{FE9A30E7-7C29-41F7-AD94-DCC110E9E858}"/>
+              </a:ext>
+            </a:extLst>
+          </p:cNvPr>
+          <p:cNvSpPr txBox="1"/>
+          <p:nvPr/>
+        </p:nvSpPr>
+        <p:spPr>
+          <a:xfrm>
+            <a:off x="2504647" y="3795453"/>
+            <a:ext cx="1682496" cy="511679"/>
+          </a:xfrm>
+          <a:prstGeom prst="rect">
+            <a:avLst/>
+          </a:prstGeom>
+          <a:noFill/>
+        </p:spPr>
+        <p:txBody>
+          <a:bodyPr wrap="square" lIns="0" tIns="0" rIns="0" bIns="0" anchor="t">
+            <a:spAutoFit/>
+          </a:bodyPr>
+          <a:lstStyle/>
+          <a:p>
+            <a:pPr marL="228600" indent="-228600" algn="l" latinLnBrk="1">
               <a:lnSpc>
                 <a:spcPct val="95000"/>
               </a:lnSpc>
+              <a:buFont typeface="+mj-lt"/>
+              <a:buAutoNum type="arabicPeriod"/>
             </a:pPr>
             <a:r>
-              <a:rPr sz="700" b="0">
+              <a:rPr sz="700" b="0" dirty="0" err="1">
                 <a:solidFill>
                   <a:srgbClr val="3D3C3A"/>
                 </a:solidFill>
                 <a:latin typeface="微软雅黑"/>
                 <a:ea typeface="微软雅黑"/>
               </a:rPr>
-              <a:t>943 模型平台 preview 版本完成部署，开放模型输出接口</a:t>
-            </a:r>
-          </a:p>
-        </p:txBody>
-      </p:sp>
-      <p:sp>
-        <p:nvSpPr>
-          <p:cNvPr id="118" name="tl-stdot-0-1">
-            <a:extLst>
-              <a:ext uri="{FF2B5EF4-FFF2-40B4-BE49-F238E27FC236}">
-                <a16:creationId xmlns:a16="http://schemas.microsoft.com/office/drawing/2014/main" id="{5CBBA2FD-7CF6-4DB0-B2CA-50B20B7BCE80}"/>
+              <a:t>负债</a:t>
+            </a:r>
+            <a:r>
+              <a:rPr sz="700" b="0" dirty="0">
+                <a:solidFill>
+                  <a:srgbClr val="3D3C3A"/>
+                </a:solidFill>
+                <a:latin typeface="微软雅黑"/>
+                <a:ea typeface="微软雅黑"/>
+              </a:rPr>
+              <a:t> / </a:t>
+            </a:r>
+            <a:r>
+              <a:rPr sz="700" b="0" dirty="0" err="1">
+                <a:solidFill>
+                  <a:srgbClr val="3D3C3A"/>
+                </a:solidFill>
+                <a:latin typeface="微软雅黑"/>
+                <a:ea typeface="微软雅黑"/>
+              </a:rPr>
+              <a:t>收入类知识库基本初始化完成</a:t>
+            </a:r>
+            <a:endParaRPr lang="en-US" sz="700" b="0" dirty="0">
+              <a:solidFill>
+                <a:srgbClr val="3D3C3A"/>
+              </a:solidFill>
+              <a:latin typeface="微软雅黑"/>
+              <a:ea typeface="微软雅黑"/>
+            </a:endParaRPr>
+          </a:p>
+          <a:p>
+            <a:pPr marL="228600" indent="-228600" algn="l" latinLnBrk="1">
+              <a:lnSpc>
+                <a:spcPct val="95000"/>
+              </a:lnSpc>
+              <a:buFont typeface="+mj-lt"/>
+              <a:buAutoNum type="arabicPeriod"/>
+            </a:pPr>
+            <a:r>
+              <a:rPr lang="zh-CN" altLang="en-US" sz="700" b="0" dirty="0">
+                <a:solidFill>
+                  <a:srgbClr val="3D3C3A"/>
+                </a:solidFill>
+                <a:latin typeface="微软雅黑"/>
+                <a:ea typeface="微软雅黑"/>
+              </a:rPr>
+              <a:t>消费类知识库建设中</a:t>
+            </a:r>
+            <a:endParaRPr lang="en-US" altLang="zh-CN" sz="700" b="0" dirty="0">
+              <a:solidFill>
+                <a:srgbClr val="3D3C3A"/>
+              </a:solidFill>
+              <a:latin typeface="微软雅黑"/>
+              <a:ea typeface="微软雅黑"/>
+            </a:endParaRPr>
+          </a:p>
+          <a:p>
+            <a:pPr marL="228600" indent="-228600" latinLnBrk="1">
+              <a:lnSpc>
+                <a:spcPct val="95000"/>
+              </a:lnSpc>
+              <a:buFont typeface="+mj-lt"/>
+              <a:buAutoNum type="arabicPeriod"/>
+            </a:pPr>
+            <a:r>
+              <a:rPr lang="zh-CN" altLang="en-US" sz="700" b="0" dirty="0">
+                <a:solidFill>
+                  <a:srgbClr val="3D3C3A"/>
+                </a:solidFill>
+                <a:latin typeface="微软雅黑"/>
+                <a:ea typeface="微软雅黑"/>
+              </a:rPr>
+              <a:t>新 </a:t>
+            </a:r>
+            <a:r>
+              <a:rPr lang="en-US" altLang="zh-CN" sz="700" b="0" dirty="0">
+                <a:solidFill>
+                  <a:srgbClr val="3D3C3A"/>
+                </a:solidFill>
+                <a:latin typeface="微软雅黑"/>
+                <a:ea typeface="微软雅黑"/>
+              </a:rPr>
+              <a:t>S-CALC </a:t>
+            </a:r>
+            <a:r>
+              <a:rPr lang="zh-CN" altLang="en-US" sz="700" dirty="0">
+                <a:solidFill>
+                  <a:srgbClr val="3D3C3A"/>
+                </a:solidFill>
+                <a:latin typeface="微软雅黑"/>
+                <a:ea typeface="微软雅黑"/>
+              </a:rPr>
+              <a:t>开始开发</a:t>
+            </a:r>
+            <a:endParaRPr lang="en-US" altLang="zh-CN" sz="700" dirty="0">
+              <a:solidFill>
+                <a:srgbClr val="3D3C3A"/>
+              </a:solidFill>
+              <a:latin typeface="微软雅黑"/>
+              <a:ea typeface="微软雅黑"/>
+            </a:endParaRPr>
+          </a:p>
+          <a:p>
+            <a:pPr marL="228600" indent="-228600" latinLnBrk="1">
+              <a:lnSpc>
+                <a:spcPct val="95000"/>
+              </a:lnSpc>
+              <a:buFont typeface="+mj-lt"/>
+              <a:buAutoNum type="arabicPeriod"/>
+            </a:pPr>
+            <a:r>
+              <a:rPr lang="zh-CN" altLang="en-US" sz="700" b="0" dirty="0">
+                <a:solidFill>
+                  <a:srgbClr val="3D3C3A"/>
+                </a:solidFill>
+                <a:latin typeface="微软雅黑"/>
+                <a:ea typeface="微软雅黑"/>
+              </a:rPr>
+              <a:t>开通新旧</a:t>
+            </a:r>
+            <a:r>
+              <a:rPr lang="en-US" altLang="zh-CN" sz="700" b="0" dirty="0">
+                <a:solidFill>
+                  <a:srgbClr val="3D3C3A"/>
+                </a:solidFill>
+                <a:latin typeface="微软雅黑"/>
+                <a:ea typeface="微软雅黑"/>
+              </a:rPr>
+              <a:t>IDP</a:t>
+            </a:r>
+            <a:r>
+              <a:rPr lang="zh-CN" altLang="en-US" sz="700" b="0" dirty="0">
+                <a:solidFill>
+                  <a:srgbClr val="3D3C3A"/>
+                </a:solidFill>
+                <a:latin typeface="微软雅黑"/>
+                <a:ea typeface="微软雅黑"/>
+              </a:rPr>
+              <a:t>链路 </a:t>
+            </a:r>
+            <a:r>
+              <a:rPr lang="en-US" altLang="zh-CN" sz="700" b="0" dirty="0">
+                <a:solidFill>
+                  <a:srgbClr val="3D3C3A"/>
+                </a:solidFill>
+                <a:latin typeface="微软雅黑"/>
+                <a:ea typeface="微软雅黑"/>
+              </a:rPr>
+              <a:t>AB </a:t>
+            </a:r>
+            <a:r>
+              <a:rPr lang="zh-CN" altLang="en-US" sz="700" b="0" dirty="0">
+                <a:solidFill>
+                  <a:srgbClr val="3D3C3A"/>
+                </a:solidFill>
+                <a:latin typeface="微软雅黑"/>
+                <a:ea typeface="微软雅黑"/>
+              </a:rPr>
+              <a:t>测试</a:t>
+            </a:r>
+          </a:p>
+          <a:p>
+            <a:pPr marL="228600" indent="-228600" algn="l" latinLnBrk="1">
+              <a:lnSpc>
+                <a:spcPct val="95000"/>
+              </a:lnSpc>
+              <a:buFont typeface="+mj-lt"/>
+              <a:buAutoNum type="arabicPeriod"/>
+            </a:pPr>
+            <a:endParaRPr sz="700" b="0" dirty="0">
+              <a:solidFill>
+                <a:srgbClr val="3D3C3A"/>
+              </a:solidFill>
+              <a:latin typeface="微软雅黑"/>
+              <a:ea typeface="微软雅黑"/>
+            </a:endParaRPr>
+          </a:p>
+        </p:txBody>
+      </p:sp>
+      <p:sp>
+        <p:nvSpPr>
+          <p:cNvPr id="126" name="tl-dot-2">
+            <a:extLst>
+              <a:ext uri="{FF2B5EF4-FFF2-40B4-BE49-F238E27FC236}">
+                <a16:creationId xmlns:a16="http://schemas.microsoft.com/office/drawing/2014/main" id="{F09D24E6-1D55-4F5C-A98B-73092449CBCD}"/>
               </a:ext>
             </a:extLst>
           </p:cNvPr>
@@ -7250,14 +7571,14 @@
         </p:nvSpPr>
         <p:spPr>
           <a:xfrm>
-            <a:off x="530352" y="4375404"/>
-            <a:ext cx="68580" cy="68580"/>
+            <a:off x="5028391" y="3439226"/>
+            <a:ext cx="137160" cy="137160"/>
           </a:xfrm>
           <a:prstGeom prst="ellipse">
             <a:avLst/>
           </a:prstGeom>
           <a:solidFill>
-            <a:srgbClr val="D6A000"/>
+            <a:srgbClr val="1F4E79"/>
           </a:solidFill>
           <a:ln>
             <a:noFill/>
@@ -7289,10 +7610,10 @@
       </p:sp>
       <p:sp>
         <p:nvSpPr>
-          <p:cNvPr id="119" name="tl-item-0-1">
-            <a:extLst>
-              <a:ext uri="{FF2B5EF4-FFF2-40B4-BE49-F238E27FC236}">
-                <a16:creationId xmlns:a16="http://schemas.microsoft.com/office/drawing/2014/main" id="{7064DE2C-CC46-4CFF-ADBF-4EBFDB9A0FEC}"/>
+          <p:cNvPr id="127" name="tl-date-2">
+            <a:extLst>
+              <a:ext uri="{FF2B5EF4-FFF2-40B4-BE49-F238E27FC236}">
+                <a16:creationId xmlns:a16="http://schemas.microsoft.com/office/drawing/2014/main" id="{00ED8DCC-631B-4BE2-818E-2C866D963754}"/>
               </a:ext>
             </a:extLst>
           </p:cNvPr>
@@ -7301,8 +7622,8 @@
         </p:nvSpPr>
         <p:spPr>
           <a:xfrm>
-            <a:off x="630936" y="4334256"/>
-            <a:ext cx="1682496" cy="274320"/>
+            <a:off x="4893414" y="3178207"/>
+            <a:ext cx="521208" cy="123111"/>
           </a:xfrm>
           <a:prstGeom prst="rect">
             <a:avLst/>
@@ -7315,30 +7636,100 @@
           </a:bodyPr>
           <a:lstStyle/>
           <a:p>
-            <a:pPr algn="l" latinLnBrk="1">
+            <a:pPr algn="l" latinLnBrk="1"/>
+            <a:r>
+              <a:rPr sz="800" b="1" dirty="0">
+                <a:solidFill>
+                  <a:srgbClr val="1F4E79"/>
+                </a:solidFill>
+                <a:latin typeface="微软雅黑"/>
+                <a:ea typeface="微软雅黑"/>
+              </a:rPr>
+              <a:t>8月21日</a:t>
+            </a:r>
+          </a:p>
+        </p:txBody>
+      </p:sp>
+      <p:sp>
+        <p:nvSpPr>
+          <p:cNvPr id="129" name="tl-item-2-0">
+            <a:extLst>
+              <a:ext uri="{FF2B5EF4-FFF2-40B4-BE49-F238E27FC236}">
+                <a16:creationId xmlns:a16="http://schemas.microsoft.com/office/drawing/2014/main" id="{B7495FBF-27DF-4BA8-A8C3-62FC45EBFD56}"/>
+              </a:ext>
+            </a:extLst>
+          </p:cNvPr>
+          <p:cNvSpPr txBox="1"/>
+          <p:nvPr/>
+        </p:nvSpPr>
+        <p:spPr>
+          <a:xfrm>
+            <a:off x="4350769" y="3789923"/>
+            <a:ext cx="1682496" cy="204671"/>
+          </a:xfrm>
+          <a:prstGeom prst="rect">
+            <a:avLst/>
+          </a:prstGeom>
+          <a:noFill/>
+        </p:spPr>
+        <p:txBody>
+          <a:bodyPr wrap="square" lIns="0" tIns="0" rIns="0" bIns="0" anchor="t">
+            <a:spAutoFit/>
+          </a:bodyPr>
+          <a:lstStyle/>
+          <a:p>
+            <a:pPr marL="228600" indent="-228600" algn="l" latinLnBrk="1">
               <a:lnSpc>
                 <a:spcPct val="95000"/>
               </a:lnSpc>
+              <a:buFont typeface="+mj-lt"/>
+              <a:buAutoNum type="arabicPeriod"/>
             </a:pPr>
             <a:r>
-              <a:rPr sz="700" b="0">
+              <a:rPr sz="700" b="0" dirty="0" err="1">
                 <a:solidFill>
                   <a:srgbClr val="3D3C3A"/>
                 </a:solidFill>
                 <a:latin typeface="微软雅黑"/>
                 <a:ea typeface="微软雅黑"/>
               </a:rPr>
-              <a:t>下游平台开始模型调用链路开发</a:t>
-            </a:r>
-          </a:p>
-        </p:txBody>
-      </p:sp>
-      <p:sp>
-        <p:nvSpPr>
-          <p:cNvPr id="120" name="tl-dot-1">
-            <a:extLst>
-              <a:ext uri="{FF2B5EF4-FFF2-40B4-BE49-F238E27FC236}">
-                <a16:creationId xmlns:a16="http://schemas.microsoft.com/office/drawing/2014/main" id="{B4E6BFA3-3126-485B-B8F8-B80EFA23EF6B}"/>
+              <a:t>完成消费类知识库初始化</a:t>
+            </a:r>
+            <a:endParaRPr lang="en-US" sz="700" b="0" dirty="0">
+              <a:solidFill>
+                <a:srgbClr val="3D3C3A"/>
+              </a:solidFill>
+              <a:latin typeface="微软雅黑"/>
+              <a:ea typeface="微软雅黑"/>
+            </a:endParaRPr>
+          </a:p>
+          <a:p>
+            <a:pPr marL="228600" indent="-228600" latinLnBrk="1">
+              <a:lnSpc>
+                <a:spcPct val="95000"/>
+              </a:lnSpc>
+              <a:buFont typeface="+mj-lt"/>
+              <a:buAutoNum type="arabicPeriod"/>
+            </a:pPr>
+            <a:r>
+              <a:rPr lang="zh-CN" altLang="en-US" sz="700" b="0" dirty="0">
+                <a:solidFill>
+                  <a:srgbClr val="3D3C3A"/>
+                </a:solidFill>
+                <a:latin typeface="微软雅黑"/>
+                <a:ea typeface="微软雅黑"/>
+              </a:rPr>
+              <a:t>发布全分类详细模型效果评估报告</a:t>
+            </a:r>
+          </a:p>
+        </p:txBody>
+      </p:sp>
+      <p:sp>
+        <p:nvSpPr>
+          <p:cNvPr id="132" name="tl-dot-3">
+            <a:extLst>
+              <a:ext uri="{FF2B5EF4-FFF2-40B4-BE49-F238E27FC236}">
+                <a16:creationId xmlns:a16="http://schemas.microsoft.com/office/drawing/2014/main" id="{17FD06C6-BDC8-4704-AFAA-EE9A845F686D}"/>
               </a:ext>
             </a:extLst>
           </p:cNvPr>
@@ -7347,7 +7738,7 @@
         </p:nvSpPr>
         <p:spPr>
           <a:xfrm>
-            <a:off x="3172968" y="3771900"/>
+            <a:off x="6848047" y="3439226"/>
             <a:ext cx="137160" cy="137160"/>
           </a:xfrm>
           <a:prstGeom prst="ellipse">
@@ -7386,10 +7777,10 @@
       </p:sp>
       <p:sp>
         <p:nvSpPr>
-          <p:cNvPr id="121" name="tl-date-1">
-            <a:extLst>
-              <a:ext uri="{FF2B5EF4-FFF2-40B4-BE49-F238E27FC236}">
-                <a16:creationId xmlns:a16="http://schemas.microsoft.com/office/drawing/2014/main" id="{C764ADD4-2E15-49E6-8D1D-625DE9E814D3}"/>
+          <p:cNvPr id="133" name="tl-date-3">
+            <a:extLst>
+              <a:ext uri="{FF2B5EF4-FFF2-40B4-BE49-F238E27FC236}">
+                <a16:creationId xmlns:a16="http://schemas.microsoft.com/office/drawing/2014/main" id="{EB883891-C8F1-41F8-8121-43F1AAC538EA}"/>
               </a:ext>
             </a:extLst>
           </p:cNvPr>
@@ -7398,8 +7789,8 @@
         </p:nvSpPr>
         <p:spPr>
           <a:xfrm>
-            <a:off x="2331720" y="3547872"/>
-            <a:ext cx="1819656" cy="146304"/>
+            <a:off x="6726455" y="3166610"/>
+            <a:ext cx="441543" cy="123111"/>
           </a:xfrm>
           <a:prstGeom prst="rect">
             <a:avLst/>
@@ -7414,24 +7805,157 @@
           <a:p>
             <a:pPr algn="l" latinLnBrk="1"/>
             <a:r>
-              <a:rPr sz="800" b="1">
+              <a:rPr sz="800" b="1" dirty="0">
                 <a:solidFill>
                   <a:srgbClr val="1F4E79"/>
                 </a:solidFill>
                 <a:latin typeface="微软雅黑"/>
                 <a:ea typeface="微软雅黑"/>
               </a:rPr>
-              <a:t>当前</a:t>
-            </a:r>
-          </a:p>
-        </p:txBody>
-      </p:sp>
-      <p:sp>
-        <p:nvSpPr>
-          <p:cNvPr id="122" name="tl-stdot-1-0">
-            <a:extLst>
-              <a:ext uri="{FF2B5EF4-FFF2-40B4-BE49-F238E27FC236}">
-                <a16:creationId xmlns:a16="http://schemas.microsoft.com/office/drawing/2014/main" id="{BB324655-2D0D-4785-82F1-085D86CDCC51}"/>
+              <a:t>8月31日</a:t>
+            </a:r>
+          </a:p>
+        </p:txBody>
+      </p:sp>
+      <p:sp>
+        <p:nvSpPr>
+          <p:cNvPr id="135" name="tl-item-3-0">
+            <a:extLst>
+              <a:ext uri="{FF2B5EF4-FFF2-40B4-BE49-F238E27FC236}">
+                <a16:creationId xmlns:a16="http://schemas.microsoft.com/office/drawing/2014/main" id="{F6CCB6F9-A4BF-4A7C-AB8D-CDD4133BD137}"/>
+              </a:ext>
+            </a:extLst>
+          </p:cNvPr>
+          <p:cNvSpPr txBox="1"/>
+          <p:nvPr/>
+        </p:nvSpPr>
+        <p:spPr>
+          <a:xfrm>
+            <a:off x="6560600" y="3784695"/>
+            <a:ext cx="1682496" cy="409343"/>
+          </a:xfrm>
+          <a:prstGeom prst="rect">
+            <a:avLst/>
+          </a:prstGeom>
+          <a:noFill/>
+        </p:spPr>
+        <p:txBody>
+          <a:bodyPr wrap="square" lIns="0" tIns="0" rIns="0" bIns="0" anchor="t">
+            <a:spAutoFit/>
+          </a:bodyPr>
+          <a:lstStyle/>
+          <a:p>
+            <a:pPr marL="228600" indent="-228600" algn="l" latinLnBrk="1">
+              <a:lnSpc>
+                <a:spcPct val="95000"/>
+              </a:lnSpc>
+              <a:buFont typeface="+mj-lt"/>
+              <a:buAutoNum type="arabicPeriod"/>
+            </a:pPr>
+            <a:r>
+              <a:rPr sz="700" b="0" dirty="0" err="1">
+                <a:solidFill>
+                  <a:srgbClr val="3D3C3A"/>
+                </a:solidFill>
+                <a:latin typeface="微软雅黑"/>
+                <a:ea typeface="微软雅黑"/>
+              </a:rPr>
+              <a:t>发布正式版模型</a:t>
+            </a:r>
+            <a:endParaRPr lang="en-US" sz="700" b="0" dirty="0">
+              <a:solidFill>
+                <a:srgbClr val="3D3C3A"/>
+              </a:solidFill>
+              <a:latin typeface="微软雅黑"/>
+              <a:ea typeface="微软雅黑"/>
+            </a:endParaRPr>
+          </a:p>
+          <a:p>
+            <a:pPr marL="228600" indent="-228600" algn="l" latinLnBrk="1">
+              <a:lnSpc>
+                <a:spcPct val="95000"/>
+              </a:lnSpc>
+              <a:buFont typeface="+mj-lt"/>
+              <a:buAutoNum type="arabicPeriod"/>
+            </a:pPr>
+            <a:r>
+              <a:rPr lang="zh-CN" altLang="en-US" sz="700" dirty="0">
+                <a:solidFill>
+                  <a:srgbClr val="3D3C3A"/>
+                </a:solidFill>
+                <a:latin typeface="微软雅黑"/>
+                <a:ea typeface="微软雅黑"/>
+              </a:rPr>
+              <a:t>新的分类数据落库</a:t>
+            </a:r>
+            <a:endParaRPr lang="en-US" sz="700" b="0" dirty="0">
+              <a:solidFill>
+                <a:srgbClr val="3D3C3A"/>
+              </a:solidFill>
+              <a:latin typeface="微软雅黑"/>
+              <a:ea typeface="微软雅黑"/>
+            </a:endParaRPr>
+          </a:p>
+          <a:p>
+            <a:pPr marL="228600" indent="-228600" algn="l" latinLnBrk="1">
+              <a:lnSpc>
+                <a:spcPct val="95000"/>
+              </a:lnSpc>
+              <a:buFont typeface="+mj-lt"/>
+              <a:buAutoNum type="arabicPeriod"/>
+            </a:pPr>
+            <a:r>
+              <a:rPr lang="zh-CN" altLang="en-US" sz="700" dirty="0">
+                <a:solidFill>
+                  <a:srgbClr val="3D3C3A"/>
+                </a:solidFill>
+                <a:latin typeface="微软雅黑"/>
+                <a:ea typeface="微软雅黑"/>
+              </a:rPr>
+              <a:t>下游平台调用链路调通</a:t>
+            </a:r>
+            <a:endParaRPr lang="en-US" altLang="zh-CN" sz="700" dirty="0">
+              <a:solidFill>
+                <a:srgbClr val="3D3C3A"/>
+              </a:solidFill>
+              <a:latin typeface="微软雅黑"/>
+              <a:ea typeface="微软雅黑"/>
+            </a:endParaRPr>
+          </a:p>
+          <a:p>
+            <a:pPr marL="228600" indent="-228600" algn="l" latinLnBrk="1">
+              <a:lnSpc>
+                <a:spcPct val="95000"/>
+              </a:lnSpc>
+              <a:buFont typeface="+mj-lt"/>
+              <a:buAutoNum type="arabicPeriod"/>
+            </a:pPr>
+            <a:r>
+              <a:rPr lang="zh-CN" altLang="en-US" sz="700" dirty="0">
+                <a:solidFill>
+                  <a:srgbClr val="3D3C3A"/>
+                </a:solidFill>
+                <a:latin typeface="微软雅黑"/>
+                <a:ea typeface="微软雅黑"/>
+              </a:rPr>
+              <a:t>调通后开始空跑两周</a:t>
+            </a:r>
+            <a:endParaRPr sz="700" b="0" dirty="0">
+              <a:solidFill>
+                <a:srgbClr val="3D3C3A"/>
+              </a:solidFill>
+              <a:latin typeface="微软雅黑"/>
+              <a:ea typeface="微软雅黑"/>
+            </a:endParaRPr>
+          </a:p>
+        </p:txBody>
+      </p:sp>
+      <p:sp>
+        <p:nvSpPr>
+          <p:cNvPr id="138" name="tl-dot-4">
+            <a:extLst>
+              <a:ext uri="{FF2B5EF4-FFF2-40B4-BE49-F238E27FC236}">
+                <a16:creationId xmlns:a16="http://schemas.microsoft.com/office/drawing/2014/main" id="{0B0625B5-7877-42B7-8F84-CBB8A6353423}"/>
               </a:ext>
             </a:extLst>
           </p:cNvPr>
@@ -7440,8 +7964,8 @@
         </p:nvSpPr>
         <p:spPr>
           <a:xfrm>
-            <a:off x="2350008" y="4101084"/>
-            <a:ext cx="68580" cy="68580"/>
+            <a:off x="8667703" y="3439226"/>
+            <a:ext cx="137160" cy="137160"/>
           </a:xfrm>
           <a:prstGeom prst="ellipse">
             <a:avLst/>
@@ -7479,10 +8003,10 @@
       </p:sp>
       <p:sp>
         <p:nvSpPr>
-          <p:cNvPr id="123" name="tl-item-1-0">
-            <a:extLst>
-              <a:ext uri="{FF2B5EF4-FFF2-40B4-BE49-F238E27FC236}">
-                <a16:creationId xmlns:a16="http://schemas.microsoft.com/office/drawing/2014/main" id="{FE9A30E7-7C29-41F7-AD94-DCC110E9E858}"/>
+          <p:cNvPr id="139" name="tl-date-4">
+            <a:extLst>
+              <a:ext uri="{FF2B5EF4-FFF2-40B4-BE49-F238E27FC236}">
+                <a16:creationId xmlns:a16="http://schemas.microsoft.com/office/drawing/2014/main" id="{3E51EB03-AA85-4901-B5D2-0973B209E11A}"/>
               </a:ext>
             </a:extLst>
           </p:cNvPr>
@@ -7491,8 +8015,8 @@
         </p:nvSpPr>
         <p:spPr>
           <a:xfrm>
-            <a:off x="2450591" y="4059936"/>
-            <a:ext cx="1682496" cy="274320"/>
+            <a:off x="8512009" y="3178207"/>
+            <a:ext cx="632869" cy="123111"/>
           </a:xfrm>
           <a:prstGeom prst="rect">
             <a:avLst/>
@@ -7505,30 +8029,26 @@
           </a:bodyPr>
           <a:lstStyle/>
           <a:p>
-            <a:pPr algn="l" latinLnBrk="1">
-              <a:lnSpc>
-                <a:spcPct val="95000"/>
-              </a:lnSpc>
-            </a:pPr>
-            <a:r>
-              <a:rPr sz="700" b="0">
-                <a:solidFill>
-                  <a:srgbClr val="3D3C3A"/>
+            <a:pPr algn="l" latinLnBrk="1"/>
+            <a:r>
+              <a:rPr sz="800" b="1" dirty="0">
+                <a:solidFill>
+                  <a:srgbClr val="1F4E79"/>
                 </a:solidFill>
                 <a:latin typeface="微软雅黑"/>
                 <a:ea typeface="微软雅黑"/>
               </a:rPr>
-              <a:t>负债 / 收入类知识库基本初始化完成，两类模型效果较好</a:t>
-            </a:r>
-          </a:p>
-        </p:txBody>
-      </p:sp>
-      <p:sp>
-        <p:nvSpPr>
-          <p:cNvPr id="124" name="tl-stdot-1-1">
-            <a:extLst>
-              <a:ext uri="{FF2B5EF4-FFF2-40B4-BE49-F238E27FC236}">
-                <a16:creationId xmlns:a16="http://schemas.microsoft.com/office/drawing/2014/main" id="{E4DECB6B-8157-49BF-B1BF-DB29E0F61AC3}"/>
+              <a:t>9月15日</a:t>
+            </a:r>
+          </a:p>
+        </p:txBody>
+      </p:sp>
+      <p:sp>
+        <p:nvSpPr>
+          <p:cNvPr id="144" name="tl-dot-5">
+            <a:extLst>
+              <a:ext uri="{FF2B5EF4-FFF2-40B4-BE49-F238E27FC236}">
+                <a16:creationId xmlns:a16="http://schemas.microsoft.com/office/drawing/2014/main" id="{A0D83AE4-64AC-4A62-8C02-3CD6556A4584}"/>
               </a:ext>
             </a:extLst>
           </p:cNvPr>
@@ -7537,14 +8057,14 @@
         </p:nvSpPr>
         <p:spPr>
           <a:xfrm>
-            <a:off x="2350008" y="4375404"/>
-            <a:ext cx="68580" cy="68580"/>
+            <a:off x="10487359" y="3439226"/>
+            <a:ext cx="137160" cy="137160"/>
           </a:xfrm>
           <a:prstGeom prst="ellipse">
             <a:avLst/>
           </a:prstGeom>
           <a:solidFill>
-            <a:srgbClr val="D6A000"/>
+            <a:srgbClr val="1F4E79"/>
           </a:solidFill>
           <a:ln>
             <a:noFill/>
@@ -7576,10 +8096,10 @@
       </p:sp>
       <p:sp>
         <p:nvSpPr>
-          <p:cNvPr id="125" name="tl-item-1-1">
-            <a:extLst>
-              <a:ext uri="{FF2B5EF4-FFF2-40B4-BE49-F238E27FC236}">
-                <a16:creationId xmlns:a16="http://schemas.microsoft.com/office/drawing/2014/main" id="{1B62AFC7-CCC9-4DBF-9109-6360F7228FE2}"/>
+          <p:cNvPr id="147" name="tl-item-5-0">
+            <a:extLst>
+              <a:ext uri="{FF2B5EF4-FFF2-40B4-BE49-F238E27FC236}">
+                <a16:creationId xmlns:a16="http://schemas.microsoft.com/office/drawing/2014/main" id="{A71DEA1D-7524-4549-B8EE-3CFB9271FAF2}"/>
               </a:ext>
             </a:extLst>
           </p:cNvPr>
@@ -7588,8 +8108,8 @@
         </p:nvSpPr>
         <p:spPr>
           <a:xfrm>
-            <a:off x="2450591" y="4334256"/>
-            <a:ext cx="1682496" cy="274320"/>
+            <a:off x="10019439" y="3738659"/>
+            <a:ext cx="1682496" cy="409343"/>
           </a:xfrm>
           <a:prstGeom prst="rect">
             <a:avLst/>
@@ -7608,75 +8128,216 @@
               </a:lnSpc>
             </a:pPr>
             <a:r>
-              <a:rPr sz="700" b="0">
+              <a:rPr sz="700" b="0" dirty="0" err="1">
                 <a:solidFill>
                   <a:srgbClr val="3D3C3A"/>
                 </a:solidFill>
                 <a:latin typeface="微软雅黑"/>
                 <a:ea typeface="微软雅黑"/>
               </a:rPr>
-              <a:t>消费类知识库建设中</a:t>
-            </a:r>
-          </a:p>
-        </p:txBody>
-      </p:sp>
-      <p:sp>
-        <p:nvSpPr>
-          <p:cNvPr id="126" name="tl-dot-2">
-            <a:extLst>
-              <a:ext uri="{FF2B5EF4-FFF2-40B4-BE49-F238E27FC236}">
-                <a16:creationId xmlns:a16="http://schemas.microsoft.com/office/drawing/2014/main" id="{F09D24E6-1D55-4F5C-A98B-73092449CBCD}"/>
-              </a:ext>
-            </a:extLst>
-          </p:cNvPr>
-          <p:cNvSpPr/>
-          <p:nvPr/>
-        </p:nvSpPr>
-        <p:spPr>
-          <a:xfrm>
-            <a:off x="4992624" y="3771900"/>
-            <a:ext cx="137160" cy="137160"/>
-          </a:xfrm>
-          <a:prstGeom prst="ellipse">
-            <a:avLst/>
-          </a:prstGeom>
-          <a:solidFill>
-            <a:srgbClr val="1F4E79"/>
-          </a:solidFill>
-          <a:ln>
-            <a:noFill/>
-          </a:ln>
-          <a:effectLst/>
-        </p:spPr>
-        <p:style>
-          <a:lnRef idx="1">
-            <a:schemeClr val="accent1"/>
-          </a:lnRef>
-          <a:fillRef idx="3">
-            <a:schemeClr val="accent1"/>
-          </a:fillRef>
-          <a:effectRef idx="2">
-            <a:schemeClr val="accent1"/>
-          </a:effectRef>
-          <a:fontRef idx="minor">
-            <a:schemeClr val="lt1"/>
-          </a:fontRef>
-        </p:style>
-        <p:txBody>
-          <a:bodyPr rtlCol="0" anchor="ctr"/>
-          <a:lstStyle/>
-          <a:p>
-            <a:pPr algn="ctr"/>
-            <a:endParaRPr/>
-          </a:p>
-        </p:txBody>
-      </p:sp>
-      <p:sp>
-        <p:nvSpPr>
-          <p:cNvPr id="127" name="tl-date-2">
-            <a:extLst>
-              <a:ext uri="{FF2B5EF4-FFF2-40B4-BE49-F238E27FC236}">
-                <a16:creationId xmlns:a16="http://schemas.microsoft.com/office/drawing/2014/main" id="{00ED8DCC-631B-4BE2-818E-2C866D963754}"/>
+              <a:t>开通</a:t>
+            </a:r>
+            <a:r>
+              <a:rPr lang="zh-CN" altLang="en-US" sz="700" b="0" dirty="0">
+                <a:solidFill>
+                  <a:srgbClr val="3D3C3A"/>
+                </a:solidFill>
+                <a:latin typeface="微软雅黑"/>
+                <a:ea typeface="微软雅黑"/>
+              </a:rPr>
+              <a:t>新旧</a:t>
+            </a:r>
+            <a:r>
+              <a:rPr lang="en-US" altLang="zh-CN" sz="700" b="0" dirty="0">
+                <a:solidFill>
+                  <a:srgbClr val="3D3C3A"/>
+                </a:solidFill>
+                <a:latin typeface="微软雅黑"/>
+                <a:ea typeface="微软雅黑"/>
+              </a:rPr>
+              <a:t>IDP</a:t>
+            </a:r>
+            <a:r>
+              <a:rPr lang="zh-CN" altLang="en-US" sz="700" b="0" dirty="0">
+                <a:solidFill>
+                  <a:srgbClr val="3D3C3A"/>
+                </a:solidFill>
+                <a:latin typeface="微软雅黑"/>
+                <a:ea typeface="微软雅黑"/>
+              </a:rPr>
+              <a:t>链路</a:t>
+            </a:r>
+            <a:r>
+              <a:rPr sz="700" b="0" dirty="0">
+                <a:solidFill>
+                  <a:srgbClr val="3D3C3A"/>
+                </a:solidFill>
+                <a:latin typeface="微软雅黑"/>
+                <a:ea typeface="微软雅黑"/>
+              </a:rPr>
+              <a:t> AB </a:t>
+            </a:r>
+            <a:r>
+              <a:rPr sz="700" b="0" dirty="0" err="1">
+                <a:solidFill>
+                  <a:srgbClr val="3D3C3A"/>
+                </a:solidFill>
+                <a:latin typeface="微软雅黑"/>
+                <a:ea typeface="微软雅黑"/>
+              </a:rPr>
+              <a:t>测试</a:t>
+            </a:r>
+            <a:endParaRPr lang="en-US" sz="700" b="0" dirty="0">
+              <a:solidFill>
+                <a:srgbClr val="3D3C3A"/>
+              </a:solidFill>
+              <a:latin typeface="微软雅黑"/>
+              <a:ea typeface="微软雅黑"/>
+            </a:endParaRPr>
+          </a:p>
+          <a:p>
+            <a:pPr latinLnBrk="1">
+              <a:lnSpc>
+                <a:spcPct val="95000"/>
+              </a:lnSpc>
+            </a:pPr>
+            <a:r>
+              <a:rPr lang="zh-CN" altLang="en-US" sz="700" b="0" dirty="0">
+                <a:solidFill>
+                  <a:srgbClr val="3D3C3A"/>
+                </a:solidFill>
+                <a:latin typeface="微软雅黑"/>
+                <a:ea typeface="微软雅黑"/>
+              </a:rPr>
+              <a:t>新 </a:t>
+            </a:r>
+            <a:r>
+              <a:rPr lang="en-US" altLang="zh-CN" sz="700" b="0" dirty="0">
+                <a:solidFill>
+                  <a:srgbClr val="3D3C3A"/>
+                </a:solidFill>
+                <a:latin typeface="微软雅黑"/>
+                <a:ea typeface="微软雅黑"/>
+              </a:rPr>
+              <a:t>S-CALC </a:t>
+            </a:r>
+            <a:r>
+              <a:rPr lang="zh-CN" altLang="en-US" sz="700" b="0" dirty="0">
+                <a:solidFill>
+                  <a:srgbClr val="3D3C3A"/>
+                </a:solidFill>
+                <a:latin typeface="微软雅黑"/>
+                <a:ea typeface="微软雅黑"/>
+              </a:rPr>
+              <a:t>开发完成</a:t>
+            </a:r>
+            <a:endParaRPr lang="en-US" altLang="zh-CN" sz="700" b="0" dirty="0">
+              <a:solidFill>
+                <a:srgbClr val="3D3C3A"/>
+              </a:solidFill>
+              <a:latin typeface="微软雅黑"/>
+              <a:ea typeface="微软雅黑"/>
+            </a:endParaRPr>
+          </a:p>
+          <a:p>
+            <a:pPr latinLnBrk="1">
+              <a:lnSpc>
+                <a:spcPct val="95000"/>
+              </a:lnSpc>
+            </a:pPr>
+            <a:r>
+              <a:rPr lang="en-US" altLang="zh-CN" sz="700" b="0" dirty="0">
+                <a:solidFill>
+                  <a:srgbClr val="3D3C3A"/>
+                </a:solidFill>
+                <a:latin typeface="微软雅黑"/>
+                <a:ea typeface="微软雅黑"/>
+              </a:rPr>
+              <a:t>LMS </a:t>
+            </a:r>
+            <a:r>
+              <a:rPr lang="zh-CN" altLang="en-US" sz="700" b="0" dirty="0">
+                <a:solidFill>
+                  <a:srgbClr val="3D3C3A"/>
+                </a:solidFill>
+                <a:latin typeface="微软雅黑"/>
+                <a:ea typeface="微软雅黑"/>
+              </a:rPr>
+              <a:t>新页面开发完成</a:t>
+            </a:r>
+            <a:endParaRPr lang="en-US" altLang="zh-CN" sz="700" b="0" dirty="0">
+              <a:solidFill>
+                <a:srgbClr val="3D3C3A"/>
+              </a:solidFill>
+              <a:latin typeface="微软雅黑"/>
+              <a:ea typeface="微软雅黑"/>
+            </a:endParaRPr>
+          </a:p>
+          <a:p>
+            <a:pPr latinLnBrk="1">
+              <a:lnSpc>
+                <a:spcPct val="95000"/>
+              </a:lnSpc>
+            </a:pPr>
+            <a:r>
+              <a:rPr lang="zh-CN" altLang="en-US" sz="700" b="0" dirty="0">
+                <a:solidFill>
+                  <a:srgbClr val="3D3C3A"/>
+                </a:solidFill>
+                <a:latin typeface="微软雅黑"/>
+                <a:ea typeface="微软雅黑"/>
+              </a:rPr>
+              <a:t>完成新旧</a:t>
+            </a:r>
+            <a:r>
+              <a:rPr lang="en-US" altLang="zh-CN" sz="700" b="0" dirty="0">
+                <a:solidFill>
+                  <a:srgbClr val="3D3C3A"/>
+                </a:solidFill>
+                <a:latin typeface="微软雅黑"/>
+                <a:ea typeface="微软雅黑"/>
+              </a:rPr>
+              <a:t>IDP</a:t>
+            </a:r>
+            <a:r>
+              <a:rPr lang="zh-CN" altLang="en-US" sz="700" b="0" dirty="0">
+                <a:solidFill>
+                  <a:srgbClr val="3D3C3A"/>
+                </a:solidFill>
+                <a:latin typeface="微软雅黑"/>
+                <a:ea typeface="微软雅黑"/>
+              </a:rPr>
+              <a:t>链路 </a:t>
+            </a:r>
+            <a:r>
+              <a:rPr lang="en-US" altLang="zh-CN" sz="700" b="0" dirty="0">
+                <a:solidFill>
+                  <a:srgbClr val="3D3C3A"/>
+                </a:solidFill>
+                <a:latin typeface="微软雅黑"/>
+                <a:ea typeface="微软雅黑"/>
+              </a:rPr>
+              <a:t>AB </a:t>
+            </a:r>
+            <a:r>
+              <a:rPr lang="zh-CN" altLang="en-US" sz="700" b="0" dirty="0">
+                <a:solidFill>
+                  <a:srgbClr val="3D3C3A"/>
+                </a:solidFill>
+                <a:latin typeface="微软雅黑"/>
+                <a:ea typeface="微软雅黑"/>
+              </a:rPr>
+              <a:t>测试</a:t>
+            </a:r>
+          </a:p>
+        </p:txBody>
+      </p:sp>
+      <p:sp>
+        <p:nvSpPr>
+          <p:cNvPr id="148" name="tl-item-3-0">
+            <a:extLst>
+              <a:ext uri="{FF2B5EF4-FFF2-40B4-BE49-F238E27FC236}">
+                <a16:creationId xmlns:a16="http://schemas.microsoft.com/office/drawing/2014/main" id="{0EC14774-DF0B-4A61-9F27-C61F134277AA}"/>
               </a:ext>
             </a:extLst>
           </p:cNvPr>
@@ -7685,8 +8346,8 @@
         </p:nvSpPr>
         <p:spPr>
           <a:xfrm>
-            <a:off x="4151376" y="3547872"/>
-            <a:ext cx="1819656" cy="146304"/>
+            <a:off x="8187302" y="3763975"/>
+            <a:ext cx="1682496" cy="102336"/>
           </a:xfrm>
           <a:prstGeom prst="rect">
             <a:avLst/>
@@ -7699,794 +8360,22 @@
           </a:bodyPr>
           <a:lstStyle/>
           <a:p>
-            <a:pPr algn="l" latinLnBrk="1"/>
-            <a:r>
-              <a:rPr sz="800" b="1">
-                <a:solidFill>
-                  <a:srgbClr val="1F4E79"/>
-                </a:solidFill>
-                <a:latin typeface="微软雅黑"/>
-                <a:ea typeface="微软雅黑"/>
-              </a:rPr>
-              <a:t>8月21日</a:t>
-            </a:r>
-          </a:p>
-        </p:txBody>
-      </p:sp>
-      <p:sp>
-        <p:nvSpPr>
-          <p:cNvPr id="128" name="tl-stdot-2-0">
-            <a:extLst>
-              <a:ext uri="{FF2B5EF4-FFF2-40B4-BE49-F238E27FC236}">
-                <a16:creationId xmlns:a16="http://schemas.microsoft.com/office/drawing/2014/main" id="{B1B4B930-CEEB-4D0E-8FCD-502BBC3989BA}"/>
-              </a:ext>
-            </a:extLst>
-          </p:cNvPr>
-          <p:cNvSpPr/>
-          <p:nvPr/>
-        </p:nvSpPr>
-        <p:spPr>
-          <a:xfrm>
-            <a:off x="4169663" y="4101084"/>
-            <a:ext cx="68580" cy="68580"/>
-          </a:xfrm>
-          <a:prstGeom prst="ellipse">
-            <a:avLst/>
-          </a:prstGeom>
-          <a:solidFill>
-            <a:srgbClr val="606060"/>
-          </a:solidFill>
-          <a:ln>
-            <a:noFill/>
-          </a:ln>
-          <a:effectLst/>
-        </p:spPr>
-        <p:style>
-          <a:lnRef idx="1">
-            <a:schemeClr val="accent1"/>
-          </a:lnRef>
-          <a:fillRef idx="3">
-            <a:schemeClr val="accent1"/>
-          </a:fillRef>
-          <a:effectRef idx="2">
-            <a:schemeClr val="accent1"/>
-          </a:effectRef>
-          <a:fontRef idx="minor">
-            <a:schemeClr val="lt1"/>
-          </a:fontRef>
-        </p:style>
-        <p:txBody>
-          <a:bodyPr rtlCol="0" anchor="ctr"/>
-          <a:lstStyle/>
-          <a:p>
-            <a:pPr algn="ctr"/>
-            <a:endParaRPr/>
-          </a:p>
-        </p:txBody>
-      </p:sp>
-      <p:sp>
-        <p:nvSpPr>
-          <p:cNvPr id="129" name="tl-item-2-0">
-            <a:extLst>
-              <a:ext uri="{FF2B5EF4-FFF2-40B4-BE49-F238E27FC236}">
-                <a16:creationId xmlns:a16="http://schemas.microsoft.com/office/drawing/2014/main" id="{B7495FBF-27DF-4BA8-A8C3-62FC45EBFD56}"/>
-              </a:ext>
-            </a:extLst>
-          </p:cNvPr>
-          <p:cNvSpPr txBox="1"/>
-          <p:nvPr/>
-        </p:nvSpPr>
-        <p:spPr>
-          <a:xfrm>
-            <a:off x="4270248" y="4059936"/>
-            <a:ext cx="1682496" cy="274320"/>
-          </a:xfrm>
-          <a:prstGeom prst="rect">
-            <a:avLst/>
-          </a:prstGeom>
-          <a:noFill/>
-        </p:spPr>
-        <p:txBody>
-          <a:bodyPr wrap="square" lIns="0" tIns="0" rIns="0" bIns="0" anchor="t">
-            <a:spAutoFit/>
-          </a:bodyPr>
-          <a:lstStyle/>
-          <a:p>
-            <a:pPr algn="l" latinLnBrk="1">
+            <a:pPr marL="228600" indent="-228600" algn="l" latinLnBrk="1">
               <a:lnSpc>
                 <a:spcPct val="95000"/>
               </a:lnSpc>
+              <a:buFont typeface="+mj-lt"/>
+              <a:buAutoNum type="arabicPeriod"/>
             </a:pPr>
             <a:r>
-              <a:rPr sz="700" b="0">
+              <a:rPr lang="zh-CN" altLang="en-US" sz="700" b="0" dirty="0">
                 <a:solidFill>
                   <a:srgbClr val="3D3C3A"/>
                 </a:solidFill>
                 <a:latin typeface="微软雅黑"/>
                 <a:ea typeface="微软雅黑"/>
               </a:rPr>
-              <a:t>完成消费类知识库初始化</a:t>
-            </a:r>
-          </a:p>
-        </p:txBody>
-      </p:sp>
-      <p:sp>
-        <p:nvSpPr>
-          <p:cNvPr id="130" name="tl-stdot-2-1">
-            <a:extLst>
-              <a:ext uri="{FF2B5EF4-FFF2-40B4-BE49-F238E27FC236}">
-                <a16:creationId xmlns:a16="http://schemas.microsoft.com/office/drawing/2014/main" id="{234575A2-8B48-4A4E-A867-576C6DEB21BA}"/>
-              </a:ext>
-            </a:extLst>
-          </p:cNvPr>
-          <p:cNvSpPr/>
-          <p:nvPr/>
-        </p:nvSpPr>
-        <p:spPr>
-          <a:xfrm>
-            <a:off x="4169663" y="4375404"/>
-            <a:ext cx="68580" cy="68580"/>
-          </a:xfrm>
-          <a:prstGeom prst="ellipse">
-            <a:avLst/>
-          </a:prstGeom>
-          <a:solidFill>
-            <a:srgbClr val="606060"/>
-          </a:solidFill>
-          <a:ln>
-            <a:noFill/>
-          </a:ln>
-          <a:effectLst/>
-        </p:spPr>
-        <p:style>
-          <a:lnRef idx="1">
-            <a:schemeClr val="accent1"/>
-          </a:lnRef>
-          <a:fillRef idx="3">
-            <a:schemeClr val="accent1"/>
-          </a:fillRef>
-          <a:effectRef idx="2">
-            <a:schemeClr val="accent1"/>
-          </a:effectRef>
-          <a:fontRef idx="minor">
-            <a:schemeClr val="lt1"/>
-          </a:fontRef>
-        </p:style>
-        <p:txBody>
-          <a:bodyPr rtlCol="0" anchor="ctr"/>
-          <a:lstStyle/>
-          <a:p>
-            <a:pPr algn="ctr"/>
-            <a:endParaRPr/>
-          </a:p>
-        </p:txBody>
-      </p:sp>
-      <p:sp>
-        <p:nvSpPr>
-          <p:cNvPr id="131" name="tl-item-2-1">
-            <a:extLst>
-              <a:ext uri="{FF2B5EF4-FFF2-40B4-BE49-F238E27FC236}">
-                <a16:creationId xmlns:a16="http://schemas.microsoft.com/office/drawing/2014/main" id="{B785BDDB-B03B-437A-811F-4073AE619D19}"/>
-              </a:ext>
-            </a:extLst>
-          </p:cNvPr>
-          <p:cNvSpPr txBox="1"/>
-          <p:nvPr/>
-        </p:nvSpPr>
-        <p:spPr>
-          <a:xfrm>
-            <a:off x="4270248" y="4334256"/>
-            <a:ext cx="1682496" cy="274320"/>
-          </a:xfrm>
-          <a:prstGeom prst="rect">
-            <a:avLst/>
-          </a:prstGeom>
-          <a:noFill/>
-        </p:spPr>
-        <p:txBody>
-          <a:bodyPr wrap="square" lIns="0" tIns="0" rIns="0" bIns="0" anchor="t">
-            <a:spAutoFit/>
-          </a:bodyPr>
-          <a:lstStyle/>
-          <a:p>
-            <a:pPr algn="l" latinLnBrk="1">
-              <a:lnSpc>
-                <a:spcPct val="95000"/>
-              </a:lnSpc>
-            </a:pPr>
-            <a:r>
-              <a:rPr sz="700" b="0">
-                <a:solidFill>
-                  <a:srgbClr val="3D3C3A"/>
-                </a:solidFill>
-                <a:latin typeface="微软雅黑"/>
-                <a:ea typeface="微软雅黑"/>
-              </a:rPr>
-              <a:t>发布全分类详细模型效果评估报告</a:t>
-            </a:r>
-          </a:p>
-        </p:txBody>
-      </p:sp>
-      <p:sp>
-        <p:nvSpPr>
-          <p:cNvPr id="132" name="tl-dot-3">
-            <a:extLst>
-              <a:ext uri="{FF2B5EF4-FFF2-40B4-BE49-F238E27FC236}">
-                <a16:creationId xmlns:a16="http://schemas.microsoft.com/office/drawing/2014/main" id="{17FD06C6-BDC8-4704-AFAA-EE9A845F686D}"/>
-              </a:ext>
-            </a:extLst>
-          </p:cNvPr>
-          <p:cNvSpPr/>
-          <p:nvPr/>
-        </p:nvSpPr>
-        <p:spPr>
-          <a:xfrm>
-            <a:off x="6812280" y="3771900"/>
-            <a:ext cx="137160" cy="137160"/>
-          </a:xfrm>
-          <a:prstGeom prst="ellipse">
-            <a:avLst/>
-          </a:prstGeom>
-          <a:solidFill>
-            <a:srgbClr val="1F4E79"/>
-          </a:solidFill>
-          <a:ln>
-            <a:noFill/>
-          </a:ln>
-          <a:effectLst/>
-        </p:spPr>
-        <p:style>
-          <a:lnRef idx="1">
-            <a:schemeClr val="accent1"/>
-          </a:lnRef>
-          <a:fillRef idx="3">
-            <a:schemeClr val="accent1"/>
-          </a:fillRef>
-          <a:effectRef idx="2">
-            <a:schemeClr val="accent1"/>
-          </a:effectRef>
-          <a:fontRef idx="minor">
-            <a:schemeClr val="lt1"/>
-          </a:fontRef>
-        </p:style>
-        <p:txBody>
-          <a:bodyPr rtlCol="0" anchor="ctr"/>
-          <a:lstStyle/>
-          <a:p>
-            <a:pPr algn="ctr"/>
-            <a:endParaRPr/>
-          </a:p>
-        </p:txBody>
-      </p:sp>
-      <p:sp>
-        <p:nvSpPr>
-          <p:cNvPr id="133" name="tl-date-3">
-            <a:extLst>
-              <a:ext uri="{FF2B5EF4-FFF2-40B4-BE49-F238E27FC236}">
-                <a16:creationId xmlns:a16="http://schemas.microsoft.com/office/drawing/2014/main" id="{EB883891-C8F1-41F8-8121-43F1AAC538EA}"/>
-              </a:ext>
-            </a:extLst>
-          </p:cNvPr>
-          <p:cNvSpPr txBox="1"/>
-          <p:nvPr/>
-        </p:nvSpPr>
-        <p:spPr>
-          <a:xfrm>
-            <a:off x="5971031" y="3547872"/>
-            <a:ext cx="1819656" cy="146304"/>
-          </a:xfrm>
-          <a:prstGeom prst="rect">
-            <a:avLst/>
-          </a:prstGeom>
-          <a:noFill/>
-        </p:spPr>
-        <p:txBody>
-          <a:bodyPr wrap="square" lIns="0" tIns="0" rIns="0" bIns="0" anchor="t">
-            <a:spAutoFit/>
-          </a:bodyPr>
-          <a:lstStyle/>
-          <a:p>
-            <a:pPr algn="l" latinLnBrk="1"/>
-            <a:r>
-              <a:rPr sz="800" b="1">
-                <a:solidFill>
-                  <a:srgbClr val="1F4E79"/>
-                </a:solidFill>
-                <a:latin typeface="微软雅黑"/>
-                <a:ea typeface="微软雅黑"/>
-              </a:rPr>
-              <a:t>8月31日</a:t>
-            </a:r>
-          </a:p>
-        </p:txBody>
-      </p:sp>
-      <p:sp>
-        <p:nvSpPr>
-          <p:cNvPr id="134" name="tl-stdot-3-0">
-            <a:extLst>
-              <a:ext uri="{FF2B5EF4-FFF2-40B4-BE49-F238E27FC236}">
-                <a16:creationId xmlns:a16="http://schemas.microsoft.com/office/drawing/2014/main" id="{07A01ECE-ED06-412E-B6E2-C6CE510915A2}"/>
-              </a:ext>
-            </a:extLst>
-          </p:cNvPr>
-          <p:cNvSpPr/>
-          <p:nvPr/>
-        </p:nvSpPr>
-        <p:spPr>
-          <a:xfrm>
-            <a:off x="5989319" y="4101084"/>
-            <a:ext cx="68580" cy="68580"/>
-          </a:xfrm>
-          <a:prstGeom prst="ellipse">
-            <a:avLst/>
-          </a:prstGeom>
-          <a:solidFill>
-            <a:srgbClr val="606060"/>
-          </a:solidFill>
-          <a:ln>
-            <a:noFill/>
-          </a:ln>
-          <a:effectLst/>
-        </p:spPr>
-        <p:style>
-          <a:lnRef idx="1">
-            <a:schemeClr val="accent1"/>
-          </a:lnRef>
-          <a:fillRef idx="3">
-            <a:schemeClr val="accent1"/>
-          </a:fillRef>
-          <a:effectRef idx="2">
-            <a:schemeClr val="accent1"/>
-          </a:effectRef>
-          <a:fontRef idx="minor">
-            <a:schemeClr val="lt1"/>
-          </a:fontRef>
-        </p:style>
-        <p:txBody>
-          <a:bodyPr rtlCol="0" anchor="ctr"/>
-          <a:lstStyle/>
-          <a:p>
-            <a:pPr algn="ctr"/>
-            <a:endParaRPr/>
-          </a:p>
-        </p:txBody>
-      </p:sp>
-      <p:sp>
-        <p:nvSpPr>
-          <p:cNvPr id="135" name="tl-item-3-0">
-            <a:extLst>
-              <a:ext uri="{FF2B5EF4-FFF2-40B4-BE49-F238E27FC236}">
-                <a16:creationId xmlns:a16="http://schemas.microsoft.com/office/drawing/2014/main" id="{F6CCB6F9-A4BF-4A7C-AB8D-CDD4133BD137}"/>
-              </a:ext>
-            </a:extLst>
-          </p:cNvPr>
-          <p:cNvSpPr txBox="1"/>
-          <p:nvPr/>
-        </p:nvSpPr>
-        <p:spPr>
-          <a:xfrm>
-            <a:off x="6089903" y="4059936"/>
-            <a:ext cx="1682496" cy="274320"/>
-          </a:xfrm>
-          <a:prstGeom prst="rect">
-            <a:avLst/>
-          </a:prstGeom>
-          <a:noFill/>
-        </p:spPr>
-        <p:txBody>
-          <a:bodyPr wrap="square" lIns="0" tIns="0" rIns="0" bIns="0" anchor="t">
-            <a:spAutoFit/>
-          </a:bodyPr>
-          <a:lstStyle/>
-          <a:p>
-            <a:pPr algn="l" latinLnBrk="1">
-              <a:lnSpc>
-                <a:spcPct val="95000"/>
-              </a:lnSpc>
-            </a:pPr>
-            <a:r>
-              <a:rPr sz="700" b="0">
-                <a:solidFill>
-                  <a:srgbClr val="3D3C3A"/>
-                </a:solidFill>
-                <a:latin typeface="微软雅黑"/>
-                <a:ea typeface="微软雅黑"/>
-              </a:rPr>
-              <a:t>发布正式版模型</a:t>
-            </a:r>
-          </a:p>
-        </p:txBody>
-      </p:sp>
-      <p:sp>
-        <p:nvSpPr>
-          <p:cNvPr id="136" name="tl-stdot-3-1">
-            <a:extLst>
-              <a:ext uri="{FF2B5EF4-FFF2-40B4-BE49-F238E27FC236}">
-                <a16:creationId xmlns:a16="http://schemas.microsoft.com/office/drawing/2014/main" id="{026F0DCF-9086-4439-A87D-07C2C70F925A}"/>
-              </a:ext>
-            </a:extLst>
-          </p:cNvPr>
-          <p:cNvSpPr/>
-          <p:nvPr/>
-        </p:nvSpPr>
-        <p:spPr>
-          <a:xfrm>
-            <a:off x="5989319" y="4375404"/>
-            <a:ext cx="68580" cy="68580"/>
-          </a:xfrm>
-          <a:prstGeom prst="ellipse">
-            <a:avLst/>
-          </a:prstGeom>
-          <a:solidFill>
-            <a:srgbClr val="606060"/>
-          </a:solidFill>
-          <a:ln>
-            <a:noFill/>
-          </a:ln>
-          <a:effectLst/>
-        </p:spPr>
-        <p:style>
-          <a:lnRef idx="1">
-            <a:schemeClr val="accent1"/>
-          </a:lnRef>
-          <a:fillRef idx="3">
-            <a:schemeClr val="accent1"/>
-          </a:fillRef>
-          <a:effectRef idx="2">
-            <a:schemeClr val="accent1"/>
-          </a:effectRef>
-          <a:fontRef idx="minor">
-            <a:schemeClr val="lt1"/>
-          </a:fontRef>
-        </p:style>
-        <p:txBody>
-          <a:bodyPr rtlCol="0" anchor="ctr"/>
-          <a:lstStyle/>
-          <a:p>
-            <a:pPr algn="ctr"/>
-            <a:endParaRPr/>
-          </a:p>
-        </p:txBody>
-      </p:sp>
-      <p:sp>
-        <p:nvSpPr>
-          <p:cNvPr id="137" name="tl-item-3-1">
-            <a:extLst>
-              <a:ext uri="{FF2B5EF4-FFF2-40B4-BE49-F238E27FC236}">
-                <a16:creationId xmlns:a16="http://schemas.microsoft.com/office/drawing/2014/main" id="{B2FDB0D4-3AD0-4CBA-8128-EE439A060EF6}"/>
-              </a:ext>
-            </a:extLst>
-          </p:cNvPr>
-          <p:cNvSpPr txBox="1"/>
-          <p:nvPr/>
-        </p:nvSpPr>
-        <p:spPr>
-          <a:xfrm>
-            <a:off x="6089903" y="4334256"/>
-            <a:ext cx="1682496" cy="274320"/>
-          </a:xfrm>
-          <a:prstGeom prst="rect">
-            <a:avLst/>
-          </a:prstGeom>
-          <a:noFill/>
-        </p:spPr>
-        <p:txBody>
-          <a:bodyPr wrap="square" lIns="0" tIns="0" rIns="0" bIns="0" anchor="t">
-            <a:spAutoFit/>
-          </a:bodyPr>
-          <a:lstStyle/>
-          <a:p>
-            <a:pPr algn="l" latinLnBrk="1">
-              <a:lnSpc>
-                <a:spcPct val="95000"/>
-              </a:lnSpc>
-            </a:pPr>
-            <a:r>
-              <a:rPr sz="700" b="0">
-                <a:solidFill>
-                  <a:srgbClr val="3D3C3A"/>
-                </a:solidFill>
-                <a:latin typeface="微软雅黑"/>
-                <a:ea typeface="微软雅黑"/>
-              </a:rPr>
-              <a:t>链路调通</a:t>
-            </a:r>
-          </a:p>
-        </p:txBody>
-      </p:sp>
-      <p:sp>
-        <p:nvSpPr>
-          <p:cNvPr id="138" name="tl-dot-4">
-            <a:extLst>
-              <a:ext uri="{FF2B5EF4-FFF2-40B4-BE49-F238E27FC236}">
-                <a16:creationId xmlns:a16="http://schemas.microsoft.com/office/drawing/2014/main" id="{0B0625B5-7877-42B7-8F84-CBB8A6353423}"/>
-              </a:ext>
-            </a:extLst>
-          </p:cNvPr>
-          <p:cNvSpPr/>
-          <p:nvPr/>
-        </p:nvSpPr>
-        <p:spPr>
-          <a:xfrm>
-            <a:off x="8631936" y="3771900"/>
-            <a:ext cx="137160" cy="137160"/>
-          </a:xfrm>
-          <a:prstGeom prst="ellipse">
-            <a:avLst/>
-          </a:prstGeom>
-          <a:solidFill>
-            <a:srgbClr val="1F4E79"/>
-          </a:solidFill>
-          <a:ln>
-            <a:noFill/>
-          </a:ln>
-          <a:effectLst/>
-        </p:spPr>
-        <p:style>
-          <a:lnRef idx="1">
-            <a:schemeClr val="accent1"/>
-          </a:lnRef>
-          <a:fillRef idx="3">
-            <a:schemeClr val="accent1"/>
-          </a:fillRef>
-          <a:effectRef idx="2">
-            <a:schemeClr val="accent1"/>
-          </a:effectRef>
-          <a:fontRef idx="minor">
-            <a:schemeClr val="lt1"/>
-          </a:fontRef>
-        </p:style>
-        <p:txBody>
-          <a:bodyPr rtlCol="0" anchor="ctr"/>
-          <a:lstStyle/>
-          <a:p>
-            <a:pPr algn="ctr"/>
-            <a:endParaRPr/>
-          </a:p>
-        </p:txBody>
-      </p:sp>
-      <p:sp>
-        <p:nvSpPr>
-          <p:cNvPr id="139" name="tl-date-4">
-            <a:extLst>
-              <a:ext uri="{FF2B5EF4-FFF2-40B4-BE49-F238E27FC236}">
-                <a16:creationId xmlns:a16="http://schemas.microsoft.com/office/drawing/2014/main" id="{3E51EB03-AA85-4901-B5D2-0973B209E11A}"/>
-              </a:ext>
-            </a:extLst>
-          </p:cNvPr>
-          <p:cNvSpPr txBox="1"/>
-          <p:nvPr/>
-        </p:nvSpPr>
-        <p:spPr>
-          <a:xfrm>
-            <a:off x="7790688" y="3547872"/>
-            <a:ext cx="1819656" cy="146304"/>
-          </a:xfrm>
-          <a:prstGeom prst="rect">
-            <a:avLst/>
-          </a:prstGeom>
-          <a:noFill/>
-        </p:spPr>
-        <p:txBody>
-          <a:bodyPr wrap="square" lIns="0" tIns="0" rIns="0" bIns="0" anchor="t">
-            <a:spAutoFit/>
-          </a:bodyPr>
-          <a:lstStyle/>
-          <a:p>
-            <a:pPr algn="l" latinLnBrk="1"/>
-            <a:r>
-              <a:rPr sz="800" b="1">
-                <a:solidFill>
-                  <a:srgbClr val="1F4E79"/>
-                </a:solidFill>
-                <a:latin typeface="微软雅黑"/>
-                <a:ea typeface="微软雅黑"/>
-              </a:rPr>
-              <a:t>9月15日之前</a:t>
-            </a:r>
-          </a:p>
-        </p:txBody>
-      </p:sp>
-      <p:sp>
-        <p:nvSpPr>
-          <p:cNvPr id="140" name="tl-stdot-4-0">
-            <a:extLst>
-              <a:ext uri="{FF2B5EF4-FFF2-40B4-BE49-F238E27FC236}">
-                <a16:creationId xmlns:a16="http://schemas.microsoft.com/office/drawing/2014/main" id="{E9CFAA7B-F408-4011-B5FE-DF1CF276276C}"/>
-              </a:ext>
-            </a:extLst>
-          </p:cNvPr>
-          <p:cNvSpPr/>
-          <p:nvPr/>
-        </p:nvSpPr>
-        <p:spPr>
-          <a:xfrm>
-            <a:off x="7808975" y="4101084"/>
-            <a:ext cx="68580" cy="68580"/>
-          </a:xfrm>
-          <a:prstGeom prst="ellipse">
-            <a:avLst/>
-          </a:prstGeom>
-          <a:solidFill>
-            <a:srgbClr val="606060"/>
-          </a:solidFill>
-          <a:ln>
-            <a:noFill/>
-          </a:ln>
-          <a:effectLst/>
-        </p:spPr>
-        <p:style>
-          <a:lnRef idx="1">
-            <a:schemeClr val="accent1"/>
-          </a:lnRef>
-          <a:fillRef idx="3">
-            <a:schemeClr val="accent1"/>
-          </a:fillRef>
-          <a:effectRef idx="2">
-            <a:schemeClr val="accent1"/>
-          </a:effectRef>
-          <a:fontRef idx="minor">
-            <a:schemeClr val="lt1"/>
-          </a:fontRef>
-        </p:style>
-        <p:txBody>
-          <a:bodyPr rtlCol="0" anchor="ctr"/>
-          <a:lstStyle/>
-          <a:p>
-            <a:pPr algn="ctr"/>
-            <a:endParaRPr/>
-          </a:p>
-        </p:txBody>
-      </p:sp>
-      <p:sp>
-        <p:nvSpPr>
-          <p:cNvPr id="141" name="tl-item-4-0">
-            <a:extLst>
-              <a:ext uri="{FF2B5EF4-FFF2-40B4-BE49-F238E27FC236}">
-                <a16:creationId xmlns:a16="http://schemas.microsoft.com/office/drawing/2014/main" id="{85A8260C-C41B-4294-AE1E-BC03F20DC6EF}"/>
-              </a:ext>
-            </a:extLst>
-          </p:cNvPr>
-          <p:cNvSpPr txBox="1"/>
-          <p:nvPr/>
-        </p:nvSpPr>
-        <p:spPr>
-          <a:xfrm>
-            <a:off x="7909560" y="4059936"/>
-            <a:ext cx="1682496" cy="274320"/>
-          </a:xfrm>
-          <a:prstGeom prst="rect">
-            <a:avLst/>
-          </a:prstGeom>
-          <a:noFill/>
-        </p:spPr>
-        <p:txBody>
-          <a:bodyPr wrap="square" lIns="0" tIns="0" rIns="0" bIns="0" anchor="t">
-            <a:spAutoFit/>
-          </a:bodyPr>
-          <a:lstStyle/>
-          <a:p>
-            <a:pPr algn="l" latinLnBrk="1">
-              <a:lnSpc>
-                <a:spcPct val="95000"/>
-              </a:lnSpc>
-            </a:pPr>
-            <a:r>
-              <a:rPr sz="700" b="0">
-                <a:solidFill>
-                  <a:srgbClr val="3D3C3A"/>
-                </a:solidFill>
-                <a:latin typeface="微软雅黑"/>
-                <a:ea typeface="微软雅黑"/>
-              </a:rPr>
-              <a:t>新 S-CALC 开发完成</a:t>
-            </a:r>
-          </a:p>
-        </p:txBody>
-      </p:sp>
-      <p:sp>
-        <p:nvSpPr>
-          <p:cNvPr id="142" name="tl-stdot-4-1">
-            <a:extLst>
-              <a:ext uri="{FF2B5EF4-FFF2-40B4-BE49-F238E27FC236}">
-                <a16:creationId xmlns:a16="http://schemas.microsoft.com/office/drawing/2014/main" id="{5724C7C0-9ECA-489A-89A3-04C9C729BB68}"/>
-              </a:ext>
-            </a:extLst>
-          </p:cNvPr>
-          <p:cNvSpPr/>
-          <p:nvPr/>
-        </p:nvSpPr>
-        <p:spPr>
-          <a:xfrm>
-            <a:off x="7808975" y="4375404"/>
-            <a:ext cx="68580" cy="68580"/>
-          </a:xfrm>
-          <a:prstGeom prst="ellipse">
-            <a:avLst/>
-          </a:prstGeom>
-          <a:solidFill>
-            <a:srgbClr val="606060"/>
-          </a:solidFill>
-          <a:ln>
-            <a:noFill/>
-          </a:ln>
-          <a:effectLst/>
-        </p:spPr>
-        <p:style>
-          <a:lnRef idx="1">
-            <a:schemeClr val="accent1"/>
-          </a:lnRef>
-          <a:fillRef idx="3">
-            <a:schemeClr val="accent1"/>
-          </a:fillRef>
-          <a:effectRef idx="2">
-            <a:schemeClr val="accent1"/>
-          </a:effectRef>
-          <a:fontRef idx="minor">
-            <a:schemeClr val="lt1"/>
-          </a:fontRef>
-        </p:style>
-        <p:txBody>
-          <a:bodyPr rtlCol="0" anchor="ctr"/>
-          <a:lstStyle/>
-          <a:p>
-            <a:pPr algn="ctr"/>
-            <a:endParaRPr/>
-          </a:p>
-        </p:txBody>
-      </p:sp>
-      <p:sp>
-        <p:nvSpPr>
-          <p:cNvPr id="143" name="tl-item-4-1">
-            <a:extLst>
-              <a:ext uri="{FF2B5EF4-FFF2-40B4-BE49-F238E27FC236}">
-                <a16:creationId xmlns:a16="http://schemas.microsoft.com/office/drawing/2014/main" id="{2773F452-0BD8-44A5-8A21-5E2EEF372780}"/>
-              </a:ext>
-            </a:extLst>
-          </p:cNvPr>
-          <p:cNvSpPr txBox="1"/>
-          <p:nvPr/>
-        </p:nvSpPr>
-        <p:spPr>
-          <a:xfrm>
-            <a:off x="7909560" y="4334256"/>
-            <a:ext cx="1682496" cy="102336"/>
-          </a:xfrm>
-          <a:prstGeom prst="rect">
-            <a:avLst/>
-          </a:prstGeom>
-          <a:noFill/>
-        </p:spPr>
-        <p:txBody>
-          <a:bodyPr wrap="square" lIns="0" tIns="0" rIns="0" bIns="0" anchor="t">
-            <a:spAutoFit/>
-          </a:bodyPr>
-          <a:lstStyle/>
-          <a:p>
-            <a:pPr algn="l" latinLnBrk="1">
-              <a:lnSpc>
-                <a:spcPct val="95000"/>
-              </a:lnSpc>
-            </a:pPr>
-            <a:r>
-              <a:rPr sz="700" b="0" dirty="0">
-                <a:solidFill>
-                  <a:srgbClr val="3D3C3A"/>
-                </a:solidFill>
-                <a:latin typeface="微软雅黑"/>
-                <a:ea typeface="微软雅黑"/>
-              </a:rPr>
-              <a:t>LMS </a:t>
-            </a:r>
-            <a:r>
-              <a:rPr sz="700" b="0" dirty="0" err="1">
-                <a:solidFill>
-                  <a:srgbClr val="3D3C3A"/>
-                </a:solidFill>
-                <a:latin typeface="微软雅黑"/>
-                <a:ea typeface="微软雅黑"/>
-              </a:rPr>
-              <a:t>新页面开发完成</a:t>
+              <a:t>空跑结束，具备切量条件</a:t>
             </a:r>
             <a:endParaRPr sz="700" b="0" dirty="0">
               <a:solidFill>
@@ -8495,196 +8384,6 @@
               <a:latin typeface="微软雅黑"/>
               <a:ea typeface="微软雅黑"/>
             </a:endParaRPr>
-          </a:p>
-        </p:txBody>
-      </p:sp>
-      <p:sp>
-        <p:nvSpPr>
-          <p:cNvPr id="144" name="tl-dot-5">
-            <a:extLst>
-              <a:ext uri="{FF2B5EF4-FFF2-40B4-BE49-F238E27FC236}">
-                <a16:creationId xmlns:a16="http://schemas.microsoft.com/office/drawing/2014/main" id="{A0D83AE4-64AC-4A62-8C02-3CD6556A4584}"/>
-              </a:ext>
-            </a:extLst>
-          </p:cNvPr>
-          <p:cNvSpPr/>
-          <p:nvPr/>
-        </p:nvSpPr>
-        <p:spPr>
-          <a:xfrm>
-            <a:off x="10451592" y="3771900"/>
-            <a:ext cx="137160" cy="137160"/>
-          </a:xfrm>
-          <a:prstGeom prst="ellipse">
-            <a:avLst/>
-          </a:prstGeom>
-          <a:solidFill>
-            <a:srgbClr val="1F4E79"/>
-          </a:solidFill>
-          <a:ln>
-            <a:noFill/>
-          </a:ln>
-          <a:effectLst/>
-        </p:spPr>
-        <p:style>
-          <a:lnRef idx="1">
-            <a:schemeClr val="accent1"/>
-          </a:lnRef>
-          <a:fillRef idx="3">
-            <a:schemeClr val="accent1"/>
-          </a:fillRef>
-          <a:effectRef idx="2">
-            <a:schemeClr val="accent1"/>
-          </a:effectRef>
-          <a:fontRef idx="minor">
-            <a:schemeClr val="lt1"/>
-          </a:fontRef>
-        </p:style>
-        <p:txBody>
-          <a:bodyPr rtlCol="0" anchor="ctr"/>
-          <a:lstStyle/>
-          <a:p>
-            <a:pPr algn="ctr"/>
-            <a:endParaRPr/>
-          </a:p>
-        </p:txBody>
-      </p:sp>
-      <p:sp>
-        <p:nvSpPr>
-          <p:cNvPr id="145" name="tl-date-5">
-            <a:extLst>
-              <a:ext uri="{FF2B5EF4-FFF2-40B4-BE49-F238E27FC236}">
-                <a16:creationId xmlns:a16="http://schemas.microsoft.com/office/drawing/2014/main" id="{B50D6AAC-8066-470F-B5E0-273503A137BB}"/>
-              </a:ext>
-            </a:extLst>
-          </p:cNvPr>
-          <p:cNvSpPr txBox="1"/>
-          <p:nvPr/>
-        </p:nvSpPr>
-        <p:spPr>
-          <a:xfrm>
-            <a:off x="9610344" y="3547872"/>
-            <a:ext cx="1819656" cy="146304"/>
-          </a:xfrm>
-          <a:prstGeom prst="rect">
-            <a:avLst/>
-          </a:prstGeom>
-          <a:noFill/>
-        </p:spPr>
-        <p:txBody>
-          <a:bodyPr wrap="square" lIns="0" tIns="0" rIns="0" bIns="0" anchor="t">
-            <a:spAutoFit/>
-          </a:bodyPr>
-          <a:lstStyle/>
-          <a:p>
-            <a:pPr algn="l" latinLnBrk="1"/>
-            <a:r>
-              <a:rPr sz="800" b="1">
-                <a:solidFill>
-                  <a:srgbClr val="1F4E79"/>
-                </a:solidFill>
-                <a:latin typeface="微软雅黑"/>
-                <a:ea typeface="微软雅黑"/>
-              </a:rPr>
-              <a:t>S-CALC 开发完成后</a:t>
-            </a:r>
-          </a:p>
-        </p:txBody>
-      </p:sp>
-      <p:sp>
-        <p:nvSpPr>
-          <p:cNvPr id="146" name="tl-stdot-5-0">
-            <a:extLst>
-              <a:ext uri="{FF2B5EF4-FFF2-40B4-BE49-F238E27FC236}">
-                <a16:creationId xmlns:a16="http://schemas.microsoft.com/office/drawing/2014/main" id="{51BC9350-261D-4BA0-B534-1CD7A9D2A8E8}"/>
-              </a:ext>
-            </a:extLst>
-          </p:cNvPr>
-          <p:cNvSpPr/>
-          <p:nvPr/>
-        </p:nvSpPr>
-        <p:spPr>
-          <a:xfrm>
-            <a:off x="9628632" y="4101084"/>
-            <a:ext cx="68580" cy="68580"/>
-          </a:xfrm>
-          <a:prstGeom prst="ellipse">
-            <a:avLst/>
-          </a:prstGeom>
-          <a:solidFill>
-            <a:srgbClr val="606060"/>
-          </a:solidFill>
-          <a:ln>
-            <a:noFill/>
-          </a:ln>
-          <a:effectLst/>
-        </p:spPr>
-        <p:style>
-          <a:lnRef idx="1">
-            <a:schemeClr val="accent1"/>
-          </a:lnRef>
-          <a:fillRef idx="3">
-            <a:schemeClr val="accent1"/>
-          </a:fillRef>
-          <a:effectRef idx="2">
-            <a:schemeClr val="accent1"/>
-          </a:effectRef>
-          <a:fontRef idx="minor">
-            <a:schemeClr val="lt1"/>
-          </a:fontRef>
-        </p:style>
-        <p:txBody>
-          <a:bodyPr rtlCol="0" anchor="ctr"/>
-          <a:lstStyle/>
-          <a:p>
-            <a:pPr algn="ctr"/>
-            <a:endParaRPr/>
-          </a:p>
-        </p:txBody>
-      </p:sp>
-      <p:sp>
-        <p:nvSpPr>
-          <p:cNvPr id="147" name="tl-item-5-0">
-            <a:extLst>
-              <a:ext uri="{FF2B5EF4-FFF2-40B4-BE49-F238E27FC236}">
-                <a16:creationId xmlns:a16="http://schemas.microsoft.com/office/drawing/2014/main" id="{A71DEA1D-7524-4549-B8EE-3CFB9271FAF2}"/>
-              </a:ext>
-            </a:extLst>
-          </p:cNvPr>
-          <p:cNvSpPr txBox="1"/>
-          <p:nvPr/>
-        </p:nvSpPr>
-        <p:spPr>
-          <a:xfrm>
-            <a:off x="9729216" y="4059936"/>
-            <a:ext cx="1682496" cy="274320"/>
-          </a:xfrm>
-          <a:prstGeom prst="rect">
-            <a:avLst/>
-          </a:prstGeom>
-          <a:noFill/>
-        </p:spPr>
-        <p:txBody>
-          <a:bodyPr wrap="square" lIns="0" tIns="0" rIns="0" bIns="0" anchor="t">
-            <a:spAutoFit/>
-          </a:bodyPr>
-          <a:lstStyle/>
-          <a:p>
-            <a:pPr algn="l" latinLnBrk="1">
-              <a:lnSpc>
-                <a:spcPct val="95000"/>
-              </a:lnSpc>
-            </a:pPr>
-            <a:r>
-              <a:rPr sz="700" b="0">
-                <a:solidFill>
-                  <a:srgbClr val="3D3C3A"/>
-                </a:solidFill>
-                <a:latin typeface="微软雅黑"/>
-                <a:ea typeface="微软雅黑"/>
-              </a:rPr>
-              <a:t>开通 AB 测试</a:t>
-            </a:r>
           </a:p>
         </p:txBody>
       </p:sp>

--- a/端到端流程与模型规划_单页汇报.pptx
+++ b/端到端流程与模型规划_单页汇报.pptx
@@ -7184,27 +7184,7 @@
                 <a:latin typeface="微软雅黑"/>
                 <a:ea typeface="微软雅黑"/>
               </a:rPr>
-              <a:t>发布</a:t>
-            </a:r>
-            <a:r>
-              <a:rPr lang="en-US" altLang="zh-CN" sz="700" dirty="0">
-                <a:solidFill>
-                  <a:srgbClr val="3D3C3A"/>
-                </a:solidFill>
-                <a:latin typeface="微软雅黑"/>
-                <a:ea typeface="微软雅黑"/>
-              </a:rPr>
-              <a:t>liability </a:t>
-            </a:r>
-            <a:r>
-              <a:rPr lang="zh-CN" altLang="en-US" sz="700" dirty="0">
-                <a:solidFill>
-                  <a:srgbClr val="3D3C3A"/>
-                </a:solidFill>
-                <a:latin typeface="微软雅黑"/>
-                <a:ea typeface="微软雅黑"/>
-              </a:rPr>
-              <a:t>识别报告</a:t>
+              <a:t>发布 Liability 识别报告</a:t>
             </a:r>
             <a:endParaRPr lang="en-US" sz="700" b="0" dirty="0">
               <a:solidFill>
@@ -7230,7 +7210,7 @@
                 <a:latin typeface="微软雅黑"/>
                 <a:ea typeface="微软雅黑"/>
               </a:rPr>
-              <a:t>下游平台开始模型调用链路开发</a:t>
+              <a:t>下游平台启动模型调用链路开发</a:t>
             </a:r>
           </a:p>
         </p:txBody>
@@ -7378,27 +7358,7 @@
                 <a:latin typeface="微软雅黑"/>
                 <a:ea typeface="微软雅黑"/>
               </a:rPr>
-              <a:t>负债</a:t>
-            </a:r>
-            <a:r>
-              <a:rPr sz="700" b="0" dirty="0">
-                <a:solidFill>
-                  <a:srgbClr val="3D3C3A"/>
-                </a:solidFill>
-                <a:latin typeface="微软雅黑"/>
-                <a:ea typeface="微软雅黑"/>
-              </a:rPr>
-              <a:t> / </a:t>
-            </a:r>
-            <a:r>
-              <a:rPr sz="700" b="0" dirty="0" err="1">
-                <a:solidFill>
-                  <a:srgbClr val="3D3C3A"/>
-                </a:solidFill>
-                <a:latin typeface="微软雅黑"/>
-                <a:ea typeface="微软雅黑"/>
-              </a:rPr>
-              <a:t>收入类知识库基本初始化完成</a:t>
+              <a:t>负债/收入类知识库初始化基本完成</a:t>
             </a:r>
             <a:endParaRPr lang="en-US" sz="700" b="0" dirty="0">
               <a:solidFill>
@@ -7450,27 +7410,7 @@
                 <a:latin typeface="微软雅黑"/>
                 <a:ea typeface="微软雅黑"/>
               </a:rPr>
-              <a:t>新 </a:t>
-            </a:r>
-            <a:r>
-              <a:rPr lang="en-US" altLang="zh-CN" sz="700" b="0" dirty="0">
-                <a:solidFill>
-                  <a:srgbClr val="3D3C3A"/>
-                </a:solidFill>
-                <a:latin typeface="微软雅黑"/>
-                <a:ea typeface="微软雅黑"/>
-              </a:rPr>
-              <a:t>S-CALC </a:t>
-            </a:r>
-            <a:r>
-              <a:rPr lang="zh-CN" altLang="en-US" sz="700" dirty="0">
-                <a:solidFill>
-                  <a:srgbClr val="3D3C3A"/>
-                </a:solidFill>
-                <a:latin typeface="微软雅黑"/>
-                <a:ea typeface="微软雅黑"/>
-              </a:rPr>
-              <a:t>开始开发</a:t>
+              <a:t>新 S-CALC 开发中</a:t>
             </a:r>
             <a:endParaRPr lang="en-US" altLang="zh-CN" sz="700" dirty="0">
               <a:solidFill>
@@ -7496,47 +7436,7 @@
                 <a:latin typeface="微软雅黑"/>
                 <a:ea typeface="微软雅黑"/>
               </a:rPr>
-              <a:t>开通新旧</a:t>
-            </a:r>
-            <a:r>
-              <a:rPr lang="en-US" altLang="zh-CN" sz="700" b="0" dirty="0">
-                <a:solidFill>
-                  <a:srgbClr val="3D3C3A"/>
-                </a:solidFill>
-                <a:latin typeface="微软雅黑"/>
-                <a:ea typeface="微软雅黑"/>
-              </a:rPr>
-              <a:t>IDP</a:t>
-            </a:r>
-            <a:r>
-              <a:rPr lang="zh-CN" altLang="en-US" sz="700" b="0" dirty="0">
-                <a:solidFill>
-                  <a:srgbClr val="3D3C3A"/>
-                </a:solidFill>
-                <a:latin typeface="微软雅黑"/>
-                <a:ea typeface="微软雅黑"/>
-              </a:rPr>
-              <a:t>链路 </a:t>
-            </a:r>
-            <a:r>
-              <a:rPr lang="en-US" altLang="zh-CN" sz="700" b="0" dirty="0">
-                <a:solidFill>
-                  <a:srgbClr val="3D3C3A"/>
-                </a:solidFill>
-                <a:latin typeface="微软雅黑"/>
-                <a:ea typeface="微软雅黑"/>
-              </a:rPr>
-              <a:t>AB </a:t>
-            </a:r>
-            <a:r>
-              <a:rPr lang="zh-CN" altLang="en-US" sz="700" b="0" dirty="0">
-                <a:solidFill>
-                  <a:srgbClr val="3D3C3A"/>
-                </a:solidFill>
-                <a:latin typeface="微软雅黑"/>
-                <a:ea typeface="微软雅黑"/>
-              </a:rPr>
-              <a:t>测试</a:t>
+              <a:t>启动新旧 IDP 链路 AB 测试</a:t>
             </a:r>
           </a:p>
           <a:p>
@@ -7719,7 +7619,7 @@
                 <a:latin typeface="微软雅黑"/>
                 <a:ea typeface="微软雅黑"/>
               </a:rPr>
-              <a:t>发布全分类详细模型效果评估报告</a:t>
+              <a:t>发布全分类模型效果详细评估报告</a:t>
             </a:r>
           </a:p>
         </p:txBody>
@@ -7886,7 +7786,7 @@
                 <a:latin typeface="微软雅黑"/>
                 <a:ea typeface="微软雅黑"/>
               </a:rPr>
-              <a:t>新的分类数据落库</a:t>
+              <a:t>新分类数据落库</a:t>
             </a:r>
             <a:endParaRPr lang="en-US" sz="700" b="0" dirty="0">
               <a:solidFill>
@@ -7938,7 +7838,7 @@
                 <a:latin typeface="微软雅黑"/>
                 <a:ea typeface="微软雅黑"/>
               </a:rPr>
-              <a:t>调通后开始空跑两周</a:t>
+              <a:t>链路调通后空跑两周</a:t>
             </a:r>
             <a:endParaRPr sz="700" b="0" dirty="0">
               <a:solidFill>
@@ -8135,57 +8035,7 @@
                 <a:latin typeface="微软雅黑"/>
                 <a:ea typeface="微软雅黑"/>
               </a:rPr>
-              <a:t>开通</a:t>
-            </a:r>
-            <a:r>
-              <a:rPr lang="zh-CN" altLang="en-US" sz="700" b="0" dirty="0">
-                <a:solidFill>
-                  <a:srgbClr val="3D3C3A"/>
-                </a:solidFill>
-                <a:latin typeface="微软雅黑"/>
-                <a:ea typeface="微软雅黑"/>
-              </a:rPr>
-              <a:t>新旧</a:t>
-            </a:r>
-            <a:r>
-              <a:rPr lang="en-US" altLang="zh-CN" sz="700" b="0" dirty="0">
-                <a:solidFill>
-                  <a:srgbClr val="3D3C3A"/>
-                </a:solidFill>
-                <a:latin typeface="微软雅黑"/>
-                <a:ea typeface="微软雅黑"/>
-              </a:rPr>
-              <a:t>IDP</a:t>
-            </a:r>
-            <a:r>
-              <a:rPr lang="zh-CN" altLang="en-US" sz="700" b="0" dirty="0">
-                <a:solidFill>
-                  <a:srgbClr val="3D3C3A"/>
-                </a:solidFill>
-                <a:latin typeface="微软雅黑"/>
-                <a:ea typeface="微软雅黑"/>
-              </a:rPr>
-              <a:t>链路</a:t>
-            </a:r>
-            <a:r>
-              <a:rPr sz="700" b="0" dirty="0">
-                <a:solidFill>
-                  <a:srgbClr val="3D3C3A"/>
-                </a:solidFill>
-                <a:latin typeface="微软雅黑"/>
-                <a:ea typeface="微软雅黑"/>
-              </a:rPr>
-              <a:t> AB </a:t>
-            </a:r>
-            <a:r>
-              <a:rPr sz="700" b="0" dirty="0" err="1">
-                <a:solidFill>
-                  <a:srgbClr val="3D3C3A"/>
-                </a:solidFill>
-                <a:latin typeface="微软雅黑"/>
-                <a:ea typeface="微软雅黑"/>
-              </a:rPr>
-              <a:t>测试</a:t>
+              <a:t>启动新旧 IDP 链路 AB 测试</a:t>
             </a:r>
             <a:endParaRPr lang="en-US" sz="700" b="0" dirty="0">
               <a:solidFill>
@@ -8287,47 +8137,7 @@
                 <a:latin typeface="微软雅黑"/>
                 <a:ea typeface="微软雅黑"/>
               </a:rPr>
-              <a:t>完成新旧</a:t>
-            </a:r>
-            <a:r>
-              <a:rPr lang="en-US" altLang="zh-CN" sz="700" b="0" dirty="0">
-                <a:solidFill>
-                  <a:srgbClr val="3D3C3A"/>
-                </a:solidFill>
-                <a:latin typeface="微软雅黑"/>
-                <a:ea typeface="微软雅黑"/>
-              </a:rPr>
-              <a:t>IDP</a:t>
-            </a:r>
-            <a:r>
-              <a:rPr lang="zh-CN" altLang="en-US" sz="700" b="0" dirty="0">
-                <a:solidFill>
-                  <a:srgbClr val="3D3C3A"/>
-                </a:solidFill>
-                <a:latin typeface="微软雅黑"/>
-                <a:ea typeface="微软雅黑"/>
-              </a:rPr>
-              <a:t>链路 </a:t>
-            </a:r>
-            <a:r>
-              <a:rPr lang="en-US" altLang="zh-CN" sz="700" b="0" dirty="0">
-                <a:solidFill>
-                  <a:srgbClr val="3D3C3A"/>
-                </a:solidFill>
-                <a:latin typeface="微软雅黑"/>
-                <a:ea typeface="微软雅黑"/>
-              </a:rPr>
-              <a:t>AB </a:t>
-            </a:r>
-            <a:r>
-              <a:rPr lang="zh-CN" altLang="en-US" sz="700" b="0" dirty="0">
-                <a:solidFill>
-                  <a:srgbClr val="3D3C3A"/>
-                </a:solidFill>
-                <a:latin typeface="微软雅黑"/>
-                <a:ea typeface="微软雅黑"/>
-              </a:rPr>
-              <a:t>测试</a:t>
+              <a:t>完成新旧 IDP 链路 AB 测试</a:t>
             </a:r>
           </a:p>
         </p:txBody>

--- a/端到端流程与模型规划_单页汇报.pptx
+++ b/端到端流程与模型规划_单页汇报.pptx
@@ -4017,7 +4017,6 @@
               <a:uFillTx/>
               <a:latin typeface="微软雅黑" panose="020B0503020204020204" pitchFamily="34" charset="-122"/>
               <a:ea typeface="微软雅黑" panose="020B0503020204020204" pitchFamily="34" charset="-122"/>
-              <a:cs typeface="+mn-cs"/>
             </a:endParaRPr>
           </a:p>
         </p:txBody>
@@ -4119,20 +4118,71 @@
               <a:buNone/>
             </a:pPr>
             <a:r>
-              <a:rPr lang="en-US" altLang="zh-CN" sz="2400" b="1" dirty="0" err="1">
+              <a:rPr lang="en-US" altLang="zh-CN" sz="2400" b="1" dirty="0">
                 <a:solidFill>
                   <a:schemeClr val="bg1"/>
                 </a:solidFill>
-                <a:latin typeface="Microsoft YaHei" pitchFamily="34" charset="0"/>
-                <a:ea typeface="Microsoft YaHei" pitchFamily="34" charset="-122"/>
-                <a:cs typeface="Microsoft YaHei" pitchFamily="34" charset="-120"/>
+                <a:latin typeface="微软雅黑" panose="020B0503020204020204" pitchFamily="34" charset="-122"/>
+                <a:ea typeface="微软雅黑" panose="020B0503020204020204" pitchFamily="34" charset="-122"/>
               </a:rPr>
-              <a:t>端到端流程与模型规划：从模型调用到运维闭环</a:t>
-            </a:r>
-            <a:endParaRPr lang="en-US" altLang="zh-CN" sz="2400" dirty="0">
+              <a:t>BS-CAT </a:t>
+            </a:r>
+            <a:r>
+              <a:rPr lang="zh-CN" altLang="en-US" sz="2400" b="1" dirty="0">
+                <a:solidFill>
+                  <a:schemeClr val="bg1"/>
+                </a:solidFill>
+                <a:latin typeface="微软雅黑" panose="020B0503020204020204" pitchFamily="34" charset="-122"/>
+                <a:ea typeface="微软雅黑" panose="020B0503020204020204" pitchFamily="34" charset="-122"/>
+              </a:rPr>
+              <a:t>模型｜</a:t>
+            </a:r>
+            <a:r>
+              <a:rPr lang="en-US" altLang="zh-CN" sz="2400" b="1" dirty="0">
+                <a:solidFill>
+                  <a:schemeClr val="bg1"/>
+                </a:solidFill>
+                <a:latin typeface="微软雅黑" panose="020B0503020204020204" pitchFamily="34" charset="-122"/>
+                <a:ea typeface="微软雅黑" panose="020B0503020204020204" pitchFamily="34" charset="-122"/>
+              </a:rPr>
+              <a:t>8 </a:t>
+            </a:r>
+            <a:r>
+              <a:rPr lang="zh-CN" altLang="en-US" sz="2400" b="1" dirty="0">
+                <a:solidFill>
+                  <a:schemeClr val="bg1"/>
+                </a:solidFill>
+                <a:latin typeface="微软雅黑" panose="020B0503020204020204" pitchFamily="34" charset="-122"/>
+                <a:ea typeface="微软雅黑" panose="020B0503020204020204" pitchFamily="34" charset="-122"/>
+              </a:rPr>
+              <a:t>月进展回顾 </a:t>
+            </a:r>
+            <a:r>
+              <a:rPr lang="en-US" altLang="zh-CN" sz="2400" b="1" dirty="0">
+                <a:solidFill>
+                  <a:schemeClr val="bg1"/>
+                </a:solidFill>
+                <a:latin typeface="微软雅黑" panose="020B0503020204020204" pitchFamily="34" charset="-122"/>
+                <a:ea typeface="微软雅黑" panose="020B0503020204020204" pitchFamily="34" charset="-122"/>
+              </a:rPr>
+              <a:t>&amp; 9 </a:t>
+            </a:r>
+            <a:r>
+              <a:rPr lang="zh-CN" altLang="en-US" sz="2400" b="1" dirty="0">
+                <a:solidFill>
+                  <a:schemeClr val="bg1"/>
+                </a:solidFill>
+                <a:latin typeface="微软雅黑" panose="020B0503020204020204" pitchFamily="34" charset="-122"/>
+                <a:ea typeface="微软雅黑" panose="020B0503020204020204" pitchFamily="34" charset="-122"/>
+              </a:rPr>
+              <a:t>月重点目标</a:t>
+            </a:r>
+            <a:endParaRPr lang="en-US" altLang="zh-CN" sz="2400" b="1" dirty="0">
               <a:solidFill>
                 <a:schemeClr val="bg1"/>
               </a:solidFill>
+              <a:latin typeface="微软雅黑" panose="020B0503020204020204" pitchFamily="34" charset="-122"/>
+              <a:ea typeface="微软雅黑" panose="020B0503020204020204" pitchFamily="34" charset="-122"/>
             </a:endParaRPr>
           </a:p>
         </p:txBody>
@@ -4151,7 +4201,7 @@
         </p:nvSpPr>
         <p:spPr>
           <a:xfrm>
-            <a:off x="410288" y="822672"/>
+            <a:off x="410288" y="928059"/>
             <a:ext cx="64008" cy="201168"/>
           </a:xfrm>
           <a:prstGeom prst="rect">
@@ -4184,7 +4234,7 @@
         </p:nvSpPr>
         <p:spPr>
           <a:xfrm>
-            <a:off x="538304" y="804384"/>
+            <a:off x="538304" y="922127"/>
             <a:ext cx="11119104" cy="237744"/>
           </a:xfrm>
           <a:prstGeom prst="rect">
@@ -4207,602 +4257,1638 @@
                 <a:solidFill>
                   <a:srgbClr val="111111"/>
                 </a:solidFill>
-                <a:latin typeface="Microsoft YaHei" pitchFamily="34" charset="0"/>
-                <a:ea typeface="Microsoft YaHei" pitchFamily="34" charset="-122"/>
-                <a:cs typeface="Microsoft YaHei" pitchFamily="34" charset="-120"/>
+                <a:latin typeface="微软雅黑" panose="020B0503020204020204" pitchFamily="34" charset="-122"/>
+                <a:ea typeface="微软雅黑" panose="020B0503020204020204" pitchFamily="34" charset="-122"/>
               </a:rPr>
-              <a:t>1. 端到端链路：分类模型前置输出，IDA 保持轻量调度</a:t>
-            </a:r>
-            <a:endParaRPr lang="en-US" sz="1400" dirty="0"/>
-          </a:p>
-        </p:txBody>
-      </p:sp>
-      <p:sp>
-        <p:nvSpPr>
-          <p:cNvPr id="36" name="Shape 10">
-            <a:extLst>
-              <a:ext uri="{FF2B5EF4-FFF2-40B4-BE49-F238E27FC236}">
-                <a16:creationId xmlns:a16="http://schemas.microsoft.com/office/drawing/2014/main" id="{446194FF-3EFA-436F-8989-696D5C1A261B}"/>
-              </a:ext>
-            </a:extLst>
-          </p:cNvPr>
-          <p:cNvSpPr/>
+              <a:t>1. </a:t>
+            </a:r>
+            <a:r>
+              <a:rPr lang="zh-CN" altLang="en-US" sz="1400" b="1" dirty="0">
+                <a:solidFill>
+                  <a:srgbClr val="111111"/>
+                </a:solidFill>
+                <a:latin typeface="微软雅黑" panose="020B0503020204020204" pitchFamily="34" charset="-122"/>
+                <a:ea typeface="微软雅黑" panose="020B0503020204020204" pitchFamily="34" charset="-122"/>
+              </a:rPr>
+              <a:t>目标架构：</a:t>
+            </a:r>
+            <a:r>
+              <a:rPr lang="en-US" altLang="zh-CN" sz="1400" b="1" dirty="0">
+                <a:solidFill>
+                  <a:srgbClr val="111111"/>
+                </a:solidFill>
+                <a:latin typeface="微软雅黑" panose="020B0503020204020204" pitchFamily="34" charset="-122"/>
+                <a:ea typeface="微软雅黑" panose="020B0503020204020204" pitchFamily="34" charset="-122"/>
+              </a:rPr>
+              <a:t>BS-CAT </a:t>
+            </a:r>
+            <a:r>
+              <a:rPr lang="zh-CN" altLang="en-US" sz="1400" b="1" dirty="0">
+                <a:solidFill>
+                  <a:srgbClr val="111111"/>
+                </a:solidFill>
+                <a:latin typeface="微软雅黑" panose="020B0503020204020204" pitchFamily="34" charset="-122"/>
+                <a:ea typeface="微软雅黑" panose="020B0503020204020204" pitchFamily="34" charset="-122"/>
+              </a:rPr>
+              <a:t>前置产出，</a:t>
+            </a:r>
+            <a:r>
+              <a:rPr lang="en-US" altLang="zh-CN" sz="1400" b="1" dirty="0">
+                <a:solidFill>
+                  <a:srgbClr val="111111"/>
+                </a:solidFill>
+                <a:latin typeface="微软雅黑" panose="020B0503020204020204" pitchFamily="34" charset="-122"/>
+                <a:ea typeface="微软雅黑" panose="020B0503020204020204" pitchFamily="34" charset="-122"/>
+              </a:rPr>
+              <a:t>IDA </a:t>
+            </a:r>
+            <a:r>
+              <a:rPr lang="zh-CN" altLang="en-US" sz="1400" b="1" dirty="0">
+                <a:solidFill>
+                  <a:srgbClr val="111111"/>
+                </a:solidFill>
+                <a:latin typeface="微软雅黑" panose="020B0503020204020204" pitchFamily="34" charset="-122"/>
+                <a:ea typeface="微软雅黑" panose="020B0503020204020204" pitchFamily="34" charset="-122"/>
+              </a:rPr>
+              <a:t>轻量编排</a:t>
+            </a:r>
+            <a:endParaRPr lang="en-US" sz="1400" b="1" dirty="0">
+              <a:solidFill>
+                <a:srgbClr val="111111"/>
+              </a:solidFill>
+              <a:latin typeface="微软雅黑" panose="020B0503020204020204" pitchFamily="34" charset="-122"/>
+              <a:ea typeface="微软雅黑" panose="020B0503020204020204" pitchFamily="34" charset="-122"/>
+            </a:endParaRPr>
+          </a:p>
+        </p:txBody>
+      </p:sp>
+      <p:grpSp>
+        <p:nvGrpSpPr>
+          <p:cNvPr id="5" name="组合 4">
+            <a:extLst>
+              <a:ext uri="{FF2B5EF4-FFF2-40B4-BE49-F238E27FC236}">
+                <a16:creationId xmlns:a16="http://schemas.microsoft.com/office/drawing/2014/main" id="{AC2C0ACB-DDB1-43FB-8845-485A3870B1F4}"/>
+              </a:ext>
+            </a:extLst>
+          </p:cNvPr>
+          <p:cNvGrpSpPr/>
           <p:nvPr/>
-        </p:nvSpPr>
-        <p:spPr>
+        </p:nvGrpSpPr>
+        <p:grpSpPr>
           <a:xfrm>
-            <a:off x="428576" y="1165572"/>
-            <a:ext cx="11228832" cy="896112"/>
+            <a:off x="428576" y="1301849"/>
+            <a:ext cx="11228832" cy="1032060"/>
+            <a:chOff x="428576" y="1128504"/>
+            <a:chExt cx="11228832" cy="1032060"/>
           </a:xfrm>
-          <a:prstGeom prst="rect">
-            <a:avLst/>
-          </a:prstGeom>
-          <a:solidFill>
-            <a:srgbClr val="F2F2F2"/>
-          </a:solidFill>
-          <a:ln w="6350">
+        </p:grpSpPr>
+        <p:sp>
+          <p:nvSpPr>
+            <p:cNvPr id="36" name="Shape 10">
+              <a:extLst>
+                <a:ext uri="{FF2B5EF4-FFF2-40B4-BE49-F238E27FC236}">
+                  <a16:creationId xmlns:a16="http://schemas.microsoft.com/office/drawing/2014/main" id="{446194FF-3EFA-436F-8989-696D5C1A261B}"/>
+                </a:ext>
+              </a:extLst>
+            </p:cNvPr>
+            <p:cNvSpPr/>
+            <p:nvPr/>
+          </p:nvSpPr>
+          <p:spPr>
+            <a:xfrm>
+              <a:off x="428576" y="1128504"/>
+              <a:ext cx="11228832" cy="1032060"/>
+            </a:xfrm>
+            <a:prstGeom prst="rect">
+              <a:avLst/>
+            </a:prstGeom>
             <a:solidFill>
-              <a:srgbClr val="F2F2F2">
-                <a:alpha val="0"/>
-              </a:srgbClr>
+              <a:srgbClr val="F2F2F2"/>
             </a:solidFill>
-            <a:prstDash val="solid"/>
-          </a:ln>
-        </p:spPr>
-      </p:sp>
-      <p:sp>
-        <p:nvSpPr>
-          <p:cNvPr id="37" name="Shape 11">
-            <a:extLst>
-              <a:ext uri="{FF2B5EF4-FFF2-40B4-BE49-F238E27FC236}">
-                <a16:creationId xmlns:a16="http://schemas.microsoft.com/office/drawing/2014/main" id="{99A02E21-C2CA-4400-AA29-C95ED41D8B71}"/>
-              </a:ext>
-            </a:extLst>
-          </p:cNvPr>
-          <p:cNvSpPr/>
-          <p:nvPr/>
-        </p:nvSpPr>
-        <p:spPr>
-          <a:xfrm>
-            <a:off x="611456" y="1302732"/>
-            <a:ext cx="3063240" cy="502920"/>
-          </a:xfrm>
-          <a:prstGeom prst="roundRect">
-            <a:avLst>
-              <a:gd name="adj" fmla="val 9091"/>
-            </a:avLst>
-          </a:prstGeom>
-          <a:solidFill>
-            <a:srgbClr val="FFFFFF"/>
-          </a:solidFill>
-          <a:ln w="7620">
+            <a:ln w="6350">
+              <a:solidFill>
+                <a:srgbClr val="F2F2F2">
+                  <a:alpha val="0"/>
+                </a:srgbClr>
+              </a:solidFill>
+              <a:prstDash val="solid"/>
+            </a:ln>
+          </p:spPr>
+        </p:sp>
+        <p:sp>
+          <p:nvSpPr>
+            <p:cNvPr id="37" name="Shape 11">
+              <a:extLst>
+                <a:ext uri="{FF2B5EF4-FFF2-40B4-BE49-F238E27FC236}">
+                  <a16:creationId xmlns:a16="http://schemas.microsoft.com/office/drawing/2014/main" id="{99A02E21-C2CA-4400-AA29-C95ED41D8B71}"/>
+                </a:ext>
+              </a:extLst>
+            </p:cNvPr>
+            <p:cNvSpPr/>
+            <p:nvPr/>
+          </p:nvSpPr>
+          <p:spPr>
+            <a:xfrm>
+              <a:off x="611456" y="1302732"/>
+              <a:ext cx="3063240" cy="502920"/>
+            </a:xfrm>
+            <a:prstGeom prst="roundRect">
+              <a:avLst>
+                <a:gd name="adj" fmla="val 9091"/>
+              </a:avLst>
+            </a:prstGeom>
             <a:solidFill>
-              <a:srgbClr val="D7DCE2"/>
+              <a:srgbClr val="FFFFFF"/>
             </a:solidFill>
-            <a:prstDash val="solid"/>
-          </a:ln>
-        </p:spPr>
-      </p:sp>
-      <p:sp>
-        <p:nvSpPr>
-          <p:cNvPr id="38" name="Shape 12">
-            <a:extLst>
-              <a:ext uri="{FF2B5EF4-FFF2-40B4-BE49-F238E27FC236}">
-                <a16:creationId xmlns:a16="http://schemas.microsoft.com/office/drawing/2014/main" id="{AF5AF12D-8E3B-4A9A-A1CA-37AA6D63FC47}"/>
-              </a:ext>
-            </a:extLst>
-          </p:cNvPr>
-          <p:cNvSpPr/>
-          <p:nvPr/>
-        </p:nvSpPr>
-        <p:spPr>
-          <a:xfrm>
-            <a:off x="3921584" y="1302732"/>
-            <a:ext cx="3886200" cy="502920"/>
-          </a:xfrm>
-          <a:prstGeom prst="roundRect">
-            <a:avLst>
-              <a:gd name="adj" fmla="val 9091"/>
-            </a:avLst>
-          </a:prstGeom>
-          <a:solidFill>
-            <a:srgbClr val="FFFFFF"/>
-          </a:solidFill>
-          <a:ln w="7620">
+            <a:ln w="7620">
+              <a:solidFill>
+                <a:srgbClr val="D7DCE2"/>
+              </a:solidFill>
+              <a:prstDash val="solid"/>
+            </a:ln>
+          </p:spPr>
+        </p:sp>
+        <p:sp>
+          <p:nvSpPr>
+            <p:cNvPr id="38" name="Shape 12">
+              <a:extLst>
+                <a:ext uri="{FF2B5EF4-FFF2-40B4-BE49-F238E27FC236}">
+                  <a16:creationId xmlns:a16="http://schemas.microsoft.com/office/drawing/2014/main" id="{AF5AF12D-8E3B-4A9A-A1CA-37AA6D63FC47}"/>
+                </a:ext>
+              </a:extLst>
+            </p:cNvPr>
+            <p:cNvSpPr/>
+            <p:nvPr/>
+          </p:nvSpPr>
+          <p:spPr>
+            <a:xfrm>
+              <a:off x="3921584" y="1302732"/>
+              <a:ext cx="3886200" cy="502920"/>
+            </a:xfrm>
+            <a:prstGeom prst="roundRect">
+              <a:avLst>
+                <a:gd name="adj" fmla="val 9091"/>
+              </a:avLst>
+            </a:prstGeom>
             <a:solidFill>
-              <a:srgbClr val="D7DCE2"/>
+              <a:srgbClr val="FFFFFF"/>
             </a:solidFill>
-            <a:prstDash val="solid"/>
-          </a:ln>
-        </p:spPr>
-      </p:sp>
-      <p:sp>
-        <p:nvSpPr>
-          <p:cNvPr id="39" name="Shape 13">
-            <a:extLst>
-              <a:ext uri="{FF2B5EF4-FFF2-40B4-BE49-F238E27FC236}">
-                <a16:creationId xmlns:a16="http://schemas.microsoft.com/office/drawing/2014/main" id="{88B029F3-D9A4-454C-BE5C-70E356E32FC1}"/>
-              </a:ext>
-            </a:extLst>
-          </p:cNvPr>
-          <p:cNvSpPr/>
-          <p:nvPr/>
-        </p:nvSpPr>
-        <p:spPr>
-          <a:xfrm>
-            <a:off x="8054672" y="1302732"/>
-            <a:ext cx="3337560" cy="502920"/>
-          </a:xfrm>
-          <a:prstGeom prst="roundRect">
-            <a:avLst>
-              <a:gd name="adj" fmla="val 9091"/>
-            </a:avLst>
-          </a:prstGeom>
-          <a:solidFill>
-            <a:srgbClr val="FFFFFF"/>
-          </a:solidFill>
-          <a:ln w="7620">
+            <a:ln w="7620">
+              <a:solidFill>
+                <a:srgbClr val="D7DCE2"/>
+              </a:solidFill>
+              <a:prstDash val="solid"/>
+            </a:ln>
+          </p:spPr>
+        </p:sp>
+        <p:sp>
+          <p:nvSpPr>
+            <p:cNvPr id="39" name="Shape 13">
+              <a:extLst>
+                <a:ext uri="{FF2B5EF4-FFF2-40B4-BE49-F238E27FC236}">
+                  <a16:creationId xmlns:a16="http://schemas.microsoft.com/office/drawing/2014/main" id="{88B029F3-D9A4-454C-BE5C-70E356E32FC1}"/>
+                </a:ext>
+              </a:extLst>
+            </p:cNvPr>
+            <p:cNvSpPr/>
+            <p:nvPr/>
+          </p:nvSpPr>
+          <p:spPr>
+            <a:xfrm>
+              <a:off x="8054672" y="1302732"/>
+              <a:ext cx="3337560" cy="502920"/>
+            </a:xfrm>
+            <a:prstGeom prst="roundRect">
+              <a:avLst>
+                <a:gd name="adj" fmla="val 9091"/>
+              </a:avLst>
+            </a:prstGeom>
             <a:solidFill>
-              <a:srgbClr val="D7DCE2"/>
+              <a:srgbClr val="FFFFFF"/>
             </a:solidFill>
-            <a:prstDash val="solid"/>
-          </a:ln>
-        </p:spPr>
-      </p:sp>
-      <p:sp>
-        <p:nvSpPr>
-          <p:cNvPr id="40" name="Shape 14">
-            <a:extLst>
-              <a:ext uri="{FF2B5EF4-FFF2-40B4-BE49-F238E27FC236}">
-                <a16:creationId xmlns:a16="http://schemas.microsoft.com/office/drawing/2014/main" id="{D6DDE70C-1FDF-4C50-97C1-312F21506A31}"/>
-              </a:ext>
-            </a:extLst>
-          </p:cNvPr>
-          <p:cNvSpPr/>
-          <p:nvPr/>
-        </p:nvSpPr>
-        <p:spPr>
-          <a:xfrm>
-            <a:off x="3683840" y="1558764"/>
-            <a:ext cx="219456" cy="0"/>
-          </a:xfrm>
-          <a:prstGeom prst="line">
-            <a:avLst/>
-          </a:prstGeom>
-          <a:noFill/>
-          <a:ln w="15240">
+            <a:ln w="7620">
+              <a:solidFill>
+                <a:srgbClr val="D7DCE2"/>
+              </a:solidFill>
+              <a:prstDash val="solid"/>
+            </a:ln>
+          </p:spPr>
+        </p:sp>
+        <p:sp>
+          <p:nvSpPr>
+            <p:cNvPr id="40" name="Shape 14">
+              <a:extLst>
+                <a:ext uri="{FF2B5EF4-FFF2-40B4-BE49-F238E27FC236}">
+                  <a16:creationId xmlns:a16="http://schemas.microsoft.com/office/drawing/2014/main" id="{D6DDE70C-1FDF-4C50-97C1-312F21506A31}"/>
+                </a:ext>
+              </a:extLst>
+            </p:cNvPr>
+            <p:cNvSpPr/>
+            <p:nvPr/>
+          </p:nvSpPr>
+          <p:spPr>
+            <a:xfrm>
+              <a:off x="3683840" y="1558764"/>
+              <a:ext cx="219456" cy="0"/>
+            </a:xfrm>
+            <a:prstGeom prst="line">
+              <a:avLst/>
+            </a:prstGeom>
+            <a:noFill/>
+            <a:ln w="15240">
+              <a:solidFill>
+                <a:srgbClr val="A7A7A7"/>
+              </a:solidFill>
+              <a:prstDash val="solid"/>
+              <a:headEnd type="none"/>
+              <a:tailEnd type="triangle"/>
+            </a:ln>
+          </p:spPr>
+        </p:sp>
+        <p:sp>
+          <p:nvSpPr>
+            <p:cNvPr id="41" name="Shape 15">
+              <a:extLst>
+                <a:ext uri="{FF2B5EF4-FFF2-40B4-BE49-F238E27FC236}">
+                  <a16:creationId xmlns:a16="http://schemas.microsoft.com/office/drawing/2014/main" id="{7A82DD64-141B-48CF-AFD7-752D509CCB04}"/>
+                </a:ext>
+              </a:extLst>
+            </p:cNvPr>
+            <p:cNvSpPr/>
+            <p:nvPr/>
+          </p:nvSpPr>
+          <p:spPr>
+            <a:xfrm>
+              <a:off x="7826072" y="1558764"/>
+              <a:ext cx="210312" cy="0"/>
+            </a:xfrm>
+            <a:prstGeom prst="line">
+              <a:avLst/>
+            </a:prstGeom>
+            <a:noFill/>
+            <a:ln w="15240">
+              <a:solidFill>
+                <a:srgbClr val="A7A7A7"/>
+              </a:solidFill>
+              <a:prstDash val="solid"/>
+              <a:headEnd type="none"/>
+              <a:tailEnd type="triangle"/>
+            </a:ln>
+          </p:spPr>
+        </p:sp>
+        <p:sp>
+          <p:nvSpPr>
+            <p:cNvPr id="42" name="Shape 16">
+              <a:extLst>
+                <a:ext uri="{FF2B5EF4-FFF2-40B4-BE49-F238E27FC236}">
+                  <a16:creationId xmlns:a16="http://schemas.microsoft.com/office/drawing/2014/main" id="{88AAE18C-D06D-4E58-B55C-A4B0670AB787}"/>
+                </a:ext>
+              </a:extLst>
+            </p:cNvPr>
+            <p:cNvSpPr/>
+            <p:nvPr/>
+          </p:nvSpPr>
+          <p:spPr>
+            <a:xfrm>
+              <a:off x="712040" y="1394172"/>
+              <a:ext cx="749808" cy="320040"/>
+            </a:xfrm>
+            <a:prstGeom prst="roundRect">
+              <a:avLst>
+                <a:gd name="adj" fmla="val 14286"/>
+              </a:avLst>
+            </a:prstGeom>
             <a:solidFill>
-              <a:srgbClr val="A7A7A7"/>
+              <a:srgbClr val="EDF4FA"/>
             </a:solidFill>
-            <a:prstDash val="solid"/>
-            <a:headEnd type="none"/>
-            <a:tailEnd type="triangle"/>
-          </a:ln>
-        </p:spPr>
-      </p:sp>
-      <p:sp>
-        <p:nvSpPr>
-          <p:cNvPr id="41" name="Shape 15">
-            <a:extLst>
-              <a:ext uri="{FF2B5EF4-FFF2-40B4-BE49-F238E27FC236}">
-                <a16:creationId xmlns:a16="http://schemas.microsoft.com/office/drawing/2014/main" id="{7A82DD64-141B-48CF-AFD7-752D509CCB04}"/>
-              </a:ext>
-            </a:extLst>
-          </p:cNvPr>
-          <p:cNvSpPr/>
-          <p:nvPr/>
-        </p:nvSpPr>
-        <p:spPr>
-          <a:xfrm>
-            <a:off x="7826072" y="1558764"/>
-            <a:ext cx="210312" cy="0"/>
-          </a:xfrm>
-          <a:prstGeom prst="line">
-            <a:avLst/>
-          </a:prstGeom>
-          <a:noFill/>
-          <a:ln w="15240">
+            <a:ln w="7620">
+              <a:solidFill>
+                <a:srgbClr val="2D669B"/>
+              </a:solidFill>
+              <a:prstDash val="solid"/>
+            </a:ln>
+          </p:spPr>
+        </p:sp>
+        <p:sp>
+          <p:nvSpPr>
+            <p:cNvPr id="43" name="Text 17">
+              <a:extLst>
+                <a:ext uri="{FF2B5EF4-FFF2-40B4-BE49-F238E27FC236}">
+                  <a16:creationId xmlns:a16="http://schemas.microsoft.com/office/drawing/2014/main" id="{ED94EF24-8A50-4989-BFED-D9D5AEC2B8A6}"/>
+                </a:ext>
+              </a:extLst>
+            </p:cNvPr>
+            <p:cNvSpPr/>
+            <p:nvPr/>
+          </p:nvSpPr>
+          <p:spPr>
+            <a:xfrm>
+              <a:off x="730328" y="1403316"/>
+              <a:ext cx="713232" cy="301752"/>
+            </a:xfrm>
+            <a:prstGeom prst="rect">
+              <a:avLst/>
+            </a:prstGeom>
+            <a:noFill/>
+            <a:ln/>
+          </p:spPr>
+          <p:txBody>
+            <a:bodyPr wrap="square" lIns="254" tIns="254" rIns="254" bIns="254" rtlCol="0" anchor="ctr">
+              <a:normAutofit/>
+            </a:bodyPr>
+            <a:lstStyle/>
+            <a:p>
+              <a:pPr marL="0" indent="0" algn="ctr">
+                <a:buNone/>
+              </a:pPr>
+              <a:r>
+                <a:rPr lang="en-US" sz="800" b="1" dirty="0">
+                  <a:solidFill>
+                    <a:srgbClr val="0B376D"/>
+                  </a:solidFill>
+                  <a:latin typeface="微软雅黑" panose="020B0503020204020204" pitchFamily="34" charset="-122"/>
+                  <a:ea typeface="微软雅黑" panose="020B0503020204020204" pitchFamily="34" charset="-122"/>
+                  <a:cs typeface="Microsoft YaHei" pitchFamily="34" charset="-120"/>
+                </a:rPr>
+                <a:t>IDA</a:t>
+              </a:r>
+              <a:endParaRPr lang="en-US" sz="800" dirty="0">
+                <a:latin typeface="微软雅黑" panose="020B0503020204020204" pitchFamily="34" charset="-122"/>
+                <a:ea typeface="微软雅黑" panose="020B0503020204020204" pitchFamily="34" charset="-122"/>
+              </a:endParaRPr>
+            </a:p>
+            <a:p>
+              <a:pPr marL="0" indent="0" algn="ctr">
+                <a:buNone/>
+              </a:pPr>
+              <a:r>
+                <a:rPr lang="en-US" sz="800" b="1" dirty="0">
+                  <a:solidFill>
+                    <a:srgbClr val="0B376D"/>
+                  </a:solidFill>
+                  <a:latin typeface="微软雅黑" panose="020B0503020204020204" pitchFamily="34" charset="-122"/>
+                  <a:ea typeface="微软雅黑" panose="020B0503020204020204" pitchFamily="34" charset="-122"/>
+                  <a:cs typeface="Microsoft YaHei" pitchFamily="34" charset="-120"/>
+                </a:rPr>
+                <a:t>申请发起</a:t>
+              </a:r>
+              <a:endParaRPr lang="en-US" sz="800" dirty="0">
+                <a:latin typeface="微软雅黑" panose="020B0503020204020204" pitchFamily="34" charset="-122"/>
+                <a:ea typeface="微软雅黑" panose="020B0503020204020204" pitchFamily="34" charset="-122"/>
+              </a:endParaRPr>
+            </a:p>
+          </p:txBody>
+        </p:sp>
+        <p:sp>
+          <p:nvSpPr>
+            <p:cNvPr id="44" name="Shape 18">
+              <a:extLst>
+                <a:ext uri="{FF2B5EF4-FFF2-40B4-BE49-F238E27FC236}">
+                  <a16:creationId xmlns:a16="http://schemas.microsoft.com/office/drawing/2014/main" id="{133C226A-59E5-4F0D-8846-F99755434A94}"/>
+                </a:ext>
+              </a:extLst>
+            </p:cNvPr>
+            <p:cNvSpPr/>
+            <p:nvPr/>
+          </p:nvSpPr>
+          <p:spPr>
+            <a:xfrm>
+              <a:off x="1571576" y="1394172"/>
+              <a:ext cx="804672" cy="320040"/>
+            </a:xfrm>
+            <a:prstGeom prst="roundRect">
+              <a:avLst>
+                <a:gd name="adj" fmla="val 14286"/>
+              </a:avLst>
+            </a:prstGeom>
             <a:solidFill>
-              <a:srgbClr val="A7A7A7"/>
+              <a:srgbClr val="EDF4FA"/>
             </a:solidFill>
-            <a:prstDash val="solid"/>
-            <a:headEnd type="none"/>
-            <a:tailEnd type="triangle"/>
-          </a:ln>
-        </p:spPr>
-      </p:sp>
-      <p:sp>
-        <p:nvSpPr>
-          <p:cNvPr id="42" name="Shape 16">
-            <a:extLst>
-              <a:ext uri="{FF2B5EF4-FFF2-40B4-BE49-F238E27FC236}">
-                <a16:creationId xmlns:a16="http://schemas.microsoft.com/office/drawing/2014/main" id="{88AAE18C-D06D-4E58-B55C-A4B0670AB787}"/>
-              </a:ext>
-            </a:extLst>
-          </p:cNvPr>
-          <p:cNvSpPr/>
-          <p:nvPr/>
-        </p:nvSpPr>
-        <p:spPr>
-          <a:xfrm>
-            <a:off x="712040" y="1394172"/>
-            <a:ext cx="749808" cy="320040"/>
-          </a:xfrm>
-          <a:prstGeom prst="roundRect">
-            <a:avLst>
-              <a:gd name="adj" fmla="val 14286"/>
-            </a:avLst>
-          </a:prstGeom>
-          <a:solidFill>
-            <a:srgbClr val="EDF4FA"/>
-          </a:solidFill>
-          <a:ln w="7620">
+            <a:ln w="7620">
+              <a:solidFill>
+                <a:srgbClr val="2D669B"/>
+              </a:solidFill>
+              <a:prstDash val="solid"/>
+            </a:ln>
+          </p:spPr>
+        </p:sp>
+        <p:sp>
+          <p:nvSpPr>
+            <p:cNvPr id="45" name="Text 19">
+              <a:extLst>
+                <a:ext uri="{FF2B5EF4-FFF2-40B4-BE49-F238E27FC236}">
+                  <a16:creationId xmlns:a16="http://schemas.microsoft.com/office/drawing/2014/main" id="{7B1A5FE1-2F97-4DD4-98D7-640030118D7D}"/>
+                </a:ext>
+              </a:extLst>
+            </p:cNvPr>
+            <p:cNvSpPr/>
+            <p:nvPr/>
+          </p:nvSpPr>
+          <p:spPr>
+            <a:xfrm>
+              <a:off x="1589864" y="1403316"/>
+              <a:ext cx="768096" cy="301752"/>
+            </a:xfrm>
+            <a:prstGeom prst="rect">
+              <a:avLst/>
+            </a:prstGeom>
+            <a:noFill/>
+            <a:ln/>
+          </p:spPr>
+          <p:txBody>
+            <a:bodyPr wrap="square" lIns="254" tIns="254" rIns="254" bIns="254" rtlCol="0" anchor="ctr">
+              <a:normAutofit/>
+            </a:bodyPr>
+            <a:lstStyle/>
+            <a:p>
+              <a:pPr marL="0" indent="0" algn="ctr">
+                <a:buNone/>
+              </a:pPr>
+              <a:r>
+                <a:rPr lang="en-US" sz="800" b="1" dirty="0">
+                  <a:solidFill>
+                    <a:srgbClr val="0B376D"/>
+                  </a:solidFill>
+                  <a:latin typeface="微软雅黑" panose="020B0503020204020204" pitchFamily="34" charset="-122"/>
+                  <a:ea typeface="微软雅黑" panose="020B0503020204020204" pitchFamily="34" charset="-122"/>
+                  <a:cs typeface="Microsoft YaHei" pitchFamily="34" charset="-120"/>
+                </a:rPr>
+                <a:t>AWS SQS</a:t>
+              </a:r>
+              <a:endParaRPr lang="en-US" sz="800" dirty="0">
+                <a:latin typeface="微软雅黑" panose="020B0503020204020204" pitchFamily="34" charset="-122"/>
+                <a:ea typeface="微软雅黑" panose="020B0503020204020204" pitchFamily="34" charset="-122"/>
+              </a:endParaRPr>
+            </a:p>
+            <a:p>
+              <a:pPr marL="0" indent="0" algn="ctr">
+                <a:buNone/>
+              </a:pPr>
+              <a:r>
+                <a:rPr lang="en-US" sz="800" b="1" dirty="0">
+                  <a:solidFill>
+                    <a:srgbClr val="0B376D"/>
+                  </a:solidFill>
+                  <a:latin typeface="微软雅黑" panose="020B0503020204020204" pitchFamily="34" charset="-122"/>
+                  <a:ea typeface="微软雅黑" panose="020B0503020204020204" pitchFamily="34" charset="-122"/>
+                  <a:cs typeface="Microsoft YaHei" pitchFamily="34" charset="-120"/>
+                </a:rPr>
+                <a:t>排队任务</a:t>
+              </a:r>
+              <a:endParaRPr lang="en-US" sz="800" dirty="0">
+                <a:latin typeface="微软雅黑" panose="020B0503020204020204" pitchFamily="34" charset="-122"/>
+                <a:ea typeface="微软雅黑" panose="020B0503020204020204" pitchFamily="34" charset="-122"/>
+              </a:endParaRPr>
+            </a:p>
+          </p:txBody>
+        </p:sp>
+        <p:sp>
+          <p:nvSpPr>
+            <p:cNvPr id="46" name="Shape 20">
+              <a:extLst>
+                <a:ext uri="{FF2B5EF4-FFF2-40B4-BE49-F238E27FC236}">
+                  <a16:creationId xmlns:a16="http://schemas.microsoft.com/office/drawing/2014/main" id="{971201FC-4C7F-4B6A-984D-F219B2A417EA}"/>
+                </a:ext>
+              </a:extLst>
+            </p:cNvPr>
+            <p:cNvSpPr/>
+            <p:nvPr/>
+          </p:nvSpPr>
+          <p:spPr>
+            <a:xfrm>
+              <a:off x="2495120" y="1394172"/>
+              <a:ext cx="786384" cy="320040"/>
+            </a:xfrm>
+            <a:prstGeom prst="roundRect">
+              <a:avLst>
+                <a:gd name="adj" fmla="val 14286"/>
+              </a:avLst>
+            </a:prstGeom>
             <a:solidFill>
-              <a:srgbClr val="2D669B"/>
+              <a:srgbClr val="EDF4FA"/>
             </a:solidFill>
-            <a:prstDash val="solid"/>
-          </a:ln>
-        </p:spPr>
-      </p:sp>
-      <p:sp>
-        <p:nvSpPr>
-          <p:cNvPr id="43" name="Text 17">
-            <a:extLst>
-              <a:ext uri="{FF2B5EF4-FFF2-40B4-BE49-F238E27FC236}">
-                <a16:creationId xmlns:a16="http://schemas.microsoft.com/office/drawing/2014/main" id="{ED94EF24-8A50-4989-BFED-D9D5AEC2B8A6}"/>
-              </a:ext>
-            </a:extLst>
-          </p:cNvPr>
-          <p:cNvSpPr/>
-          <p:nvPr/>
-        </p:nvSpPr>
-        <p:spPr>
-          <a:xfrm>
-            <a:off x="730328" y="1403316"/>
-            <a:ext cx="713232" cy="301752"/>
-          </a:xfrm>
-          <a:prstGeom prst="rect">
-            <a:avLst/>
-          </a:prstGeom>
-          <a:noFill/>
-          <a:ln/>
-        </p:spPr>
-        <p:txBody>
-          <a:bodyPr wrap="square" lIns="254" tIns="254" rIns="254" bIns="254" rtlCol="0" anchor="ctr">
-            <a:normAutofit/>
-          </a:bodyPr>
-          <a:lstStyle/>
-          <a:p>
-            <a:pPr marL="0" indent="0" algn="ctr">
-              <a:buNone/>
-            </a:pPr>
-            <a:r>
-              <a:rPr lang="en-US" sz="730" b="1" dirty="0">
-                <a:solidFill>
-                  <a:srgbClr val="0B376D"/>
-                </a:solidFill>
-                <a:latin typeface="Microsoft YaHei" pitchFamily="34" charset="0"/>
-                <a:ea typeface="Microsoft YaHei" pitchFamily="34" charset="-122"/>
-                <a:cs typeface="Microsoft YaHei" pitchFamily="34" charset="-120"/>
-              </a:rPr>
-              <a:t>IDA</a:t>
-            </a:r>
-            <a:endParaRPr lang="en-US" sz="730" dirty="0"/>
-          </a:p>
-          <a:p>
-            <a:pPr marL="0" indent="0" algn="ctr">
-              <a:buNone/>
-            </a:pPr>
-            <a:r>
-              <a:rPr lang="en-US" sz="730" b="1" dirty="0">
-                <a:solidFill>
-                  <a:srgbClr val="0B376D"/>
-                </a:solidFill>
-                <a:latin typeface="Microsoft YaHei" pitchFamily="34" charset="0"/>
-                <a:ea typeface="Microsoft YaHei" pitchFamily="34" charset="-122"/>
-                <a:cs typeface="Microsoft YaHei" pitchFamily="34" charset="-120"/>
-              </a:rPr>
-              <a:t>申请发起</a:t>
-            </a:r>
-            <a:endParaRPr lang="en-US" sz="730" dirty="0"/>
-          </a:p>
-        </p:txBody>
-      </p:sp>
-      <p:sp>
-        <p:nvSpPr>
-          <p:cNvPr id="44" name="Shape 18">
-            <a:extLst>
-              <a:ext uri="{FF2B5EF4-FFF2-40B4-BE49-F238E27FC236}">
-                <a16:creationId xmlns:a16="http://schemas.microsoft.com/office/drawing/2014/main" id="{133C226A-59E5-4F0D-8846-F99755434A94}"/>
-              </a:ext>
-            </a:extLst>
-          </p:cNvPr>
-          <p:cNvSpPr/>
-          <p:nvPr/>
-        </p:nvSpPr>
-        <p:spPr>
-          <a:xfrm>
-            <a:off x="1571576" y="1394172"/>
-            <a:ext cx="804672" cy="320040"/>
-          </a:xfrm>
-          <a:prstGeom prst="roundRect">
-            <a:avLst>
-              <a:gd name="adj" fmla="val 14286"/>
-            </a:avLst>
-          </a:prstGeom>
-          <a:solidFill>
-            <a:srgbClr val="EDF4FA"/>
-          </a:solidFill>
-          <a:ln w="7620">
-            <a:solidFill>
-              <a:srgbClr val="2D669B"/>
-            </a:solidFill>
-            <a:prstDash val="solid"/>
-          </a:ln>
-        </p:spPr>
-      </p:sp>
-      <p:sp>
-        <p:nvSpPr>
-          <p:cNvPr id="45" name="Text 19">
-            <a:extLst>
-              <a:ext uri="{FF2B5EF4-FFF2-40B4-BE49-F238E27FC236}">
-                <a16:creationId xmlns:a16="http://schemas.microsoft.com/office/drawing/2014/main" id="{7B1A5FE1-2F97-4DD4-98D7-640030118D7D}"/>
-              </a:ext>
-            </a:extLst>
-          </p:cNvPr>
-          <p:cNvSpPr/>
-          <p:nvPr/>
-        </p:nvSpPr>
-        <p:spPr>
-          <a:xfrm>
-            <a:off x="1589864" y="1403316"/>
-            <a:ext cx="768096" cy="301752"/>
-          </a:xfrm>
-          <a:prstGeom prst="rect">
-            <a:avLst/>
-          </a:prstGeom>
-          <a:noFill/>
-          <a:ln/>
-        </p:spPr>
-        <p:txBody>
-          <a:bodyPr wrap="square" lIns="254" tIns="254" rIns="254" bIns="254" rtlCol="0" anchor="ctr">
-            <a:normAutofit/>
-          </a:bodyPr>
-          <a:lstStyle/>
-          <a:p>
-            <a:pPr marL="0" indent="0" algn="ctr">
-              <a:buNone/>
-            </a:pPr>
-            <a:r>
-              <a:rPr lang="en-US" sz="730" b="1" dirty="0">
-                <a:solidFill>
-                  <a:srgbClr val="0B376D"/>
-                </a:solidFill>
-                <a:latin typeface="Microsoft YaHei" pitchFamily="34" charset="0"/>
-                <a:ea typeface="Microsoft YaHei" pitchFamily="34" charset="-122"/>
-                <a:cs typeface="Microsoft YaHei" pitchFamily="34" charset="-120"/>
-              </a:rPr>
-              <a:t>AWS SQS</a:t>
-            </a:r>
-            <a:endParaRPr lang="en-US" sz="730" dirty="0"/>
-          </a:p>
-          <a:p>
-            <a:pPr marL="0" indent="0" algn="ctr">
-              <a:buNone/>
-            </a:pPr>
-            <a:r>
-              <a:rPr lang="en-US" sz="730" b="1" dirty="0">
-                <a:solidFill>
-                  <a:srgbClr val="0B376D"/>
-                </a:solidFill>
-                <a:latin typeface="Microsoft YaHei" pitchFamily="34" charset="0"/>
-                <a:ea typeface="Microsoft YaHei" pitchFamily="34" charset="-122"/>
-                <a:cs typeface="Microsoft YaHei" pitchFamily="34" charset="-120"/>
-              </a:rPr>
-              <a:t>排队任务</a:t>
-            </a:r>
-            <a:endParaRPr lang="en-US" sz="730" dirty="0"/>
-          </a:p>
-        </p:txBody>
-      </p:sp>
-      <p:sp>
-        <p:nvSpPr>
-          <p:cNvPr id="46" name="Shape 20">
-            <a:extLst>
-              <a:ext uri="{FF2B5EF4-FFF2-40B4-BE49-F238E27FC236}">
-                <a16:creationId xmlns:a16="http://schemas.microsoft.com/office/drawing/2014/main" id="{971201FC-4C7F-4B6A-984D-F219B2A417EA}"/>
-              </a:ext>
-            </a:extLst>
-          </p:cNvPr>
-          <p:cNvSpPr/>
-          <p:nvPr/>
-        </p:nvSpPr>
-        <p:spPr>
-          <a:xfrm>
-            <a:off x="2495120" y="1394172"/>
-            <a:ext cx="786384" cy="320040"/>
-          </a:xfrm>
-          <a:prstGeom prst="roundRect">
-            <a:avLst>
-              <a:gd name="adj" fmla="val 14286"/>
-            </a:avLst>
-          </a:prstGeom>
-          <a:solidFill>
-            <a:srgbClr val="EDF4FA"/>
-          </a:solidFill>
-          <a:ln w="7620">
-            <a:solidFill>
-              <a:srgbClr val="2D669B"/>
-            </a:solidFill>
-            <a:prstDash val="solid"/>
-          </a:ln>
-        </p:spPr>
-      </p:sp>
-      <p:sp>
-        <p:nvSpPr>
-          <p:cNvPr id="47" name="Text 21">
-            <a:extLst>
-              <a:ext uri="{FF2B5EF4-FFF2-40B4-BE49-F238E27FC236}">
-                <a16:creationId xmlns:a16="http://schemas.microsoft.com/office/drawing/2014/main" id="{43C7F9F6-CBDE-4EEA-A871-842FF0D8B4C8}"/>
-              </a:ext>
-            </a:extLst>
-          </p:cNvPr>
-          <p:cNvSpPr/>
-          <p:nvPr/>
-        </p:nvSpPr>
-        <p:spPr>
-          <a:xfrm>
-            <a:off x="2513408" y="1403316"/>
-            <a:ext cx="749808" cy="301752"/>
-          </a:xfrm>
-          <a:prstGeom prst="rect">
-            <a:avLst/>
-          </a:prstGeom>
-          <a:noFill/>
-          <a:ln/>
-        </p:spPr>
-        <p:txBody>
-          <a:bodyPr wrap="square" lIns="254" tIns="254" rIns="254" bIns="254" rtlCol="0" anchor="ctr">
-            <a:normAutofit/>
-          </a:bodyPr>
-          <a:lstStyle/>
-          <a:p>
-            <a:pPr marL="0" indent="0" algn="ctr">
-              <a:buNone/>
-            </a:pPr>
-            <a:r>
-              <a:rPr lang="en-US" sz="730" b="1" dirty="0">
-                <a:solidFill>
-                  <a:srgbClr val="0B376D"/>
-                </a:solidFill>
-                <a:latin typeface="Microsoft YaHei" pitchFamily="34" charset="0"/>
-                <a:ea typeface="Microsoft YaHei" pitchFamily="34" charset="-122"/>
-                <a:cs typeface="Microsoft YaHei" pitchFamily="34" charset="-120"/>
-              </a:rPr>
-              <a:t>IDP</a:t>
-            </a:r>
-            <a:endParaRPr lang="en-US" sz="730" dirty="0"/>
-          </a:p>
-          <a:p>
-            <a:pPr marL="0" indent="0" algn="ctr">
-              <a:buNone/>
-            </a:pPr>
-            <a:r>
-              <a:rPr lang="en-US" sz="730" b="1" dirty="0">
-                <a:solidFill>
-                  <a:srgbClr val="0B376D"/>
-                </a:solidFill>
-                <a:latin typeface="Microsoft YaHei" pitchFamily="34" charset="0"/>
-                <a:ea typeface="Microsoft YaHei" pitchFamily="34" charset="-122"/>
-                <a:cs typeface="Microsoft YaHei" pitchFamily="34" charset="-120"/>
-              </a:rPr>
-              <a:t>核心调度</a:t>
-            </a:r>
-            <a:endParaRPr lang="en-US" sz="730" dirty="0"/>
-          </a:p>
-        </p:txBody>
-      </p:sp>
-      <p:sp>
-        <p:nvSpPr>
-          <p:cNvPr id="48" name="Shape 22">
-            <a:extLst>
-              <a:ext uri="{FF2B5EF4-FFF2-40B4-BE49-F238E27FC236}">
-                <a16:creationId xmlns:a16="http://schemas.microsoft.com/office/drawing/2014/main" id="{F7CDFBE3-5C1E-46AC-9373-3230E1B69BD7}"/>
-              </a:ext>
-            </a:extLst>
-          </p:cNvPr>
-          <p:cNvSpPr/>
-          <p:nvPr/>
-        </p:nvSpPr>
-        <p:spPr>
-          <a:xfrm>
-            <a:off x="1461848" y="1549620"/>
-            <a:ext cx="91440" cy="0"/>
-          </a:xfrm>
-          <a:prstGeom prst="line">
-            <a:avLst/>
-          </a:prstGeom>
-          <a:noFill/>
-          <a:ln w="10160">
-            <a:solidFill>
-              <a:srgbClr val="A7A7A7"/>
-            </a:solidFill>
-            <a:prstDash val="solid"/>
-            <a:headEnd type="none"/>
-            <a:tailEnd type="triangle"/>
-          </a:ln>
-        </p:spPr>
-      </p:sp>
-      <p:sp>
-        <p:nvSpPr>
-          <p:cNvPr id="49" name="Shape 23">
-            <a:extLst>
-              <a:ext uri="{FF2B5EF4-FFF2-40B4-BE49-F238E27FC236}">
-                <a16:creationId xmlns:a16="http://schemas.microsoft.com/office/drawing/2014/main" id="{7985F6E3-B5D3-444B-BDC5-F14D3632746A}"/>
-              </a:ext>
-            </a:extLst>
-          </p:cNvPr>
-          <p:cNvSpPr/>
-          <p:nvPr/>
-        </p:nvSpPr>
-        <p:spPr>
-          <a:xfrm>
-            <a:off x="2376248" y="1549620"/>
-            <a:ext cx="100584" cy="0"/>
-          </a:xfrm>
-          <a:prstGeom prst="line">
-            <a:avLst/>
-          </a:prstGeom>
-          <a:noFill/>
-          <a:ln w="10160">
-            <a:solidFill>
-              <a:srgbClr val="A7A7A7"/>
-            </a:solidFill>
-            <a:prstDash val="solid"/>
-            <a:headEnd type="none"/>
-            <a:tailEnd type="triangle"/>
-          </a:ln>
-        </p:spPr>
-      </p:sp>
-      <p:sp>
-        <p:nvSpPr>
-          <p:cNvPr id="50" name="Shape 24">
-            <a:extLst>
-              <a:ext uri="{FF2B5EF4-FFF2-40B4-BE49-F238E27FC236}">
-                <a16:creationId xmlns:a16="http://schemas.microsoft.com/office/drawing/2014/main" id="{E1D8732C-EABA-4B01-8B3D-BFC49FD66E4B}"/>
-              </a:ext>
-            </a:extLst>
-          </p:cNvPr>
-          <p:cNvSpPr/>
-          <p:nvPr/>
-        </p:nvSpPr>
-        <p:spPr>
-          <a:xfrm>
-            <a:off x="4049600" y="1394172"/>
-            <a:ext cx="822960" cy="320040"/>
-          </a:xfrm>
-          <a:prstGeom prst="roundRect">
-            <a:avLst>
-              <a:gd name="adj" fmla="val 14286"/>
-            </a:avLst>
-          </a:prstGeom>
-          <a:solidFill>
-            <a:srgbClr val="0B376D"/>
-          </a:solidFill>
-          <a:ln w="7620">
+            <a:ln w="7620">
+              <a:solidFill>
+                <a:srgbClr val="2D669B"/>
+              </a:solidFill>
+              <a:prstDash val="solid"/>
+            </a:ln>
+          </p:spPr>
+        </p:sp>
+        <p:sp>
+          <p:nvSpPr>
+            <p:cNvPr id="47" name="Text 21">
+              <a:extLst>
+                <a:ext uri="{FF2B5EF4-FFF2-40B4-BE49-F238E27FC236}">
+                  <a16:creationId xmlns:a16="http://schemas.microsoft.com/office/drawing/2014/main" id="{43C7F9F6-CBDE-4EEA-A871-842FF0D8B4C8}"/>
+                </a:ext>
+              </a:extLst>
+            </p:cNvPr>
+            <p:cNvSpPr/>
+            <p:nvPr/>
+          </p:nvSpPr>
+          <p:spPr>
+            <a:xfrm>
+              <a:off x="2513408" y="1403316"/>
+              <a:ext cx="749808" cy="301752"/>
+            </a:xfrm>
+            <a:prstGeom prst="rect">
+              <a:avLst/>
+            </a:prstGeom>
+            <a:noFill/>
+            <a:ln/>
+          </p:spPr>
+          <p:txBody>
+            <a:bodyPr wrap="square" lIns="254" tIns="254" rIns="254" bIns="254" rtlCol="0" anchor="ctr">
+              <a:normAutofit/>
+            </a:bodyPr>
+            <a:lstStyle/>
+            <a:p>
+              <a:pPr marL="0" indent="0" algn="ctr">
+                <a:buNone/>
+              </a:pPr>
+              <a:r>
+                <a:rPr lang="en-US" sz="800" b="1" dirty="0">
+                  <a:solidFill>
+                    <a:srgbClr val="0B376D"/>
+                  </a:solidFill>
+                  <a:latin typeface="微软雅黑" panose="020B0503020204020204" pitchFamily="34" charset="-122"/>
+                  <a:ea typeface="微软雅黑" panose="020B0503020204020204" pitchFamily="34" charset="-122"/>
+                  <a:cs typeface="Microsoft YaHei" pitchFamily="34" charset="-120"/>
+                </a:rPr>
+                <a:t>IDP</a:t>
+              </a:r>
+              <a:endParaRPr lang="en-US" sz="800" dirty="0">
+                <a:latin typeface="微软雅黑" panose="020B0503020204020204" pitchFamily="34" charset="-122"/>
+                <a:ea typeface="微软雅黑" panose="020B0503020204020204" pitchFamily="34" charset="-122"/>
+              </a:endParaRPr>
+            </a:p>
+            <a:p>
+              <a:pPr marL="0" indent="0" algn="ctr">
+                <a:buNone/>
+              </a:pPr>
+              <a:r>
+                <a:rPr lang="en-US" sz="800" b="1" dirty="0">
+                  <a:solidFill>
+                    <a:srgbClr val="0B376D"/>
+                  </a:solidFill>
+                  <a:latin typeface="微软雅黑" panose="020B0503020204020204" pitchFamily="34" charset="-122"/>
+                  <a:ea typeface="微软雅黑" panose="020B0503020204020204" pitchFamily="34" charset="-122"/>
+                  <a:cs typeface="Microsoft YaHei" pitchFamily="34" charset="-120"/>
+                </a:rPr>
+                <a:t>核心调度</a:t>
+              </a:r>
+              <a:endParaRPr lang="en-US" sz="800" dirty="0">
+                <a:latin typeface="微软雅黑" panose="020B0503020204020204" pitchFamily="34" charset="-122"/>
+                <a:ea typeface="微软雅黑" panose="020B0503020204020204" pitchFamily="34" charset="-122"/>
+              </a:endParaRPr>
+            </a:p>
+          </p:txBody>
+        </p:sp>
+        <p:sp>
+          <p:nvSpPr>
+            <p:cNvPr id="48" name="Shape 22">
+              <a:extLst>
+                <a:ext uri="{FF2B5EF4-FFF2-40B4-BE49-F238E27FC236}">
+                  <a16:creationId xmlns:a16="http://schemas.microsoft.com/office/drawing/2014/main" id="{F7CDFBE3-5C1E-46AC-9373-3230E1B69BD7}"/>
+                </a:ext>
+              </a:extLst>
+            </p:cNvPr>
+            <p:cNvSpPr/>
+            <p:nvPr/>
+          </p:nvSpPr>
+          <p:spPr>
+            <a:xfrm>
+              <a:off x="1461848" y="1549620"/>
+              <a:ext cx="91440" cy="0"/>
+            </a:xfrm>
+            <a:prstGeom prst="line">
+              <a:avLst/>
+            </a:prstGeom>
+            <a:noFill/>
+            <a:ln w="10160">
+              <a:solidFill>
+                <a:srgbClr val="A7A7A7"/>
+              </a:solidFill>
+              <a:prstDash val="solid"/>
+              <a:headEnd type="none"/>
+              <a:tailEnd type="triangle"/>
+            </a:ln>
+          </p:spPr>
+        </p:sp>
+        <p:sp>
+          <p:nvSpPr>
+            <p:cNvPr id="49" name="Shape 23">
+              <a:extLst>
+                <a:ext uri="{FF2B5EF4-FFF2-40B4-BE49-F238E27FC236}">
+                  <a16:creationId xmlns:a16="http://schemas.microsoft.com/office/drawing/2014/main" id="{7985F6E3-B5D3-444B-BDC5-F14D3632746A}"/>
+                </a:ext>
+              </a:extLst>
+            </p:cNvPr>
+            <p:cNvSpPr/>
+            <p:nvPr/>
+          </p:nvSpPr>
+          <p:spPr>
+            <a:xfrm>
+              <a:off x="2376248" y="1549620"/>
+              <a:ext cx="100584" cy="0"/>
+            </a:xfrm>
+            <a:prstGeom prst="line">
+              <a:avLst/>
+            </a:prstGeom>
+            <a:noFill/>
+            <a:ln w="10160">
+              <a:solidFill>
+                <a:srgbClr val="A7A7A7"/>
+              </a:solidFill>
+              <a:prstDash val="solid"/>
+              <a:headEnd type="none"/>
+              <a:tailEnd type="triangle"/>
+            </a:ln>
+          </p:spPr>
+        </p:sp>
+        <p:sp>
+          <p:nvSpPr>
+            <p:cNvPr id="50" name="Shape 24">
+              <a:extLst>
+                <a:ext uri="{FF2B5EF4-FFF2-40B4-BE49-F238E27FC236}">
+                  <a16:creationId xmlns:a16="http://schemas.microsoft.com/office/drawing/2014/main" id="{E1D8732C-EABA-4B01-8B3D-BFC49FD66E4B}"/>
+                </a:ext>
+              </a:extLst>
+            </p:cNvPr>
+            <p:cNvSpPr/>
+            <p:nvPr/>
+          </p:nvSpPr>
+          <p:spPr>
+            <a:xfrm>
+              <a:off x="4049600" y="1394172"/>
+              <a:ext cx="822960" cy="320040"/>
+            </a:xfrm>
+            <a:prstGeom prst="roundRect">
+              <a:avLst>
+                <a:gd name="adj" fmla="val 14286"/>
+              </a:avLst>
+            </a:prstGeom>
             <a:solidFill>
               <a:srgbClr val="0B376D"/>
             </a:solidFill>
-            <a:prstDash val="solid"/>
-          </a:ln>
-        </p:spPr>
-      </p:sp>
-      <p:sp>
-        <p:nvSpPr>
-          <p:cNvPr id="51" name="Text 25">
-            <a:extLst>
-              <a:ext uri="{FF2B5EF4-FFF2-40B4-BE49-F238E27FC236}">
-                <a16:creationId xmlns:a16="http://schemas.microsoft.com/office/drawing/2014/main" id="{06079920-533D-45D9-AC5D-76D93CE91099}"/>
+            <a:ln w="7620">
+              <a:solidFill>
+                <a:srgbClr val="0B376D"/>
+              </a:solidFill>
+              <a:prstDash val="solid"/>
+            </a:ln>
+          </p:spPr>
+        </p:sp>
+        <p:sp>
+          <p:nvSpPr>
+            <p:cNvPr id="51" name="Text 25">
+              <a:extLst>
+                <a:ext uri="{FF2B5EF4-FFF2-40B4-BE49-F238E27FC236}">
+                  <a16:creationId xmlns:a16="http://schemas.microsoft.com/office/drawing/2014/main" id="{06079920-533D-45D9-AC5D-76D93CE91099}"/>
+                </a:ext>
+              </a:extLst>
+            </p:cNvPr>
+            <p:cNvSpPr/>
+            <p:nvPr/>
+          </p:nvSpPr>
+          <p:spPr>
+            <a:xfrm>
+              <a:off x="4067888" y="1403316"/>
+              <a:ext cx="786384" cy="301752"/>
+            </a:xfrm>
+            <a:prstGeom prst="rect">
+              <a:avLst/>
+            </a:prstGeom>
+            <a:noFill/>
+            <a:ln/>
+          </p:spPr>
+          <p:txBody>
+            <a:bodyPr wrap="square" lIns="254" tIns="254" rIns="254" bIns="254" rtlCol="0" anchor="ctr">
+              <a:normAutofit/>
+            </a:bodyPr>
+            <a:lstStyle/>
+            <a:p>
+              <a:pPr marL="0" indent="0" algn="ctr">
+                <a:buNone/>
+              </a:pPr>
+              <a:r>
+                <a:rPr lang="en-US" sz="800" b="1" dirty="0">
+                  <a:solidFill>
+                    <a:srgbClr val="FFFFFF"/>
+                  </a:solidFill>
+                  <a:latin typeface="微软雅黑" panose="020B0503020204020204" pitchFamily="34" charset="-122"/>
+                  <a:ea typeface="微软雅黑" panose="020B0503020204020204" pitchFamily="34" charset="-122"/>
+                  <a:cs typeface="Microsoft YaHei" pitchFamily="34" charset="-120"/>
+                </a:rPr>
+                <a:t>BS-CAT</a:t>
+              </a:r>
+              <a:endParaRPr lang="en-US" sz="800" dirty="0">
+                <a:latin typeface="微软雅黑" panose="020B0503020204020204" pitchFamily="34" charset="-122"/>
+                <a:ea typeface="微软雅黑" panose="020B0503020204020204" pitchFamily="34" charset="-122"/>
+              </a:endParaRPr>
+            </a:p>
+            <a:p>
+              <a:pPr marL="0" indent="0" algn="ctr">
+                <a:buNone/>
+              </a:pPr>
+              <a:r>
+                <a:rPr lang="en-US" sz="800" b="1" dirty="0">
+                  <a:solidFill>
+                    <a:srgbClr val="FFFFFF"/>
+                  </a:solidFill>
+                  <a:latin typeface="微软雅黑" panose="020B0503020204020204" pitchFamily="34" charset="-122"/>
+                  <a:ea typeface="微软雅黑" panose="020B0503020204020204" pitchFamily="34" charset="-122"/>
+                  <a:cs typeface="Microsoft YaHei" pitchFamily="34" charset="-120"/>
+                </a:rPr>
+                <a:t>流水分类</a:t>
+              </a:r>
+              <a:endParaRPr lang="en-US" sz="800" dirty="0">
+                <a:latin typeface="微软雅黑" panose="020B0503020204020204" pitchFamily="34" charset="-122"/>
+                <a:ea typeface="微软雅黑" panose="020B0503020204020204" pitchFamily="34" charset="-122"/>
+              </a:endParaRPr>
+            </a:p>
+          </p:txBody>
+        </p:sp>
+        <p:sp>
+          <p:nvSpPr>
+            <p:cNvPr id="52" name="Shape 26">
+              <a:extLst>
+                <a:ext uri="{FF2B5EF4-FFF2-40B4-BE49-F238E27FC236}">
+                  <a16:creationId xmlns:a16="http://schemas.microsoft.com/office/drawing/2014/main" id="{E3127D75-721C-4419-9CF7-E5E1C34379A1}"/>
+                </a:ext>
+              </a:extLst>
+            </p:cNvPr>
+            <p:cNvSpPr/>
+            <p:nvPr/>
+          </p:nvSpPr>
+          <p:spPr>
+            <a:xfrm>
+              <a:off x="5113724" y="1394172"/>
+              <a:ext cx="1422883" cy="320040"/>
+            </a:xfrm>
+            <a:prstGeom prst="roundRect">
+              <a:avLst>
+                <a:gd name="adj" fmla="val 14286"/>
+              </a:avLst>
+            </a:prstGeom>
+            <a:solidFill>
+              <a:srgbClr val="FFF4D4"/>
+            </a:solidFill>
+            <a:ln w="7620">
+              <a:solidFill>
+                <a:srgbClr val="E5B100"/>
+              </a:solidFill>
+              <a:prstDash val="solid"/>
+            </a:ln>
+          </p:spPr>
+        </p:sp>
+        <p:sp>
+          <p:nvSpPr>
+            <p:cNvPr id="53" name="Text 27">
+              <a:extLst>
+                <a:ext uri="{FF2B5EF4-FFF2-40B4-BE49-F238E27FC236}">
+                  <a16:creationId xmlns:a16="http://schemas.microsoft.com/office/drawing/2014/main" id="{BB903172-90BD-4D5E-9B7B-323E8766FE2D}"/>
+                </a:ext>
+              </a:extLst>
+            </p:cNvPr>
+            <p:cNvSpPr/>
+            <p:nvPr/>
+          </p:nvSpPr>
+          <p:spPr>
+            <a:xfrm>
+              <a:off x="5343100" y="1415672"/>
+              <a:ext cx="985641" cy="301752"/>
+            </a:xfrm>
+            <a:prstGeom prst="rect">
+              <a:avLst/>
+            </a:prstGeom>
+            <a:noFill/>
+            <a:ln/>
+          </p:spPr>
+          <p:txBody>
+            <a:bodyPr wrap="square" lIns="254" tIns="254" rIns="254" bIns="254" rtlCol="0" anchor="ctr">
+              <a:normAutofit/>
+            </a:bodyPr>
+            <a:lstStyle/>
+            <a:p>
+              <a:pPr marL="0" indent="0" algn="ctr">
+                <a:buNone/>
+              </a:pPr>
+              <a:r>
+                <a:rPr lang="zh-CN" altLang="en-US" sz="800" b="1" dirty="0">
+                  <a:solidFill>
+                    <a:srgbClr val="111111"/>
+                  </a:solidFill>
+                  <a:latin typeface="微软雅黑" panose="020B0503020204020204" pitchFamily="34" charset="-122"/>
+                  <a:ea typeface="微软雅黑" panose="020B0503020204020204" pitchFamily="34" charset="-122"/>
+                  <a:cs typeface="Microsoft YaHei" pitchFamily="34" charset="-120"/>
+                </a:rPr>
+                <a:t>分类</a:t>
+              </a:r>
+              <a:r>
+                <a:rPr lang="en-US" altLang="zh-CN" sz="800" b="1" dirty="0">
+                  <a:solidFill>
+                    <a:srgbClr val="111111"/>
+                  </a:solidFill>
+                  <a:latin typeface="微软雅黑" panose="020B0503020204020204" pitchFamily="34" charset="-122"/>
+                  <a:ea typeface="微软雅黑" panose="020B0503020204020204" pitchFamily="34" charset="-122"/>
+                  <a:cs typeface="Microsoft YaHei" pitchFamily="34" charset="-120"/>
+                </a:rPr>
+                <a:t>/</a:t>
+              </a:r>
+              <a:r>
+                <a:rPr lang="zh-CN" altLang="en-US" sz="800" b="1" dirty="0">
+                  <a:solidFill>
+                    <a:srgbClr val="111111"/>
+                  </a:solidFill>
+                  <a:latin typeface="微软雅黑" panose="020B0503020204020204" pitchFamily="34" charset="-122"/>
+                  <a:ea typeface="微软雅黑" panose="020B0503020204020204" pitchFamily="34" charset="-122"/>
+                  <a:cs typeface="Microsoft YaHei" pitchFamily="34" charset="-120"/>
+                </a:rPr>
+                <a:t>交易</a:t>
+              </a:r>
+              <a:r>
+                <a:rPr lang="en-US" sz="800" b="1" dirty="0" err="1">
+                  <a:solidFill>
+                    <a:srgbClr val="111111"/>
+                  </a:solidFill>
+                  <a:latin typeface="微软雅黑" panose="020B0503020204020204" pitchFamily="34" charset="-122"/>
+                  <a:ea typeface="微软雅黑" panose="020B0503020204020204" pitchFamily="34" charset="-122"/>
+                  <a:cs typeface="Microsoft YaHei" pitchFamily="34" charset="-120"/>
+                </a:rPr>
+                <a:t>对手</a:t>
+              </a:r>
+              <a:r>
+                <a:rPr lang="en-US" sz="800" b="1" dirty="0">
+                  <a:solidFill>
+                    <a:srgbClr val="111111"/>
+                  </a:solidFill>
+                  <a:latin typeface="微软雅黑" panose="020B0503020204020204" pitchFamily="34" charset="-122"/>
+                  <a:ea typeface="微软雅黑" panose="020B0503020204020204" pitchFamily="34" charset="-122"/>
+                  <a:cs typeface="Microsoft YaHei" pitchFamily="34" charset="-120"/>
+                </a:rPr>
+                <a:t>/</a:t>
+              </a:r>
+              <a:r>
+                <a:rPr lang="zh-CN" altLang="en-US" sz="800" b="1" dirty="0">
+                  <a:solidFill>
+                    <a:srgbClr val="111111"/>
+                  </a:solidFill>
+                  <a:latin typeface="微软雅黑" panose="020B0503020204020204" pitchFamily="34" charset="-122"/>
+                  <a:ea typeface="微软雅黑" panose="020B0503020204020204" pitchFamily="34" charset="-122"/>
+                  <a:cs typeface="Microsoft YaHei" pitchFamily="34" charset="-120"/>
+                </a:rPr>
+                <a:t>指标</a:t>
+              </a:r>
+              <a:endParaRPr lang="en-US" sz="800" dirty="0">
+                <a:latin typeface="微软雅黑" panose="020B0503020204020204" pitchFamily="34" charset="-122"/>
+                <a:ea typeface="微软雅黑" panose="020B0503020204020204" pitchFamily="34" charset="-122"/>
+              </a:endParaRPr>
+            </a:p>
+          </p:txBody>
+        </p:sp>
+        <p:sp>
+          <p:nvSpPr>
+            <p:cNvPr id="54" name="Shape 28">
+              <a:extLst>
+                <a:ext uri="{FF2B5EF4-FFF2-40B4-BE49-F238E27FC236}">
+                  <a16:creationId xmlns:a16="http://schemas.microsoft.com/office/drawing/2014/main" id="{99EDEFB3-4519-435B-9ED6-184D0CD44100}"/>
+                </a:ext>
+              </a:extLst>
+            </p:cNvPr>
+            <p:cNvSpPr/>
+            <p:nvPr/>
+          </p:nvSpPr>
+          <p:spPr>
+            <a:xfrm>
+              <a:off x="6795114" y="1394172"/>
+              <a:ext cx="903243" cy="320040"/>
+            </a:xfrm>
+            <a:prstGeom prst="roundRect">
+              <a:avLst>
+                <a:gd name="adj" fmla="val 14286"/>
+              </a:avLst>
+            </a:prstGeom>
+            <a:solidFill>
+              <a:srgbClr val="FFF4D4"/>
+            </a:solidFill>
+            <a:ln w="7620">
+              <a:solidFill>
+                <a:srgbClr val="E5B100"/>
+              </a:solidFill>
+              <a:prstDash val="solid"/>
+            </a:ln>
+          </p:spPr>
+        </p:sp>
+        <p:sp>
+          <p:nvSpPr>
+            <p:cNvPr id="55" name="Text 29">
+              <a:extLst>
+                <a:ext uri="{FF2B5EF4-FFF2-40B4-BE49-F238E27FC236}">
+                  <a16:creationId xmlns:a16="http://schemas.microsoft.com/office/drawing/2014/main" id="{FD9DED82-82F6-4CCE-B94D-6031AFBD55A9}"/>
+                </a:ext>
+              </a:extLst>
+            </p:cNvPr>
+            <p:cNvSpPr/>
+            <p:nvPr/>
+          </p:nvSpPr>
+          <p:spPr>
+            <a:xfrm>
+              <a:off x="6851375" y="1403316"/>
+              <a:ext cx="822960" cy="301752"/>
+            </a:xfrm>
+            <a:prstGeom prst="rect">
+              <a:avLst/>
+            </a:prstGeom>
+            <a:noFill/>
+            <a:ln/>
+          </p:spPr>
+          <p:txBody>
+            <a:bodyPr wrap="square" lIns="254" tIns="254" rIns="254" bIns="254" rtlCol="0" anchor="ctr">
+              <a:normAutofit/>
+            </a:bodyPr>
+            <a:lstStyle/>
+            <a:p>
+              <a:pPr marL="0" indent="0" algn="ctr">
+                <a:buNone/>
+              </a:pPr>
+              <a:r>
+                <a:rPr lang="en-US" sz="800" b="1" dirty="0">
+                  <a:solidFill>
+                    <a:srgbClr val="111111"/>
+                  </a:solidFill>
+                  <a:latin typeface="微软雅黑" panose="020B0503020204020204" pitchFamily="34" charset="-122"/>
+                  <a:ea typeface="微软雅黑" panose="020B0503020204020204" pitchFamily="34" charset="-122"/>
+                  <a:cs typeface="Microsoft YaHei" pitchFamily="34" charset="-120"/>
+                </a:rPr>
+                <a:t>S-CALC</a:t>
+              </a:r>
+              <a:endParaRPr lang="en-US" sz="800" dirty="0">
+                <a:latin typeface="微软雅黑" panose="020B0503020204020204" pitchFamily="34" charset="-122"/>
+                <a:ea typeface="微软雅黑" panose="020B0503020204020204" pitchFamily="34" charset="-122"/>
+              </a:endParaRPr>
+            </a:p>
+            <a:p>
+              <a:pPr marL="0" indent="0" algn="ctr">
+                <a:buNone/>
+              </a:pPr>
+              <a:r>
+                <a:rPr lang="en-US" sz="800" b="1" dirty="0">
+                  <a:solidFill>
+                    <a:srgbClr val="111111"/>
+                  </a:solidFill>
+                  <a:latin typeface="微软雅黑" panose="020B0503020204020204" pitchFamily="34" charset="-122"/>
+                  <a:ea typeface="微软雅黑" panose="020B0503020204020204" pitchFamily="34" charset="-122"/>
+                  <a:cs typeface="Microsoft YaHei" pitchFamily="34" charset="-120"/>
+                </a:rPr>
+                <a:t>服务能力</a:t>
+              </a:r>
+              <a:endParaRPr lang="en-US" sz="800" dirty="0">
+                <a:latin typeface="微软雅黑" panose="020B0503020204020204" pitchFamily="34" charset="-122"/>
+                <a:ea typeface="微软雅黑" panose="020B0503020204020204" pitchFamily="34" charset="-122"/>
+              </a:endParaRPr>
+            </a:p>
+          </p:txBody>
+        </p:sp>
+        <p:sp>
+          <p:nvSpPr>
+            <p:cNvPr id="58" name="Shape 32">
+              <a:extLst>
+                <a:ext uri="{FF2B5EF4-FFF2-40B4-BE49-F238E27FC236}">
+                  <a16:creationId xmlns:a16="http://schemas.microsoft.com/office/drawing/2014/main" id="{FB99B180-F34E-4E3F-AB48-EFD447DDD4DD}"/>
+                </a:ext>
+              </a:extLst>
+            </p:cNvPr>
+            <p:cNvSpPr/>
+            <p:nvPr/>
+          </p:nvSpPr>
+          <p:spPr>
+            <a:xfrm>
+              <a:off x="4940519" y="1549620"/>
+              <a:ext cx="137160" cy="0"/>
+            </a:xfrm>
+            <a:prstGeom prst="line">
+              <a:avLst/>
+            </a:prstGeom>
+            <a:noFill/>
+            <a:ln w="10160">
+              <a:solidFill>
+                <a:srgbClr val="A7A7A7"/>
+              </a:solidFill>
+              <a:prstDash val="solid"/>
+              <a:headEnd type="none"/>
+              <a:tailEnd type="triangle"/>
+            </a:ln>
+          </p:spPr>
+        </p:sp>
+        <p:sp>
+          <p:nvSpPr>
+            <p:cNvPr id="62" name="Shape 33">
+              <a:extLst>
+                <a:ext uri="{FF2B5EF4-FFF2-40B4-BE49-F238E27FC236}">
+                  <a16:creationId xmlns:a16="http://schemas.microsoft.com/office/drawing/2014/main" id="{93E1AED1-91CD-4B80-825A-114A20191329}"/>
+                </a:ext>
+              </a:extLst>
+            </p:cNvPr>
+            <p:cNvSpPr/>
+            <p:nvPr/>
+          </p:nvSpPr>
+          <p:spPr>
+            <a:xfrm>
+              <a:off x="6590486" y="1558764"/>
+              <a:ext cx="155448" cy="0"/>
+            </a:xfrm>
+            <a:prstGeom prst="line">
+              <a:avLst/>
+            </a:prstGeom>
+            <a:noFill/>
+            <a:ln w="10160">
+              <a:solidFill>
+                <a:srgbClr val="A7A7A7"/>
+              </a:solidFill>
+              <a:prstDash val="solid"/>
+              <a:headEnd type="none"/>
+              <a:tailEnd type="triangle"/>
+            </a:ln>
+          </p:spPr>
+        </p:sp>
+        <p:sp>
+          <p:nvSpPr>
+            <p:cNvPr id="74" name="Shape 35">
+              <a:extLst>
+                <a:ext uri="{FF2B5EF4-FFF2-40B4-BE49-F238E27FC236}">
+                  <a16:creationId xmlns:a16="http://schemas.microsoft.com/office/drawing/2014/main" id="{3372D461-9926-4A56-B6DC-4FB7D58BEAB9}"/>
+                </a:ext>
+              </a:extLst>
+            </p:cNvPr>
+            <p:cNvSpPr/>
+            <p:nvPr/>
+          </p:nvSpPr>
+          <p:spPr>
+            <a:xfrm>
+              <a:off x="8200976" y="1394172"/>
+              <a:ext cx="886968" cy="320040"/>
+            </a:xfrm>
+            <a:prstGeom prst="roundRect">
+              <a:avLst>
+                <a:gd name="adj" fmla="val 14286"/>
+              </a:avLst>
+            </a:prstGeom>
+            <a:solidFill>
+              <a:srgbClr val="EDF4FA"/>
+            </a:solidFill>
+            <a:ln w="7620">
+              <a:solidFill>
+                <a:srgbClr val="2D669B"/>
+              </a:solidFill>
+              <a:prstDash val="solid"/>
+            </a:ln>
+          </p:spPr>
+        </p:sp>
+        <p:sp>
+          <p:nvSpPr>
+            <p:cNvPr id="78" name="Text 36">
+              <a:extLst>
+                <a:ext uri="{FF2B5EF4-FFF2-40B4-BE49-F238E27FC236}">
+                  <a16:creationId xmlns:a16="http://schemas.microsoft.com/office/drawing/2014/main" id="{F721D0CA-3A20-44EB-8540-160B0A1C4F68}"/>
+                </a:ext>
+              </a:extLst>
+            </p:cNvPr>
+            <p:cNvSpPr/>
+            <p:nvPr/>
+          </p:nvSpPr>
+          <p:spPr>
+            <a:xfrm>
+              <a:off x="8219264" y="1403316"/>
+              <a:ext cx="850392" cy="301752"/>
+            </a:xfrm>
+            <a:prstGeom prst="rect">
+              <a:avLst/>
+            </a:prstGeom>
+            <a:noFill/>
+            <a:ln/>
+          </p:spPr>
+          <p:txBody>
+            <a:bodyPr wrap="square" lIns="254" tIns="254" rIns="254" bIns="254" rtlCol="0" anchor="ctr">
+              <a:normAutofit/>
+            </a:bodyPr>
+            <a:lstStyle/>
+            <a:p>
+              <a:pPr marL="0" indent="0" algn="ctr">
+                <a:buNone/>
+              </a:pPr>
+              <a:r>
+                <a:rPr lang="en-US" sz="800" b="1" dirty="0" err="1">
+                  <a:solidFill>
+                    <a:srgbClr val="0B376D"/>
+                  </a:solidFill>
+                  <a:latin typeface="微软雅黑" panose="020B0503020204020204" pitchFamily="34" charset="-122"/>
+                  <a:ea typeface="微软雅黑" panose="020B0503020204020204" pitchFamily="34" charset="-122"/>
+                  <a:cs typeface="Microsoft YaHei" pitchFamily="34" charset="-120"/>
+                </a:rPr>
+                <a:t>结果落库</a:t>
+              </a:r>
+              <a:endParaRPr lang="en-US" sz="800" dirty="0">
+                <a:latin typeface="微软雅黑" panose="020B0503020204020204" pitchFamily="34" charset="-122"/>
+                <a:ea typeface="微软雅黑" panose="020B0503020204020204" pitchFamily="34" charset="-122"/>
+              </a:endParaRPr>
+            </a:p>
+          </p:txBody>
+        </p:sp>
+        <p:sp>
+          <p:nvSpPr>
+            <p:cNvPr id="81" name="Shape 37">
+              <a:extLst>
+                <a:ext uri="{FF2B5EF4-FFF2-40B4-BE49-F238E27FC236}">
+                  <a16:creationId xmlns:a16="http://schemas.microsoft.com/office/drawing/2014/main" id="{2ED4BB11-272C-4945-91B6-B7A957B749E9}"/>
+                </a:ext>
+              </a:extLst>
+            </p:cNvPr>
+            <p:cNvSpPr/>
+            <p:nvPr/>
+          </p:nvSpPr>
+          <p:spPr>
+            <a:xfrm>
+              <a:off x="9279968" y="1394172"/>
+              <a:ext cx="877824" cy="320040"/>
+            </a:xfrm>
+            <a:prstGeom prst="roundRect">
+              <a:avLst>
+                <a:gd name="adj" fmla="val 14286"/>
+              </a:avLst>
+            </a:prstGeom>
+            <a:solidFill>
+              <a:srgbClr val="EDF4FA"/>
+            </a:solidFill>
+            <a:ln w="7620">
+              <a:solidFill>
+                <a:srgbClr val="2D669B"/>
+              </a:solidFill>
+              <a:prstDash val="solid"/>
+            </a:ln>
+          </p:spPr>
+        </p:sp>
+        <p:sp>
+          <p:nvSpPr>
+            <p:cNvPr id="82" name="Text 38">
+              <a:extLst>
+                <a:ext uri="{FF2B5EF4-FFF2-40B4-BE49-F238E27FC236}">
+                  <a16:creationId xmlns:a16="http://schemas.microsoft.com/office/drawing/2014/main" id="{3FD04EF7-A39B-4BF3-A3A4-47B807A9B45A}"/>
+                </a:ext>
+              </a:extLst>
+            </p:cNvPr>
+            <p:cNvSpPr/>
+            <p:nvPr/>
+          </p:nvSpPr>
+          <p:spPr>
+            <a:xfrm>
+              <a:off x="9298256" y="1403316"/>
+              <a:ext cx="841248" cy="301752"/>
+            </a:xfrm>
+            <a:prstGeom prst="rect">
+              <a:avLst/>
+            </a:prstGeom>
+            <a:noFill/>
+            <a:ln/>
+          </p:spPr>
+          <p:txBody>
+            <a:bodyPr wrap="square" lIns="254" tIns="254" rIns="254" bIns="254" rtlCol="0" anchor="ctr">
+              <a:normAutofit/>
+            </a:bodyPr>
+            <a:lstStyle/>
+            <a:p>
+              <a:pPr marL="0" indent="0" algn="ctr">
+                <a:buNone/>
+              </a:pPr>
+              <a:r>
+                <a:rPr lang="zh-CN" altLang="en-US" sz="800" b="1" dirty="0">
+                  <a:solidFill>
+                    <a:srgbClr val="0B376D"/>
+                  </a:solidFill>
+                  <a:latin typeface="微软雅黑" panose="020B0503020204020204" pitchFamily="34" charset="-122"/>
+                  <a:ea typeface="微软雅黑" panose="020B0503020204020204" pitchFamily="34" charset="-122"/>
+                </a:rPr>
+                <a:t>策略模型调用</a:t>
+              </a:r>
+              <a:endParaRPr lang="en-US" sz="800" dirty="0">
+                <a:latin typeface="微软雅黑" panose="020B0503020204020204" pitchFamily="34" charset="-122"/>
+                <a:ea typeface="微软雅黑" panose="020B0503020204020204" pitchFamily="34" charset="-122"/>
+              </a:endParaRPr>
+            </a:p>
+          </p:txBody>
+        </p:sp>
+        <p:sp>
+          <p:nvSpPr>
+            <p:cNvPr id="83" name="Shape 39">
+              <a:extLst>
+                <a:ext uri="{FF2B5EF4-FFF2-40B4-BE49-F238E27FC236}">
+                  <a16:creationId xmlns:a16="http://schemas.microsoft.com/office/drawing/2014/main" id="{1190DB02-B45C-4CDB-9B03-55773EEED340}"/>
+                </a:ext>
+              </a:extLst>
+            </p:cNvPr>
+            <p:cNvSpPr/>
+            <p:nvPr/>
+          </p:nvSpPr>
+          <p:spPr>
+            <a:xfrm>
+              <a:off x="10340672" y="1394172"/>
+              <a:ext cx="749808" cy="320040"/>
+            </a:xfrm>
+            <a:prstGeom prst="roundRect">
+              <a:avLst>
+                <a:gd name="adj" fmla="val 14286"/>
+              </a:avLst>
+            </a:prstGeom>
+            <a:solidFill>
+              <a:srgbClr val="EDF4FA"/>
+            </a:solidFill>
+            <a:ln w="7620">
+              <a:solidFill>
+                <a:srgbClr val="2D669B"/>
+              </a:solidFill>
+              <a:prstDash val="solid"/>
+            </a:ln>
+          </p:spPr>
+        </p:sp>
+        <p:sp>
+          <p:nvSpPr>
+            <p:cNvPr id="84" name="Text 40">
+              <a:extLst>
+                <a:ext uri="{FF2B5EF4-FFF2-40B4-BE49-F238E27FC236}">
+                  <a16:creationId xmlns:a16="http://schemas.microsoft.com/office/drawing/2014/main" id="{03421656-77BC-49DB-9096-7EE0BC5D1A6F}"/>
+                </a:ext>
+              </a:extLst>
+            </p:cNvPr>
+            <p:cNvSpPr/>
+            <p:nvPr/>
+          </p:nvSpPr>
+          <p:spPr>
+            <a:xfrm>
+              <a:off x="10358960" y="1403316"/>
+              <a:ext cx="713232" cy="301752"/>
+            </a:xfrm>
+            <a:prstGeom prst="rect">
+              <a:avLst/>
+            </a:prstGeom>
+            <a:noFill/>
+            <a:ln/>
+          </p:spPr>
+          <p:txBody>
+            <a:bodyPr wrap="square" lIns="254" tIns="254" rIns="254" bIns="254" rtlCol="0" anchor="ctr">
+              <a:normAutofit/>
+            </a:bodyPr>
+            <a:lstStyle/>
+            <a:p>
+              <a:pPr marL="0" indent="0" algn="ctr">
+                <a:buNone/>
+              </a:pPr>
+              <a:r>
+                <a:rPr lang="en-US" sz="800" b="1" dirty="0">
+                  <a:solidFill>
+                    <a:srgbClr val="0B376D"/>
+                  </a:solidFill>
+                  <a:latin typeface="微软雅黑" panose="020B0503020204020204" pitchFamily="34" charset="-122"/>
+                  <a:ea typeface="微软雅黑" panose="020B0503020204020204" pitchFamily="34" charset="-122"/>
+                  <a:cs typeface="Microsoft YaHei" pitchFamily="34" charset="-120"/>
+                </a:rPr>
+                <a:t>LMS</a:t>
+              </a:r>
+              <a:endParaRPr lang="en-US" sz="800" dirty="0">
+                <a:latin typeface="微软雅黑" panose="020B0503020204020204" pitchFamily="34" charset="-122"/>
+                <a:ea typeface="微软雅黑" panose="020B0503020204020204" pitchFamily="34" charset="-122"/>
+              </a:endParaRPr>
+            </a:p>
+            <a:p>
+              <a:pPr marL="0" indent="0" algn="ctr">
+                <a:buNone/>
+              </a:pPr>
+              <a:r>
+                <a:rPr lang="en-US" sz="800" b="1" dirty="0">
+                  <a:solidFill>
+                    <a:srgbClr val="0B376D"/>
+                  </a:solidFill>
+                  <a:latin typeface="微软雅黑" panose="020B0503020204020204" pitchFamily="34" charset="-122"/>
+                  <a:ea typeface="微软雅黑" panose="020B0503020204020204" pitchFamily="34" charset="-122"/>
+                  <a:cs typeface="Microsoft YaHei" pitchFamily="34" charset="-120"/>
+                </a:rPr>
+                <a:t>输出应用</a:t>
+              </a:r>
+              <a:endParaRPr lang="en-US" sz="800" dirty="0">
+                <a:latin typeface="微软雅黑" panose="020B0503020204020204" pitchFamily="34" charset="-122"/>
+                <a:ea typeface="微软雅黑" panose="020B0503020204020204" pitchFamily="34" charset="-122"/>
+              </a:endParaRPr>
+            </a:p>
+          </p:txBody>
+        </p:sp>
+        <p:sp>
+          <p:nvSpPr>
+            <p:cNvPr id="85" name="Shape 41">
+              <a:extLst>
+                <a:ext uri="{FF2B5EF4-FFF2-40B4-BE49-F238E27FC236}">
+                  <a16:creationId xmlns:a16="http://schemas.microsoft.com/office/drawing/2014/main" id="{6D48832B-7B11-4F92-88E3-387E501596C3}"/>
+                </a:ext>
+              </a:extLst>
+            </p:cNvPr>
+            <p:cNvSpPr/>
+            <p:nvPr/>
+          </p:nvSpPr>
+          <p:spPr>
+            <a:xfrm>
+              <a:off x="9087944" y="1549620"/>
+              <a:ext cx="173736" cy="0"/>
+            </a:xfrm>
+            <a:prstGeom prst="line">
+              <a:avLst/>
+            </a:prstGeom>
+            <a:noFill/>
+            <a:ln w="10160">
+              <a:solidFill>
+                <a:srgbClr val="A7A7A7"/>
+              </a:solidFill>
+              <a:prstDash val="solid"/>
+              <a:headEnd type="none"/>
+              <a:tailEnd type="triangle"/>
+            </a:ln>
+          </p:spPr>
+        </p:sp>
+        <p:sp>
+          <p:nvSpPr>
+            <p:cNvPr id="86" name="Shape 42">
+              <a:extLst>
+                <a:ext uri="{FF2B5EF4-FFF2-40B4-BE49-F238E27FC236}">
+                  <a16:creationId xmlns:a16="http://schemas.microsoft.com/office/drawing/2014/main" id="{13A233BA-EBFD-4A44-BFDB-928D4E36B012}"/>
+                </a:ext>
+              </a:extLst>
+            </p:cNvPr>
+            <p:cNvSpPr/>
+            <p:nvPr/>
+          </p:nvSpPr>
+          <p:spPr>
+            <a:xfrm>
+              <a:off x="10157792" y="1549620"/>
+              <a:ext cx="164592" cy="0"/>
+            </a:xfrm>
+            <a:prstGeom prst="line">
+              <a:avLst/>
+            </a:prstGeom>
+            <a:noFill/>
+            <a:ln w="10160">
+              <a:solidFill>
+                <a:srgbClr val="A7A7A7"/>
+              </a:solidFill>
+              <a:prstDash val="solid"/>
+              <a:headEnd type="none"/>
+              <a:tailEnd type="triangle"/>
+            </a:ln>
+          </p:spPr>
+        </p:sp>
+        <p:grpSp>
+          <p:nvGrpSpPr>
+            <p:cNvPr id="4" name="组合 3">
+              <a:extLst>
+                <a:ext uri="{FF2B5EF4-FFF2-40B4-BE49-F238E27FC236}">
+                  <a16:creationId xmlns:a16="http://schemas.microsoft.com/office/drawing/2014/main" id="{44C0E1DC-067D-481D-A592-A82AC7264C2F}"/>
+                </a:ext>
+              </a:extLst>
+            </p:cNvPr>
+            <p:cNvGrpSpPr/>
+            <p:nvPr/>
+          </p:nvGrpSpPr>
+          <p:grpSpPr>
+            <a:xfrm>
+              <a:off x="4098563" y="1860516"/>
+              <a:ext cx="2969421" cy="182880"/>
+              <a:chOff x="4098563" y="1860516"/>
+              <a:chExt cx="2969421" cy="182880"/>
+            </a:xfrm>
+          </p:grpSpPr>
+          <p:sp>
+            <p:nvSpPr>
+              <p:cNvPr id="87" name="Shape 43">
+                <a:extLst>
+                  <a:ext uri="{FF2B5EF4-FFF2-40B4-BE49-F238E27FC236}">
+                    <a16:creationId xmlns:a16="http://schemas.microsoft.com/office/drawing/2014/main" id="{C1E9F602-A65E-4C5C-BD6D-89644C0FBAED}"/>
+                  </a:ext>
+                </a:extLst>
+              </p:cNvPr>
+              <p:cNvSpPr/>
+              <p:nvPr/>
+            </p:nvSpPr>
+            <p:spPr>
+              <a:xfrm>
+                <a:off x="4226285" y="1860516"/>
+                <a:ext cx="1350363" cy="182880"/>
+              </a:xfrm>
+              <a:prstGeom prst="roundRect">
+                <a:avLst>
+                  <a:gd name="adj" fmla="val 25000"/>
+                </a:avLst>
+              </a:prstGeom>
+              <a:solidFill>
+                <a:schemeClr val="bg2">
+                  <a:alpha val="25000"/>
+                </a:schemeClr>
+              </a:solidFill>
+              <a:ln w="3175">
+                <a:solidFill>
+                  <a:schemeClr val="accent6"/>
+                </a:solidFill>
+                <a:prstDash val="solid"/>
+              </a:ln>
+            </p:spPr>
+            <p:txBody>
+              <a:bodyPr/>
+              <a:lstStyle/>
+              <a:p>
+                <a:endParaRPr lang="zh-CN" altLang="en-US" dirty="0"/>
+              </a:p>
+            </p:txBody>
+          </p:sp>
+          <p:sp>
+            <p:nvSpPr>
+              <p:cNvPr id="88" name="Text 44">
+                <a:extLst>
+                  <a:ext uri="{FF2B5EF4-FFF2-40B4-BE49-F238E27FC236}">
+                    <a16:creationId xmlns:a16="http://schemas.microsoft.com/office/drawing/2014/main" id="{3CC56E02-5FE6-4579-8C69-5E35D1C4551A}"/>
+                  </a:ext>
+                </a:extLst>
+              </p:cNvPr>
+              <p:cNvSpPr/>
+              <p:nvPr/>
+            </p:nvSpPr>
+            <p:spPr>
+              <a:xfrm>
+                <a:off x="4098563" y="1875457"/>
+                <a:ext cx="1627632" cy="156957"/>
+              </a:xfrm>
+              <a:prstGeom prst="rect">
+                <a:avLst/>
+              </a:prstGeom>
+              <a:noFill/>
+              <a:ln/>
+            </p:spPr>
+            <p:txBody>
+              <a:bodyPr wrap="square" lIns="0" tIns="0" rIns="0" bIns="0" rtlCol="0" anchor="ctr">
+                <a:noAutofit/>
+              </a:bodyPr>
+              <a:lstStyle/>
+              <a:p>
+                <a:pPr marL="0" indent="0" algn="ctr">
+                  <a:buNone/>
+                </a:pPr>
+                <a:r>
+                  <a:rPr lang="en-US" sz="700" b="1" dirty="0" err="1">
+                    <a:latin typeface="微软雅黑" panose="020B0503020204020204" pitchFamily="34" charset="-122"/>
+                    <a:ea typeface="微软雅黑" panose="020B0503020204020204" pitchFamily="34" charset="-122"/>
+                    <a:cs typeface="Microsoft YaHei" pitchFamily="34" charset="-120"/>
+                  </a:rPr>
+                  <a:t>知识库</a:t>
+                </a:r>
+                <a:r>
+                  <a:rPr lang="zh-CN" altLang="en-US" sz="700" b="1" dirty="0">
+                    <a:latin typeface="微软雅黑" panose="020B0503020204020204" pitchFamily="34" charset="-122"/>
+                    <a:ea typeface="微软雅黑" panose="020B0503020204020204" pitchFamily="34" charset="-122"/>
+                    <a:cs typeface="Microsoft YaHei" pitchFamily="34" charset="-120"/>
+                  </a:rPr>
+                  <a:t>维护</a:t>
+                </a:r>
+                <a:r>
+                  <a:rPr lang="en-US" sz="700" b="1" dirty="0">
+                    <a:latin typeface="微软雅黑" panose="020B0503020204020204" pitchFamily="34" charset="-122"/>
+                    <a:ea typeface="微软雅黑" panose="020B0503020204020204" pitchFamily="34" charset="-122"/>
+                    <a:cs typeface="Microsoft YaHei" pitchFamily="34" charset="-120"/>
+                  </a:rPr>
+                  <a:t>：规则 / </a:t>
+                </a:r>
+                <a:r>
+                  <a:rPr lang="zh-CN" altLang="en-US" sz="700" b="1" dirty="0">
+                    <a:latin typeface="微软雅黑" panose="020B0503020204020204" pitchFamily="34" charset="-122"/>
+                    <a:ea typeface="微软雅黑" panose="020B0503020204020204" pitchFamily="34" charset="-122"/>
+                    <a:cs typeface="Microsoft YaHei" pitchFamily="34" charset="-120"/>
+                  </a:rPr>
+                  <a:t>新增商户</a:t>
+                </a:r>
+                <a:endParaRPr lang="en-US" sz="700" b="1" dirty="0">
+                  <a:latin typeface="微软雅黑" panose="020B0503020204020204" pitchFamily="34" charset="-122"/>
+                  <a:ea typeface="微软雅黑" panose="020B0503020204020204" pitchFamily="34" charset="-122"/>
+                </a:endParaRPr>
+              </a:p>
+            </p:txBody>
+          </p:sp>
+          <p:sp>
+            <p:nvSpPr>
+              <p:cNvPr id="89" name="Shape 45">
+                <a:extLst>
+                  <a:ext uri="{FF2B5EF4-FFF2-40B4-BE49-F238E27FC236}">
+                    <a16:creationId xmlns:a16="http://schemas.microsoft.com/office/drawing/2014/main" id="{6DB06DFD-D4EB-489E-AC9D-4389A044AFCE}"/>
+                  </a:ext>
+                </a:extLst>
+              </p:cNvPr>
+              <p:cNvSpPr/>
+              <p:nvPr/>
+            </p:nvSpPr>
+            <p:spPr>
+              <a:xfrm>
+                <a:off x="5622368" y="1860516"/>
+                <a:ext cx="1388032" cy="182880"/>
+              </a:xfrm>
+              <a:prstGeom prst="roundRect">
+                <a:avLst>
+                  <a:gd name="adj" fmla="val 25000"/>
+                </a:avLst>
+              </a:prstGeom>
+              <a:solidFill>
+                <a:srgbClr val="E0E8F3"/>
+              </a:solidFill>
+              <a:ln w="3175">
+                <a:solidFill>
+                  <a:schemeClr val="accent6"/>
+                </a:solidFill>
+                <a:prstDash val="solid"/>
+              </a:ln>
+            </p:spPr>
+          </p:sp>
+          <p:sp>
+            <p:nvSpPr>
+              <p:cNvPr id="90" name="Text 46">
+                <a:extLst>
+                  <a:ext uri="{FF2B5EF4-FFF2-40B4-BE49-F238E27FC236}">
+                    <a16:creationId xmlns:a16="http://schemas.microsoft.com/office/drawing/2014/main" id="{B357DB46-0264-4973-B3AD-35E542AC05DF}"/>
+                  </a:ext>
+                </a:extLst>
+              </p:cNvPr>
+              <p:cNvSpPr/>
+              <p:nvPr/>
+            </p:nvSpPr>
+            <p:spPr>
+              <a:xfrm>
+                <a:off x="5568074" y="1888328"/>
+                <a:ext cx="1499910" cy="137160"/>
+              </a:xfrm>
+              <a:prstGeom prst="rect">
+                <a:avLst/>
+              </a:prstGeom>
+              <a:noFill/>
+              <a:ln/>
+            </p:spPr>
+            <p:txBody>
+              <a:bodyPr wrap="square" lIns="0" tIns="0" rIns="0" bIns="0" rtlCol="0" anchor="ctr">
+                <a:noAutofit/>
+              </a:bodyPr>
+              <a:lstStyle/>
+              <a:p>
+                <a:pPr marL="0" indent="0" algn="ctr">
+                  <a:buNone/>
+                </a:pPr>
+                <a:r>
+                  <a:rPr lang="en-US" sz="700" b="1" dirty="0" err="1">
+                    <a:solidFill>
+                      <a:srgbClr val="111111"/>
+                    </a:solidFill>
+                    <a:latin typeface="微软雅黑" panose="020B0503020204020204" pitchFamily="34" charset="-122"/>
+                    <a:ea typeface="微软雅黑" panose="020B0503020204020204" pitchFamily="34" charset="-122"/>
+                    <a:cs typeface="Microsoft YaHei" pitchFamily="34" charset="-120"/>
+                  </a:rPr>
+                  <a:t>监控运营：效果监控</a:t>
+                </a:r>
+                <a:r>
+                  <a:rPr lang="en-US" sz="700" b="1" dirty="0">
+                    <a:solidFill>
+                      <a:srgbClr val="111111"/>
+                    </a:solidFill>
+                    <a:latin typeface="微软雅黑" panose="020B0503020204020204" pitchFamily="34" charset="-122"/>
+                    <a:ea typeface="微软雅黑" panose="020B0503020204020204" pitchFamily="34" charset="-122"/>
+                    <a:cs typeface="Microsoft YaHei" pitchFamily="34" charset="-120"/>
+                  </a:rPr>
+                  <a:t> / </a:t>
+                </a:r>
+                <a:r>
+                  <a:rPr lang="en-US" sz="700" b="1" dirty="0" err="1">
+                    <a:solidFill>
+                      <a:srgbClr val="111111"/>
+                    </a:solidFill>
+                    <a:latin typeface="微软雅黑" panose="020B0503020204020204" pitchFamily="34" charset="-122"/>
+                    <a:ea typeface="微软雅黑" panose="020B0503020204020204" pitchFamily="34" charset="-122"/>
+                    <a:cs typeface="Microsoft YaHei" pitchFamily="34" charset="-120"/>
+                  </a:rPr>
+                  <a:t>异常跟踪</a:t>
+                </a:r>
+                <a:endParaRPr lang="en-US" sz="700" b="1" dirty="0">
+                  <a:latin typeface="微软雅黑" panose="020B0503020204020204" pitchFamily="34" charset="-122"/>
+                  <a:ea typeface="微软雅黑" panose="020B0503020204020204" pitchFamily="34" charset="-122"/>
+                </a:endParaRPr>
+              </a:p>
+            </p:txBody>
+          </p:sp>
+        </p:grpSp>
+      </p:grpSp>
+      <p:sp>
+        <p:nvSpPr>
+          <p:cNvPr id="91" name="Shape 47">
+            <a:extLst>
+              <a:ext uri="{FF2B5EF4-FFF2-40B4-BE49-F238E27FC236}">
+                <a16:creationId xmlns:a16="http://schemas.microsoft.com/office/drawing/2014/main" id="{886C1365-B887-43AA-AE3B-0ECB68BCB8A4}"/>
               </a:ext>
             </a:extLst>
           </p:cNvPr>
@@ -4811,840 +5897,7 @@
         </p:nvSpPr>
         <p:spPr>
           <a:xfrm>
-            <a:off x="4067888" y="1403316"/>
-            <a:ext cx="786384" cy="301752"/>
-          </a:xfrm>
-          <a:prstGeom prst="rect">
-            <a:avLst/>
-          </a:prstGeom>
-          <a:noFill/>
-          <a:ln/>
-        </p:spPr>
-        <p:txBody>
-          <a:bodyPr wrap="square" lIns="254" tIns="254" rIns="254" bIns="254" rtlCol="0" anchor="ctr">
-            <a:normAutofit/>
-          </a:bodyPr>
-          <a:lstStyle/>
-          <a:p>
-            <a:pPr marL="0" indent="0" algn="ctr">
-              <a:buNone/>
-            </a:pPr>
-            <a:r>
-              <a:rPr lang="en-US" sz="730" b="1" dirty="0">
-                <a:solidFill>
-                  <a:srgbClr val="FFFFFF"/>
-                </a:solidFill>
-                <a:latin typeface="Microsoft YaHei" pitchFamily="34" charset="0"/>
-                <a:ea typeface="Microsoft YaHei" pitchFamily="34" charset="-122"/>
-                <a:cs typeface="Microsoft YaHei" pitchFamily="34" charset="-120"/>
-              </a:rPr>
-              <a:t>BS-CAT</a:t>
-            </a:r>
-            <a:endParaRPr lang="en-US" sz="730" dirty="0"/>
-          </a:p>
-          <a:p>
-            <a:pPr marL="0" indent="0" algn="ctr">
-              <a:buNone/>
-            </a:pPr>
-            <a:r>
-              <a:rPr lang="en-US" sz="730" b="1" dirty="0">
-                <a:solidFill>
-                  <a:srgbClr val="FFFFFF"/>
-                </a:solidFill>
-                <a:latin typeface="Microsoft YaHei" pitchFamily="34" charset="0"/>
-                <a:ea typeface="Microsoft YaHei" pitchFamily="34" charset="-122"/>
-                <a:cs typeface="Microsoft YaHei" pitchFamily="34" charset="-120"/>
-              </a:rPr>
-              <a:t>流水分类</a:t>
-            </a:r>
-            <a:endParaRPr lang="en-US" sz="730" dirty="0"/>
-          </a:p>
-        </p:txBody>
-      </p:sp>
-      <p:sp>
-        <p:nvSpPr>
-          <p:cNvPr id="52" name="Shape 26">
-            <a:extLst>
-              <a:ext uri="{FF2B5EF4-FFF2-40B4-BE49-F238E27FC236}">
-                <a16:creationId xmlns:a16="http://schemas.microsoft.com/office/drawing/2014/main" id="{E3127D75-721C-4419-9CF7-E5E1C34379A1}"/>
-              </a:ext>
-            </a:extLst>
-          </p:cNvPr>
-          <p:cNvSpPr/>
-          <p:nvPr/>
-        </p:nvSpPr>
-        <p:spPr>
-          <a:xfrm>
-            <a:off x="5070479" y="1394172"/>
-            <a:ext cx="1236868" cy="320040"/>
-          </a:xfrm>
-          <a:prstGeom prst="roundRect">
-            <a:avLst>
-              <a:gd name="adj" fmla="val 14286"/>
-            </a:avLst>
-          </a:prstGeom>
-          <a:solidFill>
-            <a:srgbClr val="FFF4D4"/>
-          </a:solidFill>
-          <a:ln w="7620">
-            <a:solidFill>
-              <a:srgbClr val="E5B100"/>
-            </a:solidFill>
-            <a:prstDash val="solid"/>
-          </a:ln>
-        </p:spPr>
-      </p:sp>
-      <p:sp>
-        <p:nvSpPr>
-          <p:cNvPr id="53" name="Text 27">
-            <a:extLst>
-              <a:ext uri="{FF2B5EF4-FFF2-40B4-BE49-F238E27FC236}">
-                <a16:creationId xmlns:a16="http://schemas.microsoft.com/office/drawing/2014/main" id="{BB903172-90BD-4D5E-9B7B-323E8766FE2D}"/>
-              </a:ext>
-            </a:extLst>
-          </p:cNvPr>
-          <p:cNvSpPr/>
-          <p:nvPr/>
-        </p:nvSpPr>
-        <p:spPr>
-          <a:xfrm>
-            <a:off x="5246789" y="1403316"/>
-            <a:ext cx="859536" cy="301752"/>
-          </a:xfrm>
-          <a:prstGeom prst="rect">
-            <a:avLst/>
-          </a:prstGeom>
-          <a:noFill/>
-          <a:ln/>
-        </p:spPr>
-        <p:txBody>
-          <a:bodyPr wrap="square" lIns="254" tIns="254" rIns="254" bIns="254" rtlCol="0" anchor="ctr">
-            <a:normAutofit/>
-          </a:bodyPr>
-          <a:lstStyle/>
-          <a:p>
-            <a:pPr marL="0" indent="0" algn="ctr">
-              <a:buNone/>
-            </a:pPr>
-            <a:r>
-              <a:rPr lang="en-US" sz="730" b="1" dirty="0">
-                <a:solidFill>
-                  <a:srgbClr val="111111"/>
-                </a:solidFill>
-                <a:latin typeface="Microsoft YaHei" pitchFamily="34" charset="0"/>
-                <a:ea typeface="Microsoft YaHei" pitchFamily="34" charset="-122"/>
-                <a:cs typeface="Microsoft YaHei" pitchFamily="34" charset="-120"/>
-              </a:rPr>
-              <a:t>交易识别</a:t>
-            </a:r>
-            <a:endParaRPr lang="en-US" sz="730" dirty="0"/>
-          </a:p>
-          <a:p>
-            <a:pPr marL="0" indent="0" algn="ctr">
-              <a:buNone/>
-            </a:pPr>
-            <a:r>
-              <a:rPr lang="en-US" sz="730" b="1" dirty="0">
-                <a:solidFill>
-                  <a:srgbClr val="111111"/>
-                </a:solidFill>
-                <a:latin typeface="Microsoft YaHei" pitchFamily="34" charset="0"/>
-                <a:ea typeface="Microsoft YaHei" pitchFamily="34" charset="-122"/>
-                <a:cs typeface="Microsoft YaHei" pitchFamily="34" charset="-120"/>
-              </a:rPr>
-              <a:t>对手/标签</a:t>
-            </a:r>
-            <a:endParaRPr lang="en-US" sz="730" dirty="0"/>
-          </a:p>
-        </p:txBody>
-      </p:sp>
-      <p:sp>
-        <p:nvSpPr>
-          <p:cNvPr id="54" name="Shape 28">
-            <a:extLst>
-              <a:ext uri="{FF2B5EF4-FFF2-40B4-BE49-F238E27FC236}">
-                <a16:creationId xmlns:a16="http://schemas.microsoft.com/office/drawing/2014/main" id="{99EDEFB3-4519-435B-9ED6-184D0CD44100}"/>
-              </a:ext>
-            </a:extLst>
-          </p:cNvPr>
-          <p:cNvSpPr/>
-          <p:nvPr/>
-        </p:nvSpPr>
-        <p:spPr>
-          <a:xfrm>
-            <a:off x="6633660" y="1394172"/>
-            <a:ext cx="1064698" cy="320040"/>
-          </a:xfrm>
-          <a:prstGeom prst="roundRect">
-            <a:avLst>
-              <a:gd name="adj" fmla="val 14286"/>
-            </a:avLst>
-          </a:prstGeom>
-          <a:solidFill>
-            <a:srgbClr val="FFF4D4"/>
-          </a:solidFill>
-          <a:ln w="7620">
-            <a:solidFill>
-              <a:srgbClr val="E5B100"/>
-            </a:solidFill>
-            <a:prstDash val="solid"/>
-          </a:ln>
-        </p:spPr>
-      </p:sp>
-      <p:sp>
-        <p:nvSpPr>
-          <p:cNvPr id="55" name="Text 29">
-            <a:extLst>
-              <a:ext uri="{FF2B5EF4-FFF2-40B4-BE49-F238E27FC236}">
-                <a16:creationId xmlns:a16="http://schemas.microsoft.com/office/drawing/2014/main" id="{FD9DED82-82F6-4CCE-B94D-6031AFBD55A9}"/>
-              </a:ext>
-            </a:extLst>
-          </p:cNvPr>
-          <p:cNvSpPr/>
-          <p:nvPr/>
-        </p:nvSpPr>
-        <p:spPr>
-          <a:xfrm>
-            <a:off x="6746342" y="1403316"/>
-            <a:ext cx="822960" cy="301752"/>
-          </a:xfrm>
-          <a:prstGeom prst="rect">
-            <a:avLst/>
-          </a:prstGeom>
-          <a:noFill/>
-          <a:ln/>
-        </p:spPr>
-        <p:txBody>
-          <a:bodyPr wrap="square" lIns="254" tIns="254" rIns="254" bIns="254" rtlCol="0" anchor="ctr">
-            <a:normAutofit/>
-          </a:bodyPr>
-          <a:lstStyle/>
-          <a:p>
-            <a:pPr marL="0" indent="0" algn="ctr">
-              <a:buNone/>
-            </a:pPr>
-            <a:r>
-              <a:rPr lang="en-US" sz="730" b="1" dirty="0">
-                <a:solidFill>
-                  <a:srgbClr val="111111"/>
-                </a:solidFill>
-                <a:latin typeface="Microsoft YaHei" pitchFamily="34" charset="0"/>
-                <a:ea typeface="Microsoft YaHei" pitchFamily="34" charset="-122"/>
-                <a:cs typeface="Microsoft YaHei" pitchFamily="34" charset="-120"/>
-              </a:rPr>
-              <a:t>S-CALC</a:t>
-            </a:r>
-            <a:endParaRPr lang="en-US" sz="730" dirty="0"/>
-          </a:p>
-          <a:p>
-            <a:pPr marL="0" indent="0" algn="ctr">
-              <a:buNone/>
-            </a:pPr>
-            <a:r>
-              <a:rPr lang="en-US" sz="730" b="1" dirty="0">
-                <a:solidFill>
-                  <a:srgbClr val="111111"/>
-                </a:solidFill>
-                <a:latin typeface="Microsoft YaHei" pitchFamily="34" charset="0"/>
-                <a:ea typeface="Microsoft YaHei" pitchFamily="34" charset="-122"/>
-                <a:cs typeface="Microsoft YaHei" pitchFamily="34" charset="-120"/>
-              </a:rPr>
-              <a:t>服务能力</a:t>
-            </a:r>
-            <a:endParaRPr lang="en-US" sz="730" dirty="0"/>
-          </a:p>
-        </p:txBody>
-      </p:sp>
-      <p:sp>
-        <p:nvSpPr>
-          <p:cNvPr id="58" name="Shape 32">
-            <a:extLst>
-              <a:ext uri="{FF2B5EF4-FFF2-40B4-BE49-F238E27FC236}">
-                <a16:creationId xmlns:a16="http://schemas.microsoft.com/office/drawing/2014/main" id="{FB99B180-F34E-4E3F-AB48-EFD447DDD4DD}"/>
-              </a:ext>
-            </a:extLst>
-          </p:cNvPr>
-          <p:cNvSpPr/>
-          <p:nvPr/>
-        </p:nvSpPr>
-        <p:spPr>
-          <a:xfrm>
-            <a:off x="4872560" y="1549620"/>
-            <a:ext cx="137160" cy="0"/>
-          </a:xfrm>
-          <a:prstGeom prst="line">
-            <a:avLst/>
-          </a:prstGeom>
-          <a:noFill/>
-          <a:ln w="10160">
-            <a:solidFill>
-              <a:srgbClr val="A7A7A7"/>
-            </a:solidFill>
-            <a:prstDash val="solid"/>
-            <a:headEnd type="none"/>
-            <a:tailEnd type="triangle"/>
-          </a:ln>
-        </p:spPr>
-      </p:sp>
-      <p:sp>
-        <p:nvSpPr>
-          <p:cNvPr id="62" name="Shape 33">
-            <a:extLst>
-              <a:ext uri="{FF2B5EF4-FFF2-40B4-BE49-F238E27FC236}">
-                <a16:creationId xmlns:a16="http://schemas.microsoft.com/office/drawing/2014/main" id="{93E1AED1-91CD-4B80-825A-114A20191329}"/>
-              </a:ext>
-            </a:extLst>
-          </p:cNvPr>
-          <p:cNvSpPr/>
-          <p:nvPr/>
-        </p:nvSpPr>
-        <p:spPr>
-          <a:xfrm>
-            <a:off x="6392779" y="1558764"/>
-            <a:ext cx="155448" cy="0"/>
-          </a:xfrm>
-          <a:prstGeom prst="line">
-            <a:avLst/>
-          </a:prstGeom>
-          <a:noFill/>
-          <a:ln w="10160">
-            <a:solidFill>
-              <a:srgbClr val="A7A7A7"/>
-            </a:solidFill>
-            <a:prstDash val="solid"/>
-            <a:headEnd type="none"/>
-            <a:tailEnd type="triangle"/>
-          </a:ln>
-        </p:spPr>
-      </p:sp>
-      <p:sp>
-        <p:nvSpPr>
-          <p:cNvPr id="74" name="Shape 35">
-            <a:extLst>
-              <a:ext uri="{FF2B5EF4-FFF2-40B4-BE49-F238E27FC236}">
-                <a16:creationId xmlns:a16="http://schemas.microsoft.com/office/drawing/2014/main" id="{3372D461-9926-4A56-B6DC-4FB7D58BEAB9}"/>
-              </a:ext>
-            </a:extLst>
-          </p:cNvPr>
-          <p:cNvSpPr/>
-          <p:nvPr/>
-        </p:nvSpPr>
-        <p:spPr>
-          <a:xfrm>
-            <a:off x="8200976" y="1394172"/>
-            <a:ext cx="886968" cy="320040"/>
-          </a:xfrm>
-          <a:prstGeom prst="roundRect">
-            <a:avLst>
-              <a:gd name="adj" fmla="val 14286"/>
-            </a:avLst>
-          </a:prstGeom>
-          <a:solidFill>
-            <a:srgbClr val="EDF4FA"/>
-          </a:solidFill>
-          <a:ln w="7620">
-            <a:solidFill>
-              <a:srgbClr val="2D669B"/>
-            </a:solidFill>
-            <a:prstDash val="solid"/>
-          </a:ln>
-        </p:spPr>
-      </p:sp>
-      <p:sp>
-        <p:nvSpPr>
-          <p:cNvPr id="78" name="Text 36">
-            <a:extLst>
-              <a:ext uri="{FF2B5EF4-FFF2-40B4-BE49-F238E27FC236}">
-                <a16:creationId xmlns:a16="http://schemas.microsoft.com/office/drawing/2014/main" id="{F721D0CA-3A20-44EB-8540-160B0A1C4F68}"/>
-              </a:ext>
-            </a:extLst>
-          </p:cNvPr>
-          <p:cNvSpPr/>
-          <p:nvPr/>
-        </p:nvSpPr>
-        <p:spPr>
-          <a:xfrm>
-            <a:off x="8219264" y="1403316"/>
-            <a:ext cx="850392" cy="301752"/>
-          </a:xfrm>
-          <a:prstGeom prst="rect">
-            <a:avLst/>
-          </a:prstGeom>
-          <a:noFill/>
-          <a:ln/>
-        </p:spPr>
-        <p:txBody>
-          <a:bodyPr wrap="square" lIns="254" tIns="254" rIns="254" bIns="254" rtlCol="0" anchor="ctr">
-            <a:normAutofit/>
-          </a:bodyPr>
-          <a:lstStyle/>
-          <a:p>
-            <a:pPr marL="0" indent="0" algn="ctr">
-              <a:buNone/>
-            </a:pPr>
-            <a:r>
-              <a:rPr lang="en-US" sz="730" b="1" dirty="0">
-                <a:solidFill>
-                  <a:srgbClr val="0B376D"/>
-                </a:solidFill>
-                <a:latin typeface="Microsoft YaHei" pitchFamily="34" charset="0"/>
-                <a:ea typeface="Microsoft YaHei" pitchFamily="34" charset="-122"/>
-                <a:cs typeface="Microsoft YaHei" pitchFamily="34" charset="-120"/>
-              </a:rPr>
-              <a:t>结果落库</a:t>
-            </a:r>
-            <a:endParaRPr lang="en-US" sz="730" dirty="0"/>
-          </a:p>
-          <a:p>
-            <a:pPr marL="0" indent="0" algn="ctr">
-              <a:buNone/>
-            </a:pPr>
-            <a:r>
-              <a:rPr lang="en-US" sz="730" b="1" dirty="0">
-                <a:solidFill>
-                  <a:srgbClr val="0B376D"/>
-                </a:solidFill>
-                <a:latin typeface="Microsoft YaHei" pitchFamily="34" charset="0"/>
-                <a:ea typeface="Microsoft YaHei" pitchFamily="34" charset="-122"/>
-                <a:cs typeface="Microsoft YaHei" pitchFamily="34" charset="-120"/>
-              </a:rPr>
-              <a:t>HTM/测算</a:t>
-            </a:r>
-            <a:endParaRPr lang="en-US" sz="730" dirty="0"/>
-          </a:p>
-        </p:txBody>
-      </p:sp>
-      <p:sp>
-        <p:nvSpPr>
-          <p:cNvPr id="81" name="Shape 37">
-            <a:extLst>
-              <a:ext uri="{FF2B5EF4-FFF2-40B4-BE49-F238E27FC236}">
-                <a16:creationId xmlns:a16="http://schemas.microsoft.com/office/drawing/2014/main" id="{2ED4BB11-272C-4945-91B6-B7A957B749E9}"/>
-              </a:ext>
-            </a:extLst>
-          </p:cNvPr>
-          <p:cNvSpPr/>
-          <p:nvPr/>
-        </p:nvSpPr>
-        <p:spPr>
-          <a:xfrm>
-            <a:off x="9279968" y="1394172"/>
-            <a:ext cx="877824" cy="320040"/>
-          </a:xfrm>
-          <a:prstGeom prst="roundRect">
-            <a:avLst>
-              <a:gd name="adj" fmla="val 14286"/>
-            </a:avLst>
-          </a:prstGeom>
-          <a:solidFill>
-            <a:srgbClr val="EDF4FA"/>
-          </a:solidFill>
-          <a:ln w="7620">
-            <a:solidFill>
-              <a:srgbClr val="2D669B"/>
-            </a:solidFill>
-            <a:prstDash val="solid"/>
-          </a:ln>
-        </p:spPr>
-      </p:sp>
-      <p:sp>
-        <p:nvSpPr>
-          <p:cNvPr id="82" name="Text 38">
-            <a:extLst>
-              <a:ext uri="{FF2B5EF4-FFF2-40B4-BE49-F238E27FC236}">
-                <a16:creationId xmlns:a16="http://schemas.microsoft.com/office/drawing/2014/main" id="{3FD04EF7-A39B-4BF3-A3A4-47B807A9B45A}"/>
-              </a:ext>
-            </a:extLst>
-          </p:cNvPr>
-          <p:cNvSpPr/>
-          <p:nvPr/>
-        </p:nvSpPr>
-        <p:spPr>
-          <a:xfrm>
-            <a:off x="9298256" y="1403316"/>
-            <a:ext cx="841248" cy="301752"/>
-          </a:xfrm>
-          <a:prstGeom prst="rect">
-            <a:avLst/>
-          </a:prstGeom>
-          <a:noFill/>
-          <a:ln/>
-        </p:spPr>
-        <p:txBody>
-          <a:bodyPr wrap="square" lIns="254" tIns="254" rIns="254" bIns="254" rtlCol="0" anchor="ctr">
-            <a:normAutofit/>
-          </a:bodyPr>
-          <a:lstStyle/>
-          <a:p>
-            <a:pPr marL="0" indent="0" algn="ctr">
-              <a:buNone/>
-            </a:pPr>
-            <a:r>
-              <a:rPr lang="en-US" sz="730" b="1" dirty="0">
-                <a:solidFill>
-                  <a:srgbClr val="0B376D"/>
-                </a:solidFill>
-                <a:latin typeface="Microsoft YaHei" pitchFamily="34" charset="0"/>
-                <a:ea typeface="Microsoft YaHei" pitchFamily="34" charset="-122"/>
-                <a:cs typeface="Microsoft YaHei" pitchFamily="34" charset="-120"/>
-              </a:rPr>
-              <a:t>风险模型</a:t>
-            </a:r>
-            <a:endParaRPr lang="en-US" sz="730" dirty="0"/>
-          </a:p>
-          <a:p>
-            <a:pPr marL="0" indent="0" algn="ctr">
-              <a:buNone/>
-            </a:pPr>
-            <a:r>
-              <a:rPr lang="en-US" sz="730" b="1" dirty="0">
-                <a:solidFill>
-                  <a:srgbClr val="0B376D"/>
-                </a:solidFill>
-                <a:latin typeface="Microsoft YaHei" pitchFamily="34" charset="0"/>
-                <a:ea typeface="Microsoft YaHei" pitchFamily="34" charset="-122"/>
-                <a:cs typeface="Microsoft YaHei" pitchFamily="34" charset="-120"/>
-              </a:rPr>
-              <a:t>决策建议</a:t>
-            </a:r>
-            <a:endParaRPr lang="en-US" sz="730" dirty="0"/>
-          </a:p>
-        </p:txBody>
-      </p:sp>
-      <p:sp>
-        <p:nvSpPr>
-          <p:cNvPr id="83" name="Shape 39">
-            <a:extLst>
-              <a:ext uri="{FF2B5EF4-FFF2-40B4-BE49-F238E27FC236}">
-                <a16:creationId xmlns:a16="http://schemas.microsoft.com/office/drawing/2014/main" id="{1190DB02-B45C-4CDB-9B03-55773EEED340}"/>
-              </a:ext>
-            </a:extLst>
-          </p:cNvPr>
-          <p:cNvSpPr/>
-          <p:nvPr/>
-        </p:nvSpPr>
-        <p:spPr>
-          <a:xfrm>
-            <a:off x="10340672" y="1394172"/>
-            <a:ext cx="749808" cy="320040"/>
-          </a:xfrm>
-          <a:prstGeom prst="roundRect">
-            <a:avLst>
-              <a:gd name="adj" fmla="val 14286"/>
-            </a:avLst>
-          </a:prstGeom>
-          <a:solidFill>
-            <a:srgbClr val="EDF4FA"/>
-          </a:solidFill>
-          <a:ln w="7620">
-            <a:solidFill>
-              <a:srgbClr val="2D669B"/>
-            </a:solidFill>
-            <a:prstDash val="solid"/>
-          </a:ln>
-        </p:spPr>
-      </p:sp>
-      <p:sp>
-        <p:nvSpPr>
-          <p:cNvPr id="84" name="Text 40">
-            <a:extLst>
-              <a:ext uri="{FF2B5EF4-FFF2-40B4-BE49-F238E27FC236}">
-                <a16:creationId xmlns:a16="http://schemas.microsoft.com/office/drawing/2014/main" id="{03421656-77BC-49DB-9096-7EE0BC5D1A6F}"/>
-              </a:ext>
-            </a:extLst>
-          </p:cNvPr>
-          <p:cNvSpPr/>
-          <p:nvPr/>
-        </p:nvSpPr>
-        <p:spPr>
-          <a:xfrm>
-            <a:off x="10358960" y="1403316"/>
-            <a:ext cx="713232" cy="301752"/>
-          </a:xfrm>
-          <a:prstGeom prst="rect">
-            <a:avLst/>
-          </a:prstGeom>
-          <a:noFill/>
-          <a:ln/>
-        </p:spPr>
-        <p:txBody>
-          <a:bodyPr wrap="square" lIns="254" tIns="254" rIns="254" bIns="254" rtlCol="0" anchor="ctr">
-            <a:normAutofit/>
-          </a:bodyPr>
-          <a:lstStyle/>
-          <a:p>
-            <a:pPr marL="0" indent="0" algn="ctr">
-              <a:buNone/>
-            </a:pPr>
-            <a:r>
-              <a:rPr lang="en-US" sz="730" b="1" dirty="0">
-                <a:solidFill>
-                  <a:srgbClr val="0B376D"/>
-                </a:solidFill>
-                <a:latin typeface="Microsoft YaHei" pitchFamily="34" charset="0"/>
-                <a:ea typeface="Microsoft YaHei" pitchFamily="34" charset="-122"/>
-                <a:cs typeface="Microsoft YaHei" pitchFamily="34" charset="-120"/>
-              </a:rPr>
-              <a:t>LMS</a:t>
-            </a:r>
-            <a:endParaRPr lang="en-US" sz="730" dirty="0"/>
-          </a:p>
-          <a:p>
-            <a:pPr marL="0" indent="0" algn="ctr">
-              <a:buNone/>
-            </a:pPr>
-            <a:r>
-              <a:rPr lang="en-US" sz="730" b="1" dirty="0">
-                <a:solidFill>
-                  <a:srgbClr val="0B376D"/>
-                </a:solidFill>
-                <a:latin typeface="Microsoft YaHei" pitchFamily="34" charset="0"/>
-                <a:ea typeface="Microsoft YaHei" pitchFamily="34" charset="-122"/>
-                <a:cs typeface="Microsoft YaHei" pitchFamily="34" charset="-120"/>
-              </a:rPr>
-              <a:t>输出应用</a:t>
-            </a:r>
-            <a:endParaRPr lang="en-US" sz="730" dirty="0"/>
-          </a:p>
-        </p:txBody>
-      </p:sp>
-      <p:sp>
-        <p:nvSpPr>
-          <p:cNvPr id="85" name="Shape 41">
-            <a:extLst>
-              <a:ext uri="{FF2B5EF4-FFF2-40B4-BE49-F238E27FC236}">
-                <a16:creationId xmlns:a16="http://schemas.microsoft.com/office/drawing/2014/main" id="{6D48832B-7B11-4F92-88E3-387E501596C3}"/>
-              </a:ext>
-            </a:extLst>
-          </p:cNvPr>
-          <p:cNvSpPr/>
-          <p:nvPr/>
-        </p:nvSpPr>
-        <p:spPr>
-          <a:xfrm>
-            <a:off x="9087944" y="1549620"/>
-            <a:ext cx="173736" cy="0"/>
-          </a:xfrm>
-          <a:prstGeom prst="line">
-            <a:avLst/>
-          </a:prstGeom>
-          <a:noFill/>
-          <a:ln w="10160">
-            <a:solidFill>
-              <a:srgbClr val="A7A7A7"/>
-            </a:solidFill>
-            <a:prstDash val="solid"/>
-            <a:headEnd type="none"/>
-            <a:tailEnd type="triangle"/>
-          </a:ln>
-        </p:spPr>
-      </p:sp>
-      <p:sp>
-        <p:nvSpPr>
-          <p:cNvPr id="86" name="Shape 42">
-            <a:extLst>
-              <a:ext uri="{FF2B5EF4-FFF2-40B4-BE49-F238E27FC236}">
-                <a16:creationId xmlns:a16="http://schemas.microsoft.com/office/drawing/2014/main" id="{13A233BA-EBFD-4A44-BFDB-928D4E36B012}"/>
-              </a:ext>
-            </a:extLst>
-          </p:cNvPr>
-          <p:cNvSpPr/>
-          <p:nvPr/>
-        </p:nvSpPr>
-        <p:spPr>
-          <a:xfrm>
-            <a:off x="10157792" y="1549620"/>
-            <a:ext cx="164592" cy="0"/>
-          </a:xfrm>
-          <a:prstGeom prst="line">
-            <a:avLst/>
-          </a:prstGeom>
-          <a:noFill/>
-          <a:ln w="10160">
-            <a:solidFill>
-              <a:srgbClr val="A7A7A7"/>
-            </a:solidFill>
-            <a:prstDash val="solid"/>
-            <a:headEnd type="none"/>
-            <a:tailEnd type="triangle"/>
-          </a:ln>
-        </p:spPr>
-      </p:sp>
-      <p:sp>
-        <p:nvSpPr>
-          <p:cNvPr id="87" name="Shape 43">
-            <a:extLst>
-              <a:ext uri="{FF2B5EF4-FFF2-40B4-BE49-F238E27FC236}">
-                <a16:creationId xmlns:a16="http://schemas.microsoft.com/office/drawing/2014/main" id="{C1E9F602-A65E-4C5C-BD6D-89644C0FBAED}"/>
-              </a:ext>
-            </a:extLst>
-          </p:cNvPr>
-          <p:cNvSpPr/>
-          <p:nvPr/>
-        </p:nvSpPr>
-        <p:spPr>
-          <a:xfrm>
-            <a:off x="4159328" y="1860516"/>
-            <a:ext cx="1417320" cy="182880"/>
-          </a:xfrm>
-          <a:prstGeom prst="roundRect">
-            <a:avLst>
-              <a:gd name="adj" fmla="val 25000"/>
-            </a:avLst>
-          </a:prstGeom>
-          <a:solidFill>
-            <a:srgbClr val="FFF4D4"/>
-          </a:solidFill>
-          <a:ln w="7620">
-            <a:solidFill>
-              <a:srgbClr val="E5B100"/>
-            </a:solidFill>
-            <a:prstDash val="solid"/>
-          </a:ln>
-        </p:spPr>
-      </p:sp>
-      <p:sp>
-        <p:nvSpPr>
-          <p:cNvPr id="88" name="Text 44">
-            <a:extLst>
-              <a:ext uri="{FF2B5EF4-FFF2-40B4-BE49-F238E27FC236}">
-                <a16:creationId xmlns:a16="http://schemas.microsoft.com/office/drawing/2014/main" id="{3CC56E02-5FE6-4579-8C69-5E35D1C4551A}"/>
-              </a:ext>
-            </a:extLst>
-          </p:cNvPr>
-          <p:cNvSpPr/>
-          <p:nvPr/>
-        </p:nvSpPr>
-        <p:spPr>
-          <a:xfrm>
-            <a:off x="4205048" y="1878804"/>
-            <a:ext cx="1325880" cy="137160"/>
-          </a:xfrm>
-          <a:prstGeom prst="rect">
-            <a:avLst/>
-          </a:prstGeom>
-          <a:noFill/>
-          <a:ln/>
-        </p:spPr>
-        <p:txBody>
-          <a:bodyPr wrap="square" lIns="0" tIns="0" rIns="0" bIns="0" rtlCol="0" anchor="ctr">
-            <a:normAutofit/>
-          </a:bodyPr>
-          <a:lstStyle/>
-          <a:p>
-            <a:pPr marL="0" indent="0" algn="ctr">
-              <a:buNone/>
-            </a:pPr>
-            <a:r>
-              <a:rPr lang="en-US" sz="580" dirty="0">
-                <a:solidFill>
-                  <a:srgbClr val="111111"/>
-                </a:solidFill>
-                <a:latin typeface="Microsoft YaHei" pitchFamily="34" charset="0"/>
-                <a:ea typeface="Microsoft YaHei" pitchFamily="34" charset="-122"/>
-                <a:cs typeface="Microsoft YaHei" pitchFamily="34" charset="-120"/>
-              </a:rPr>
-              <a:t>分类知识库：规则 / 关键词 / 第三方数据</a:t>
-            </a:r>
-            <a:endParaRPr lang="en-US" sz="580" dirty="0"/>
-          </a:p>
-        </p:txBody>
-      </p:sp>
-      <p:sp>
-        <p:nvSpPr>
-          <p:cNvPr id="89" name="Shape 45">
-            <a:extLst>
-              <a:ext uri="{FF2B5EF4-FFF2-40B4-BE49-F238E27FC236}">
-                <a16:creationId xmlns:a16="http://schemas.microsoft.com/office/drawing/2014/main" id="{6DB06DFD-D4EB-489E-AC9D-4389A044AFCE}"/>
-              </a:ext>
-            </a:extLst>
-          </p:cNvPr>
-          <p:cNvSpPr/>
-          <p:nvPr/>
-        </p:nvSpPr>
-        <p:spPr>
-          <a:xfrm>
-            <a:off x="5622368" y="1860516"/>
-            <a:ext cx="1517904" cy="182880"/>
-          </a:xfrm>
-          <a:prstGeom prst="roundRect">
-            <a:avLst>
-              <a:gd name="adj" fmla="val 25000"/>
-            </a:avLst>
-          </a:prstGeom>
-          <a:solidFill>
-            <a:srgbClr val="FFF4D4"/>
-          </a:solidFill>
-          <a:ln w="7620">
-            <a:solidFill>
-              <a:srgbClr val="E5B100"/>
-            </a:solidFill>
-            <a:prstDash val="solid"/>
-          </a:ln>
-        </p:spPr>
-      </p:sp>
-      <p:sp>
-        <p:nvSpPr>
-          <p:cNvPr id="90" name="Text 46">
-            <a:extLst>
-              <a:ext uri="{FF2B5EF4-FFF2-40B4-BE49-F238E27FC236}">
-                <a16:creationId xmlns:a16="http://schemas.microsoft.com/office/drawing/2014/main" id="{B357DB46-0264-4973-B3AD-35E542AC05DF}"/>
-              </a:ext>
-            </a:extLst>
-          </p:cNvPr>
-          <p:cNvSpPr/>
-          <p:nvPr/>
-        </p:nvSpPr>
-        <p:spPr>
-          <a:xfrm>
-            <a:off x="5668088" y="1878804"/>
-            <a:ext cx="1426464" cy="137160"/>
-          </a:xfrm>
-          <a:prstGeom prst="rect">
-            <a:avLst/>
-          </a:prstGeom>
-          <a:noFill/>
-          <a:ln/>
-        </p:spPr>
-        <p:txBody>
-          <a:bodyPr wrap="square" lIns="0" tIns="0" rIns="0" bIns="0" rtlCol="0" anchor="ctr">
-            <a:normAutofit/>
-          </a:bodyPr>
-          <a:lstStyle/>
-          <a:p>
-            <a:pPr marL="0" indent="0" algn="ctr">
-              <a:buNone/>
-            </a:pPr>
-            <a:r>
-              <a:rPr lang="en-US" sz="580" dirty="0">
-                <a:solidFill>
-                  <a:srgbClr val="111111"/>
-                </a:solidFill>
-                <a:latin typeface="Microsoft YaHei" pitchFamily="34" charset="0"/>
-                <a:ea typeface="Microsoft YaHei" pitchFamily="34" charset="-122"/>
-                <a:cs typeface="Microsoft YaHei" pitchFamily="34" charset="-120"/>
-              </a:rPr>
-              <a:t>监控运营：效果监控 / 异常跟踪 / 人工维护</a:t>
-            </a:r>
-            <a:endParaRPr lang="en-US" sz="580" dirty="0"/>
-          </a:p>
-        </p:txBody>
-      </p:sp>
-      <p:sp>
-        <p:nvSpPr>
-          <p:cNvPr id="91" name="Shape 47">
-            <a:extLst>
-              <a:ext uri="{FF2B5EF4-FFF2-40B4-BE49-F238E27FC236}">
-                <a16:creationId xmlns:a16="http://schemas.microsoft.com/office/drawing/2014/main" id="{886C1365-B887-43AA-AE3B-0ECB68BCB8A4}"/>
-              </a:ext>
-            </a:extLst>
-          </p:cNvPr>
-          <p:cNvSpPr/>
-          <p:nvPr/>
-        </p:nvSpPr>
-        <p:spPr>
-          <a:xfrm>
-            <a:off x="410288" y="2639910"/>
+            <a:off x="410288" y="2918487"/>
             <a:ext cx="64008" cy="201168"/>
           </a:xfrm>
           <a:prstGeom prst="rect">
@@ -5677,7 +5930,7 @@
         </p:nvSpPr>
         <p:spPr>
           <a:xfrm>
-            <a:off x="538304" y="2621622"/>
+            <a:off x="535499" y="2888542"/>
             <a:ext cx="5449824" cy="237744"/>
           </a:xfrm>
           <a:prstGeom prst="rect">
@@ -5697,47 +5950,67 @@
                 <a:solidFill>
                   <a:srgbClr val="111111"/>
                 </a:solidFill>
-                <a:latin typeface="Microsoft YaHei" pitchFamily="34" charset="0"/>
-                <a:ea typeface="Microsoft YaHei" pitchFamily="34" charset="-122"/>
+                <a:latin typeface="微软雅黑" panose="020B0503020204020204" pitchFamily="34" charset="-122"/>
+                <a:ea typeface="微软雅黑" panose="020B0503020204020204" pitchFamily="34" charset="-122"/>
               </a:rPr>
               <a:t>2. </a:t>
             </a:r>
             <a:r>
-              <a:rPr lang="en-US" sz="1400" b="1" dirty="0" err="1">
+              <a:rPr lang="zh-CN" altLang="en-US" sz="1400" b="1" dirty="0">
                 <a:solidFill>
                   <a:srgbClr val="111111"/>
                 </a:solidFill>
-                <a:latin typeface="Microsoft YaHei" pitchFamily="34" charset="0"/>
-                <a:ea typeface="Microsoft YaHei" pitchFamily="34" charset="-122"/>
+                <a:latin typeface="微软雅黑" panose="020B0503020204020204" pitchFamily="34" charset="-122"/>
+                <a:ea typeface="微软雅黑" panose="020B0503020204020204" pitchFamily="34" charset="-122"/>
               </a:rPr>
-              <a:t>当前现状</a:t>
-            </a:r>
-            <a:r>
-              <a:rPr lang="en-US" sz="1400" b="1" dirty="0">
+              <a:t>上线里程碑：</a:t>
+            </a:r>
+            <a:r>
+              <a:rPr lang="en-US" altLang="zh-CN" sz="1400" b="1" dirty="0">
                 <a:solidFill>
                   <a:srgbClr val="111111"/>
                 </a:solidFill>
-                <a:latin typeface="Microsoft YaHei" pitchFamily="34" charset="0"/>
-                <a:ea typeface="Microsoft YaHei" pitchFamily="34" charset="-122"/>
+                <a:latin typeface="微软雅黑" panose="020B0503020204020204" pitchFamily="34" charset="-122"/>
+                <a:ea typeface="微软雅黑" panose="020B0503020204020204" pitchFamily="34" charset="-122"/>
               </a:rPr>
-              <a:t>：</a:t>
+              <a:t>8 </a:t>
             </a:r>
             <a:r>
               <a:rPr lang="zh-CN" altLang="en-US" sz="1400" b="1" dirty="0">
                 <a:solidFill>
                   <a:srgbClr val="111111"/>
                 </a:solidFill>
-                <a:latin typeface="Microsoft YaHei" pitchFamily="34" charset="0"/>
-                <a:ea typeface="Microsoft YaHei" pitchFamily="34" charset="-122"/>
+                <a:latin typeface="微软雅黑" panose="020B0503020204020204" pitchFamily="34" charset="-122"/>
+                <a:ea typeface="微软雅黑" panose="020B0503020204020204" pitchFamily="34" charset="-122"/>
               </a:rPr>
-              <a:t>进展时间轴</a:t>
+              <a:t>月完成模型落地，</a:t>
+            </a:r>
+            <a:r>
+              <a:rPr lang="en-US" altLang="zh-CN" sz="1400" b="1" dirty="0">
+                <a:solidFill>
+                  <a:srgbClr val="111111"/>
+                </a:solidFill>
+                <a:latin typeface="微软雅黑" panose="020B0503020204020204" pitchFamily="34" charset="-122"/>
+                <a:ea typeface="微软雅黑" panose="020B0503020204020204" pitchFamily="34" charset="-122"/>
+              </a:rPr>
+              <a:t>9 </a:t>
+            </a:r>
+            <a:r>
+              <a:rPr lang="zh-CN" altLang="en-US" sz="1400" b="1" dirty="0">
+                <a:solidFill>
+                  <a:srgbClr val="111111"/>
+                </a:solidFill>
+                <a:latin typeface="微软雅黑" panose="020B0503020204020204" pitchFamily="34" charset="-122"/>
+                <a:ea typeface="微软雅黑" panose="020B0503020204020204" pitchFamily="34" charset="-122"/>
+              </a:rPr>
+              <a:t>月完成切量准备</a:t>
             </a:r>
             <a:endParaRPr lang="en-US" sz="1400" b="1" dirty="0">
               <a:solidFill>
                 <a:srgbClr val="111111"/>
               </a:solidFill>
-              <a:latin typeface="Microsoft YaHei" pitchFamily="34" charset="0"/>
-              <a:ea typeface="Microsoft YaHei" pitchFamily="34" charset="-122"/>
+              <a:latin typeface="微软雅黑" panose="020B0503020204020204" pitchFamily="34" charset="-122"/>
+              <a:ea typeface="微软雅黑" panose="020B0503020204020204" pitchFamily="34" charset="-122"/>
             </a:endParaRPr>
           </a:p>
         </p:txBody>
@@ -5756,7 +6029,7 @@
         </p:nvSpPr>
         <p:spPr>
           <a:xfrm>
-            <a:off x="454815" y="5114544"/>
+            <a:off x="416627" y="5101693"/>
             <a:ext cx="64008" cy="201168"/>
           </a:xfrm>
           <a:prstGeom prst="rect">
@@ -5789,7 +6062,7 @@
         </p:nvSpPr>
         <p:spPr>
           <a:xfrm>
-            <a:off x="582831" y="5104472"/>
+            <a:off x="544643" y="5091621"/>
             <a:ext cx="11119104" cy="237744"/>
           </a:xfrm>
           <a:prstGeom prst="rect">
@@ -5809,11 +6082,88 @@
                 <a:solidFill>
                   <a:srgbClr val="111111"/>
                 </a:solidFill>
-                <a:latin typeface="Microsoft YaHei" pitchFamily="34" charset="0"/>
-                <a:ea typeface="Microsoft YaHei" pitchFamily="34" charset="-122"/>
+                <a:latin typeface="微软雅黑" panose="020B0503020204020204" pitchFamily="34" charset="-122"/>
+                <a:ea typeface="微软雅黑" panose="020B0503020204020204" pitchFamily="34" charset="-122"/>
               </a:rPr>
-              <a:t>3. 运维方式：1 人 + 2 个 AI Agent，持续闭环</a:t>
-            </a:r>
+              <a:t>3. </a:t>
+            </a:r>
+            <a:r>
+              <a:rPr lang="zh-CN" altLang="en-US" sz="1400" b="1" dirty="0">
+                <a:solidFill>
+                  <a:srgbClr val="111111"/>
+                </a:solidFill>
+                <a:latin typeface="微软雅黑" panose="020B0503020204020204" pitchFamily="34" charset="-122"/>
+                <a:ea typeface="微软雅黑" panose="020B0503020204020204" pitchFamily="34" charset="-122"/>
+              </a:rPr>
+              <a:t>运维方式：</a:t>
+            </a:r>
+            <a:r>
+              <a:rPr lang="en-US" altLang="zh-CN" sz="1400" b="1" dirty="0">
+                <a:solidFill>
+                  <a:srgbClr val="111111"/>
+                </a:solidFill>
+                <a:latin typeface="微软雅黑" panose="020B0503020204020204" pitchFamily="34" charset="-122"/>
+                <a:ea typeface="微软雅黑" panose="020B0503020204020204" pitchFamily="34" charset="-122"/>
+              </a:rPr>
+              <a:t>Agent 1 </a:t>
+            </a:r>
+            <a:r>
+              <a:rPr lang="zh-CN" altLang="en-US" sz="1400" b="1" dirty="0">
+                <a:solidFill>
+                  <a:srgbClr val="111111"/>
+                </a:solidFill>
+                <a:latin typeface="微软雅黑" panose="020B0503020204020204" pitchFamily="34" charset="-122"/>
+                <a:ea typeface="微软雅黑" panose="020B0503020204020204" pitchFamily="34" charset="-122"/>
+              </a:rPr>
+              <a:t>找问题 → </a:t>
+            </a:r>
+            <a:r>
+              <a:rPr lang="en-US" altLang="zh-CN" sz="1400" b="1" dirty="0">
+                <a:solidFill>
+                  <a:srgbClr val="111111"/>
+                </a:solidFill>
+                <a:latin typeface="微软雅黑" panose="020B0503020204020204" pitchFamily="34" charset="-122"/>
+                <a:ea typeface="微软雅黑" panose="020B0503020204020204" pitchFamily="34" charset="-122"/>
+              </a:rPr>
+              <a:t>Agent 2 </a:t>
+            </a:r>
+            <a:r>
+              <a:rPr lang="zh-CN" altLang="en-US" sz="1400" b="1" dirty="0">
+                <a:solidFill>
+                  <a:srgbClr val="111111"/>
+                </a:solidFill>
+                <a:latin typeface="微软雅黑" panose="020B0503020204020204" pitchFamily="34" charset="-122"/>
+                <a:ea typeface="微软雅黑" panose="020B0503020204020204" pitchFamily="34" charset="-122"/>
+              </a:rPr>
+              <a:t>补知识 → 人确认 → </a:t>
+            </a:r>
+            <a:r>
+              <a:rPr lang="en-US" altLang="zh-CN" sz="1400" b="1" dirty="0">
+                <a:solidFill>
+                  <a:srgbClr val="111111"/>
+                </a:solidFill>
+                <a:latin typeface="微软雅黑" panose="020B0503020204020204" pitchFamily="34" charset="-122"/>
+                <a:ea typeface="微软雅黑" panose="020B0503020204020204" pitchFamily="34" charset="-122"/>
+              </a:rPr>
+              <a:t>AI </a:t>
+            </a:r>
+            <a:r>
+              <a:rPr lang="zh-CN" altLang="en-US" sz="1400" b="1" dirty="0">
+                <a:solidFill>
+                  <a:srgbClr val="111111"/>
+                </a:solidFill>
+                <a:latin typeface="微软雅黑" panose="020B0503020204020204" pitchFamily="34" charset="-122"/>
+                <a:ea typeface="微软雅黑" panose="020B0503020204020204" pitchFamily="34" charset="-122"/>
+              </a:rPr>
+              <a:t>自动调整并验证</a:t>
+            </a:r>
+            <a:endParaRPr lang="en-US" sz="1400" b="1" dirty="0">
+              <a:solidFill>
+                <a:srgbClr val="111111"/>
+              </a:solidFill>
+              <a:latin typeface="微软雅黑" panose="020B0503020204020204" pitchFamily="34" charset="-122"/>
+              <a:ea typeface="微软雅黑" panose="020B0503020204020204" pitchFamily="34" charset="-122"/>
+            </a:endParaRPr>
           </a:p>
         </p:txBody>
       </p:sp>
@@ -5831,7 +6181,7 @@
         </p:nvSpPr>
         <p:spPr>
           <a:xfrm>
-            <a:off x="573687" y="5507736"/>
+            <a:off x="535499" y="5494885"/>
             <a:ext cx="5458968" cy="982980"/>
           </a:xfrm>
           <a:prstGeom prst="roundRect">
@@ -5866,7 +6216,10 @@
           <a:lstStyle/>
           <a:p>
             <a:pPr algn="ctr"/>
-            <a:endParaRPr/>
+            <a:endParaRPr>
+              <a:latin typeface="微软雅黑" panose="020B0503020204020204" pitchFamily="34" charset="-122"/>
+              <a:ea typeface="微软雅黑" panose="020B0503020204020204" pitchFamily="34" charset="-122"/>
+            </a:endParaRPr>
           </a:p>
         </p:txBody>
       </p:sp>
@@ -5884,7 +6237,7 @@
         </p:nvSpPr>
         <p:spPr>
           <a:xfrm>
-            <a:off x="573687" y="5507736"/>
+            <a:off x="535499" y="5494885"/>
             <a:ext cx="5456980" cy="49696"/>
           </a:xfrm>
           <a:prstGeom prst="rect">
@@ -5917,7 +6270,10 @@
           <a:lstStyle/>
           <a:p>
             <a:pPr algn="ctr"/>
-            <a:endParaRPr/>
+            <a:endParaRPr>
+              <a:latin typeface="微软雅黑" panose="020B0503020204020204" pitchFamily="34" charset="-122"/>
+              <a:ea typeface="微软雅黑" panose="020B0503020204020204" pitchFamily="34" charset="-122"/>
+            </a:endParaRPr>
           </a:p>
         </p:txBody>
       </p:sp>
@@ -5935,8 +6291,8 @@
         </p:nvSpPr>
         <p:spPr>
           <a:xfrm>
-            <a:off x="710847" y="5599176"/>
-            <a:ext cx="5650992" cy="201168"/>
+            <a:off x="672659" y="5586325"/>
+            <a:ext cx="5650992" cy="146194"/>
           </a:xfrm>
           <a:prstGeom prst="rect">
             <a:avLst/>
@@ -5955,8 +6311,8 @@
                 <a:solidFill>
                   <a:srgbClr val="1F4E79"/>
                 </a:solidFill>
-                <a:latin typeface="微软雅黑"/>
-                <a:ea typeface="微软雅黑"/>
+                <a:latin typeface="微软雅黑" panose="020B0503020204020204" pitchFamily="34" charset="-122"/>
+                <a:ea typeface="微软雅黑" panose="020B0503020204020204" pitchFamily="34" charset="-122"/>
               </a:rPr>
               <a:t>AI Agent 1｜</a:t>
             </a:r>
@@ -5965,8 +6321,8 @@
                 <a:solidFill>
                   <a:srgbClr val="0A0A0A"/>
                 </a:solidFill>
-                <a:latin typeface="微软雅黑"/>
-                <a:ea typeface="微软雅黑"/>
+                <a:latin typeface="微软雅黑" panose="020B0503020204020204" pitchFamily="34" charset="-122"/>
+                <a:ea typeface="微软雅黑" panose="020B0503020204020204" pitchFamily="34" charset="-122"/>
               </a:rPr>
               <a:t>质检 Agent：监控异常、定位问题</a:t>
             </a:r>
@@ -5987,7 +6343,7 @@
         </p:nvSpPr>
         <p:spPr>
           <a:xfrm>
-            <a:off x="710847" y="5836920"/>
+            <a:off x="672659" y="5811713"/>
             <a:ext cx="5650992" cy="123111"/>
           </a:xfrm>
           <a:prstGeom prst="rect">
@@ -6007,8 +6363,8 @@
                 <a:solidFill>
                   <a:srgbClr val="1F4E79"/>
                 </a:solidFill>
-                <a:latin typeface="微软雅黑"/>
-                <a:ea typeface="微软雅黑"/>
+                <a:latin typeface="微软雅黑" panose="020B0503020204020204" pitchFamily="34" charset="-122"/>
+                <a:ea typeface="微软雅黑" panose="020B0503020204020204" pitchFamily="34" charset="-122"/>
               </a:rPr>
               <a:t> </a:t>
             </a:r>
@@ -6017,8 +6373,8 @@
                 <a:solidFill>
                   <a:srgbClr val="0A0A0A"/>
                 </a:solidFill>
-                <a:latin typeface="微软雅黑"/>
-                <a:ea typeface="微软雅黑"/>
+                <a:latin typeface="微软雅黑" panose="020B0503020204020204" pitchFamily="34" charset="-122"/>
+                <a:ea typeface="微软雅黑" panose="020B0503020204020204" pitchFamily="34" charset="-122"/>
               </a:rPr>
               <a:t>效果监控</a:t>
             </a:r>
@@ -6026,8 +6382,8 @@
               <a:solidFill>
                 <a:srgbClr val="0A0A0A"/>
               </a:solidFill>
-              <a:latin typeface="微软雅黑"/>
-              <a:ea typeface="微软雅黑"/>
+              <a:latin typeface="微软雅黑" panose="020B0503020204020204" pitchFamily="34" charset="-122"/>
+              <a:ea typeface="微软雅黑" panose="020B0503020204020204" pitchFamily="34" charset="-122"/>
             </a:endParaRPr>
           </a:p>
         </p:txBody>
@@ -6046,7 +6402,7 @@
         </p:nvSpPr>
         <p:spPr>
           <a:xfrm>
-            <a:off x="884583" y="5992368"/>
+            <a:off x="846395" y="5967161"/>
             <a:ext cx="5504688" cy="128016"/>
           </a:xfrm>
           <a:prstGeom prst="rect">
@@ -6066,8 +6422,8 @@
                 <a:solidFill>
                   <a:srgbClr val="3D3C3A"/>
                 </a:solidFill>
-                <a:latin typeface="微软雅黑"/>
-                <a:ea typeface="微软雅黑"/>
+                <a:latin typeface="微软雅黑" panose="020B0503020204020204" pitchFamily="34" charset="-122"/>
+                <a:ea typeface="微软雅黑" panose="020B0503020204020204" pitchFamily="34" charset="-122"/>
               </a:rPr>
               <a:t>分类分布与命中率、数据</a:t>
             </a:r>
@@ -6076,8 +6432,8 @@
                 <a:solidFill>
                   <a:srgbClr val="3D3C3A"/>
                 </a:solidFill>
-                <a:latin typeface="微软雅黑"/>
-                <a:ea typeface="微软雅黑"/>
+                <a:latin typeface="微软雅黑" panose="020B0503020204020204" pitchFamily="34" charset="-122"/>
+                <a:ea typeface="微软雅黑" panose="020B0503020204020204" pitchFamily="34" charset="-122"/>
               </a:rPr>
               <a:t>/</a:t>
             </a:r>
@@ -6086,8 +6442,8 @@
                 <a:solidFill>
                   <a:srgbClr val="3D3C3A"/>
                 </a:solidFill>
-                <a:latin typeface="微软雅黑"/>
-                <a:ea typeface="微软雅黑"/>
+                <a:latin typeface="微软雅黑" panose="020B0503020204020204" pitchFamily="34" charset="-122"/>
+                <a:ea typeface="微软雅黑" panose="020B0503020204020204" pitchFamily="34" charset="-122"/>
               </a:rPr>
               <a:t>分类漂移；对手方识别异常、关键字段缺失</a:t>
             </a:r>
@@ -6095,8 +6451,8 @@
               <a:solidFill>
                 <a:srgbClr val="3D3C3A"/>
               </a:solidFill>
-              <a:latin typeface="微软雅黑"/>
-              <a:ea typeface="微软雅黑"/>
+              <a:latin typeface="微软雅黑" panose="020B0503020204020204" pitchFamily="34" charset="-122"/>
+              <a:ea typeface="微软雅黑" panose="020B0503020204020204" pitchFamily="34" charset="-122"/>
             </a:endParaRPr>
           </a:p>
         </p:txBody>
@@ -6115,7 +6471,7 @@
         </p:nvSpPr>
         <p:spPr>
           <a:xfrm>
-            <a:off x="710847" y="6148308"/>
+            <a:off x="672659" y="6141635"/>
             <a:ext cx="5650992" cy="123111"/>
           </a:xfrm>
           <a:prstGeom prst="rect">
@@ -6135,8 +6491,8 @@
                 <a:solidFill>
                   <a:srgbClr val="1F4E79"/>
                 </a:solidFill>
-                <a:latin typeface="微软雅黑"/>
-                <a:ea typeface="微软雅黑"/>
+                <a:latin typeface="微软雅黑" panose="020B0503020204020204" pitchFamily="34" charset="-122"/>
+                <a:ea typeface="微软雅黑" panose="020B0503020204020204" pitchFamily="34" charset="-122"/>
               </a:rPr>
               <a:t> </a:t>
             </a:r>
@@ -6145,8 +6501,8 @@
                 <a:solidFill>
                   <a:srgbClr val="0A0A0A"/>
                 </a:solidFill>
-                <a:latin typeface="微软雅黑"/>
-                <a:ea typeface="微软雅黑"/>
+                <a:latin typeface="微软雅黑" panose="020B0503020204020204" pitchFamily="34" charset="-122"/>
+                <a:ea typeface="微软雅黑" panose="020B0503020204020204" pitchFamily="34" charset="-122"/>
               </a:rPr>
               <a:t>问题诊断</a:t>
             </a:r>
@@ -6154,8 +6510,8 @@
               <a:solidFill>
                 <a:srgbClr val="0A0A0A"/>
               </a:solidFill>
-              <a:latin typeface="微软雅黑"/>
-              <a:ea typeface="微软雅黑"/>
+              <a:latin typeface="微软雅黑" panose="020B0503020204020204" pitchFamily="34" charset="-122"/>
+              <a:ea typeface="微软雅黑" panose="020B0503020204020204" pitchFamily="34" charset="-122"/>
             </a:endParaRPr>
           </a:p>
         </p:txBody>
@@ -6174,8 +6530,8 @@
         </p:nvSpPr>
         <p:spPr>
           <a:xfrm>
-            <a:off x="884583" y="6303756"/>
-            <a:ext cx="5504688" cy="128016"/>
+            <a:off x="846395" y="6297083"/>
+            <a:ext cx="5504688" cy="123111"/>
           </a:xfrm>
           <a:prstGeom prst="rect">
             <a:avLst/>
@@ -6188,103 +6544,53 @@
           </a:bodyPr>
           <a:lstStyle/>
           <a:p>
-            <a:pPr algn="l" latinLnBrk="1"/>
-            <a:r>
-              <a:rPr sz="800" b="0" dirty="0" err="1">
+            <a:pPr latinLnBrk="1"/>
+            <a:r>
+              <a:rPr lang="en-US" altLang="zh-CN" sz="800" dirty="0">
                 <a:solidFill>
                   <a:srgbClr val="3D3C3A"/>
                 </a:solidFill>
-                <a:latin typeface="微软雅黑"/>
-                <a:ea typeface="微软雅黑"/>
+                <a:latin typeface="微软雅黑" panose="020B0503020204020204" pitchFamily="34" charset="-122"/>
+                <a:ea typeface="微软雅黑" panose="020B0503020204020204" pitchFamily="34" charset="-122"/>
               </a:rPr>
-              <a:t>定位异常交易与问题引擎，识别缺失商户</a:t>
-            </a:r>
-            <a:r>
-              <a:rPr sz="800" b="0" dirty="0">
+              <a:t>AI</a:t>
+            </a:r>
+            <a:r>
+              <a:rPr lang="zh-CN" altLang="en-US" sz="800" dirty="0">
                 <a:solidFill>
                   <a:srgbClr val="3D3C3A"/>
                 </a:solidFill>
-                <a:latin typeface="微软雅黑"/>
-                <a:ea typeface="微软雅黑"/>
+                <a:latin typeface="微软雅黑" panose="020B0503020204020204" pitchFamily="34" charset="-122"/>
+                <a:ea typeface="微软雅黑" panose="020B0503020204020204" pitchFamily="34" charset="-122"/>
               </a:rPr>
-              <a:t>/</a:t>
-            </a:r>
-            <a:r>
-              <a:rPr sz="800" b="0" dirty="0" err="1">
+              <a:t>直接给出具体待处理项和调整建议；人工只需完成确认，确认后 </a:t>
+            </a:r>
+            <a:r>
+              <a:rPr lang="en-US" altLang="zh-CN" sz="800" dirty="0">
                 <a:solidFill>
                   <a:srgbClr val="3D3C3A"/>
                 </a:solidFill>
-                <a:latin typeface="微软雅黑"/>
-                <a:ea typeface="微软雅黑"/>
+                <a:latin typeface="微软雅黑" panose="020B0503020204020204" pitchFamily="34" charset="-122"/>
+                <a:ea typeface="微软雅黑" panose="020B0503020204020204" pitchFamily="34" charset="-122"/>
               </a:rPr>
-              <a:t>关键词</a:t>
-            </a:r>
-            <a:r>
-              <a:rPr sz="800" b="0" dirty="0">
+              <a:t>AI </a:t>
+            </a:r>
+            <a:r>
+              <a:rPr lang="zh-CN" altLang="en-US" sz="800" dirty="0">
                 <a:solidFill>
                   <a:srgbClr val="3D3C3A"/>
                 </a:solidFill>
-                <a:latin typeface="微软雅黑"/>
-                <a:ea typeface="微软雅黑"/>
+                <a:latin typeface="微软雅黑" panose="020B0503020204020204" pitchFamily="34" charset="-122"/>
+                <a:ea typeface="微软雅黑" panose="020B0503020204020204" pitchFamily="34" charset="-122"/>
               </a:rPr>
-              <a:t>/</a:t>
-            </a:r>
-            <a:r>
-              <a:rPr sz="800" b="0" dirty="0" err="1">
-                <a:solidFill>
-                  <a:srgbClr val="3D3C3A"/>
-                </a:solidFill>
-                <a:latin typeface="微软雅黑"/>
-                <a:ea typeface="微软雅黑"/>
-              </a:rPr>
-              <a:t>规则；自动生成优先级</a:t>
-            </a:r>
-            <a:r>
-              <a:rPr sz="800" b="0" dirty="0">
-                <a:solidFill>
-                  <a:srgbClr val="3D3C3A"/>
-                </a:solidFill>
-                <a:latin typeface="微软雅黑"/>
-                <a:ea typeface="微软雅黑"/>
-              </a:rPr>
-              <a:t> </a:t>
-            </a:r>
-            <a:r>
-              <a:rPr sz="800" b="0" dirty="0" err="1">
-                <a:solidFill>
-                  <a:srgbClr val="3D3C3A"/>
-                </a:solidFill>
-                <a:latin typeface="微软雅黑"/>
-                <a:ea typeface="微软雅黑"/>
-              </a:rPr>
-              <a:t>Todo</a:t>
-            </a:r>
-            <a:r>
-              <a:rPr sz="800" b="0" dirty="0">
-                <a:solidFill>
-                  <a:srgbClr val="3D3C3A"/>
-                </a:solidFill>
-                <a:latin typeface="微软雅黑"/>
-                <a:ea typeface="微软雅黑"/>
-              </a:rPr>
-              <a:t> </a:t>
-            </a:r>
-            <a:r>
-              <a:rPr sz="800" b="0" dirty="0" err="1">
-                <a:solidFill>
-                  <a:srgbClr val="3D3C3A"/>
-                </a:solidFill>
-                <a:latin typeface="微软雅黑"/>
-                <a:ea typeface="微软雅黑"/>
-              </a:rPr>
-              <a:t>清单</a:t>
-            </a:r>
-            <a:endParaRPr sz="800" b="0" dirty="0">
+              <a:t>会自动执行调整并完成后续测试验证。</a:t>
+            </a:r>
+            <a:endParaRPr sz="800" dirty="0">
               <a:solidFill>
                 <a:srgbClr val="3D3C3A"/>
               </a:solidFill>
-              <a:latin typeface="微软雅黑"/>
-              <a:ea typeface="微软雅黑"/>
+              <a:latin typeface="微软雅黑" panose="020B0503020204020204" pitchFamily="34" charset="-122"/>
+              <a:ea typeface="微软雅黑" panose="020B0503020204020204" pitchFamily="34" charset="-122"/>
             </a:endParaRPr>
           </a:p>
         </p:txBody>
@@ -6303,10 +6609,10 @@
         </p:nvGrpSpPr>
         <p:grpSpPr>
           <a:xfrm>
-            <a:off x="6214342" y="5489448"/>
-            <a:ext cx="5836257" cy="1001268"/>
+            <a:off x="6169815" y="5491598"/>
+            <a:ext cx="5836257" cy="993247"/>
             <a:chOff x="6203210" y="4741959"/>
-            <a:chExt cx="5836257" cy="1001268"/>
+            <a:chExt cx="5836257" cy="993247"/>
           </a:xfrm>
         </p:grpSpPr>
         <p:sp>
@@ -6324,7 +6630,7 @@
           <p:spPr>
             <a:xfrm>
               <a:off x="6203210" y="4741959"/>
-              <a:ext cx="5412718" cy="1001268"/>
+              <a:ext cx="5412718" cy="993247"/>
             </a:xfrm>
             <a:prstGeom prst="roundRect">
               <a:avLst>
@@ -6358,7 +6664,10 @@
             <a:lstStyle/>
             <a:p>
               <a:pPr algn="ctr"/>
-              <a:endParaRPr/>
+              <a:endParaRPr>
+                <a:latin typeface="微软雅黑" panose="020B0503020204020204" pitchFamily="34" charset="-122"/>
+                <a:ea typeface="微软雅黑" panose="020B0503020204020204" pitchFamily="34" charset="-122"/>
+              </a:endParaRPr>
             </a:p>
           </p:txBody>
         </p:sp>
@@ -6409,7 +6718,10 @@
             <a:lstStyle/>
             <a:p>
               <a:pPr algn="ctr"/>
-              <a:endParaRPr/>
+              <a:endParaRPr>
+                <a:latin typeface="微软雅黑" panose="020B0503020204020204" pitchFamily="34" charset="-122"/>
+                <a:ea typeface="微软雅黑" panose="020B0503020204020204" pitchFamily="34" charset="-122"/>
+              </a:endParaRPr>
             </a:p>
           </p:txBody>
         </p:sp>
@@ -6428,7 +6740,7 @@
           <p:spPr>
             <a:xfrm>
               <a:off x="6340370" y="4833399"/>
-              <a:ext cx="5650992" cy="201168"/>
+              <a:ext cx="5650992" cy="146194"/>
             </a:xfrm>
             <a:prstGeom prst="rect">
               <a:avLst/>
@@ -6447,8 +6759,8 @@
                   <a:solidFill>
                     <a:srgbClr val="1F4E79"/>
                   </a:solidFill>
-                  <a:latin typeface="微软雅黑"/>
-                  <a:ea typeface="微软雅黑"/>
+                  <a:latin typeface="微软雅黑" panose="020B0503020204020204" pitchFamily="34" charset="-122"/>
+                  <a:ea typeface="微软雅黑" panose="020B0503020204020204" pitchFamily="34" charset="-122"/>
                 </a:rPr>
                 <a:t>AI Agent 2｜</a:t>
               </a:r>
@@ -6457,8 +6769,8 @@
                   <a:solidFill>
                     <a:srgbClr val="0A0A0A"/>
                   </a:solidFill>
-                  <a:latin typeface="微软雅黑"/>
-                  <a:ea typeface="微软雅黑"/>
+                  <a:latin typeface="微软雅黑" panose="020B0503020204020204" pitchFamily="34" charset="-122"/>
+                  <a:ea typeface="微软雅黑" panose="020B0503020204020204" pitchFamily="34" charset="-122"/>
                 </a:rPr>
                 <a:t>知识库 Agent：主动补充、持续迭代</a:t>
               </a:r>
@@ -6479,7 +6791,7 @@
           </p:nvSpPr>
           <p:spPr>
             <a:xfrm>
-              <a:off x="6340370" y="5071143"/>
+              <a:off x="6375270" y="5058787"/>
               <a:ext cx="5650992" cy="123111"/>
             </a:xfrm>
             <a:prstGeom prst="rect">
@@ -6499,8 +6811,8 @@
                   <a:solidFill>
                     <a:srgbClr val="1F4E79"/>
                   </a:solidFill>
-                  <a:latin typeface="微软雅黑"/>
-                  <a:ea typeface="微软雅黑"/>
+                  <a:latin typeface="微软雅黑" panose="020B0503020204020204" pitchFamily="34" charset="-122"/>
+                  <a:ea typeface="微软雅黑" panose="020B0503020204020204" pitchFamily="34" charset="-122"/>
                 </a:rPr>
                 <a:t> </a:t>
               </a:r>
@@ -6509,8 +6821,8 @@
                   <a:solidFill>
                     <a:srgbClr val="0A0A0A"/>
                   </a:solidFill>
-                  <a:latin typeface="微软雅黑"/>
-                  <a:ea typeface="微软雅黑"/>
+                  <a:latin typeface="微软雅黑" panose="020B0503020204020204" pitchFamily="34" charset="-122"/>
+                  <a:ea typeface="微软雅黑" panose="020B0503020204020204" pitchFamily="34" charset="-122"/>
                 </a:rPr>
                 <a:t>知识补全</a:t>
               </a:r>
@@ -6518,8 +6830,8 @@
                 <a:solidFill>
                   <a:srgbClr val="0A0A0A"/>
                 </a:solidFill>
-                <a:latin typeface="微软雅黑"/>
-                <a:ea typeface="微软雅黑"/>
+                <a:latin typeface="微软雅黑" panose="020B0503020204020204" pitchFamily="34" charset="-122"/>
+                <a:ea typeface="微软雅黑" panose="020B0503020204020204" pitchFamily="34" charset="-122"/>
               </a:endParaRPr>
             </a:p>
           </p:txBody>
@@ -6538,7 +6850,7 @@
           </p:nvSpPr>
           <p:spPr>
             <a:xfrm>
-              <a:off x="6514106" y="5226591"/>
+              <a:off x="6514106" y="5214235"/>
               <a:ext cx="5504688" cy="128016"/>
             </a:xfrm>
             <a:prstGeom prst="rect">
@@ -6558,8 +6870,8 @@
                   <a:solidFill>
                     <a:srgbClr val="3D3C3A"/>
                   </a:solidFill>
-                  <a:latin typeface="微软雅黑"/>
-                  <a:ea typeface="微软雅黑"/>
+                  <a:latin typeface="微软雅黑" panose="020B0503020204020204" pitchFamily="34" charset="-122"/>
+                  <a:ea typeface="微软雅黑" panose="020B0503020204020204" pitchFamily="34" charset="-122"/>
                 </a:rPr>
                 <a:t>检索未知商户</a:t>
               </a:r>
@@ -6568,8 +6880,8 @@
                   <a:solidFill>
                     <a:srgbClr val="3D3C3A"/>
                   </a:solidFill>
-                  <a:latin typeface="微软雅黑"/>
-                  <a:ea typeface="微软雅黑"/>
+                  <a:latin typeface="微软雅黑" panose="020B0503020204020204" pitchFamily="34" charset="-122"/>
+                  <a:ea typeface="微软雅黑" panose="020B0503020204020204" pitchFamily="34" charset="-122"/>
                 </a:rPr>
                 <a:t>/</a:t>
               </a:r>
@@ -6578,8 +6890,8 @@
                   <a:solidFill>
                     <a:srgbClr val="3D3C3A"/>
                   </a:solidFill>
-                  <a:latin typeface="微软雅黑"/>
-                  <a:ea typeface="微软雅黑"/>
+                  <a:latin typeface="微软雅黑" panose="020B0503020204020204" pitchFamily="34" charset="-122"/>
+                  <a:ea typeface="微软雅黑" panose="020B0503020204020204" pitchFamily="34" charset="-122"/>
                 </a:rPr>
                 <a:t>对手方，补充企业、品牌、关键词与分类信息，识别新增业务实体</a:t>
               </a:r>
@@ -6587,8 +6899,8 @@
                 <a:solidFill>
                   <a:srgbClr val="3D3C3A"/>
                 </a:solidFill>
-                <a:latin typeface="微软雅黑"/>
-                <a:ea typeface="微软雅黑"/>
+                <a:latin typeface="微软雅黑" panose="020B0503020204020204" pitchFamily="34" charset="-122"/>
+                <a:ea typeface="微软雅黑" panose="020B0503020204020204" pitchFamily="34" charset="-122"/>
               </a:endParaRPr>
             </a:p>
           </p:txBody>
@@ -6607,7 +6919,7 @@
           </p:nvSpPr>
           <p:spPr>
             <a:xfrm>
-              <a:off x="6361043" y="5409471"/>
+              <a:off x="6361043" y="5397115"/>
               <a:ext cx="5650992" cy="123111"/>
             </a:xfrm>
             <a:prstGeom prst="rect">
@@ -6627,8 +6939,8 @@
                   <a:solidFill>
                     <a:srgbClr val="1F4E79"/>
                   </a:solidFill>
-                  <a:latin typeface="微软雅黑"/>
-                  <a:ea typeface="微软雅黑"/>
+                  <a:latin typeface="微软雅黑" panose="020B0503020204020204" pitchFamily="34" charset="-122"/>
+                  <a:ea typeface="微软雅黑" panose="020B0503020204020204" pitchFamily="34" charset="-122"/>
                 </a:rPr>
                 <a:t> </a:t>
               </a:r>
@@ -6637,8 +6949,8 @@
                   <a:solidFill>
                     <a:srgbClr val="0A0A0A"/>
                   </a:solidFill>
-                  <a:latin typeface="微软雅黑"/>
-                  <a:ea typeface="微软雅黑"/>
+                  <a:latin typeface="微软雅黑" panose="020B0503020204020204" pitchFamily="34" charset="-122"/>
+                  <a:ea typeface="微软雅黑" panose="020B0503020204020204" pitchFamily="34" charset="-122"/>
                 </a:rPr>
                 <a:t>知识库更新</a:t>
               </a:r>
@@ -6646,8 +6958,8 @@
                 <a:solidFill>
                   <a:srgbClr val="0A0A0A"/>
                 </a:solidFill>
-                <a:latin typeface="微软雅黑"/>
-                <a:ea typeface="微软雅黑"/>
+                <a:latin typeface="微软雅黑" panose="020B0503020204020204" pitchFamily="34" charset="-122"/>
+                <a:ea typeface="微软雅黑" panose="020B0503020204020204" pitchFamily="34" charset="-122"/>
               </a:endParaRPr>
             </a:p>
           </p:txBody>
@@ -6666,7 +6978,7 @@
           </p:nvSpPr>
           <p:spPr>
             <a:xfrm>
-              <a:off x="6534779" y="5564919"/>
+              <a:off x="6534779" y="5552563"/>
               <a:ext cx="5504688" cy="123111"/>
             </a:xfrm>
             <a:prstGeom prst="rect">
@@ -6686,8 +6998,8 @@
                   <a:solidFill>
                     <a:srgbClr val="3D3C3A"/>
                   </a:solidFill>
-                  <a:latin typeface="微软雅黑"/>
-                  <a:ea typeface="微软雅黑"/>
+                  <a:latin typeface="微软雅黑" panose="020B0503020204020204" pitchFamily="34" charset="-122"/>
+                  <a:ea typeface="微软雅黑" panose="020B0503020204020204" pitchFamily="34" charset="-122"/>
                 </a:rPr>
                 <a:t>自动生成新增</a:t>
               </a:r>
@@ -6696,8 +7008,8 @@
                   <a:solidFill>
                     <a:srgbClr val="3D3C3A"/>
                   </a:solidFill>
-                  <a:latin typeface="微软雅黑"/>
-                  <a:ea typeface="微软雅黑"/>
+                  <a:latin typeface="微软雅黑" panose="020B0503020204020204" pitchFamily="34" charset="-122"/>
+                  <a:ea typeface="微软雅黑" panose="020B0503020204020204" pitchFamily="34" charset="-122"/>
                 </a:rPr>
                 <a:t>/</a:t>
               </a:r>
@@ -6706,8 +7018,8 @@
                   <a:solidFill>
                     <a:srgbClr val="3D3C3A"/>
                   </a:solidFill>
-                  <a:latin typeface="微软雅黑"/>
-                  <a:ea typeface="微软雅黑"/>
+                  <a:latin typeface="微软雅黑" panose="020B0503020204020204" pitchFamily="34" charset="-122"/>
+                  <a:ea typeface="微软雅黑" panose="020B0503020204020204" pitchFamily="34" charset="-122"/>
                 </a:rPr>
                 <a:t>修改</a:t>
               </a:r>
@@ -6716,8 +7028,8 @@
                   <a:solidFill>
                     <a:srgbClr val="3D3C3A"/>
                   </a:solidFill>
-                  <a:latin typeface="微软雅黑"/>
-                  <a:ea typeface="微软雅黑"/>
+                  <a:latin typeface="微软雅黑" panose="020B0503020204020204" pitchFamily="34" charset="-122"/>
+                  <a:ea typeface="微软雅黑" panose="020B0503020204020204" pitchFamily="34" charset="-122"/>
                 </a:rPr>
                 <a:t>知识库</a:t>
               </a:r>
@@ -6726,8 +7038,8 @@
                   <a:solidFill>
                     <a:srgbClr val="3D3C3A"/>
                   </a:solidFill>
-                  <a:latin typeface="微软雅黑"/>
-                  <a:ea typeface="微软雅黑"/>
+                  <a:latin typeface="微软雅黑" panose="020B0503020204020204" pitchFamily="34" charset="-122"/>
+                  <a:ea typeface="微软雅黑" panose="020B0503020204020204" pitchFamily="34" charset="-122"/>
                 </a:rPr>
                 <a:t>建议，人工审核后进入正式知识库，持续沉淀规则与案例</a:t>
               </a:r>
@@ -6735,19 +7047,222 @@
                 <a:solidFill>
                   <a:srgbClr val="3D3C3A"/>
                 </a:solidFill>
-                <a:latin typeface="微软雅黑"/>
-                <a:ea typeface="微软雅黑"/>
+                <a:latin typeface="微软雅黑" panose="020B0503020204020204" pitchFamily="34" charset="-122"/>
+                <a:ea typeface="微软雅黑" panose="020B0503020204020204" pitchFamily="34" charset="-122"/>
               </a:endParaRPr>
             </a:p>
           </p:txBody>
         </p:sp>
       </p:grpSp>
-      <p:sp>
-        <p:nvSpPr>
-          <p:cNvPr id="111" name="Shape 117">
-            <a:extLst>
-              <a:ext uri="{FF2B5EF4-FFF2-40B4-BE49-F238E27FC236}">
-                <a16:creationId xmlns:a16="http://schemas.microsoft.com/office/drawing/2014/main" id="{81B2719A-8BEA-4FF3-8F1B-18017C197F8D}"/>
+      <p:grpSp>
+        <p:nvGrpSpPr>
+          <p:cNvPr id="3" name="组合 2">
+            <a:extLst>
+              <a:ext uri="{FF2B5EF4-FFF2-40B4-BE49-F238E27FC236}">
+                <a16:creationId xmlns:a16="http://schemas.microsoft.com/office/drawing/2014/main" id="{F1AB33C5-8D10-49AF-B950-7741F7571955}"/>
+              </a:ext>
+            </a:extLst>
+          </p:cNvPr>
+          <p:cNvGrpSpPr/>
+          <p:nvPr/>
+        </p:nvGrpSpPr>
+        <p:grpSpPr>
+          <a:xfrm>
+            <a:off x="419462" y="2359060"/>
+            <a:ext cx="11247121" cy="347472"/>
+            <a:chOff x="410287" y="2136062"/>
+            <a:chExt cx="11247121" cy="347472"/>
+          </a:xfrm>
+        </p:grpSpPr>
+        <p:sp>
+          <p:nvSpPr>
+            <p:cNvPr id="111" name="Shape 117">
+              <a:extLst>
+                <a:ext uri="{FF2B5EF4-FFF2-40B4-BE49-F238E27FC236}">
+                  <a16:creationId xmlns:a16="http://schemas.microsoft.com/office/drawing/2014/main" id="{81B2719A-8BEA-4FF3-8F1B-18017C197F8D}"/>
+                </a:ext>
+              </a:extLst>
+            </p:cNvPr>
+            <p:cNvSpPr/>
+            <p:nvPr/>
+          </p:nvSpPr>
+          <p:spPr>
+            <a:xfrm>
+              <a:off x="410287" y="2136062"/>
+              <a:ext cx="11247121" cy="347472"/>
+            </a:xfrm>
+            <a:prstGeom prst="rect">
+              <a:avLst/>
+            </a:prstGeom>
+            <a:solidFill>
+              <a:srgbClr val="FFF4D4"/>
+            </a:solidFill>
+            <a:ln w="6350">
+              <a:solidFill>
+                <a:srgbClr val="FFF4D4">
+                  <a:alpha val="0"/>
+                </a:srgbClr>
+              </a:solidFill>
+              <a:prstDash val="solid"/>
+            </a:ln>
+          </p:spPr>
+        </p:sp>
+        <p:sp>
+          <p:nvSpPr>
+            <p:cNvPr id="112" name="Text 118">
+              <a:extLst>
+                <a:ext uri="{FF2B5EF4-FFF2-40B4-BE49-F238E27FC236}">
+                  <a16:creationId xmlns:a16="http://schemas.microsoft.com/office/drawing/2014/main" id="{3D944DDE-F6CF-4AE0-9D62-BE1C908BDEC5}"/>
+                </a:ext>
+              </a:extLst>
+            </p:cNvPr>
+            <p:cNvSpPr/>
+            <p:nvPr/>
+          </p:nvSpPr>
+          <p:spPr>
+            <a:xfrm>
+              <a:off x="620600" y="2256228"/>
+              <a:ext cx="10661904" cy="155448"/>
+            </a:xfrm>
+            <a:prstGeom prst="rect">
+              <a:avLst/>
+            </a:prstGeom>
+            <a:noFill/>
+            <a:ln/>
+          </p:spPr>
+          <p:txBody>
+            <a:bodyPr wrap="square" lIns="0" tIns="0" rIns="0" bIns="0" rtlCol="0" anchor="ctr">
+              <a:normAutofit/>
+            </a:bodyPr>
+            <a:lstStyle/>
+            <a:p>
+              <a:pPr marL="0" indent="0" algn="ctr">
+                <a:buNone/>
+              </a:pPr>
+              <a:r>
+                <a:rPr lang="en-US" sz="910" b="1" dirty="0" err="1">
+                  <a:solidFill>
+                    <a:srgbClr val="111111"/>
+                  </a:solidFill>
+                  <a:latin typeface="微软雅黑" panose="020B0503020204020204" pitchFamily="34" charset="-122"/>
+                  <a:ea typeface="微软雅黑" panose="020B0503020204020204" pitchFamily="34" charset="-122"/>
+                  <a:cs typeface="Microsoft YaHei" pitchFamily="34" charset="-120"/>
+                </a:rPr>
+                <a:t>核心取舍：让</a:t>
+              </a:r>
+              <a:r>
+                <a:rPr lang="en-US" sz="910" b="1" dirty="0">
+                  <a:solidFill>
+                    <a:srgbClr val="111111"/>
+                  </a:solidFill>
+                  <a:latin typeface="微软雅黑" panose="020B0503020204020204" pitchFamily="34" charset="-122"/>
+                  <a:ea typeface="微软雅黑" panose="020B0503020204020204" pitchFamily="34" charset="-122"/>
+                  <a:cs typeface="Microsoft YaHei" pitchFamily="34" charset="-120"/>
+                </a:rPr>
+                <a:t> BS-CAT </a:t>
+              </a:r>
+              <a:r>
+                <a:rPr lang="en-US" sz="910" b="1" dirty="0" err="1">
+                  <a:solidFill>
+                    <a:srgbClr val="111111"/>
+                  </a:solidFill>
+                  <a:latin typeface="微软雅黑" panose="020B0503020204020204" pitchFamily="34" charset="-122"/>
+                  <a:ea typeface="微软雅黑" panose="020B0503020204020204" pitchFamily="34" charset="-122"/>
+                  <a:cs typeface="Microsoft YaHei" pitchFamily="34" charset="-120"/>
+                </a:rPr>
+                <a:t>输出“可直接用于</a:t>
+              </a:r>
+              <a:r>
+                <a:rPr lang="en-US" altLang="zh-CN" sz="910" b="1" dirty="0" err="1">
+                  <a:solidFill>
+                    <a:srgbClr val="111111"/>
+                  </a:solidFill>
+                  <a:latin typeface="微软雅黑" panose="020B0503020204020204" pitchFamily="34" charset="-122"/>
+                  <a:ea typeface="微软雅黑" panose="020B0503020204020204" pitchFamily="34" charset="-122"/>
+                  <a:cs typeface="Microsoft YaHei" pitchFamily="34" charset="-120"/>
+                </a:rPr>
+                <a:t>S-CALC</a:t>
+              </a:r>
+              <a:r>
+                <a:rPr lang="en-US" sz="910" b="1" dirty="0" err="1">
+                  <a:solidFill>
+                    <a:srgbClr val="111111"/>
+                  </a:solidFill>
+                  <a:latin typeface="微软雅黑" panose="020B0503020204020204" pitchFamily="34" charset="-122"/>
+                  <a:ea typeface="微软雅黑" panose="020B0503020204020204" pitchFamily="34" charset="-122"/>
+                  <a:cs typeface="Microsoft YaHei" pitchFamily="34" charset="-120"/>
+                </a:rPr>
+                <a:t>”的分类、对手方与</a:t>
+              </a:r>
+              <a:r>
+                <a:rPr lang="zh-CN" altLang="en-US" sz="910" b="1" dirty="0">
+                  <a:solidFill>
+                    <a:srgbClr val="111111"/>
+                  </a:solidFill>
+                  <a:latin typeface="微软雅黑" panose="020B0503020204020204" pitchFamily="34" charset="-122"/>
+                  <a:ea typeface="微软雅黑" panose="020B0503020204020204" pitchFamily="34" charset="-122"/>
+                  <a:cs typeface="Microsoft YaHei" pitchFamily="34" charset="-120"/>
+                </a:rPr>
+                <a:t>指标</a:t>
+              </a:r>
+              <a:r>
+                <a:rPr lang="en-US" sz="910" b="1" dirty="0" err="1">
+                  <a:solidFill>
+                    <a:srgbClr val="111111"/>
+                  </a:solidFill>
+                  <a:latin typeface="微软雅黑" panose="020B0503020204020204" pitchFamily="34" charset="-122"/>
+                  <a:ea typeface="微软雅黑" panose="020B0503020204020204" pitchFamily="34" charset="-122"/>
+                  <a:cs typeface="Microsoft YaHei" pitchFamily="34" charset="-120"/>
+                </a:rPr>
+                <a:t>结果；IDA</a:t>
+              </a:r>
+              <a:r>
+                <a:rPr lang="en-US" sz="910" b="1" dirty="0">
+                  <a:solidFill>
+                    <a:srgbClr val="111111"/>
+                  </a:solidFill>
+                  <a:latin typeface="微软雅黑" panose="020B0503020204020204" pitchFamily="34" charset="-122"/>
+                  <a:ea typeface="微软雅黑" panose="020B0503020204020204" pitchFamily="34" charset="-122"/>
+                  <a:cs typeface="Microsoft YaHei" pitchFamily="34" charset="-120"/>
+                </a:rPr>
+                <a:t> </a:t>
+              </a:r>
+              <a:r>
+                <a:rPr lang="en-US" sz="910" b="1" dirty="0" err="1">
+                  <a:solidFill>
+                    <a:srgbClr val="111111"/>
+                  </a:solidFill>
+                  <a:latin typeface="微软雅黑" panose="020B0503020204020204" pitchFamily="34" charset="-122"/>
+                  <a:ea typeface="微软雅黑" panose="020B0503020204020204" pitchFamily="34" charset="-122"/>
+                  <a:cs typeface="Microsoft YaHei" pitchFamily="34" charset="-120"/>
+                </a:rPr>
+                <a:t>只保留必要调度、汇总与基础计算，降低下游复杂度</a:t>
+              </a:r>
+              <a:r>
+                <a:rPr lang="en-US" sz="910" b="1" dirty="0">
+                  <a:solidFill>
+                    <a:srgbClr val="111111"/>
+                  </a:solidFill>
+                  <a:latin typeface="微软雅黑" panose="020B0503020204020204" pitchFamily="34" charset="-122"/>
+                  <a:ea typeface="微软雅黑" panose="020B0503020204020204" pitchFamily="34" charset="-122"/>
+                  <a:cs typeface="Microsoft YaHei" pitchFamily="34" charset="-120"/>
+                </a:rPr>
+                <a:t>。</a:t>
+              </a:r>
+              <a:endParaRPr lang="en-US" sz="910" dirty="0">
+                <a:latin typeface="微软雅黑" panose="020B0503020204020204" pitchFamily="34" charset="-122"/>
+                <a:ea typeface="微软雅黑" panose="020B0503020204020204" pitchFamily="34" charset="-122"/>
+              </a:endParaRPr>
+            </a:p>
+          </p:txBody>
+        </p:sp>
+      </p:grpSp>
+      <p:sp>
+        <p:nvSpPr>
+          <p:cNvPr id="113" name="tl-line">
+            <a:extLst>
+              <a:ext uri="{FF2B5EF4-FFF2-40B4-BE49-F238E27FC236}">
+                <a16:creationId xmlns:a16="http://schemas.microsoft.com/office/drawing/2014/main" id="{3F3A469C-AA07-4415-8B8B-E08119DF6289}"/>
               </a:ext>
             </a:extLst>
           </p:cNvPr>
@@ -6756,186 +7271,7 @@
         </p:nvSpPr>
         <p:spPr>
           <a:xfrm>
-            <a:off x="410287" y="2136062"/>
-            <a:ext cx="11247121" cy="347472"/>
-          </a:xfrm>
-          <a:prstGeom prst="rect">
-            <a:avLst/>
-          </a:prstGeom>
-          <a:solidFill>
-            <a:srgbClr val="FFF4D4"/>
-          </a:solidFill>
-          <a:ln w="6350">
-            <a:solidFill>
-              <a:srgbClr val="FFF4D4">
-                <a:alpha val="0"/>
-              </a:srgbClr>
-            </a:solidFill>
-            <a:prstDash val="solid"/>
-          </a:ln>
-        </p:spPr>
-      </p:sp>
-      <p:sp>
-        <p:nvSpPr>
-          <p:cNvPr id="112" name="Text 118">
-            <a:extLst>
-              <a:ext uri="{FF2B5EF4-FFF2-40B4-BE49-F238E27FC236}">
-                <a16:creationId xmlns:a16="http://schemas.microsoft.com/office/drawing/2014/main" id="{3D944DDE-F6CF-4AE0-9D62-BE1C908BDEC5}"/>
-              </a:ext>
-            </a:extLst>
-          </p:cNvPr>
-          <p:cNvSpPr/>
-          <p:nvPr/>
-        </p:nvSpPr>
-        <p:spPr>
-          <a:xfrm>
-            <a:off x="620600" y="2249248"/>
-            <a:ext cx="10661904" cy="155448"/>
-          </a:xfrm>
-          <a:prstGeom prst="rect">
-            <a:avLst/>
-          </a:prstGeom>
-          <a:noFill/>
-          <a:ln/>
-        </p:spPr>
-        <p:txBody>
-          <a:bodyPr wrap="square" lIns="0" tIns="0" rIns="0" bIns="0" rtlCol="0" anchor="ctr">
-            <a:normAutofit/>
-          </a:bodyPr>
-          <a:lstStyle/>
-          <a:p>
-            <a:pPr marL="0" indent="0" algn="ctr">
-              <a:buNone/>
-            </a:pPr>
-            <a:r>
-              <a:rPr lang="en-US" sz="910" b="1" dirty="0" err="1">
-                <a:solidFill>
-                  <a:srgbClr val="111111"/>
-                </a:solidFill>
-                <a:latin typeface="Microsoft YaHei" pitchFamily="34" charset="0"/>
-                <a:ea typeface="Microsoft YaHei" pitchFamily="34" charset="-122"/>
-                <a:cs typeface="Microsoft YaHei" pitchFamily="34" charset="-120"/>
-              </a:rPr>
-              <a:t>核心取舍：让</a:t>
-            </a:r>
-            <a:r>
-              <a:rPr lang="en-US" sz="910" b="1" dirty="0">
-                <a:solidFill>
-                  <a:srgbClr val="111111"/>
-                </a:solidFill>
-                <a:latin typeface="Microsoft YaHei" pitchFamily="34" charset="0"/>
-                <a:ea typeface="Microsoft YaHei" pitchFamily="34" charset="-122"/>
-                <a:cs typeface="Microsoft YaHei" pitchFamily="34" charset="-120"/>
-              </a:rPr>
-              <a:t> BS-CAT </a:t>
-            </a:r>
-            <a:r>
-              <a:rPr lang="en-US" sz="910" b="1" dirty="0" err="1">
-                <a:solidFill>
-                  <a:srgbClr val="111111"/>
-                </a:solidFill>
-                <a:latin typeface="Microsoft YaHei" pitchFamily="34" charset="0"/>
-                <a:ea typeface="Microsoft YaHei" pitchFamily="34" charset="-122"/>
-                <a:cs typeface="Microsoft YaHei" pitchFamily="34" charset="-120"/>
-              </a:rPr>
-              <a:t>输出“可直接用于</a:t>
-            </a:r>
-            <a:r>
-              <a:rPr lang="en-US" altLang="zh-CN" sz="910" b="1" dirty="0" err="1">
-                <a:solidFill>
-                  <a:srgbClr val="111111"/>
-                </a:solidFill>
-                <a:latin typeface="Microsoft YaHei" pitchFamily="34" charset="0"/>
-                <a:ea typeface="Microsoft YaHei" pitchFamily="34" charset="-122"/>
-                <a:cs typeface="Microsoft YaHei" pitchFamily="34" charset="-120"/>
-              </a:rPr>
-              <a:t>S-CALC</a:t>
-            </a:r>
-            <a:r>
-              <a:rPr lang="en-US" sz="910" b="1" dirty="0" err="1">
-                <a:solidFill>
-                  <a:srgbClr val="111111"/>
-                </a:solidFill>
-                <a:latin typeface="Microsoft YaHei" pitchFamily="34" charset="0"/>
-                <a:ea typeface="Microsoft YaHei" pitchFamily="34" charset="-122"/>
-                <a:cs typeface="Microsoft YaHei" pitchFamily="34" charset="-120"/>
-              </a:rPr>
-              <a:t>”的分类、对手方与</a:t>
-            </a:r>
-            <a:r>
-              <a:rPr lang="zh-CN" altLang="en-US" sz="910" b="1" dirty="0">
-                <a:solidFill>
-                  <a:srgbClr val="111111"/>
-                </a:solidFill>
-                <a:latin typeface="Microsoft YaHei" pitchFamily="34" charset="0"/>
-                <a:ea typeface="Microsoft YaHei" pitchFamily="34" charset="-122"/>
-                <a:cs typeface="Microsoft YaHei" pitchFamily="34" charset="-120"/>
-              </a:rPr>
-              <a:t>指标</a:t>
-            </a:r>
-            <a:r>
-              <a:rPr lang="en-US" sz="910" b="1" dirty="0" err="1">
-                <a:solidFill>
-                  <a:srgbClr val="111111"/>
-                </a:solidFill>
-                <a:latin typeface="Microsoft YaHei" pitchFamily="34" charset="0"/>
-                <a:ea typeface="Microsoft YaHei" pitchFamily="34" charset="-122"/>
-                <a:cs typeface="Microsoft YaHei" pitchFamily="34" charset="-120"/>
-              </a:rPr>
-              <a:t>结果；IDA</a:t>
-            </a:r>
-            <a:r>
-              <a:rPr lang="en-US" sz="910" b="1" dirty="0">
-                <a:solidFill>
-                  <a:srgbClr val="111111"/>
-                </a:solidFill>
-                <a:latin typeface="Microsoft YaHei" pitchFamily="34" charset="0"/>
-                <a:ea typeface="Microsoft YaHei" pitchFamily="34" charset="-122"/>
-                <a:cs typeface="Microsoft YaHei" pitchFamily="34" charset="-120"/>
-              </a:rPr>
-              <a:t> </a:t>
-            </a:r>
-            <a:r>
-              <a:rPr lang="en-US" sz="910" b="1" dirty="0" err="1">
-                <a:solidFill>
-                  <a:srgbClr val="111111"/>
-                </a:solidFill>
-                <a:latin typeface="Microsoft YaHei" pitchFamily="34" charset="0"/>
-                <a:ea typeface="Microsoft YaHei" pitchFamily="34" charset="-122"/>
-                <a:cs typeface="Microsoft YaHei" pitchFamily="34" charset="-120"/>
-              </a:rPr>
-              <a:t>只保留必要调度、汇总与基础计算，降低下游复杂度</a:t>
-            </a:r>
-            <a:r>
-              <a:rPr lang="en-US" sz="910" b="1" dirty="0">
-                <a:solidFill>
-                  <a:srgbClr val="111111"/>
-                </a:solidFill>
-                <a:latin typeface="Microsoft YaHei" pitchFamily="34" charset="0"/>
-                <a:ea typeface="Microsoft YaHei" pitchFamily="34" charset="-122"/>
-                <a:cs typeface="Microsoft YaHei" pitchFamily="34" charset="-120"/>
-              </a:rPr>
-              <a:t>。</a:t>
-            </a:r>
-            <a:endParaRPr lang="en-US" sz="910" dirty="0"/>
-          </a:p>
-        </p:txBody>
-      </p:sp>
-      <p:sp>
-        <p:nvSpPr>
-          <p:cNvPr id="113" name="tl-line">
-            <a:extLst>
-              <a:ext uri="{FF2B5EF4-FFF2-40B4-BE49-F238E27FC236}">
-                <a16:creationId xmlns:a16="http://schemas.microsoft.com/office/drawing/2014/main" id="{3F3A469C-AA07-4415-8B8B-E08119DF6289}"/>
-              </a:ext>
-            </a:extLst>
-          </p:cNvPr>
-          <p:cNvSpPr/>
-          <p:nvPr/>
-        </p:nvSpPr>
-        <p:spPr>
-          <a:xfrm>
-            <a:off x="694135" y="3497747"/>
+            <a:off x="722055" y="3631582"/>
             <a:ext cx="10698480" cy="20116"/>
           </a:xfrm>
           <a:prstGeom prst="rect">
@@ -6968,7 +7304,10 @@
           <a:lstStyle/>
           <a:p>
             <a:pPr algn="ctr"/>
-            <a:endParaRPr/>
+            <a:endParaRPr>
+              <a:latin typeface="微软雅黑" panose="020B0503020204020204" pitchFamily="34" charset="-122"/>
+              <a:ea typeface="微软雅黑" panose="020B0503020204020204" pitchFamily="34" charset="-122"/>
+            </a:endParaRPr>
           </a:p>
         </p:txBody>
       </p:sp>
@@ -6986,7 +7325,7 @@
         </p:nvSpPr>
         <p:spPr>
           <a:xfrm>
-            <a:off x="1389079" y="3439226"/>
+            <a:off x="1416999" y="3573061"/>
             <a:ext cx="137160" cy="137160"/>
           </a:xfrm>
           <a:prstGeom prst="ellipse">
@@ -7019,7 +7358,10 @@
           <a:lstStyle/>
           <a:p>
             <a:pPr algn="ctr"/>
-            <a:endParaRPr/>
+            <a:endParaRPr>
+              <a:latin typeface="微软雅黑" panose="020B0503020204020204" pitchFamily="34" charset="-122"/>
+              <a:ea typeface="微软雅黑" panose="020B0503020204020204" pitchFamily="34" charset="-122"/>
+            </a:endParaRPr>
           </a:p>
         </p:txBody>
       </p:sp>
@@ -7037,8 +7379,8 @@
         </p:nvSpPr>
         <p:spPr>
           <a:xfrm>
-            <a:off x="1270701" y="3172844"/>
-            <a:ext cx="602428" cy="123111"/>
+            <a:off x="1298620" y="3306679"/>
+            <a:ext cx="781889" cy="153888"/>
           </a:xfrm>
           <a:prstGeom prst="rect">
             <a:avLst/>
@@ -7053,32 +7395,32 @@
           <a:p>
             <a:pPr algn="l" latinLnBrk="1"/>
             <a:r>
-              <a:rPr sz="800" b="1" dirty="0">
+              <a:rPr sz="1000" b="1" dirty="0">
                 <a:solidFill>
                   <a:srgbClr val="1F4E79"/>
                 </a:solidFill>
-                <a:latin typeface="微软雅黑"/>
-                <a:ea typeface="微软雅黑"/>
+                <a:latin typeface="微软雅黑" panose="020B0503020204020204" pitchFamily="34" charset="-122"/>
+                <a:ea typeface="微软雅黑" panose="020B0503020204020204" pitchFamily="34" charset="-122"/>
               </a:rPr>
               <a:t>8月</a:t>
             </a:r>
             <a:r>
-              <a:rPr lang="en-US" sz="800" b="1" dirty="0">
+              <a:rPr lang="en-US" sz="1000" b="1" dirty="0">
                 <a:solidFill>
                   <a:srgbClr val="1F4E79"/>
                 </a:solidFill>
-                <a:latin typeface="微软雅黑"/>
-                <a:ea typeface="微软雅黑"/>
+                <a:latin typeface="微软雅黑" panose="020B0503020204020204" pitchFamily="34" charset="-122"/>
+                <a:ea typeface="微软雅黑" panose="020B0503020204020204" pitchFamily="34" charset="-122"/>
               </a:rPr>
               <a:t>11</a:t>
             </a:r>
             <a:r>
-              <a:rPr sz="800" b="1" dirty="0">
+              <a:rPr sz="1000" b="1" dirty="0">
                 <a:solidFill>
                   <a:srgbClr val="1F4E79"/>
                 </a:solidFill>
-                <a:latin typeface="微软雅黑"/>
-                <a:ea typeface="微软雅黑"/>
+                <a:latin typeface="微软雅黑" panose="020B0503020204020204" pitchFamily="34" charset="-122"/>
+                <a:ea typeface="微软雅黑" panose="020B0503020204020204" pitchFamily="34" charset="-122"/>
               </a:rPr>
               <a:t>日</a:t>
             </a:r>
@@ -7099,8 +7441,8 @@
         </p:nvSpPr>
         <p:spPr>
           <a:xfrm>
-            <a:off x="637787" y="3796890"/>
-            <a:ext cx="1682496" cy="409343"/>
+            <a:off x="803148" y="3876177"/>
+            <a:ext cx="1682496" cy="716928"/>
           </a:xfrm>
           <a:prstGeom prst="rect">
             <a:avLst/>
@@ -7113,104 +7455,180 @@
           </a:bodyPr>
           <a:lstStyle/>
           <a:p>
-            <a:pPr marL="228600" indent="-228600" algn="l" latinLnBrk="1">
+            <a:pPr marL="228600" indent="-228600" latinLnBrk="1">
               <a:lnSpc>
-                <a:spcPct val="95000"/>
+                <a:spcPct val="150000"/>
               </a:lnSpc>
               <a:buFont typeface="+mj-lt"/>
               <a:buAutoNum type="arabicPeriod"/>
             </a:pPr>
             <a:r>
-              <a:rPr sz="700" b="0" dirty="0">
+              <a:rPr lang="zh-CN" altLang="en-US" sz="800" b="0" dirty="0">
                 <a:solidFill>
                   <a:srgbClr val="3D3C3A"/>
                 </a:solidFill>
-                <a:latin typeface="微软雅黑"/>
-                <a:ea typeface="微软雅黑"/>
+                <a:latin typeface="微软雅黑" panose="020B0503020204020204" pitchFamily="34" charset="-122"/>
+                <a:ea typeface="微软雅黑" panose="020B0503020204020204" pitchFamily="34" charset="-122"/>
               </a:rPr>
-              <a:t>943 </a:t>
-            </a:r>
-            <a:r>
-              <a:rPr sz="700" b="0" dirty="0" err="1">
+              <a:t>已完成负债</a:t>
+            </a:r>
+            <a:r>
+              <a:rPr lang="zh-CN" altLang="en-US" sz="800" dirty="0">
                 <a:solidFill>
                   <a:srgbClr val="3D3C3A"/>
                 </a:solidFill>
-                <a:latin typeface="微软雅黑"/>
-                <a:ea typeface="微软雅黑"/>
+                <a:latin typeface="微软雅黑" panose="020B0503020204020204" pitchFamily="34" charset="-122"/>
+                <a:ea typeface="微软雅黑" panose="020B0503020204020204" pitchFamily="34" charset="-122"/>
               </a:rPr>
-              <a:t>模型平台</a:t>
-            </a:r>
-            <a:r>
-              <a:rPr sz="700" b="0" dirty="0">
+              <a:t>类</a:t>
+            </a:r>
+            <a:r>
+              <a:rPr lang="zh-CN" altLang="en-US" sz="800" b="0" dirty="0">
                 <a:solidFill>
                   <a:srgbClr val="3D3C3A"/>
                 </a:solidFill>
-                <a:latin typeface="微软雅黑"/>
-                <a:ea typeface="微软雅黑"/>
+                <a:latin typeface="微软雅黑" panose="020B0503020204020204" pitchFamily="34" charset="-122"/>
+                <a:ea typeface="微软雅黑" panose="020B0503020204020204" pitchFamily="34" charset="-122"/>
               </a:rPr>
-              <a:t> preview </a:t>
-            </a:r>
-            <a:r>
-              <a:rPr sz="700" b="0" dirty="0" err="1">
-                <a:solidFill>
-                  <a:srgbClr val="3D3C3A"/>
-                </a:solidFill>
-                <a:latin typeface="微软雅黑"/>
-                <a:ea typeface="微软雅黑"/>
-              </a:rPr>
-              <a:t>版本完成部署，开放模型输出接口</a:t>
-            </a:r>
-            <a:endParaRPr lang="en-US" sz="700" b="0" dirty="0">
+              <a:t>知识库初始化</a:t>
+            </a:r>
+            <a:endParaRPr lang="en-US" altLang="zh-CN" sz="800" b="0" dirty="0">
               <a:solidFill>
                 <a:srgbClr val="3D3C3A"/>
               </a:solidFill>
-              <a:latin typeface="微软雅黑"/>
-              <a:ea typeface="微软雅黑"/>
+              <a:latin typeface="微软雅黑" panose="020B0503020204020204" pitchFamily="34" charset="-122"/>
+              <a:ea typeface="微软雅黑" panose="020B0503020204020204" pitchFamily="34" charset="-122"/>
             </a:endParaRPr>
           </a:p>
           <a:p>
-            <a:pPr marL="228600" indent="-228600" algn="l" latinLnBrk="1">
+            <a:pPr marL="228600" indent="-228600" latinLnBrk="1">
               <a:lnSpc>
-                <a:spcPct val="95000"/>
+                <a:spcPct val="150000"/>
               </a:lnSpc>
               <a:buFont typeface="+mj-lt"/>
               <a:buAutoNum type="arabicPeriod"/>
             </a:pPr>
             <a:r>
-              <a:rPr lang="zh-CN" altLang="en-US" sz="700" dirty="0">
+              <a:rPr lang="zh-CN" altLang="en-US" sz="800" dirty="0">
                 <a:solidFill>
                   <a:srgbClr val="3D3C3A"/>
                 </a:solidFill>
-                <a:latin typeface="微软雅黑"/>
-                <a:ea typeface="微软雅黑"/>
+                <a:latin typeface="微软雅黑" panose="020B0503020204020204" pitchFamily="34" charset="-122"/>
+                <a:ea typeface="微软雅黑" panose="020B0503020204020204" pitchFamily="34" charset="-122"/>
               </a:rPr>
-              <a:t>发布 Liability 识别报告</a:t>
-            </a:r>
-            <a:endParaRPr lang="en-US" sz="700" b="0" dirty="0">
+              <a:t>已发布 Liability 识别报告</a:t>
+            </a:r>
+            <a:endParaRPr lang="en-US" sz="800" b="0" dirty="0">
               <a:solidFill>
                 <a:srgbClr val="3D3C3A"/>
               </a:solidFill>
-              <a:latin typeface="微软雅黑"/>
-              <a:ea typeface="微软雅黑"/>
+              <a:latin typeface="微软雅黑" panose="020B0503020204020204" pitchFamily="34" charset="-122"/>
+              <a:ea typeface="微软雅黑" panose="020B0503020204020204" pitchFamily="34" charset="-122"/>
             </a:endParaRPr>
           </a:p>
           <a:p>
-            <a:pPr marL="228600" indent="-228600" latinLnBrk="1">
+            <a:pPr marL="228600" indent="-228600" algn="l" latinLnBrk="1">
               <a:lnSpc>
-                <a:spcPct val="95000"/>
+                <a:spcPct val="150000"/>
               </a:lnSpc>
               <a:buFont typeface="+mj-lt"/>
               <a:buAutoNum type="arabicPeriod"/>
             </a:pPr>
             <a:r>
-              <a:rPr lang="zh-CN" altLang="en-US" sz="700" b="0" dirty="0">
+              <a:rPr lang="zh-CN" altLang="en-US" sz="800" b="0" dirty="0">
                 <a:solidFill>
                   <a:srgbClr val="3D3C3A"/>
                 </a:solidFill>
-                <a:latin typeface="微软雅黑"/>
-                <a:ea typeface="微软雅黑"/>
+                <a:latin typeface="微软雅黑" panose="020B0503020204020204" pitchFamily="34" charset="-122"/>
+                <a:ea typeface="微软雅黑" panose="020B0503020204020204" pitchFamily="34" charset="-122"/>
               </a:rPr>
-              <a:t>下游平台启动模型调用链路开发</a:t>
+              <a:t>已部署模型</a:t>
+            </a:r>
+            <a:r>
+              <a:rPr sz="800" b="0" dirty="0">
+                <a:solidFill>
+                  <a:srgbClr val="3D3C3A"/>
+                </a:solidFill>
+                <a:latin typeface="微软雅黑" panose="020B0503020204020204" pitchFamily="34" charset="-122"/>
+                <a:ea typeface="微软雅黑" panose="020B0503020204020204" pitchFamily="34" charset="-122"/>
+              </a:rPr>
+              <a:t>preview </a:t>
+            </a:r>
+            <a:r>
+              <a:rPr sz="800" b="0" dirty="0" err="1">
+                <a:solidFill>
+                  <a:srgbClr val="3D3C3A"/>
+                </a:solidFill>
+                <a:latin typeface="微软雅黑" panose="020B0503020204020204" pitchFamily="34" charset="-122"/>
+                <a:ea typeface="微软雅黑" panose="020B0503020204020204" pitchFamily="34" charset="-122"/>
+              </a:rPr>
+              <a:t>版本</a:t>
+            </a:r>
+            <a:endParaRPr lang="en-US" sz="800" b="0" dirty="0">
+              <a:solidFill>
+                <a:srgbClr val="3D3C3A"/>
+              </a:solidFill>
+              <a:latin typeface="微软雅黑" panose="020B0503020204020204" pitchFamily="34" charset="-122"/>
+              <a:ea typeface="微软雅黑" panose="020B0503020204020204" pitchFamily="34" charset="-122"/>
+            </a:endParaRPr>
+          </a:p>
+          <a:p>
+            <a:pPr marL="228600" indent="-228600" algn="l" latinLnBrk="1">
+              <a:lnSpc>
+                <a:spcPct val="150000"/>
+              </a:lnSpc>
+              <a:buFont typeface="+mj-lt"/>
+              <a:buAutoNum type="arabicPeriod"/>
+            </a:pPr>
+            <a:r>
+              <a:rPr lang="zh-CN" altLang="en-US" sz="800" b="0" dirty="0">
+                <a:solidFill>
+                  <a:srgbClr val="3D3C3A"/>
+                </a:solidFill>
+                <a:latin typeface="微软雅黑" panose="020B0503020204020204" pitchFamily="34" charset="-122"/>
+                <a:ea typeface="微软雅黑" panose="020B0503020204020204" pitchFamily="34" charset="-122"/>
+              </a:rPr>
+              <a:t>已</a:t>
+            </a:r>
+            <a:r>
+              <a:rPr sz="800" b="0" dirty="0" err="1">
+                <a:solidFill>
+                  <a:srgbClr val="3D3C3A"/>
+                </a:solidFill>
+                <a:latin typeface="微软雅黑" panose="020B0503020204020204" pitchFamily="34" charset="-122"/>
+                <a:ea typeface="微软雅黑" panose="020B0503020204020204" pitchFamily="34" charset="-122"/>
+              </a:rPr>
+              <a:t>开放模型</a:t>
+            </a:r>
+            <a:r>
+              <a:rPr lang="zh-CN" altLang="en-US" sz="800" b="0" dirty="0">
+                <a:solidFill>
+                  <a:srgbClr val="3D3C3A"/>
+                </a:solidFill>
+                <a:latin typeface="微软雅黑" panose="020B0503020204020204" pitchFamily="34" charset="-122"/>
+                <a:ea typeface="微软雅黑" panose="020B0503020204020204" pitchFamily="34" charset="-122"/>
+              </a:rPr>
+              <a:t>调用</a:t>
+            </a:r>
+            <a:r>
+              <a:rPr sz="800" b="0" dirty="0">
+                <a:solidFill>
+                  <a:srgbClr val="3D3C3A"/>
+                </a:solidFill>
+                <a:latin typeface="微软雅黑" panose="020B0503020204020204" pitchFamily="34" charset="-122"/>
+                <a:ea typeface="微软雅黑" panose="020B0503020204020204" pitchFamily="34" charset="-122"/>
+              </a:rPr>
+              <a:t>接</a:t>
+            </a:r>
+            <a:r>
+              <a:rPr lang="zh-CN" altLang="en-US" sz="800" b="0" dirty="0">
+                <a:solidFill>
+                  <a:srgbClr val="3D3C3A"/>
+                </a:solidFill>
+                <a:latin typeface="微软雅黑" panose="020B0503020204020204" pitchFamily="34" charset="-122"/>
+                <a:ea typeface="微软雅黑" panose="020B0503020204020204" pitchFamily="34" charset="-122"/>
+              </a:rPr>
+              <a:t>口</a:t>
             </a:r>
           </a:p>
         </p:txBody>
@@ -7229,7 +7647,7 @@
         </p:nvSpPr>
         <p:spPr>
           <a:xfrm>
-            <a:off x="3208735" y="3439226"/>
+            <a:off x="3236655" y="3573061"/>
             <a:ext cx="137160" cy="137160"/>
           </a:xfrm>
           <a:prstGeom prst="ellipse">
@@ -7262,7 +7680,10 @@
           <a:lstStyle/>
           <a:p>
             <a:pPr algn="ctr"/>
-            <a:endParaRPr/>
+            <a:endParaRPr>
+              <a:latin typeface="微软雅黑" panose="020B0503020204020204" pitchFamily="34" charset="-122"/>
+              <a:ea typeface="微软雅黑" panose="020B0503020204020204" pitchFamily="34" charset="-122"/>
+            </a:endParaRPr>
           </a:p>
         </p:txBody>
       </p:sp>
@@ -7280,8 +7701,8 @@
         </p:nvSpPr>
         <p:spPr>
           <a:xfrm>
-            <a:off x="3146664" y="3172274"/>
-            <a:ext cx="326669" cy="123111"/>
+            <a:off x="3181386" y="3306109"/>
+            <a:ext cx="423982" cy="153888"/>
           </a:xfrm>
           <a:prstGeom prst="rect">
             <a:avLst/>
@@ -7296,21 +7717,21 @@
           <a:p>
             <a:pPr algn="l" latinLnBrk="1"/>
             <a:r>
-              <a:rPr sz="800" b="1" dirty="0" err="1">
+              <a:rPr sz="1000" b="1" dirty="0" err="1">
                 <a:solidFill>
                   <a:srgbClr val="1F4E79"/>
                 </a:solidFill>
-                <a:latin typeface="微软雅黑"/>
-                <a:ea typeface="微软雅黑"/>
+                <a:latin typeface="微软雅黑" panose="020B0503020204020204" pitchFamily="34" charset="-122"/>
+                <a:ea typeface="微软雅黑" panose="020B0503020204020204" pitchFamily="34" charset="-122"/>
               </a:rPr>
               <a:t>当前</a:t>
             </a:r>
-            <a:endParaRPr sz="800" b="1" dirty="0">
+            <a:endParaRPr sz="1000" b="1" dirty="0">
               <a:solidFill>
                 <a:srgbClr val="1F4E79"/>
               </a:solidFill>
-              <a:latin typeface="微软雅黑"/>
-              <a:ea typeface="微软雅黑"/>
+              <a:latin typeface="微软雅黑" panose="020B0503020204020204" pitchFamily="34" charset="-122"/>
+              <a:ea typeface="微软雅黑" panose="020B0503020204020204" pitchFamily="34" charset="-122"/>
             </a:endParaRPr>
           </a:p>
         </p:txBody>
@@ -7329,8 +7750,8 @@
         </p:nvSpPr>
         <p:spPr>
           <a:xfrm>
-            <a:off x="2504647" y="3795453"/>
-            <a:ext cx="1682496" cy="511679"/>
+            <a:off x="2623101" y="3881915"/>
+            <a:ext cx="1882323" cy="716928"/>
           </a:xfrm>
           <a:prstGeom prst="rect">
             <a:avLst/>
@@ -7345,114 +7766,145 @@
           <a:p>
             <a:pPr marL="228600" indent="-228600" algn="l" latinLnBrk="1">
               <a:lnSpc>
-                <a:spcPct val="95000"/>
+                <a:spcPct val="150000"/>
               </a:lnSpc>
               <a:buFont typeface="+mj-lt"/>
               <a:buAutoNum type="arabicPeriod"/>
             </a:pPr>
             <a:r>
-              <a:rPr sz="700" b="0" dirty="0" err="1">
+              <a:rPr lang="zh-CN" altLang="en-US" sz="800" b="0" dirty="0">
                 <a:solidFill>
                   <a:srgbClr val="3D3C3A"/>
                 </a:solidFill>
-                <a:latin typeface="微软雅黑"/>
-                <a:ea typeface="微软雅黑"/>
+                <a:latin typeface="微软雅黑" panose="020B0503020204020204" pitchFamily="34" charset="-122"/>
+                <a:ea typeface="微软雅黑" panose="020B0503020204020204" pitchFamily="34" charset="-122"/>
               </a:rPr>
-              <a:t>负债/收入类知识库初始化基本完成</a:t>
-            </a:r>
-            <a:endParaRPr lang="en-US" sz="700" b="0" dirty="0">
+              <a:t>消费类知识库建设中</a:t>
+            </a:r>
+            <a:endParaRPr lang="en-US" altLang="zh-CN" sz="800" b="0" dirty="0">
               <a:solidFill>
                 <a:srgbClr val="3D3C3A"/>
               </a:solidFill>
-              <a:latin typeface="微软雅黑"/>
-              <a:ea typeface="微软雅黑"/>
+              <a:latin typeface="微软雅黑" panose="020B0503020204020204" pitchFamily="34" charset="-122"/>
+              <a:ea typeface="微软雅黑" panose="020B0503020204020204" pitchFamily="34" charset="-122"/>
             </a:endParaRPr>
           </a:p>
           <a:p>
-            <a:pPr marL="228600" indent="-228600" algn="l" latinLnBrk="1">
+            <a:pPr marL="228600" indent="-228600" latinLnBrk="1">
               <a:lnSpc>
-                <a:spcPct val="95000"/>
+                <a:spcPct val="150000"/>
               </a:lnSpc>
               <a:buFont typeface="+mj-lt"/>
               <a:buAutoNum type="arabicPeriod"/>
             </a:pPr>
             <a:r>
-              <a:rPr lang="zh-CN" altLang="en-US" sz="700" b="0" dirty="0">
+              <a:rPr lang="zh-CN" altLang="en-US" sz="800" b="0" dirty="0">
                 <a:solidFill>
                   <a:srgbClr val="3D3C3A"/>
                 </a:solidFill>
-                <a:latin typeface="微软雅黑"/>
-                <a:ea typeface="微软雅黑"/>
+                <a:latin typeface="微软雅黑" panose="020B0503020204020204" pitchFamily="34" charset="-122"/>
+                <a:ea typeface="微软雅黑" panose="020B0503020204020204" pitchFamily="34" charset="-122"/>
               </a:rPr>
-              <a:t>消费类知识库建设中</a:t>
-            </a:r>
-            <a:endParaRPr lang="en-US" altLang="zh-CN" sz="700" b="0" dirty="0">
+              <a:t>新 S-CALC 启动开发</a:t>
+            </a:r>
+            <a:endParaRPr lang="en-US" altLang="zh-CN" sz="800" b="0" dirty="0">
               <a:solidFill>
                 <a:srgbClr val="3D3C3A"/>
               </a:solidFill>
-              <a:latin typeface="微软雅黑"/>
-              <a:ea typeface="微软雅黑"/>
+              <a:latin typeface="微软雅黑" panose="020B0503020204020204" pitchFamily="34" charset="-122"/>
+              <a:ea typeface="微软雅黑" panose="020B0503020204020204" pitchFamily="34" charset="-122"/>
             </a:endParaRPr>
           </a:p>
           <a:p>
             <a:pPr marL="228600" indent="-228600" latinLnBrk="1">
               <a:lnSpc>
-                <a:spcPct val="95000"/>
+                <a:spcPct val="150000"/>
               </a:lnSpc>
               <a:buFont typeface="+mj-lt"/>
               <a:buAutoNum type="arabicPeriod"/>
             </a:pPr>
             <a:r>
-              <a:rPr lang="zh-CN" altLang="en-US" sz="700" b="0" dirty="0">
+              <a:rPr lang="zh-CN" altLang="en-US" sz="800" b="0" dirty="0">
                 <a:solidFill>
                   <a:srgbClr val="3D3C3A"/>
                 </a:solidFill>
-                <a:latin typeface="微软雅黑"/>
-                <a:ea typeface="微软雅黑"/>
+                <a:latin typeface="微软雅黑" panose="020B0503020204020204" pitchFamily="34" charset="-122"/>
+                <a:ea typeface="微软雅黑" panose="020B0503020204020204" pitchFamily="34" charset="-122"/>
               </a:rPr>
-              <a:t>新 S-CALC 开发中</a:t>
-            </a:r>
-            <a:endParaRPr lang="en-US" altLang="zh-CN" sz="700" dirty="0">
+              <a:t>启动新</a:t>
+            </a:r>
+            <a:r>
+              <a:rPr lang="en-US" altLang="zh-CN" sz="800" b="0" dirty="0">
+                <a:solidFill>
+                  <a:srgbClr val="3D3C3A"/>
+                </a:solidFill>
+                <a:latin typeface="微软雅黑" panose="020B0503020204020204" pitchFamily="34" charset="-122"/>
+                <a:ea typeface="微软雅黑" panose="020B0503020204020204" pitchFamily="34" charset="-122"/>
+              </a:rPr>
+              <a:t>IDA</a:t>
+            </a:r>
+            <a:r>
+              <a:rPr lang="zh-CN" altLang="en-US" sz="800" b="0" dirty="0">
+                <a:solidFill>
+                  <a:srgbClr val="3D3C3A"/>
+                </a:solidFill>
+                <a:latin typeface="微软雅黑" panose="020B0503020204020204" pitchFamily="34" charset="-122"/>
+                <a:ea typeface="微软雅黑" panose="020B0503020204020204" pitchFamily="34" charset="-122"/>
+              </a:rPr>
+              <a:t>调用链路开发</a:t>
+            </a:r>
+            <a:endParaRPr lang="en-US" altLang="zh-CN" sz="800" b="0" dirty="0">
               <a:solidFill>
                 <a:srgbClr val="3D3C3A"/>
               </a:solidFill>
-              <a:latin typeface="微软雅黑"/>
-              <a:ea typeface="微软雅黑"/>
+              <a:latin typeface="微软雅黑" panose="020B0503020204020204" pitchFamily="34" charset="-122"/>
+              <a:ea typeface="微软雅黑" panose="020B0503020204020204" pitchFamily="34" charset="-122"/>
             </a:endParaRPr>
           </a:p>
           <a:p>
             <a:pPr marL="228600" indent="-228600" latinLnBrk="1">
               <a:lnSpc>
-                <a:spcPct val="95000"/>
+                <a:spcPct val="150000"/>
               </a:lnSpc>
               <a:buFont typeface="+mj-lt"/>
               <a:buAutoNum type="arabicPeriod"/>
             </a:pPr>
             <a:r>
-              <a:rPr lang="zh-CN" altLang="en-US" sz="700" b="0" dirty="0">
+              <a:rPr lang="zh-CN" altLang="en-US" sz="800" dirty="0">
                 <a:solidFill>
                   <a:srgbClr val="3D3C3A"/>
                 </a:solidFill>
-                <a:latin typeface="微软雅黑"/>
-                <a:ea typeface="微软雅黑"/>
+                <a:latin typeface="微软雅黑" panose="020B0503020204020204" pitchFamily="34" charset="-122"/>
+                <a:ea typeface="微软雅黑" panose="020B0503020204020204" pitchFamily="34" charset="-122"/>
               </a:rPr>
-              <a:t>启动新旧 IDP 链路 AB 测试</a:t>
-            </a:r>
-          </a:p>
-          <a:p>
-            <a:pPr marL="228600" indent="-228600" algn="l" latinLnBrk="1">
-              <a:lnSpc>
-                <a:spcPct val="95000"/>
-              </a:lnSpc>
-              <a:buFont typeface="+mj-lt"/>
-              <a:buAutoNum type="arabicPeriod"/>
-            </a:pPr>
-            <a:endParaRPr sz="700" b="0" dirty="0">
+              <a:t>运维的</a:t>
+            </a:r>
+            <a:r>
+              <a:rPr lang="en-US" altLang="zh-CN" sz="800" dirty="0">
+                <a:solidFill>
+                  <a:srgbClr val="3D3C3A"/>
+                </a:solidFill>
+                <a:latin typeface="微软雅黑" panose="020B0503020204020204" pitchFamily="34" charset="-122"/>
+                <a:ea typeface="微软雅黑" panose="020B0503020204020204" pitchFamily="34" charset="-122"/>
+              </a:rPr>
+              <a:t>Agent</a:t>
+            </a:r>
+            <a:r>
+              <a:rPr lang="zh-CN" altLang="en-US" sz="800" dirty="0">
+                <a:solidFill>
+                  <a:srgbClr val="3D3C3A"/>
+                </a:solidFill>
+                <a:latin typeface="微软雅黑" panose="020B0503020204020204" pitchFamily="34" charset="-122"/>
+                <a:ea typeface="微软雅黑" panose="020B0503020204020204" pitchFamily="34" charset="-122"/>
+              </a:rPr>
+              <a:t>开发中</a:t>
+            </a:r>
+            <a:endParaRPr lang="zh-CN" altLang="en-US" sz="800" b="0" dirty="0">
               <a:solidFill>
                 <a:srgbClr val="3D3C3A"/>
               </a:solidFill>
-              <a:latin typeface="微软雅黑"/>
-              <a:ea typeface="微软雅黑"/>
+              <a:latin typeface="微软雅黑" panose="020B0503020204020204" pitchFamily="34" charset="-122"/>
+              <a:ea typeface="微软雅黑" panose="020B0503020204020204" pitchFamily="34" charset="-122"/>
             </a:endParaRPr>
           </a:p>
         </p:txBody>
@@ -7471,7 +7923,7 @@
         </p:nvSpPr>
         <p:spPr>
           <a:xfrm>
-            <a:off x="5028391" y="3439226"/>
+            <a:off x="5056311" y="3573061"/>
             <a:ext cx="137160" cy="137160"/>
           </a:xfrm>
           <a:prstGeom prst="ellipse">
@@ -7504,7 +7956,10 @@
           <a:lstStyle/>
           <a:p>
             <a:pPr algn="ctr"/>
-            <a:endParaRPr/>
+            <a:endParaRPr>
+              <a:latin typeface="微软雅黑" panose="020B0503020204020204" pitchFamily="34" charset="-122"/>
+              <a:ea typeface="微软雅黑" panose="020B0503020204020204" pitchFamily="34" charset="-122"/>
+            </a:endParaRPr>
           </a:p>
         </p:txBody>
       </p:sp>
@@ -7522,8 +7977,8 @@
         </p:nvSpPr>
         <p:spPr>
           <a:xfrm>
-            <a:off x="4893414" y="3178207"/>
-            <a:ext cx="521208" cy="123111"/>
+            <a:off x="4921334" y="3312042"/>
+            <a:ext cx="676474" cy="153888"/>
           </a:xfrm>
           <a:prstGeom prst="rect">
             <a:avLst/>
@@ -7538,12 +7993,12 @@
           <a:p>
             <a:pPr algn="l" latinLnBrk="1"/>
             <a:r>
-              <a:rPr sz="800" b="1" dirty="0">
+              <a:rPr sz="1000" b="1" dirty="0">
                 <a:solidFill>
                   <a:srgbClr val="1F4E79"/>
                 </a:solidFill>
-                <a:latin typeface="微软雅黑"/>
-                <a:ea typeface="微软雅黑"/>
+                <a:latin typeface="微软雅黑" panose="020B0503020204020204" pitchFamily="34" charset="-122"/>
+                <a:ea typeface="微软雅黑" panose="020B0503020204020204" pitchFamily="34" charset="-122"/>
               </a:rPr>
               <a:t>8月21日</a:t>
             </a:r>
@@ -7564,8 +8019,8 @@
         </p:nvSpPr>
         <p:spPr>
           <a:xfrm>
-            <a:off x="4350769" y="3789923"/>
-            <a:ext cx="1682496" cy="204671"/>
+            <a:off x="4376260" y="3873305"/>
+            <a:ext cx="1863573" cy="532262"/>
           </a:xfrm>
           <a:prstGeom prst="rect">
             <a:avLst/>
@@ -7580,44 +8035,120 @@
           <a:p>
             <a:pPr marL="228600" indent="-228600" algn="l" latinLnBrk="1">
               <a:lnSpc>
-                <a:spcPct val="95000"/>
+                <a:spcPct val="150000"/>
               </a:lnSpc>
               <a:buFont typeface="+mj-lt"/>
               <a:buAutoNum type="arabicPeriod"/>
             </a:pPr>
             <a:r>
-              <a:rPr sz="700" b="0" dirty="0" err="1">
+              <a:rPr sz="800" b="0" dirty="0" err="1">
                 <a:solidFill>
                   <a:srgbClr val="3D3C3A"/>
                 </a:solidFill>
-                <a:latin typeface="微软雅黑"/>
-                <a:ea typeface="微软雅黑"/>
+                <a:latin typeface="微软雅黑" panose="020B0503020204020204" pitchFamily="34" charset="-122"/>
+                <a:ea typeface="微软雅黑" panose="020B0503020204020204" pitchFamily="34" charset="-122"/>
               </a:rPr>
-              <a:t>完成消费类知识库初始化</a:t>
-            </a:r>
-            <a:endParaRPr lang="en-US" sz="700" b="0" dirty="0">
+              <a:t>完成</a:t>
+            </a:r>
+            <a:r>
+              <a:rPr lang="zh-CN" altLang="en-US" sz="800" b="0" dirty="0">
+                <a:solidFill>
+                  <a:srgbClr val="3D3C3A"/>
+                </a:solidFill>
+                <a:latin typeface="微软雅黑" panose="020B0503020204020204" pitchFamily="34" charset="-122"/>
+                <a:ea typeface="微软雅黑" panose="020B0503020204020204" pitchFamily="34" charset="-122"/>
+              </a:rPr>
+              <a:t>所有</a:t>
+            </a:r>
+            <a:r>
+              <a:rPr lang="zh-CN" altLang="en-US" sz="800" dirty="0">
+                <a:solidFill>
+                  <a:srgbClr val="3D3C3A"/>
+                </a:solidFill>
+                <a:latin typeface="微软雅黑" panose="020B0503020204020204" pitchFamily="34" charset="-122"/>
+                <a:ea typeface="微软雅黑" panose="020B0503020204020204" pitchFamily="34" charset="-122"/>
+              </a:rPr>
+              <a:t>类别</a:t>
+            </a:r>
+            <a:r>
+              <a:rPr sz="800" b="0" dirty="0" err="1">
+                <a:solidFill>
+                  <a:srgbClr val="3D3C3A"/>
+                </a:solidFill>
+                <a:latin typeface="微软雅黑" panose="020B0503020204020204" pitchFamily="34" charset="-122"/>
+                <a:ea typeface="微软雅黑" panose="020B0503020204020204" pitchFamily="34" charset="-122"/>
+              </a:rPr>
+              <a:t>知识库初始化</a:t>
+            </a:r>
+            <a:endParaRPr lang="en-US" sz="800" b="0" dirty="0">
               <a:solidFill>
                 <a:srgbClr val="3D3C3A"/>
               </a:solidFill>
-              <a:latin typeface="微软雅黑"/>
-              <a:ea typeface="微软雅黑"/>
+              <a:latin typeface="微软雅黑" panose="020B0503020204020204" pitchFamily="34" charset="-122"/>
+              <a:ea typeface="微软雅黑" panose="020B0503020204020204" pitchFamily="34" charset="-122"/>
             </a:endParaRPr>
           </a:p>
           <a:p>
-            <a:pPr marL="228600" indent="-228600" latinLnBrk="1">
+            <a:pPr marL="228600" indent="-228600" algn="l" latinLnBrk="1">
               <a:lnSpc>
-                <a:spcPct val="95000"/>
+                <a:spcPct val="150000"/>
               </a:lnSpc>
               <a:buFont typeface="+mj-lt"/>
               <a:buAutoNum type="arabicPeriod"/>
             </a:pPr>
             <a:r>
-              <a:rPr lang="zh-CN" altLang="en-US" sz="700" b="0" dirty="0">
+              <a:rPr lang="zh-CN" altLang="en-US" sz="800" b="0" dirty="0">
                 <a:solidFill>
                   <a:srgbClr val="3D3C3A"/>
                 </a:solidFill>
-                <a:latin typeface="微软雅黑"/>
-                <a:ea typeface="微软雅黑"/>
+                <a:latin typeface="微软雅黑" panose="020B0503020204020204" pitchFamily="34" charset="-122"/>
+                <a:ea typeface="微软雅黑" panose="020B0503020204020204" pitchFamily="34" charset="-122"/>
+              </a:rPr>
+              <a:t>完成两</a:t>
+            </a:r>
+            <a:r>
+              <a:rPr lang="zh-CN" altLang="en-US" sz="800" dirty="0">
+                <a:solidFill>
+                  <a:srgbClr val="3D3C3A"/>
+                </a:solidFill>
+                <a:latin typeface="微软雅黑" panose="020B0503020204020204" pitchFamily="34" charset="-122"/>
+                <a:ea typeface="微软雅黑" panose="020B0503020204020204" pitchFamily="34" charset="-122"/>
+              </a:rPr>
+              <a:t>个运维的</a:t>
+            </a:r>
+            <a:r>
+              <a:rPr lang="en-US" altLang="zh-CN" sz="800" dirty="0">
+                <a:solidFill>
+                  <a:srgbClr val="3D3C3A"/>
+                </a:solidFill>
+                <a:latin typeface="微软雅黑" panose="020B0503020204020204" pitchFamily="34" charset="-122"/>
+                <a:ea typeface="微软雅黑" panose="020B0503020204020204" pitchFamily="34" charset="-122"/>
+              </a:rPr>
+              <a:t>Agent</a:t>
+            </a:r>
+            <a:endParaRPr lang="en-US" sz="800" b="0" dirty="0">
+              <a:solidFill>
+                <a:srgbClr val="3D3C3A"/>
+              </a:solidFill>
+              <a:latin typeface="微软雅黑" panose="020B0503020204020204" pitchFamily="34" charset="-122"/>
+              <a:ea typeface="微软雅黑" panose="020B0503020204020204" pitchFamily="34" charset="-122"/>
+            </a:endParaRPr>
+          </a:p>
+          <a:p>
+            <a:pPr marL="228600" indent="-228600" latinLnBrk="1">
+              <a:lnSpc>
+                <a:spcPct val="150000"/>
+              </a:lnSpc>
+              <a:buFont typeface="+mj-lt"/>
+              <a:buAutoNum type="arabicPeriod"/>
+            </a:pPr>
+            <a:r>
+              <a:rPr lang="zh-CN" altLang="en-US" sz="800" b="0" dirty="0">
+                <a:solidFill>
+                  <a:srgbClr val="3D3C3A"/>
+                </a:solidFill>
+                <a:latin typeface="微软雅黑" panose="020B0503020204020204" pitchFamily="34" charset="-122"/>
+                <a:ea typeface="微软雅黑" panose="020B0503020204020204" pitchFamily="34" charset="-122"/>
               </a:rPr>
               <a:t>发布全分类模型效果详细评估报告</a:t>
             </a:r>
@@ -7638,7 +8169,7 @@
         </p:nvSpPr>
         <p:spPr>
           <a:xfrm>
-            <a:off x="6848047" y="3439226"/>
+            <a:off x="6875967" y="3573061"/>
             <a:ext cx="137160" cy="137160"/>
           </a:xfrm>
           <a:prstGeom prst="ellipse">
@@ -7671,7 +8202,10 @@
           <a:lstStyle/>
           <a:p>
             <a:pPr algn="ctr"/>
-            <a:endParaRPr/>
+            <a:endParaRPr>
+              <a:latin typeface="微软雅黑" panose="020B0503020204020204" pitchFamily="34" charset="-122"/>
+              <a:ea typeface="微软雅黑" panose="020B0503020204020204" pitchFamily="34" charset="-122"/>
+            </a:endParaRPr>
           </a:p>
         </p:txBody>
       </p:sp>
@@ -7689,8 +8223,8 @@
         </p:nvSpPr>
         <p:spPr>
           <a:xfrm>
-            <a:off x="6726455" y="3166610"/>
-            <a:ext cx="441543" cy="123111"/>
+            <a:off x="6754375" y="3300445"/>
+            <a:ext cx="573077" cy="153888"/>
           </a:xfrm>
           <a:prstGeom prst="rect">
             <a:avLst/>
@@ -7705,12 +8239,12 @@
           <a:p>
             <a:pPr algn="l" latinLnBrk="1"/>
             <a:r>
-              <a:rPr sz="800" b="1" dirty="0">
+              <a:rPr sz="1000" b="1" dirty="0">
                 <a:solidFill>
                   <a:srgbClr val="1F4E79"/>
                 </a:solidFill>
-                <a:latin typeface="微软雅黑"/>
-                <a:ea typeface="微软雅黑"/>
+                <a:latin typeface="微软雅黑" panose="020B0503020204020204" pitchFamily="34" charset="-122"/>
+                <a:ea typeface="微软雅黑" panose="020B0503020204020204" pitchFamily="34" charset="-122"/>
               </a:rPr>
               <a:t>8月31日</a:t>
             </a:r>
@@ -7731,8 +8265,8 @@
         </p:nvSpPr>
         <p:spPr>
           <a:xfrm>
-            <a:off x="6560600" y="3784695"/>
-            <a:ext cx="1682496" cy="409343"/>
+            <a:off x="6417191" y="3875243"/>
+            <a:ext cx="1682496" cy="716928"/>
           </a:xfrm>
           <a:prstGeom prst="rect">
             <a:avLst/>
@@ -7745,107 +8279,117 @@
           </a:bodyPr>
           <a:lstStyle/>
           <a:p>
-            <a:pPr marL="228600" indent="-228600" algn="l" latinLnBrk="1">
+            <a:pPr marL="228600" indent="-228600" latinLnBrk="1">
               <a:lnSpc>
-                <a:spcPct val="95000"/>
+                <a:spcPct val="150000"/>
               </a:lnSpc>
               <a:buFont typeface="+mj-lt"/>
               <a:buAutoNum type="arabicPeriod"/>
             </a:pPr>
             <a:r>
-              <a:rPr sz="700" b="0" dirty="0" err="1">
+              <a:rPr sz="800" b="1" dirty="0" err="1">
                 <a:solidFill>
                   <a:srgbClr val="3D3C3A"/>
                 </a:solidFill>
-                <a:latin typeface="微软雅黑"/>
-                <a:ea typeface="微软雅黑"/>
+                <a:latin typeface="微软雅黑" panose="020B0503020204020204" pitchFamily="34" charset="-122"/>
+                <a:ea typeface="微软雅黑" panose="020B0503020204020204" pitchFamily="34" charset="-122"/>
               </a:rPr>
               <a:t>发布正式版模型</a:t>
             </a:r>
-            <a:endParaRPr lang="en-US" sz="700" b="0" dirty="0">
+            <a:endParaRPr lang="en-US" sz="800" b="1" dirty="0">
               <a:solidFill>
                 <a:srgbClr val="3D3C3A"/>
               </a:solidFill>
-              <a:latin typeface="微软雅黑"/>
-              <a:ea typeface="微软雅黑"/>
+              <a:latin typeface="微软雅黑" panose="020B0503020204020204" pitchFamily="34" charset="-122"/>
+              <a:ea typeface="微软雅黑" panose="020B0503020204020204" pitchFamily="34" charset="-122"/>
             </a:endParaRPr>
           </a:p>
           <a:p>
-            <a:pPr marL="228600" indent="-228600" algn="l" latinLnBrk="1">
+            <a:pPr marL="228600" indent="-228600" latinLnBrk="1">
               <a:lnSpc>
-                <a:spcPct val="95000"/>
+                <a:spcPct val="150000"/>
               </a:lnSpc>
               <a:buFont typeface="+mj-lt"/>
               <a:buAutoNum type="arabicPeriod"/>
             </a:pPr>
             <a:r>
-              <a:rPr lang="zh-CN" altLang="en-US" sz="700" dirty="0">
+              <a:rPr lang="zh-CN" altLang="en-US" sz="800" dirty="0">
                 <a:solidFill>
                   <a:srgbClr val="3D3C3A"/>
                 </a:solidFill>
-                <a:latin typeface="微软雅黑"/>
-                <a:ea typeface="微软雅黑"/>
+                <a:latin typeface="微软雅黑" panose="020B0503020204020204" pitchFamily="34" charset="-122"/>
+                <a:ea typeface="微软雅黑" panose="020B0503020204020204" pitchFamily="34" charset="-122"/>
               </a:rPr>
               <a:t>新分类数据落库</a:t>
             </a:r>
-            <a:endParaRPr lang="en-US" sz="700" b="0" dirty="0">
+            <a:endParaRPr lang="en-US" sz="800" dirty="0">
               <a:solidFill>
                 <a:srgbClr val="3D3C3A"/>
               </a:solidFill>
-              <a:latin typeface="微软雅黑"/>
-              <a:ea typeface="微软雅黑"/>
+              <a:latin typeface="微软雅黑" panose="020B0503020204020204" pitchFamily="34" charset="-122"/>
+              <a:ea typeface="微软雅黑" panose="020B0503020204020204" pitchFamily="34" charset="-122"/>
             </a:endParaRPr>
           </a:p>
           <a:p>
-            <a:pPr marL="228600" indent="-228600" algn="l" latinLnBrk="1">
+            <a:pPr marL="228600" indent="-228600" latinLnBrk="1">
               <a:lnSpc>
-                <a:spcPct val="95000"/>
+                <a:spcPct val="150000"/>
               </a:lnSpc>
               <a:buFont typeface="+mj-lt"/>
               <a:buAutoNum type="arabicPeriod"/>
             </a:pPr>
             <a:r>
-              <a:rPr lang="zh-CN" altLang="en-US" sz="700" dirty="0">
+              <a:rPr lang="en-US" altLang="zh-CN" sz="800" dirty="0">
                 <a:solidFill>
                   <a:srgbClr val="3D3C3A"/>
                 </a:solidFill>
-                <a:latin typeface="微软雅黑"/>
-                <a:ea typeface="微软雅黑"/>
+                <a:latin typeface="微软雅黑" panose="020B0503020204020204" pitchFamily="34" charset="-122"/>
+                <a:ea typeface="微软雅黑" panose="020B0503020204020204" pitchFamily="34" charset="-122"/>
               </a:rPr>
-              <a:t>下游平台调用链路调通</a:t>
-            </a:r>
-            <a:endParaRPr lang="en-US" altLang="zh-CN" sz="700" dirty="0">
+              <a:t>IDP/A</a:t>
+            </a:r>
+            <a:r>
+              <a:rPr lang="zh-CN" altLang="en-US" sz="800" dirty="0">
+                <a:solidFill>
+                  <a:srgbClr val="3D3C3A"/>
+                </a:solidFill>
+                <a:latin typeface="微软雅黑" panose="020B0503020204020204" pitchFamily="34" charset="-122"/>
+                <a:ea typeface="微软雅黑" panose="020B0503020204020204" pitchFamily="34" charset="-122"/>
+              </a:rPr>
+              <a:t>调用链路调通</a:t>
+            </a:r>
+            <a:endParaRPr lang="en-US" altLang="zh-CN" sz="800" dirty="0">
               <a:solidFill>
                 <a:srgbClr val="3D3C3A"/>
               </a:solidFill>
-              <a:latin typeface="微软雅黑"/>
-              <a:ea typeface="微软雅黑"/>
+              <a:latin typeface="微软雅黑" panose="020B0503020204020204" pitchFamily="34" charset="-122"/>
+              <a:ea typeface="微软雅黑" panose="020B0503020204020204" pitchFamily="34" charset="-122"/>
             </a:endParaRPr>
           </a:p>
           <a:p>
-            <a:pPr marL="228600" indent="-228600" algn="l" latinLnBrk="1">
+            <a:pPr marL="228600" indent="-228600" latinLnBrk="1">
               <a:lnSpc>
-                <a:spcPct val="95000"/>
+                <a:spcPct val="150000"/>
               </a:lnSpc>
               <a:buFont typeface="+mj-lt"/>
               <a:buAutoNum type="arabicPeriod"/>
             </a:pPr>
             <a:r>
-              <a:rPr lang="zh-CN" altLang="en-US" sz="700" dirty="0">
+              <a:rPr lang="zh-CN" altLang="en-US" sz="800" dirty="0">
                 <a:solidFill>
                   <a:srgbClr val="3D3C3A"/>
                 </a:solidFill>
-                <a:latin typeface="微软雅黑"/>
-                <a:ea typeface="微软雅黑"/>
+                <a:latin typeface="微软雅黑" panose="020B0503020204020204" pitchFamily="34" charset="-122"/>
+                <a:ea typeface="微软雅黑" panose="020B0503020204020204" pitchFamily="34" charset="-122"/>
               </a:rPr>
               <a:t>链路调通后空跑两周</a:t>
             </a:r>
-            <a:endParaRPr sz="700" b="0" dirty="0">
+            <a:endParaRPr sz="800" dirty="0">
               <a:solidFill>
                 <a:srgbClr val="3D3C3A"/>
               </a:solidFill>
-              <a:latin typeface="微软雅黑"/>
-              <a:ea typeface="微软雅黑"/>
+              <a:latin typeface="微软雅黑" panose="020B0503020204020204" pitchFamily="34" charset="-122"/>
+              <a:ea typeface="微软雅黑" panose="020B0503020204020204" pitchFamily="34" charset="-122"/>
             </a:endParaRPr>
           </a:p>
         </p:txBody>
@@ -7864,7 +8408,7 @@
         </p:nvSpPr>
         <p:spPr>
           <a:xfrm>
-            <a:off x="8667703" y="3439226"/>
+            <a:off x="8695623" y="3573061"/>
             <a:ext cx="137160" cy="137160"/>
           </a:xfrm>
           <a:prstGeom prst="ellipse">
@@ -7897,7 +8441,10 @@
           <a:lstStyle/>
           <a:p>
             <a:pPr algn="ctr"/>
-            <a:endParaRPr/>
+            <a:endParaRPr>
+              <a:latin typeface="微软雅黑" panose="020B0503020204020204" pitchFamily="34" charset="-122"/>
+              <a:ea typeface="微软雅黑" panose="020B0503020204020204" pitchFamily="34" charset="-122"/>
+            </a:endParaRPr>
           </a:p>
         </p:txBody>
       </p:sp>
@@ -7915,8 +8462,8 @@
         </p:nvSpPr>
         <p:spPr>
           <a:xfrm>
-            <a:off x="8512009" y="3178207"/>
-            <a:ext cx="632869" cy="123111"/>
+            <a:off x="8539929" y="3312042"/>
+            <a:ext cx="821398" cy="153888"/>
           </a:xfrm>
           <a:prstGeom prst="rect">
             <a:avLst/>
@@ -7931,12 +8478,12 @@
           <a:p>
             <a:pPr algn="l" latinLnBrk="1"/>
             <a:r>
-              <a:rPr sz="800" b="1" dirty="0">
+              <a:rPr sz="1000" b="1" dirty="0">
                 <a:solidFill>
                   <a:srgbClr val="1F4E79"/>
                 </a:solidFill>
-                <a:latin typeface="微软雅黑"/>
-                <a:ea typeface="微软雅黑"/>
+                <a:latin typeface="微软雅黑" panose="020B0503020204020204" pitchFamily="34" charset="-122"/>
+                <a:ea typeface="微软雅黑" panose="020B0503020204020204" pitchFamily="34" charset="-122"/>
               </a:rPr>
               <a:t>9月15日</a:t>
             </a:r>
@@ -7957,7 +8504,7 @@
         </p:nvSpPr>
         <p:spPr>
           <a:xfrm>
-            <a:off x="10487359" y="3439226"/>
+            <a:off x="10515279" y="3573061"/>
             <a:ext cx="137160" cy="137160"/>
           </a:xfrm>
           <a:prstGeom prst="ellipse">
@@ -7990,7 +8537,10 @@
           <a:lstStyle/>
           <a:p>
             <a:pPr algn="ctr"/>
-            <a:endParaRPr/>
+            <a:endParaRPr>
+              <a:latin typeface="微软雅黑" panose="020B0503020204020204" pitchFamily="34" charset="-122"/>
+              <a:ea typeface="微软雅黑" panose="020B0503020204020204" pitchFamily="34" charset="-122"/>
+            </a:endParaRPr>
           </a:p>
         </p:txBody>
       </p:sp>
@@ -8008,8 +8558,8 @@
         </p:nvSpPr>
         <p:spPr>
           <a:xfrm>
-            <a:off x="10019439" y="3738659"/>
-            <a:ext cx="1682496" cy="409343"/>
+            <a:off x="10047359" y="3872494"/>
+            <a:ext cx="1682496" cy="716928"/>
           </a:xfrm>
           <a:prstGeom prst="rect">
             <a:avLst/>
@@ -8022,120 +8572,128 @@
           </a:bodyPr>
           <a:lstStyle/>
           <a:p>
-            <a:pPr algn="l" latinLnBrk="1">
+            <a:pPr marL="228600" indent="-228600" latinLnBrk="1">
               <a:lnSpc>
-                <a:spcPct val="95000"/>
+                <a:spcPct val="150000"/>
               </a:lnSpc>
+              <a:buFont typeface="+mj-lt"/>
+              <a:buAutoNum type="arabicPeriod"/>
             </a:pPr>
             <a:r>
-              <a:rPr sz="700" b="0" dirty="0" err="1">
+              <a:rPr lang="zh-CN" altLang="en-US" sz="800" dirty="0">
                 <a:solidFill>
                   <a:srgbClr val="3D3C3A"/>
                 </a:solidFill>
-                <a:latin typeface="微软雅黑"/>
-                <a:ea typeface="微软雅黑"/>
+                <a:latin typeface="微软雅黑" panose="020B0503020204020204" pitchFamily="34" charset="-122"/>
+                <a:ea typeface="微软雅黑" panose="020B0503020204020204" pitchFamily="34" charset="-122"/>
               </a:rPr>
-              <a:t>启动新旧 IDP 链路 AB 测试</a:t>
-            </a:r>
-            <a:endParaRPr lang="en-US" sz="700" b="0" dirty="0">
+              <a:t>新 </a:t>
+            </a:r>
+            <a:r>
+              <a:rPr lang="en-US" altLang="zh-CN" sz="800" dirty="0">
+                <a:solidFill>
+                  <a:srgbClr val="3D3C3A"/>
+                </a:solidFill>
+                <a:latin typeface="微软雅黑" panose="020B0503020204020204" pitchFamily="34" charset="-122"/>
+                <a:ea typeface="微软雅黑" panose="020B0503020204020204" pitchFamily="34" charset="-122"/>
+              </a:rPr>
+              <a:t>S-CALC </a:t>
+            </a:r>
+            <a:r>
+              <a:rPr lang="zh-CN" altLang="en-US" sz="800" dirty="0">
+                <a:solidFill>
+                  <a:srgbClr val="3D3C3A"/>
+                </a:solidFill>
+                <a:latin typeface="微软雅黑" panose="020B0503020204020204" pitchFamily="34" charset="-122"/>
+                <a:ea typeface="微软雅黑" panose="020B0503020204020204" pitchFamily="34" charset="-122"/>
+              </a:rPr>
+              <a:t>开发完成并测试</a:t>
+            </a:r>
+            <a:endParaRPr lang="en-US" altLang="zh-CN" sz="800" dirty="0">
               <a:solidFill>
                 <a:srgbClr val="3D3C3A"/>
               </a:solidFill>
-              <a:latin typeface="微软雅黑"/>
-              <a:ea typeface="微软雅黑"/>
+              <a:latin typeface="微软雅黑" panose="020B0503020204020204" pitchFamily="34" charset="-122"/>
+              <a:ea typeface="微软雅黑" panose="020B0503020204020204" pitchFamily="34" charset="-122"/>
             </a:endParaRPr>
           </a:p>
           <a:p>
-            <a:pPr latinLnBrk="1">
+            <a:pPr marL="228600" indent="-228600" latinLnBrk="1">
               <a:lnSpc>
-                <a:spcPct val="95000"/>
+                <a:spcPct val="150000"/>
               </a:lnSpc>
+              <a:buFont typeface="+mj-lt"/>
+              <a:buAutoNum type="arabicPeriod"/>
             </a:pPr>
             <a:r>
-              <a:rPr lang="zh-CN" altLang="en-US" sz="700" b="0" dirty="0">
+              <a:rPr lang="en-US" altLang="zh-CN" sz="800" dirty="0">
                 <a:solidFill>
                   <a:srgbClr val="3D3C3A"/>
                 </a:solidFill>
-                <a:latin typeface="微软雅黑"/>
-                <a:ea typeface="微软雅黑"/>
+                <a:latin typeface="微软雅黑" panose="020B0503020204020204" pitchFamily="34" charset="-122"/>
+                <a:ea typeface="微软雅黑" panose="020B0503020204020204" pitchFamily="34" charset="-122"/>
               </a:rPr>
-              <a:t>新 </a:t>
-            </a:r>
-            <a:r>
-              <a:rPr lang="en-US" altLang="zh-CN" sz="700" b="0" dirty="0">
+              <a:t>LMS </a:t>
+            </a:r>
+            <a:r>
+              <a:rPr lang="zh-CN" altLang="en-US" sz="800" dirty="0">
                 <a:solidFill>
                   <a:srgbClr val="3D3C3A"/>
                 </a:solidFill>
-                <a:latin typeface="微软雅黑"/>
-                <a:ea typeface="微软雅黑"/>
+                <a:latin typeface="微软雅黑" panose="020B0503020204020204" pitchFamily="34" charset="-122"/>
+                <a:ea typeface="微软雅黑" panose="020B0503020204020204" pitchFamily="34" charset="-122"/>
               </a:rPr>
-              <a:t>S-CALC </a:t>
-            </a:r>
-            <a:r>
-              <a:rPr lang="zh-CN" altLang="en-US" sz="700" b="0" dirty="0">
-                <a:solidFill>
-                  <a:srgbClr val="3D3C3A"/>
-                </a:solidFill>
-                <a:latin typeface="微软雅黑"/>
-                <a:ea typeface="微软雅黑"/>
-              </a:rPr>
-              <a:t>开发完成</a:t>
-            </a:r>
-            <a:endParaRPr lang="en-US" altLang="zh-CN" sz="700" b="0" dirty="0">
+              <a:t>页面改造完成</a:t>
+            </a:r>
+            <a:endParaRPr lang="en-US" altLang="zh-CN" sz="800" dirty="0">
               <a:solidFill>
                 <a:srgbClr val="3D3C3A"/>
               </a:solidFill>
-              <a:latin typeface="微软雅黑"/>
-              <a:ea typeface="微软雅黑"/>
+              <a:latin typeface="微软雅黑" panose="020B0503020204020204" pitchFamily="34" charset="-122"/>
+              <a:ea typeface="微软雅黑" panose="020B0503020204020204" pitchFamily="34" charset="-122"/>
             </a:endParaRPr>
           </a:p>
           <a:p>
-            <a:pPr latinLnBrk="1">
+            <a:pPr marL="228600" indent="-228600" latinLnBrk="1">
               <a:lnSpc>
-                <a:spcPct val="95000"/>
+                <a:spcPct val="150000"/>
               </a:lnSpc>
+              <a:buFont typeface="+mj-lt"/>
+              <a:buAutoNum type="arabicPeriod"/>
             </a:pPr>
             <a:r>
-              <a:rPr lang="en-US" altLang="zh-CN" sz="700" b="0" dirty="0">
+              <a:rPr lang="zh-CN" altLang="en-US" sz="800" dirty="0">
                 <a:solidFill>
                   <a:srgbClr val="3D3C3A"/>
                 </a:solidFill>
-                <a:latin typeface="微软雅黑"/>
-                <a:ea typeface="微软雅黑"/>
+                <a:latin typeface="微软雅黑" panose="020B0503020204020204" pitchFamily="34" charset="-122"/>
+                <a:ea typeface="微软雅黑" panose="020B0503020204020204" pitchFamily="34" charset="-122"/>
               </a:rPr>
-              <a:t>LMS </a:t>
-            </a:r>
-            <a:r>
-              <a:rPr lang="zh-CN" altLang="en-US" sz="700" b="0" dirty="0">
-                <a:solidFill>
-                  <a:srgbClr val="3D3C3A"/>
-                </a:solidFill>
-                <a:latin typeface="微软雅黑"/>
-                <a:ea typeface="微软雅黑"/>
-              </a:rPr>
-              <a:t>新页面开发完成</a:t>
-            </a:r>
-            <a:endParaRPr lang="en-US" altLang="zh-CN" sz="700" b="0" dirty="0">
+              <a:t>完成对人审知识同步</a:t>
+            </a:r>
+            <a:endParaRPr lang="en-US" altLang="zh-CN" sz="800" dirty="0">
               <a:solidFill>
                 <a:srgbClr val="3D3C3A"/>
               </a:solidFill>
-              <a:latin typeface="微软雅黑"/>
-              <a:ea typeface="微软雅黑"/>
+              <a:latin typeface="微软雅黑" panose="020B0503020204020204" pitchFamily="34" charset="-122"/>
+              <a:ea typeface="微软雅黑" panose="020B0503020204020204" pitchFamily="34" charset="-122"/>
             </a:endParaRPr>
           </a:p>
           <a:p>
-            <a:pPr latinLnBrk="1">
+            <a:pPr marL="228600" indent="-228600" latinLnBrk="1">
               <a:lnSpc>
-                <a:spcPct val="95000"/>
+                <a:spcPct val="150000"/>
               </a:lnSpc>
+              <a:buFont typeface="+mj-lt"/>
+              <a:buAutoNum type="arabicPeriod"/>
             </a:pPr>
             <a:r>
-              <a:rPr lang="zh-CN" altLang="en-US" sz="700" b="0" dirty="0">
+              <a:rPr lang="zh-CN" altLang="en-US" sz="800" dirty="0">
                 <a:solidFill>
                   <a:srgbClr val="3D3C3A"/>
                 </a:solidFill>
-                <a:latin typeface="微软雅黑"/>
-                <a:ea typeface="微软雅黑"/>
+                <a:latin typeface="微软雅黑" panose="020B0503020204020204" pitchFamily="34" charset="-122"/>
+                <a:ea typeface="微软雅黑" panose="020B0503020204020204" pitchFamily="34" charset="-122"/>
               </a:rPr>
               <a:t>完成新旧 IDP 链路 AB 测试</a:t>
             </a:r>
@@ -8156,8 +8714,8 @@
         </p:nvSpPr>
         <p:spPr>
           <a:xfrm>
-            <a:off x="8187302" y="3763975"/>
-            <a:ext cx="1682496" cy="102336"/>
+            <a:off x="8015115" y="3884173"/>
+            <a:ext cx="1682496" cy="162930"/>
           </a:xfrm>
           <a:prstGeom prst="rect">
             <a:avLst/>
@@ -8170,29 +8728,78 @@
           </a:bodyPr>
           <a:lstStyle/>
           <a:p>
-            <a:pPr marL="228600" indent="-228600" algn="l" latinLnBrk="1">
+            <a:pPr marL="228600" indent="-228600" latinLnBrk="1">
               <a:lnSpc>
-                <a:spcPct val="95000"/>
+                <a:spcPct val="150000"/>
               </a:lnSpc>
               <a:buFont typeface="+mj-lt"/>
               <a:buAutoNum type="arabicPeriod"/>
             </a:pPr>
             <a:r>
-              <a:rPr lang="zh-CN" altLang="en-US" sz="700" b="0" dirty="0">
+              <a:rPr lang="zh-CN" altLang="en-US" sz="800" dirty="0">
                 <a:solidFill>
                   <a:srgbClr val="3D3C3A"/>
                 </a:solidFill>
-                <a:latin typeface="微软雅黑"/>
-                <a:ea typeface="微软雅黑"/>
+                <a:latin typeface="微软雅黑" panose="020B0503020204020204" pitchFamily="34" charset="-122"/>
+                <a:ea typeface="微软雅黑" panose="020B0503020204020204" pitchFamily="34" charset="-122"/>
               </a:rPr>
-              <a:t>空跑结束，具备切量条件</a:t>
-            </a:r>
-            <a:endParaRPr sz="700" b="0" dirty="0">
+              <a:t>空跑验证完成，具备切量条件</a:t>
+            </a:r>
+            <a:endParaRPr sz="800" dirty="0">
               <a:solidFill>
                 <a:srgbClr val="3D3C3A"/>
               </a:solidFill>
-              <a:latin typeface="微软雅黑"/>
-              <a:ea typeface="微软雅黑"/>
+              <a:latin typeface="微软雅黑" panose="020B0503020204020204" pitchFamily="34" charset="-122"/>
+              <a:ea typeface="微软雅黑" panose="020B0503020204020204" pitchFamily="34" charset="-122"/>
+            </a:endParaRPr>
+          </a:p>
+        </p:txBody>
+      </p:sp>
+      <p:sp>
+        <p:nvSpPr>
+          <p:cNvPr id="116" name="tl-date-4">
+            <a:extLst>
+              <a:ext uri="{FF2B5EF4-FFF2-40B4-BE49-F238E27FC236}">
+                <a16:creationId xmlns:a16="http://schemas.microsoft.com/office/drawing/2014/main" id="{08D23D5B-9A4B-4BCD-B264-E8AD03608FB8}"/>
+              </a:ext>
+            </a:extLst>
+          </p:cNvPr>
+          <p:cNvSpPr txBox="1"/>
+          <p:nvPr/>
+        </p:nvSpPr>
+        <p:spPr>
+          <a:xfrm>
+            <a:off x="10001718" y="3310935"/>
+            <a:ext cx="1073581" cy="153888"/>
+          </a:xfrm>
+          <a:prstGeom prst="rect">
+            <a:avLst/>
+          </a:prstGeom>
+          <a:noFill/>
+        </p:spPr>
+        <p:txBody>
+          <a:bodyPr wrap="square" lIns="0" tIns="0" rIns="0" bIns="0" anchor="t">
+            <a:spAutoFit/>
+          </a:bodyPr>
+          <a:lstStyle/>
+          <a:p>
+            <a:pPr algn="l" latinLnBrk="1"/>
+            <a:r>
+              <a:rPr lang="zh-CN" altLang="en-US" sz="1000" b="1" dirty="0">
+                <a:solidFill>
+                  <a:srgbClr val="1F4E79"/>
+                </a:solidFill>
+                <a:latin typeface="微软雅黑" panose="020B0503020204020204" pitchFamily="34" charset="-122"/>
+                <a:ea typeface="微软雅黑" panose="020B0503020204020204" pitchFamily="34" charset="-122"/>
+              </a:rPr>
+              <a:t>正在评估时间节点</a:t>
+            </a:r>
+            <a:endParaRPr sz="1000" b="1" dirty="0">
+              <a:solidFill>
+                <a:srgbClr val="1F4E79"/>
+              </a:solidFill>
+              <a:latin typeface="微软雅黑" panose="020B0503020204020204" pitchFamily="34" charset="-122"/>
+              <a:ea typeface="微软雅黑" panose="020B0503020204020204" pitchFamily="34" charset="-122"/>
             </a:endParaRPr>
           </a:p>
         </p:txBody>
